--- a/Introduccion a la Ingenieria/Clases/Clase 12 - Presentacion de avances de proyectos/Presentacion.pptx
+++ b/Introduccion a la Ingenieria/Clases/Clase 12 - Presentacion de avances de proyectos/Presentacion.pptx
@@ -18,6 +18,15 @@
     <p:sldId id="266" r:id="rId17"/>
     <p:sldId id="267" r:id="rId18"/>
     <p:sldId id="268" r:id="rId19"/>
+    <p:sldId id="269" r:id="rId20"/>
+    <p:sldId id="270" r:id="rId21"/>
+    <p:sldId id="271" r:id="rId22"/>
+    <p:sldId id="272" r:id="rId23"/>
+    <p:sldId id="273" r:id="rId24"/>
+    <p:sldId id="274" r:id="rId25"/>
+    <p:sldId id="275" r:id="rId26"/>
+    <p:sldId id="276" r:id="rId27"/>
+    <p:sldId id="277" r:id="rId28"/>
   </p:sldIdLst>
   <p:sldSz cx="12191695" cy="6858000" type="screen4x3"/>
   <p:notesSz cx="6858000" cy="9144000"/>
@@ -3512,7 +3521,7 @@
         <p:spPr>
           <a:xfrm>
             <a:off x="0" y="0"/>
-            <a:ext cx="12191695" cy="1170432"/>
+            <a:ext cx="12191695" cy="960120"/>
           </a:xfrm>
           <a:prstGeom prst="rect">
             <a:avLst/>
@@ -3554,7 +3563,7 @@
         </p:nvSpPr>
         <p:spPr>
           <a:xfrm>
-            <a:off x="0" y="1170432"/>
+            <a:off x="0" y="960120"/>
             <a:ext cx="12191695" cy="41148"/>
           </a:xfrm>
           <a:prstGeom prst="rect">
@@ -3598,7 +3607,7 @@
         <p:spPr>
           <a:xfrm>
             <a:off x="457200" y="164592"/>
-            <a:ext cx="11277295" cy="384048"/>
+            <a:ext cx="11277295" cy="502920"/>
           </a:xfrm>
           <a:prstGeom prst="rect">
             <a:avLst/>
@@ -3618,7 +3627,7 @@
                 </a:solidFill>
                 <a:latin typeface="Calibri"/>
               </a:rPr>
-              <a:t>Taller de hoy: Ficha de avance y plan de ajustes</a:t>
+              <a:t>La pregunta de entrada: «no, ahí no, toca acá» (1/2)</a:t>
             </a:r>
           </a:p>
         </p:txBody>
@@ -3631,8 +3640,8 @@
         </p:nvSpPr>
         <p:spPr>
           <a:xfrm>
-            <a:off x="457200" y="566928"/>
-            <a:ext cx="11277295" cy="411480"/>
+            <a:off x="457200" y="1170432"/>
+            <a:ext cx="11277295" cy="5230368"/>
           </a:xfrm>
           <a:prstGeom prst="rect">
             <a:avLst/>
@@ -3645,963 +3654,124 @@
           </a:bodyPr>
           <a:lstStyle/>
           <a:p>
-            <a:r>
-              <a:rPr sz="1400" b="0" i="0">
-                <a:solidFill>
-                  <a:srgbClr val="B8D8EE"/>
-                </a:solidFill>
-                <a:latin typeface="Calibri"/>
-              </a:rPr>
-              <a:t>12 min en equipos · 12 min: hallazgos, clasificación, decisión y la pregunta al curso · ficha de avance de 5 bloques, con el plan de ajustes al cerrar</a:t>
-            </a:r>
-          </a:p>
-        </p:txBody>
-      </p:sp>
-      <p:sp>
-        <p:nvSpPr>
-          <p:cNvPr id="6" name="Rounded Rectangle 5"/>
-          <p:cNvSpPr/>
-          <p:nvPr/>
-        </p:nvSpPr>
-        <p:spPr>
-          <a:xfrm>
-            <a:off x="457200" y="1472184"/>
-            <a:ext cx="11277295" cy="566928"/>
-          </a:xfrm>
-          <a:prstGeom prst="roundRect">
-            <a:avLst>
-              <a:gd name="adj" fmla="val 12000"/>
-            </a:avLst>
-          </a:prstGeom>
-          <a:solidFill>
-            <a:srgbClr val="F2F2F2"/>
-          </a:solidFill>
-          <a:ln>
-            <a:noFill/>
-          </a:ln>
-        </p:spPr>
-        <p:style>
-          <a:lnRef idx="1">
-            <a:schemeClr val="accent1"/>
-          </a:lnRef>
-          <a:fillRef idx="3">
-            <a:schemeClr val="accent1"/>
-          </a:fillRef>
-          <a:effectRef idx="2">
-            <a:schemeClr val="accent1"/>
-          </a:effectRef>
-          <a:fontRef idx="minor">
-            <a:schemeClr val="lt1"/>
-          </a:fontRef>
-        </p:style>
-        <p:txBody>
-          <a:bodyPr rtlCol="0" anchor="ctr"/>
-          <a:lstStyle/>
-          <a:p>
-            <a:pPr algn="ctr"/>
-          </a:p>
-        </p:txBody>
-      </p:sp>
-      <p:sp>
-        <p:nvSpPr>
-          <p:cNvPr id="7" name="Rectangle 6"/>
-          <p:cNvSpPr/>
-          <p:nvPr/>
-        </p:nvSpPr>
-        <p:spPr>
-          <a:xfrm>
-            <a:off x="640080" y="1618487"/>
-            <a:ext cx="274320" cy="274320"/>
-          </a:xfrm>
-          <a:prstGeom prst="rect">
-            <a:avLst/>
-          </a:prstGeom>
-          <a:solidFill>
-            <a:srgbClr val="FFFFFF"/>
-          </a:solidFill>
-          <a:ln>
-            <a:solidFill>
-              <a:srgbClr val="333333"/>
-            </a:solidFill>
-          </a:ln>
-        </p:spPr>
-        <p:style>
-          <a:lnRef idx="1">
-            <a:schemeClr val="accent1"/>
-          </a:lnRef>
-          <a:fillRef idx="3">
-            <a:schemeClr val="accent1"/>
-          </a:fillRef>
-          <a:effectRef idx="2">
-            <a:schemeClr val="accent1"/>
-          </a:effectRef>
-          <a:fontRef idx="minor">
-            <a:schemeClr val="lt1"/>
-          </a:fontRef>
-        </p:style>
-        <p:txBody>
-          <a:bodyPr rtlCol="0" anchor="ctr"/>
-          <a:lstStyle/>
-          <a:p>
-            <a:pPr algn="ctr"/>
-          </a:p>
-        </p:txBody>
-      </p:sp>
-      <p:sp>
-        <p:nvSpPr>
-          <p:cNvPr id="8" name="Rectangle 7"/>
-          <p:cNvSpPr/>
-          <p:nvPr/>
-        </p:nvSpPr>
-        <p:spPr>
-          <a:xfrm>
-            <a:off x="640080" y="1618487"/>
-            <a:ext cx="73152" cy="274320"/>
-          </a:xfrm>
-          <a:prstGeom prst="rect">
-            <a:avLst/>
-          </a:prstGeom>
-          <a:solidFill>
-            <a:srgbClr val="269CCB"/>
-          </a:solidFill>
-          <a:ln>
-            <a:noFill/>
-          </a:ln>
-        </p:spPr>
-        <p:style>
-          <a:lnRef idx="1">
-            <a:schemeClr val="accent1"/>
-          </a:lnRef>
-          <a:fillRef idx="3">
-            <a:schemeClr val="accent1"/>
-          </a:fillRef>
-          <a:effectRef idx="2">
-            <a:schemeClr val="accent1"/>
-          </a:effectRef>
-          <a:fontRef idx="minor">
-            <a:schemeClr val="lt1"/>
-          </a:fontRef>
-        </p:style>
-        <p:txBody>
-          <a:bodyPr rtlCol="0" anchor="ctr"/>
-          <a:lstStyle/>
-          <a:p>
-            <a:pPr algn="ctr"/>
-          </a:p>
-        </p:txBody>
-      </p:sp>
-      <p:sp>
-        <p:nvSpPr>
-          <p:cNvPr id="9" name="TextBox 8"/>
-          <p:cNvSpPr txBox="1"/>
-          <p:nvPr/>
-        </p:nvSpPr>
-        <p:spPr>
-          <a:xfrm>
-            <a:off x="1097280" y="1563624"/>
-            <a:ext cx="10362895" cy="402336"/>
-          </a:xfrm>
-          <a:prstGeom prst="rect">
-            <a:avLst/>
-          </a:prstGeom>
-          <a:noFill/>
-        </p:spPr>
-        <p:txBody>
-          <a:bodyPr wrap="square" anchor="ctr"/>
-          <a:lstStyle/>
-          <a:p>
-            <a:r>
-              <a:rPr sz="1500" b="1" i="0">
-                <a:solidFill>
-                  <a:srgbClr val="333333"/>
-                </a:solidFill>
-                <a:latin typeface="Calibri"/>
-              </a:rPr>
-              <a:t>LOS TRES HALLAZGOS</a:t>
-            </a:r>
-            <a:r>
-              <a:rPr sz="1500" b="0" i="0">
-                <a:solidFill>
-                  <a:srgbClr val="333333"/>
-                </a:solidFill>
-                <a:latin typeface="Calibri"/>
-              </a:rPr>
-              <a:t> — Tres tropiezos de la prueba, escritos como </a:t>
-            </a:r>
-            <a:r>
-              <a:rPr sz="1500" b="1" i="0">
-                <a:solidFill>
-                  <a:srgbClr val="333333"/>
-                </a:solidFill>
-                <a:latin typeface="Calibri"/>
-              </a:rPr>
-              <a:t>lo que la persona hizo o preguntó</a:t>
-            </a:r>
-            <a:r>
-              <a:rPr sz="1500" b="0" i="0">
-                <a:solidFill>
-                  <a:srgbClr val="333333"/>
-                </a:solidFill>
-                <a:latin typeface="Calibri"/>
-              </a:rPr>
-              <a:t> — no como lo que dijo al final, y no como la solución.</a:t>
-            </a:r>
-          </a:p>
-        </p:txBody>
-      </p:sp>
-      <p:sp>
-        <p:nvSpPr>
-          <p:cNvPr id="10" name="Rounded Rectangle 9"/>
-          <p:cNvSpPr/>
-          <p:nvPr/>
-        </p:nvSpPr>
-        <p:spPr>
-          <a:xfrm>
-            <a:off x="457200" y="2148839"/>
-            <a:ext cx="11277295" cy="566928"/>
-          </a:xfrm>
-          <a:prstGeom prst="roundRect">
-            <a:avLst>
-              <a:gd name="adj" fmla="val 12000"/>
-            </a:avLst>
-          </a:prstGeom>
-          <a:solidFill>
-            <a:srgbClr val="F2F2F2"/>
-          </a:solidFill>
-          <a:ln>
-            <a:noFill/>
-          </a:ln>
-        </p:spPr>
-        <p:style>
-          <a:lnRef idx="1">
-            <a:schemeClr val="accent1"/>
-          </a:lnRef>
-          <a:fillRef idx="3">
-            <a:schemeClr val="accent1"/>
-          </a:fillRef>
-          <a:effectRef idx="2">
-            <a:schemeClr val="accent1"/>
-          </a:effectRef>
-          <a:fontRef idx="minor">
-            <a:schemeClr val="lt1"/>
-          </a:fontRef>
-        </p:style>
-        <p:txBody>
-          <a:bodyPr rtlCol="0" anchor="ctr"/>
-          <a:lstStyle/>
-          <a:p>
-            <a:pPr algn="ctr"/>
-          </a:p>
-        </p:txBody>
-      </p:sp>
-      <p:sp>
-        <p:nvSpPr>
-          <p:cNvPr id="11" name="Rectangle 10"/>
-          <p:cNvSpPr/>
-          <p:nvPr/>
-        </p:nvSpPr>
-        <p:spPr>
-          <a:xfrm>
-            <a:off x="640080" y="2295144"/>
-            <a:ext cx="274320" cy="274320"/>
-          </a:xfrm>
-          <a:prstGeom prst="rect">
-            <a:avLst/>
-          </a:prstGeom>
-          <a:solidFill>
-            <a:srgbClr val="FFFFFF"/>
-          </a:solidFill>
-          <a:ln>
-            <a:solidFill>
-              <a:srgbClr val="333333"/>
-            </a:solidFill>
-          </a:ln>
-        </p:spPr>
-        <p:style>
-          <a:lnRef idx="1">
-            <a:schemeClr val="accent1"/>
-          </a:lnRef>
-          <a:fillRef idx="3">
-            <a:schemeClr val="accent1"/>
-          </a:fillRef>
-          <a:effectRef idx="2">
-            <a:schemeClr val="accent1"/>
-          </a:effectRef>
-          <a:fontRef idx="minor">
-            <a:schemeClr val="lt1"/>
-          </a:fontRef>
-        </p:style>
-        <p:txBody>
-          <a:bodyPr rtlCol="0" anchor="ctr"/>
-          <a:lstStyle/>
-          <a:p>
-            <a:pPr algn="ctr"/>
-          </a:p>
-        </p:txBody>
-      </p:sp>
-      <p:sp>
-        <p:nvSpPr>
-          <p:cNvPr id="12" name="Rectangle 11"/>
-          <p:cNvSpPr/>
-          <p:nvPr/>
-        </p:nvSpPr>
-        <p:spPr>
-          <a:xfrm>
-            <a:off x="640080" y="2295144"/>
-            <a:ext cx="73152" cy="274320"/>
-          </a:xfrm>
-          <a:prstGeom prst="rect">
-            <a:avLst/>
-          </a:prstGeom>
-          <a:solidFill>
-            <a:srgbClr val="269CCB"/>
-          </a:solidFill>
-          <a:ln>
-            <a:noFill/>
-          </a:ln>
-        </p:spPr>
-        <p:style>
-          <a:lnRef idx="1">
-            <a:schemeClr val="accent1"/>
-          </a:lnRef>
-          <a:fillRef idx="3">
-            <a:schemeClr val="accent1"/>
-          </a:fillRef>
-          <a:effectRef idx="2">
-            <a:schemeClr val="accent1"/>
-          </a:effectRef>
-          <a:fontRef idx="minor">
-            <a:schemeClr val="lt1"/>
-          </a:fontRef>
-        </p:style>
-        <p:txBody>
-          <a:bodyPr rtlCol="0" anchor="ctr"/>
-          <a:lstStyle/>
-          <a:p>
-            <a:pPr algn="ctr"/>
-          </a:p>
-        </p:txBody>
-      </p:sp>
-      <p:sp>
-        <p:nvSpPr>
-          <p:cNvPr id="13" name="TextBox 12"/>
-          <p:cNvSpPr txBox="1"/>
-          <p:nvPr/>
-        </p:nvSpPr>
-        <p:spPr>
-          <a:xfrm>
-            <a:off x="1097280" y="2240279"/>
-            <a:ext cx="10362895" cy="402336"/>
-          </a:xfrm>
-          <a:prstGeom prst="rect">
-            <a:avLst/>
-          </a:prstGeom>
-          <a:noFill/>
-        </p:spPr>
-        <p:txBody>
-          <a:bodyPr wrap="square" anchor="ctr"/>
-          <a:lstStyle/>
-          <a:p>
-            <a:r>
-              <a:rPr sz="1500" b="1" i="0">
-                <a:solidFill>
-                  <a:srgbClr val="333333"/>
-                </a:solidFill>
-                <a:latin typeface="Calibri"/>
-              </a:rPr>
-              <a:t>LA CLASIFICACIÓN Y EL PATRÓN</a:t>
-            </a:r>
-            <a:r>
-              <a:rPr sz="1500" b="0" i="0">
-                <a:solidFill>
-                  <a:srgbClr val="333333"/>
-                </a:solidFill>
-                <a:latin typeface="Calibri"/>
-              </a:rPr>
-              <a:t> — El tipo de cada hallazgo —lenguaje, flujo, expectativa o suposición nuestra— y si se repitió en más de una persona.</a:t>
-            </a:r>
-          </a:p>
-        </p:txBody>
-      </p:sp>
-      <p:sp>
-        <p:nvSpPr>
-          <p:cNvPr id="14" name="Rounded Rectangle 13"/>
-          <p:cNvSpPr/>
-          <p:nvPr/>
-        </p:nvSpPr>
-        <p:spPr>
-          <a:xfrm>
-            <a:off x="457200" y="2825496"/>
-            <a:ext cx="11277295" cy="566928"/>
-          </a:xfrm>
-          <a:prstGeom prst="roundRect">
-            <a:avLst>
-              <a:gd name="adj" fmla="val 12000"/>
-            </a:avLst>
-          </a:prstGeom>
-          <a:solidFill>
-            <a:srgbClr val="F2F2F2"/>
-          </a:solidFill>
-          <a:ln>
-            <a:noFill/>
-          </a:ln>
-        </p:spPr>
-        <p:style>
-          <a:lnRef idx="1">
-            <a:schemeClr val="accent1"/>
-          </a:lnRef>
-          <a:fillRef idx="3">
-            <a:schemeClr val="accent1"/>
-          </a:fillRef>
-          <a:effectRef idx="2">
-            <a:schemeClr val="accent1"/>
-          </a:effectRef>
-          <a:fontRef idx="minor">
-            <a:schemeClr val="lt1"/>
-          </a:fontRef>
-        </p:style>
-        <p:txBody>
-          <a:bodyPr rtlCol="0" anchor="ctr"/>
-          <a:lstStyle/>
-          <a:p>
-            <a:pPr algn="ctr"/>
-          </a:p>
-        </p:txBody>
-      </p:sp>
-      <p:sp>
-        <p:nvSpPr>
-          <p:cNvPr id="15" name="Rectangle 14"/>
-          <p:cNvSpPr/>
-          <p:nvPr/>
-        </p:nvSpPr>
-        <p:spPr>
-          <a:xfrm>
-            <a:off x="640080" y="2971800"/>
-            <a:ext cx="274320" cy="274320"/>
-          </a:xfrm>
-          <a:prstGeom prst="rect">
-            <a:avLst/>
-          </a:prstGeom>
-          <a:solidFill>
-            <a:srgbClr val="FFFFFF"/>
-          </a:solidFill>
-          <a:ln>
-            <a:solidFill>
-              <a:srgbClr val="333333"/>
-            </a:solidFill>
-          </a:ln>
-        </p:spPr>
-        <p:style>
-          <a:lnRef idx="1">
-            <a:schemeClr val="accent1"/>
-          </a:lnRef>
-          <a:fillRef idx="3">
-            <a:schemeClr val="accent1"/>
-          </a:fillRef>
-          <a:effectRef idx="2">
-            <a:schemeClr val="accent1"/>
-          </a:effectRef>
-          <a:fontRef idx="minor">
-            <a:schemeClr val="lt1"/>
-          </a:fontRef>
-        </p:style>
-        <p:txBody>
-          <a:bodyPr rtlCol="0" anchor="ctr"/>
-          <a:lstStyle/>
-          <a:p>
-            <a:pPr algn="ctr"/>
-          </a:p>
-        </p:txBody>
-      </p:sp>
-      <p:sp>
-        <p:nvSpPr>
-          <p:cNvPr id="16" name="Rectangle 15"/>
-          <p:cNvSpPr/>
-          <p:nvPr/>
-        </p:nvSpPr>
-        <p:spPr>
-          <a:xfrm>
-            <a:off x="640080" y="2971800"/>
-            <a:ext cx="73152" cy="274320"/>
-          </a:xfrm>
-          <a:prstGeom prst="rect">
-            <a:avLst/>
-          </a:prstGeom>
-          <a:solidFill>
-            <a:srgbClr val="269CCB"/>
-          </a:solidFill>
-          <a:ln>
-            <a:noFill/>
-          </a:ln>
-        </p:spPr>
-        <p:style>
-          <a:lnRef idx="1">
-            <a:schemeClr val="accent1"/>
-          </a:lnRef>
-          <a:fillRef idx="3">
-            <a:schemeClr val="accent1"/>
-          </a:fillRef>
-          <a:effectRef idx="2">
-            <a:schemeClr val="accent1"/>
-          </a:effectRef>
-          <a:fontRef idx="minor">
-            <a:schemeClr val="lt1"/>
-          </a:fontRef>
-        </p:style>
-        <p:txBody>
-          <a:bodyPr rtlCol="0" anchor="ctr"/>
-          <a:lstStyle/>
-          <a:p>
-            <a:pPr algn="ctr"/>
-          </a:p>
-        </p:txBody>
-      </p:sp>
-      <p:sp>
-        <p:nvSpPr>
-          <p:cNvPr id="17" name="TextBox 16"/>
-          <p:cNvSpPr txBox="1"/>
-          <p:nvPr/>
-        </p:nvSpPr>
-        <p:spPr>
-          <a:xfrm>
-            <a:off x="1097280" y="2916936"/>
-            <a:ext cx="10362895" cy="402336"/>
-          </a:xfrm>
-          <a:prstGeom prst="rect">
-            <a:avLst/>
-          </a:prstGeom>
-          <a:noFill/>
-        </p:spPr>
-        <p:txBody>
-          <a:bodyPr wrap="square" anchor="ctr"/>
-          <a:lstStyle/>
-          <a:p>
-            <a:r>
-              <a:rPr sz="1500" b="1" i="0">
-                <a:solidFill>
-                  <a:srgbClr val="333333"/>
-                </a:solidFill>
-                <a:latin typeface="Calibri"/>
-              </a:rPr>
-              <a:t>QUÉ ARREGLAMOS Y QUÉ NO</a:t>
-            </a:r>
-            <a:r>
-              <a:rPr sz="1500" b="0" i="0">
-                <a:solidFill>
-                  <a:srgbClr val="333333"/>
-                </a:solidFill>
-                <a:latin typeface="Calibri"/>
-              </a:rPr>
-              <a:t> — Lo que se arregla antes de la Clase 14, y </a:t>
-            </a:r>
-            <a:r>
-              <a:rPr sz="1500" b="1" i="0">
-                <a:solidFill>
-                  <a:srgbClr val="333333"/>
-                </a:solidFill>
-                <a:latin typeface="Calibri"/>
-              </a:rPr>
-              <a:t>lo que no se arregla con su razón</a:t>
-            </a:r>
-            <a:r>
-              <a:rPr sz="1500" b="0" i="0">
-                <a:solidFill>
-                  <a:srgbClr val="333333"/>
-                </a:solidFill>
-                <a:latin typeface="Calibri"/>
-              </a:rPr>
-              <a:t>: fuera del alcance, no alcanza el tiempo, o cambia una restricción.</a:t>
-            </a:r>
-          </a:p>
-        </p:txBody>
-      </p:sp>
-      <p:sp>
-        <p:nvSpPr>
-          <p:cNvPr id="18" name="Rounded Rectangle 17"/>
-          <p:cNvSpPr/>
-          <p:nvPr/>
-        </p:nvSpPr>
-        <p:spPr>
-          <a:xfrm>
-            <a:off x="457200" y="3502152"/>
-            <a:ext cx="11277295" cy="566928"/>
-          </a:xfrm>
-          <a:prstGeom prst="roundRect">
-            <a:avLst>
-              <a:gd name="adj" fmla="val 12000"/>
-            </a:avLst>
-          </a:prstGeom>
-          <a:solidFill>
-            <a:srgbClr val="F2F2F2"/>
-          </a:solidFill>
-          <a:ln>
-            <a:noFill/>
-          </a:ln>
-        </p:spPr>
-        <p:style>
-          <a:lnRef idx="1">
-            <a:schemeClr val="accent1"/>
-          </a:lnRef>
-          <a:fillRef idx="3">
-            <a:schemeClr val="accent1"/>
-          </a:fillRef>
-          <a:effectRef idx="2">
-            <a:schemeClr val="accent1"/>
-          </a:effectRef>
-          <a:fontRef idx="minor">
-            <a:schemeClr val="lt1"/>
-          </a:fontRef>
-        </p:style>
-        <p:txBody>
-          <a:bodyPr rtlCol="0" anchor="ctr"/>
-          <a:lstStyle/>
-          <a:p>
-            <a:pPr algn="ctr"/>
-          </a:p>
-        </p:txBody>
-      </p:sp>
-      <p:sp>
-        <p:nvSpPr>
-          <p:cNvPr id="19" name="Rectangle 18"/>
-          <p:cNvSpPr/>
-          <p:nvPr/>
-        </p:nvSpPr>
-        <p:spPr>
-          <a:xfrm>
-            <a:off x="640080" y="3648456"/>
-            <a:ext cx="274320" cy="274320"/>
-          </a:xfrm>
-          <a:prstGeom prst="rect">
-            <a:avLst/>
-          </a:prstGeom>
-          <a:solidFill>
-            <a:srgbClr val="FFFFFF"/>
-          </a:solidFill>
-          <a:ln>
-            <a:solidFill>
-              <a:srgbClr val="333333"/>
-            </a:solidFill>
-          </a:ln>
-        </p:spPr>
-        <p:style>
-          <a:lnRef idx="1">
-            <a:schemeClr val="accent1"/>
-          </a:lnRef>
-          <a:fillRef idx="3">
-            <a:schemeClr val="accent1"/>
-          </a:fillRef>
-          <a:effectRef idx="2">
-            <a:schemeClr val="accent1"/>
-          </a:effectRef>
-          <a:fontRef idx="minor">
-            <a:schemeClr val="lt1"/>
-          </a:fontRef>
-        </p:style>
-        <p:txBody>
-          <a:bodyPr rtlCol="0" anchor="ctr"/>
-          <a:lstStyle/>
-          <a:p>
-            <a:pPr algn="ctr"/>
-          </a:p>
-        </p:txBody>
-      </p:sp>
-      <p:sp>
-        <p:nvSpPr>
-          <p:cNvPr id="20" name="Rectangle 19"/>
-          <p:cNvSpPr/>
-          <p:nvPr/>
-        </p:nvSpPr>
-        <p:spPr>
-          <a:xfrm>
-            <a:off x="640080" y="3648456"/>
-            <a:ext cx="73152" cy="274320"/>
-          </a:xfrm>
-          <a:prstGeom prst="rect">
-            <a:avLst/>
-          </a:prstGeom>
-          <a:solidFill>
-            <a:srgbClr val="269CCB"/>
-          </a:solidFill>
-          <a:ln>
-            <a:noFill/>
-          </a:ln>
-        </p:spPr>
-        <p:style>
-          <a:lnRef idx="1">
-            <a:schemeClr val="accent1"/>
-          </a:lnRef>
-          <a:fillRef idx="3">
-            <a:schemeClr val="accent1"/>
-          </a:fillRef>
-          <a:effectRef idx="2">
-            <a:schemeClr val="accent1"/>
-          </a:effectRef>
-          <a:fontRef idx="minor">
-            <a:schemeClr val="lt1"/>
-          </a:fontRef>
-        </p:style>
-        <p:txBody>
-          <a:bodyPr rtlCol="0" anchor="ctr"/>
-          <a:lstStyle/>
-          <a:p>
-            <a:pPr algn="ctr"/>
-          </a:p>
-        </p:txBody>
-      </p:sp>
-      <p:sp>
-        <p:nvSpPr>
-          <p:cNvPr id="21" name="TextBox 20"/>
-          <p:cNvSpPr txBox="1"/>
-          <p:nvPr/>
-        </p:nvSpPr>
-        <p:spPr>
-          <a:xfrm>
-            <a:off x="1097280" y="3593592"/>
-            <a:ext cx="10362895" cy="402336"/>
-          </a:xfrm>
-          <a:prstGeom prst="rect">
-            <a:avLst/>
-          </a:prstGeom>
-          <a:noFill/>
-        </p:spPr>
-        <p:txBody>
-          <a:bodyPr wrap="square" anchor="ctr"/>
-          <a:lstStyle/>
-          <a:p>
-            <a:r>
-              <a:rPr sz="1500" b="1" i="0">
-                <a:solidFill>
-                  <a:srgbClr val="333333"/>
-                </a:solidFill>
-                <a:latin typeface="Calibri"/>
-              </a:rPr>
-              <a:t>LA PREGUNTA PARA EL CURSO</a:t>
-            </a:r>
-            <a:r>
-              <a:rPr sz="1500" b="0" i="0">
-                <a:solidFill>
-                  <a:srgbClr val="333333"/>
-                </a:solidFill>
-                <a:latin typeface="Calibri"/>
-              </a:rPr>
-              <a:t> — Una pregunta abierta, concreta, sobre una decisión que el equipo no logra tomar. Es lo que hace útiles los tres minutos de retroalimentación.</a:t>
-            </a:r>
-          </a:p>
-        </p:txBody>
-      </p:sp>
-      <p:sp>
-        <p:nvSpPr>
-          <p:cNvPr id="22" name="Rounded Rectangle 21"/>
-          <p:cNvSpPr/>
-          <p:nvPr/>
-        </p:nvSpPr>
-        <p:spPr>
-          <a:xfrm>
-            <a:off x="457200" y="4178808"/>
-            <a:ext cx="11277295" cy="566928"/>
-          </a:xfrm>
-          <a:prstGeom prst="roundRect">
-            <a:avLst>
-              <a:gd name="adj" fmla="val 12000"/>
-            </a:avLst>
-          </a:prstGeom>
-          <a:solidFill>
-            <a:srgbClr val="F2F2F2"/>
-          </a:solidFill>
-          <a:ln>
-            <a:noFill/>
-          </a:ln>
-        </p:spPr>
-        <p:style>
-          <a:lnRef idx="1">
-            <a:schemeClr val="accent1"/>
-          </a:lnRef>
-          <a:fillRef idx="3">
-            <a:schemeClr val="accent1"/>
-          </a:fillRef>
-          <a:effectRef idx="2">
-            <a:schemeClr val="accent1"/>
-          </a:effectRef>
-          <a:fontRef idx="minor">
-            <a:schemeClr val="lt1"/>
-          </a:fontRef>
-        </p:style>
-        <p:txBody>
-          <a:bodyPr rtlCol="0" anchor="ctr"/>
-          <a:lstStyle/>
-          <a:p>
-            <a:pPr algn="ctr"/>
-          </a:p>
-        </p:txBody>
-      </p:sp>
-      <p:sp>
-        <p:nvSpPr>
-          <p:cNvPr id="23" name="Rectangle 22"/>
-          <p:cNvSpPr/>
-          <p:nvPr/>
-        </p:nvSpPr>
-        <p:spPr>
-          <a:xfrm>
-            <a:off x="640080" y="4325112"/>
-            <a:ext cx="274320" cy="274320"/>
-          </a:xfrm>
-          <a:prstGeom prst="rect">
-            <a:avLst/>
-          </a:prstGeom>
-          <a:solidFill>
-            <a:srgbClr val="FFFFFF"/>
-          </a:solidFill>
-          <a:ln>
-            <a:solidFill>
-              <a:srgbClr val="333333"/>
-            </a:solidFill>
-          </a:ln>
-        </p:spPr>
-        <p:style>
-          <a:lnRef idx="1">
-            <a:schemeClr val="accent1"/>
-          </a:lnRef>
-          <a:fillRef idx="3">
-            <a:schemeClr val="accent1"/>
-          </a:fillRef>
-          <a:effectRef idx="2">
-            <a:schemeClr val="accent1"/>
-          </a:effectRef>
-          <a:fontRef idx="minor">
-            <a:schemeClr val="lt1"/>
-          </a:fontRef>
-        </p:style>
-        <p:txBody>
-          <a:bodyPr rtlCol="0" anchor="ctr"/>
-          <a:lstStyle/>
-          <a:p>
-            <a:pPr algn="ctr"/>
-          </a:p>
-        </p:txBody>
-      </p:sp>
-      <p:sp>
-        <p:nvSpPr>
-          <p:cNvPr id="24" name="Rectangle 23"/>
-          <p:cNvSpPr/>
-          <p:nvPr/>
-        </p:nvSpPr>
-        <p:spPr>
-          <a:xfrm>
-            <a:off x="640080" y="4325112"/>
-            <a:ext cx="73152" cy="274320"/>
-          </a:xfrm>
-          <a:prstGeom prst="rect">
-            <a:avLst/>
-          </a:prstGeom>
-          <a:solidFill>
-            <a:srgbClr val="269CCB"/>
-          </a:solidFill>
-          <a:ln>
-            <a:noFill/>
-          </a:ln>
-        </p:spPr>
-        <p:style>
-          <a:lnRef idx="1">
-            <a:schemeClr val="accent1"/>
-          </a:lnRef>
-          <a:fillRef idx="3">
-            <a:schemeClr val="accent1"/>
-          </a:fillRef>
-          <a:effectRef idx="2">
-            <a:schemeClr val="accent1"/>
-          </a:effectRef>
-          <a:fontRef idx="minor">
-            <a:schemeClr val="lt1"/>
-          </a:fontRef>
-        </p:style>
-        <p:txBody>
-          <a:bodyPr rtlCol="0" anchor="ctr"/>
-          <a:lstStyle/>
-          <a:p>
-            <a:pPr algn="ctr"/>
-          </a:p>
-        </p:txBody>
-      </p:sp>
-      <p:sp>
-        <p:nvSpPr>
-          <p:cNvPr id="25" name="TextBox 24"/>
-          <p:cNvSpPr txBox="1"/>
-          <p:nvPr/>
-        </p:nvSpPr>
-        <p:spPr>
-          <a:xfrm>
-            <a:off x="1097280" y="4270248"/>
-            <a:ext cx="10362895" cy="402336"/>
-          </a:xfrm>
-          <a:prstGeom prst="rect">
-            <a:avLst/>
-          </a:prstGeom>
-          <a:noFill/>
-        </p:spPr>
-        <p:txBody>
-          <a:bodyPr wrap="square" anchor="ctr"/>
-          <a:lstStyle/>
-          <a:p>
-            <a:r>
-              <a:rPr sz="1500" b="1" i="0">
-                <a:solidFill>
-                  <a:srgbClr val="333333"/>
-                </a:solidFill>
-                <a:latin typeface="Calibri"/>
-              </a:rPr>
-              <a:t>EL PLAN DE AJUSTES</a:t>
-            </a:r>
-            <a:r>
-              <a:rPr sz="1500" b="0" i="0">
-                <a:solidFill>
-                  <a:srgbClr val="333333"/>
-                </a:solidFill>
-                <a:latin typeface="Calibri"/>
-              </a:rPr>
-              <a:t> — Las </a:t>
-            </a:r>
-            <a:r>
-              <a:rPr sz="1500" b="1" i="0">
-                <a:solidFill>
-                  <a:srgbClr val="333333"/>
-                </a:solidFill>
-                <a:latin typeface="Calibri"/>
-              </a:rPr>
-              <a:t>dos cosas</a:t>
-            </a:r>
-            <a:r>
-              <a:rPr sz="1500" b="0" i="0">
-                <a:solidFill>
-                  <a:srgbClr val="333333"/>
-                </a:solidFill>
-                <a:latin typeface="Calibri"/>
-              </a:rPr>
-              <a:t> que el equipo va a ajustar con lo que oyó en la retroalimentación, y </a:t>
-            </a:r>
-            <a:r>
-              <a:rPr sz="1500" b="1" i="0">
-                <a:solidFill>
-                  <a:srgbClr val="333333"/>
-                </a:solidFill>
-                <a:latin typeface="Calibri"/>
-              </a:rPr>
-              <a:t>qué lo motivó</a:t>
-            </a:r>
-            <a:r>
-              <a:rPr sz="1500" b="0" i="0">
-                <a:solidFill>
-                  <a:srgbClr val="333333"/>
-                </a:solidFill>
-                <a:latin typeface="Calibri"/>
-              </a:rPr>
-              <a:t>: quién lo dijo y qué dijo. Se llena en los últimos minutos de la sesión, no antes.</a:t>
-            </a:r>
-          </a:p>
-        </p:txBody>
-      </p:sp>
-      <p:sp>
-        <p:nvSpPr>
-          <p:cNvPr id="26" name="TextBox 25"/>
+            <a:pPr>
+              <a:spcAft>
+                <a:spcPts val="800"/>
+              </a:spcAft>
+            </a:pPr>
+            <a:r>
+              <a:rPr sz="2000" b="0" i="0">
+                <a:solidFill>
+                  <a:srgbClr val="333333"/>
+                </a:solidFill>
+                <a:latin typeface="Calibri"/>
+              </a:rPr>
+              <a:t>–   El gancho de hoy funciona porque todos los equipos van a reconocerse en él.</a:t>
+            </a:r>
+          </a:p>
+          <a:p>
+            <a:pPr>
+              <a:spcAft>
+                <a:spcPts val="800"/>
+              </a:spcAft>
+            </a:pPr>
+            <a:r>
+              <a:rPr sz="2000" b="0" i="0">
+                <a:solidFill>
+                  <a:srgbClr val="333333"/>
+                </a:solidFill>
+                <a:latin typeface="Calibri"/>
+              </a:rPr>
+              <a:t>–   Le pidieron a alguien ajeno que usara el prototipo y, casi con seguridad, en algún momento intervinieron: «no, ahí no, toca acá».</a:t>
+            </a:r>
+          </a:p>
+          <a:p>
+            <a:pPr>
+              <a:spcAft>
+                <a:spcPts val="800"/>
+              </a:spcAft>
+            </a:pPr>
+            <a:r>
+              <a:rPr sz="2000" b="0" i="0">
+                <a:solidFill>
+                  <a:srgbClr val="333333"/>
+                </a:solidFill>
+                <a:latin typeface="Calibri"/>
+              </a:rPr>
+              <a:t>–   Esa frase es el dato más valioso que el equipo tiene hoy, y viene disfrazada de incomodidad.</a:t>
+            </a:r>
+          </a:p>
+          <a:p>
+            <a:pPr>
+              <a:spcAft>
+                <a:spcPts val="800"/>
+              </a:spcAft>
+            </a:pPr>
+            <a:r>
+              <a:rPr sz="2000" b="0" i="0">
+                <a:solidFill>
+                  <a:srgbClr val="333333"/>
+                </a:solidFill>
+                <a:latin typeface="Calibri"/>
+              </a:rPr>
+              <a:t>–   El giro que hay que hacer explícito, y que es el eje de la sesión: </a:t>
+            </a:r>
+            <a:r>
+              <a:rPr sz="2000" b="1" i="0">
+                <a:solidFill>
+                  <a:srgbClr val="333333"/>
+                </a:solidFill>
+                <a:latin typeface="Calibri"/>
+              </a:rPr>
+              <a:t>cada intervención es un hallazgo, no un error de la persona.</a:t>
+            </a:r>
+            <a:r>
+              <a:rPr sz="2000" b="0" i="0">
+                <a:solidFill>
+                  <a:srgbClr val="333333"/>
+                </a:solidFill>
+                <a:latin typeface="Calibri"/>
+              </a:rPr>
+              <a:t> Si tuvieron que explicar algo, el prototipo no lo explicaba.</a:t>
+            </a:r>
+          </a:p>
+          <a:p>
+            <a:pPr>
+              <a:spcAft>
+                <a:spcPts val="800"/>
+              </a:spcAft>
+            </a:pPr>
+            <a:r>
+              <a:rPr sz="2000" b="0" i="0">
+                <a:solidFill>
+                  <a:srgbClr val="333333"/>
+                </a:solidFill>
+                <a:latin typeface="Calibri"/>
+              </a:rPr>
+              <a:t>–   Y en la vida real nadie va a estar al lado del usuario para aclarárselo.</a:t>
+            </a:r>
+          </a:p>
+          <a:p>
+            <a:pPr>
+              <a:spcAft>
+                <a:spcPts val="800"/>
+              </a:spcAft>
+            </a:pPr>
+            <a:r>
+              <a:rPr sz="2000" b="0" i="0">
+                <a:solidFill>
+                  <a:srgbClr val="333333"/>
+                </a:solidFill>
+                <a:latin typeface="Calibri"/>
+              </a:rPr>
+              <a:t>–   Ese número, además de romper el hielo, le dice de inmediato quién hizo la prueba y quién no.</a:t>
+            </a:r>
+          </a:p>
+        </p:txBody>
+      </p:sp>
+      <p:sp>
+        <p:nvSpPr>
+          <p:cNvPr id="6" name="TextBox 5"/>
           <p:cNvSpPr txBox="1"/>
           <p:nvPr/>
         </p:nvSpPr>
@@ -4669,7 +3839,7 @@
         <p:spPr>
           <a:xfrm>
             <a:off x="0" y="0"/>
-            <a:ext cx="12191695" cy="1170432"/>
+            <a:ext cx="12191695" cy="960120"/>
           </a:xfrm>
           <a:prstGeom prst="rect">
             <a:avLst/>
@@ -4711,7 +3881,7 @@
         </p:nvSpPr>
         <p:spPr>
           <a:xfrm>
-            <a:off x="0" y="1170432"/>
+            <a:off x="0" y="960120"/>
             <a:ext cx="12191695" cy="41148"/>
           </a:xfrm>
           <a:prstGeom prst="rect">
@@ -4755,7 +3925,7 @@
         <p:spPr>
           <a:xfrm>
             <a:off x="457200" y="164592"/>
-            <a:ext cx="11277295" cy="384048"/>
+            <a:ext cx="11277295" cy="502920"/>
           </a:xfrm>
           <a:prstGeom prst="rect">
             <a:avLst/>
@@ -4775,7 +3945,7 @@
                 </a:solidFill>
                 <a:latin typeface="Calibri"/>
               </a:rPr>
-              <a:t>Cómo se expone en 5 minutos</a:t>
+              <a:t>La pregunta de entrada: «no, ahí no, toca acá» (2/2)</a:t>
             </a:r>
           </a:p>
         </p:txBody>
@@ -4788,8 +3958,8 @@
         </p:nvSpPr>
         <p:spPr>
           <a:xfrm>
-            <a:off x="457200" y="566928"/>
-            <a:ext cx="11277295" cy="411480"/>
+            <a:off x="457200" y="1170432"/>
+            <a:ext cx="11277295" cy="5230368"/>
           </a:xfrm>
           <a:prstGeom prst="rect">
             <a:avLst/>
@@ -4802,912 +3972,76 @@
           </a:bodyPr>
           <a:lstStyle/>
           <a:p>
-            <a:r>
-              <a:rPr sz="1400" b="0" i="0">
-                <a:solidFill>
-                  <a:srgbClr val="B8D8EE"/>
-                </a:solidFill>
-                <a:latin typeface="Calibri"/>
-              </a:rPr>
-              <a:t>Habla el vocero con la pantalla ya compartida · cronómetro en pantalla · se corta al llegar a cero</a:t>
-            </a:r>
-          </a:p>
-        </p:txBody>
-      </p:sp>
-      <p:sp>
-        <p:nvSpPr>
-          <p:cNvPr id="6" name="Rounded Rectangle 5"/>
-          <p:cNvSpPr/>
-          <p:nvPr/>
-        </p:nvSpPr>
-        <p:spPr>
-          <a:xfrm>
-            <a:off x="457200" y="1444752"/>
-            <a:ext cx="11277295" cy="908913"/>
-          </a:xfrm>
-          <a:prstGeom prst="roundRect">
-            <a:avLst>
-              <a:gd name="adj" fmla="val 12000"/>
-            </a:avLst>
-          </a:prstGeom>
-          <a:solidFill>
-            <a:srgbClr val="F2F2F2"/>
-          </a:solidFill>
-          <a:ln>
-            <a:noFill/>
-          </a:ln>
-        </p:spPr>
-        <p:style>
-          <a:lnRef idx="1">
-            <a:schemeClr val="accent1"/>
-          </a:lnRef>
-          <a:fillRef idx="3">
-            <a:schemeClr val="accent1"/>
-          </a:fillRef>
-          <a:effectRef idx="2">
-            <a:schemeClr val="accent1"/>
-          </a:effectRef>
-          <a:fontRef idx="minor">
-            <a:schemeClr val="lt1"/>
-          </a:fontRef>
-        </p:style>
-        <p:txBody>
-          <a:bodyPr rtlCol="0" anchor="ctr"/>
-          <a:lstStyle/>
-          <a:p>
-            <a:pPr algn="ctr"/>
-          </a:p>
-        </p:txBody>
-      </p:sp>
-      <p:sp>
-        <p:nvSpPr>
-          <p:cNvPr id="7" name="Rounded Rectangle 6"/>
-          <p:cNvSpPr/>
-          <p:nvPr/>
-        </p:nvSpPr>
-        <p:spPr>
-          <a:xfrm>
-            <a:off x="594360" y="1679752"/>
-            <a:ext cx="438912" cy="438912"/>
-          </a:xfrm>
-          <a:prstGeom prst="roundRect">
-            <a:avLst>
-              <a:gd name="adj" fmla="val 12000"/>
-            </a:avLst>
-          </a:prstGeom>
-          <a:solidFill>
-            <a:srgbClr val="095292"/>
-          </a:solidFill>
-          <a:ln>
-            <a:noFill/>
-          </a:ln>
-        </p:spPr>
-        <p:style>
-          <a:lnRef idx="1">
-            <a:schemeClr val="accent1"/>
-          </a:lnRef>
-          <a:fillRef idx="3">
-            <a:schemeClr val="accent1"/>
-          </a:fillRef>
-          <a:effectRef idx="2">
-            <a:schemeClr val="accent1"/>
-          </a:effectRef>
-          <a:fontRef idx="minor">
-            <a:schemeClr val="lt1"/>
-          </a:fontRef>
-        </p:style>
-        <p:txBody>
-          <a:bodyPr rtlCol="0" anchor="ctr"/>
-          <a:lstStyle/>
-          <a:p>
-            <a:pPr algn="ctr"/>
-          </a:p>
-        </p:txBody>
-      </p:sp>
-      <p:sp>
-        <p:nvSpPr>
-          <p:cNvPr id="8" name="TextBox 7"/>
-          <p:cNvSpPr txBox="1"/>
-          <p:nvPr/>
-        </p:nvSpPr>
-        <p:spPr>
-          <a:xfrm>
-            <a:off x="594360" y="1679752"/>
-            <a:ext cx="438912" cy="438912"/>
-          </a:xfrm>
-          <a:prstGeom prst="rect">
-            <a:avLst/>
-          </a:prstGeom>
-          <a:noFill/>
-        </p:spPr>
-        <p:txBody>
-          <a:bodyPr wrap="square" anchor="ctr"/>
-          <a:lstStyle/>
-          <a:p>
-            <a:pPr algn="ctr"/>
-            <a:r>
-              <a:rPr sz="1600" b="1" i="0">
-                <a:solidFill>
-                  <a:srgbClr val="FFFFFF"/>
-                </a:solidFill>
-                <a:latin typeface="Calibri"/>
-              </a:rPr>
-              <a:t>1</a:t>
-            </a:r>
-          </a:p>
-        </p:txBody>
-      </p:sp>
-      <p:sp>
-        <p:nvSpPr>
-          <p:cNvPr id="9" name="TextBox 8"/>
-          <p:cNvSpPr txBox="1"/>
-          <p:nvPr/>
-        </p:nvSpPr>
-        <p:spPr>
-          <a:xfrm>
-            <a:off x="1188720" y="1536192"/>
-            <a:ext cx="10271455" cy="744321"/>
-          </a:xfrm>
-          <a:prstGeom prst="rect">
-            <a:avLst/>
-          </a:prstGeom>
-          <a:noFill/>
-        </p:spPr>
-        <p:txBody>
-          <a:bodyPr wrap="square" anchor="ctr"/>
-          <a:lstStyle/>
-          <a:p>
-            <a:r>
-              <a:rPr sz="1500" b="1" i="0">
-                <a:solidFill>
-                  <a:srgbClr val="095292"/>
-                </a:solidFill>
-                <a:latin typeface="Calibri"/>
-              </a:rPr>
-              <a:t>30 s · Recordatorio mínimo</a:t>
-            </a:r>
-          </a:p>
-          <a:p>
             <a:pPr>
-              <a:spcBef>
-                <a:spcPts val="200"/>
-              </a:spcBef>
+              <a:spcAft>
+                <a:spcPts val="800"/>
+              </a:spcAft>
             </a:pPr>
             <a:r>
-              <a:rPr sz="1300" b="0" i="0">
-                <a:solidFill>
-                  <a:srgbClr val="333333"/>
-                </a:solidFill>
-                <a:latin typeface="Calibri"/>
-              </a:rPr>
-              <a:t>El problema en </a:t>
-            </a:r>
-            <a:r>
-              <a:rPr sz="1300" b="1" i="0">
-                <a:solidFill>
-                  <a:srgbClr val="333333"/>
-                </a:solidFill>
-                <a:latin typeface="Calibri"/>
-              </a:rPr>
-              <a:t>una frase</a:t>
-            </a:r>
-            <a:r>
-              <a:rPr sz="1300" b="0" i="0">
-                <a:solidFill>
-                  <a:srgbClr val="333333"/>
-                </a:solidFill>
-                <a:latin typeface="Calibri"/>
-              </a:rPr>
-              <a:t>. Nada más: el curso ya conoce su proyecto.</a:t>
-            </a:r>
-          </a:p>
-        </p:txBody>
-      </p:sp>
-      <p:sp>
-        <p:nvSpPr>
-          <p:cNvPr id="10" name="Rounded Rectangle 9"/>
-          <p:cNvSpPr/>
-          <p:nvPr/>
-        </p:nvSpPr>
-        <p:spPr>
-          <a:xfrm>
-            <a:off x="457200" y="2445105"/>
-            <a:ext cx="11277295" cy="908913"/>
-          </a:xfrm>
-          <a:prstGeom prst="roundRect">
-            <a:avLst>
-              <a:gd name="adj" fmla="val 12000"/>
-            </a:avLst>
-          </a:prstGeom>
-          <a:solidFill>
-            <a:srgbClr val="E8F4FA"/>
-          </a:solidFill>
-          <a:ln>
-            <a:noFill/>
-          </a:ln>
-        </p:spPr>
-        <p:style>
-          <a:lnRef idx="1">
-            <a:schemeClr val="accent1"/>
-          </a:lnRef>
-          <a:fillRef idx="3">
-            <a:schemeClr val="accent1"/>
-          </a:fillRef>
-          <a:effectRef idx="2">
-            <a:schemeClr val="accent1"/>
-          </a:effectRef>
-          <a:fontRef idx="minor">
-            <a:schemeClr val="lt1"/>
-          </a:fontRef>
-        </p:style>
-        <p:txBody>
-          <a:bodyPr rtlCol="0" anchor="ctr"/>
-          <a:lstStyle/>
-          <a:p>
-            <a:pPr algn="ctr"/>
-          </a:p>
-        </p:txBody>
-      </p:sp>
-      <p:sp>
-        <p:nvSpPr>
-          <p:cNvPr id="11" name="Rounded Rectangle 10"/>
-          <p:cNvSpPr/>
-          <p:nvPr/>
-        </p:nvSpPr>
-        <p:spPr>
-          <a:xfrm>
-            <a:off x="594360" y="2680106"/>
-            <a:ext cx="438912" cy="438912"/>
-          </a:xfrm>
-          <a:prstGeom prst="roundRect">
-            <a:avLst>
-              <a:gd name="adj" fmla="val 12000"/>
-            </a:avLst>
-          </a:prstGeom>
-          <a:solidFill>
-            <a:srgbClr val="095292"/>
-          </a:solidFill>
-          <a:ln>
-            <a:noFill/>
-          </a:ln>
-        </p:spPr>
-        <p:style>
-          <a:lnRef idx="1">
-            <a:schemeClr val="accent1"/>
-          </a:lnRef>
-          <a:fillRef idx="3">
-            <a:schemeClr val="accent1"/>
-          </a:fillRef>
-          <a:effectRef idx="2">
-            <a:schemeClr val="accent1"/>
-          </a:effectRef>
-          <a:fontRef idx="minor">
-            <a:schemeClr val="lt1"/>
-          </a:fontRef>
-        </p:style>
-        <p:txBody>
-          <a:bodyPr rtlCol="0" anchor="ctr"/>
-          <a:lstStyle/>
-          <a:p>
-            <a:pPr algn="ctr"/>
-          </a:p>
-        </p:txBody>
-      </p:sp>
-      <p:sp>
-        <p:nvSpPr>
-          <p:cNvPr id="12" name="TextBox 11"/>
-          <p:cNvSpPr txBox="1"/>
-          <p:nvPr/>
-        </p:nvSpPr>
-        <p:spPr>
-          <a:xfrm>
-            <a:off x="594360" y="2680106"/>
-            <a:ext cx="438912" cy="438912"/>
-          </a:xfrm>
-          <a:prstGeom prst="rect">
-            <a:avLst/>
-          </a:prstGeom>
-          <a:noFill/>
-        </p:spPr>
-        <p:txBody>
-          <a:bodyPr wrap="square" anchor="ctr"/>
-          <a:lstStyle/>
-          <a:p>
-            <a:pPr algn="ctr"/>
-            <a:r>
-              <a:rPr sz="1600" b="1" i="0">
-                <a:solidFill>
-                  <a:srgbClr val="FFFFFF"/>
-                </a:solidFill>
-                <a:latin typeface="Calibri"/>
-              </a:rPr>
-              <a:t>2</a:t>
-            </a:r>
-          </a:p>
-        </p:txBody>
-      </p:sp>
-      <p:sp>
-        <p:nvSpPr>
-          <p:cNvPr id="13" name="TextBox 12"/>
-          <p:cNvSpPr txBox="1"/>
-          <p:nvPr/>
-        </p:nvSpPr>
-        <p:spPr>
-          <a:xfrm>
-            <a:off x="1188720" y="2536545"/>
-            <a:ext cx="10271455" cy="744321"/>
-          </a:xfrm>
-          <a:prstGeom prst="rect">
-            <a:avLst/>
-          </a:prstGeom>
-          <a:noFill/>
-        </p:spPr>
-        <p:txBody>
-          <a:bodyPr wrap="square" anchor="ctr"/>
-          <a:lstStyle/>
-          <a:p>
-            <a:r>
-              <a:rPr sz="1500" b="1" i="0">
-                <a:solidFill>
-                  <a:srgbClr val="095292"/>
-                </a:solidFill>
-                <a:latin typeface="Calibri"/>
-              </a:rPr>
-              <a:t>2 min · Los tres hallazgos</a:t>
+              <a:rPr sz="2000" b="0" i="0">
+                <a:solidFill>
+                  <a:srgbClr val="333333"/>
+                </a:solidFill>
+                <a:latin typeface="Calibri"/>
+              </a:rPr>
+              <a:t>–   Un equipo que responde «ninguna, quedó perfecto» casi siempre no probó, o probó con la mamá de un integrante mientras le explicaba todo.</a:t>
             </a:r>
           </a:p>
           <a:p>
             <a:pPr>
-              <a:spcBef>
-                <a:spcPts val="200"/>
-              </a:spcBef>
+              <a:spcAft>
+                <a:spcPts val="800"/>
+              </a:spcAft>
             </a:pPr>
             <a:r>
-              <a:rPr sz="1300" b="0" i="0">
-                <a:solidFill>
-                  <a:srgbClr val="333333"/>
-                </a:solidFill>
-                <a:latin typeface="Calibri"/>
-              </a:rPr>
-              <a:t>Lo que la persona </a:t>
-            </a:r>
-            <a:r>
-              <a:rPr sz="1300" b="1" i="0">
-                <a:solidFill>
-                  <a:srgbClr val="333333"/>
-                </a:solidFill>
-                <a:latin typeface="Calibri"/>
-              </a:rPr>
-              <a:t>hizo</a:t>
-            </a:r>
-            <a:r>
-              <a:rPr sz="1300" b="0" i="0">
-                <a:solidFill>
-                  <a:srgbClr val="333333"/>
-                </a:solidFill>
-                <a:latin typeface="Calibri"/>
-              </a:rPr>
-              <a:t>. Es el corazón del avance.</a:t>
-            </a:r>
-          </a:p>
-        </p:txBody>
-      </p:sp>
-      <p:sp>
-        <p:nvSpPr>
-          <p:cNvPr id="14" name="Rounded Rectangle 13"/>
-          <p:cNvSpPr/>
-          <p:nvPr/>
-        </p:nvSpPr>
-        <p:spPr>
-          <a:xfrm>
-            <a:off x="457200" y="3445459"/>
-            <a:ext cx="11277295" cy="908913"/>
-          </a:xfrm>
-          <a:prstGeom prst="roundRect">
-            <a:avLst>
-              <a:gd name="adj" fmla="val 12000"/>
-            </a:avLst>
-          </a:prstGeom>
-          <a:solidFill>
-            <a:srgbClr val="F2F2F2"/>
-          </a:solidFill>
-          <a:ln>
-            <a:noFill/>
-          </a:ln>
-        </p:spPr>
-        <p:style>
-          <a:lnRef idx="1">
-            <a:schemeClr val="accent1"/>
-          </a:lnRef>
-          <a:fillRef idx="3">
-            <a:schemeClr val="accent1"/>
-          </a:fillRef>
-          <a:effectRef idx="2">
-            <a:schemeClr val="accent1"/>
-          </a:effectRef>
-          <a:fontRef idx="minor">
-            <a:schemeClr val="lt1"/>
-          </a:fontRef>
-        </p:style>
-        <p:txBody>
-          <a:bodyPr rtlCol="0" anchor="ctr"/>
-          <a:lstStyle/>
-          <a:p>
-            <a:pPr algn="ctr"/>
-          </a:p>
-        </p:txBody>
-      </p:sp>
-      <p:sp>
-        <p:nvSpPr>
-          <p:cNvPr id="15" name="Rounded Rectangle 14"/>
-          <p:cNvSpPr/>
-          <p:nvPr/>
-        </p:nvSpPr>
-        <p:spPr>
-          <a:xfrm>
-            <a:off x="594360" y="3680460"/>
-            <a:ext cx="438912" cy="438912"/>
-          </a:xfrm>
-          <a:prstGeom prst="roundRect">
-            <a:avLst>
-              <a:gd name="adj" fmla="val 12000"/>
-            </a:avLst>
-          </a:prstGeom>
-          <a:solidFill>
-            <a:srgbClr val="095292"/>
-          </a:solidFill>
-          <a:ln>
-            <a:noFill/>
-          </a:ln>
-        </p:spPr>
-        <p:style>
-          <a:lnRef idx="1">
-            <a:schemeClr val="accent1"/>
-          </a:lnRef>
-          <a:fillRef idx="3">
-            <a:schemeClr val="accent1"/>
-          </a:fillRef>
-          <a:effectRef idx="2">
-            <a:schemeClr val="accent1"/>
-          </a:effectRef>
-          <a:fontRef idx="minor">
-            <a:schemeClr val="lt1"/>
-          </a:fontRef>
-        </p:style>
-        <p:txBody>
-          <a:bodyPr rtlCol="0" anchor="ctr"/>
-          <a:lstStyle/>
-          <a:p>
-            <a:pPr algn="ctr"/>
-          </a:p>
-        </p:txBody>
-      </p:sp>
-      <p:sp>
-        <p:nvSpPr>
-          <p:cNvPr id="16" name="TextBox 15"/>
-          <p:cNvSpPr txBox="1"/>
-          <p:nvPr/>
-        </p:nvSpPr>
-        <p:spPr>
-          <a:xfrm>
-            <a:off x="594360" y="3680460"/>
-            <a:ext cx="438912" cy="438912"/>
-          </a:xfrm>
-          <a:prstGeom prst="rect">
-            <a:avLst/>
-          </a:prstGeom>
-          <a:noFill/>
-        </p:spPr>
-        <p:txBody>
-          <a:bodyPr wrap="square" anchor="ctr"/>
-          <a:lstStyle/>
-          <a:p>
-            <a:pPr algn="ctr"/>
-            <a:r>
-              <a:rPr sz="1600" b="1" i="0">
-                <a:solidFill>
-                  <a:srgbClr val="FFFFFF"/>
-                </a:solidFill>
-                <a:latin typeface="Calibri"/>
-              </a:rPr>
-              <a:t>3</a:t>
-            </a:r>
-          </a:p>
-        </p:txBody>
-      </p:sp>
-      <p:sp>
-        <p:nvSpPr>
-          <p:cNvPr id="17" name="TextBox 16"/>
-          <p:cNvSpPr txBox="1"/>
-          <p:nvPr/>
-        </p:nvSpPr>
-        <p:spPr>
-          <a:xfrm>
-            <a:off x="1188720" y="3536899"/>
-            <a:ext cx="10271455" cy="744321"/>
-          </a:xfrm>
-          <a:prstGeom prst="rect">
-            <a:avLst/>
-          </a:prstGeom>
-          <a:noFill/>
-        </p:spPr>
-        <p:txBody>
-          <a:bodyPr wrap="square" anchor="ctr"/>
-          <a:lstStyle/>
-          <a:p>
-            <a:r>
-              <a:rPr sz="1500" b="1" i="0">
-                <a:solidFill>
-                  <a:srgbClr val="095292"/>
-                </a:solidFill>
-                <a:latin typeface="Calibri"/>
-              </a:rPr>
-              <a:t>1 min · Qué arreglan y qué no</a:t>
+              <a:rPr sz="2000" b="0" i="0">
+                <a:solidFill>
+                  <a:srgbClr val="333333"/>
+                </a:solidFill>
+                <a:latin typeface="Calibri"/>
+              </a:rPr>
+              <a:t>–   Y aquí conviene ser directo, porque es la primera sesión del corte 3 y las reglas se fijan hoy: </a:t>
+            </a:r>
+            <a:r>
+              <a:rPr sz="2000" b="1" i="0">
+                <a:solidFill>
+                  <a:srgbClr val="333333"/>
+                </a:solidFill>
+                <a:latin typeface="Calibri"/>
+              </a:rPr>
+              <a:t>un equipo que no hizo la prueba no tiene avance que presentar.</a:t>
+            </a:r>
+            <a:r>
+              <a:rPr sz="2000" b="0" i="0">
+                <a:solidFill>
+                  <a:srgbClr val="333333"/>
+                </a:solidFill>
+                <a:latin typeface="Calibri"/>
+              </a:rPr>
+              <a:t> No se le puede improvisar retroalimentación a un avance inexistente.</a:t>
             </a:r>
           </a:p>
           <a:p>
             <a:pPr>
-              <a:spcBef>
-                <a:spcPts val="200"/>
-              </a:spcBef>
+              <a:spcAft>
+                <a:spcPts val="800"/>
+              </a:spcAft>
             </a:pPr>
             <a:r>
-              <a:rPr sz="1300" b="0" i="0">
-                <a:solidFill>
-                  <a:srgbClr val="333333"/>
-                </a:solidFill>
-                <a:latin typeface="Calibri"/>
-              </a:rPr>
-              <a:t>Y por qué lo que queda fuera queda fuera.</a:t>
-            </a:r>
-          </a:p>
-        </p:txBody>
-      </p:sp>
-      <p:sp>
-        <p:nvSpPr>
-          <p:cNvPr id="18" name="Rounded Rectangle 17"/>
-          <p:cNvSpPr/>
-          <p:nvPr/>
-        </p:nvSpPr>
-        <p:spPr>
-          <a:xfrm>
-            <a:off x="457200" y="4445812"/>
-            <a:ext cx="11277295" cy="908913"/>
-          </a:xfrm>
-          <a:prstGeom prst="roundRect">
-            <a:avLst>
-              <a:gd name="adj" fmla="val 12000"/>
-            </a:avLst>
-          </a:prstGeom>
-          <a:solidFill>
-            <a:srgbClr val="E8F4FA"/>
-          </a:solidFill>
-          <a:ln>
-            <a:noFill/>
-          </a:ln>
-        </p:spPr>
-        <p:style>
-          <a:lnRef idx="1">
-            <a:schemeClr val="accent1"/>
-          </a:lnRef>
-          <a:fillRef idx="3">
-            <a:schemeClr val="accent1"/>
-          </a:fillRef>
-          <a:effectRef idx="2">
-            <a:schemeClr val="accent1"/>
-          </a:effectRef>
-          <a:fontRef idx="minor">
-            <a:schemeClr val="lt1"/>
-          </a:fontRef>
-        </p:style>
-        <p:txBody>
-          <a:bodyPr rtlCol="0" anchor="ctr"/>
-          <a:lstStyle/>
-          <a:p>
-            <a:pPr algn="ctr"/>
-          </a:p>
-        </p:txBody>
-      </p:sp>
-      <p:sp>
-        <p:nvSpPr>
-          <p:cNvPr id="19" name="Rounded Rectangle 18"/>
-          <p:cNvSpPr/>
-          <p:nvPr/>
-        </p:nvSpPr>
-        <p:spPr>
-          <a:xfrm>
-            <a:off x="594360" y="4680813"/>
-            <a:ext cx="438912" cy="438912"/>
-          </a:xfrm>
-          <a:prstGeom prst="roundRect">
-            <a:avLst>
-              <a:gd name="adj" fmla="val 12000"/>
-            </a:avLst>
-          </a:prstGeom>
-          <a:solidFill>
-            <a:srgbClr val="095292"/>
-          </a:solidFill>
-          <a:ln>
-            <a:noFill/>
-          </a:ln>
-        </p:spPr>
-        <p:style>
-          <a:lnRef idx="1">
-            <a:schemeClr val="accent1"/>
-          </a:lnRef>
-          <a:fillRef idx="3">
-            <a:schemeClr val="accent1"/>
-          </a:fillRef>
-          <a:effectRef idx="2">
-            <a:schemeClr val="accent1"/>
-          </a:effectRef>
-          <a:fontRef idx="minor">
-            <a:schemeClr val="lt1"/>
-          </a:fontRef>
-        </p:style>
-        <p:txBody>
-          <a:bodyPr rtlCol="0" anchor="ctr"/>
-          <a:lstStyle/>
-          <a:p>
-            <a:pPr algn="ctr"/>
-          </a:p>
-        </p:txBody>
-      </p:sp>
-      <p:sp>
-        <p:nvSpPr>
-          <p:cNvPr id="20" name="TextBox 19"/>
-          <p:cNvSpPr txBox="1"/>
-          <p:nvPr/>
-        </p:nvSpPr>
-        <p:spPr>
-          <a:xfrm>
-            <a:off x="594360" y="4680813"/>
-            <a:ext cx="438912" cy="438912"/>
-          </a:xfrm>
-          <a:prstGeom prst="rect">
-            <a:avLst/>
-          </a:prstGeom>
-          <a:noFill/>
-        </p:spPr>
-        <p:txBody>
-          <a:bodyPr wrap="square" anchor="ctr"/>
-          <a:lstStyle/>
-          <a:p>
-            <a:pPr algn="ctr"/>
-            <a:r>
-              <a:rPr sz="1600" b="1" i="0">
-                <a:solidFill>
-                  <a:srgbClr val="FFFFFF"/>
-                </a:solidFill>
-                <a:latin typeface="Calibri"/>
-              </a:rPr>
-              <a:t>4</a:t>
-            </a:r>
-          </a:p>
-        </p:txBody>
-      </p:sp>
-      <p:sp>
-        <p:nvSpPr>
-          <p:cNvPr id="21" name="TextBox 20"/>
-          <p:cNvSpPr txBox="1"/>
-          <p:nvPr/>
-        </p:nvSpPr>
-        <p:spPr>
-          <a:xfrm>
-            <a:off x="1188720" y="4537252"/>
-            <a:ext cx="10271455" cy="744321"/>
-          </a:xfrm>
-          <a:prstGeom prst="rect">
-            <a:avLst/>
-          </a:prstGeom>
-          <a:noFill/>
-        </p:spPr>
-        <p:txBody>
-          <a:bodyPr wrap="square" anchor="ctr"/>
-          <a:lstStyle/>
-          <a:p>
-            <a:r>
-              <a:rPr sz="1500" b="1" i="0">
-                <a:solidFill>
-                  <a:srgbClr val="095292"/>
-                </a:solidFill>
-                <a:latin typeface="Calibri"/>
-              </a:rPr>
-              <a:t>1 min · La pregunta para el curso</a:t>
-            </a:r>
-          </a:p>
-          <a:p>
-            <a:pPr>
-              <a:spcBef>
-                <a:spcPts val="200"/>
-              </a:spcBef>
-            </a:pPr>
-            <a:r>
-              <a:rPr sz="1300" b="0" i="0">
-                <a:solidFill>
-                  <a:srgbClr val="333333"/>
-                </a:solidFill>
-                <a:latin typeface="Calibri"/>
-              </a:rPr>
-              <a:t>Con las dos alternativas que están considerando.</a:t>
-            </a:r>
-          </a:p>
-        </p:txBody>
-      </p:sp>
-      <p:sp>
-        <p:nvSpPr>
-          <p:cNvPr id="22" name="Rounded Rectangle 21"/>
-          <p:cNvSpPr/>
-          <p:nvPr/>
-        </p:nvSpPr>
-        <p:spPr>
-          <a:xfrm>
-            <a:off x="457200" y="5446166"/>
-            <a:ext cx="11277295" cy="908913"/>
-          </a:xfrm>
-          <a:prstGeom prst="roundRect">
-            <a:avLst>
-              <a:gd name="adj" fmla="val 12000"/>
-            </a:avLst>
-          </a:prstGeom>
-          <a:solidFill>
-            <a:srgbClr val="F2F2F2"/>
-          </a:solidFill>
-          <a:ln>
-            <a:noFill/>
-          </a:ln>
-        </p:spPr>
-        <p:style>
-          <a:lnRef idx="1">
-            <a:schemeClr val="accent1"/>
-          </a:lnRef>
-          <a:fillRef idx="3">
-            <a:schemeClr val="accent1"/>
-          </a:fillRef>
-          <a:effectRef idx="2">
-            <a:schemeClr val="accent1"/>
-          </a:effectRef>
-          <a:fontRef idx="minor">
-            <a:schemeClr val="lt1"/>
-          </a:fontRef>
-        </p:style>
-        <p:txBody>
-          <a:bodyPr rtlCol="0" anchor="ctr"/>
-          <a:lstStyle/>
-          <a:p>
-            <a:pPr algn="ctr"/>
-          </a:p>
-        </p:txBody>
-      </p:sp>
-      <p:sp>
-        <p:nvSpPr>
-          <p:cNvPr id="23" name="Rounded Rectangle 22"/>
-          <p:cNvSpPr/>
-          <p:nvPr/>
-        </p:nvSpPr>
-        <p:spPr>
-          <a:xfrm>
-            <a:off x="594360" y="5681167"/>
-            <a:ext cx="438912" cy="438912"/>
-          </a:xfrm>
-          <a:prstGeom prst="roundRect">
-            <a:avLst>
-              <a:gd name="adj" fmla="val 12000"/>
-            </a:avLst>
-          </a:prstGeom>
-          <a:solidFill>
-            <a:srgbClr val="095292"/>
-          </a:solidFill>
-          <a:ln>
-            <a:noFill/>
-          </a:ln>
-        </p:spPr>
-        <p:style>
-          <a:lnRef idx="1">
-            <a:schemeClr val="accent1"/>
-          </a:lnRef>
-          <a:fillRef idx="3">
-            <a:schemeClr val="accent1"/>
-          </a:fillRef>
-          <a:effectRef idx="2">
-            <a:schemeClr val="accent1"/>
-          </a:effectRef>
-          <a:fontRef idx="minor">
-            <a:schemeClr val="lt1"/>
-          </a:fontRef>
-        </p:style>
-        <p:txBody>
-          <a:bodyPr rtlCol="0" anchor="ctr"/>
-          <a:lstStyle/>
-          <a:p>
-            <a:pPr algn="ctr"/>
-          </a:p>
-        </p:txBody>
-      </p:sp>
-      <p:sp>
-        <p:nvSpPr>
-          <p:cNvPr id="24" name="TextBox 23"/>
-          <p:cNvSpPr txBox="1"/>
-          <p:nvPr/>
-        </p:nvSpPr>
-        <p:spPr>
-          <a:xfrm>
-            <a:off x="594360" y="5681167"/>
-            <a:ext cx="438912" cy="438912"/>
-          </a:xfrm>
-          <a:prstGeom prst="rect">
-            <a:avLst/>
-          </a:prstGeom>
-          <a:noFill/>
-        </p:spPr>
-        <p:txBody>
-          <a:bodyPr wrap="square" anchor="ctr"/>
-          <a:lstStyle/>
-          <a:p>
-            <a:pPr algn="ctr"/>
-            <a:r>
-              <a:rPr sz="1600" b="1" i="0">
-                <a:solidFill>
-                  <a:srgbClr val="FFFFFF"/>
-                </a:solidFill>
-                <a:latin typeface="Calibri"/>
-              </a:rPr>
-              <a:t>5</a:t>
-            </a:r>
-          </a:p>
-        </p:txBody>
-      </p:sp>
-      <p:sp>
-        <p:nvSpPr>
-          <p:cNvPr id="25" name="TextBox 24"/>
-          <p:cNvSpPr txBox="1"/>
-          <p:nvPr/>
-        </p:nvSpPr>
-        <p:spPr>
-          <a:xfrm>
-            <a:off x="1188720" y="5537606"/>
-            <a:ext cx="10271455" cy="744321"/>
-          </a:xfrm>
-          <a:prstGeom prst="rect">
-            <a:avLst/>
-          </a:prstGeom>
-          <a:noFill/>
-        </p:spPr>
-        <p:txBody>
-          <a:bodyPr wrap="square" anchor="ctr"/>
-          <a:lstStyle/>
-          <a:p>
-            <a:r>
-              <a:rPr sz="1500" b="1" i="0">
-                <a:solidFill>
-                  <a:srgbClr val="095292"/>
-                </a:solidFill>
-                <a:latin typeface="Calibri"/>
-              </a:rPr>
-              <a:t>30 s · Cierre</a:t>
-            </a:r>
-          </a:p>
-          <a:p>
-            <a:pPr>
-              <a:spcBef>
-                <a:spcPts val="200"/>
-              </a:spcBef>
-            </a:pPr>
-            <a:r>
-              <a:rPr sz="1300" b="0" i="0">
-                <a:solidFill>
-                  <a:srgbClr val="333333"/>
-                </a:solidFill>
-                <a:latin typeface="Calibri"/>
-              </a:rPr>
-              <a:t>Qué van a tener listo para la Clase 14.</a:t>
-            </a:r>
-          </a:p>
-        </p:txBody>
-      </p:sp>
-      <p:sp>
-        <p:nvSpPr>
-          <p:cNvPr id="26" name="TextBox 25"/>
+              <a:rPr sz="2000" b="0" i="0">
+                <a:solidFill>
+                  <a:srgbClr val="333333"/>
+                </a:solidFill>
+                <a:latin typeface="Calibri"/>
+              </a:rPr>
+              <a:t>–   Si ocurre, dígalo, deje que expongan lo que tengan y que hagan la prueba antes de la Clase 13 — pero que quede claro que arrancaron el corte con desventaja.</a:t>
+            </a:r>
+          </a:p>
+        </p:txBody>
+      </p:sp>
+      <p:sp>
+        <p:nvSpPr>
+          <p:cNvPr id="6" name="TextBox 5"/>
           <p:cNvSpPr txBox="1"/>
           <p:nvPr/>
         </p:nvSpPr>
@@ -5881,7 +4215,7 @@
                 </a:solidFill>
                 <a:latin typeface="Calibri"/>
               </a:rPr>
-              <a:t>Para la Clase 13</a:t>
+              <a:t>Lo que hizo vale más que lo que dijo, y el patrón vale más que el caso (1/3)</a:t>
             </a:r>
           </a:p>
         </p:txBody>
@@ -5929,7 +4263,7 @@
                 </a:solidFill>
                 <a:latin typeface="Calibri"/>
               </a:rPr>
-              <a:t>Trabajo dirigido:</a:t>
+              <a:t>Paso 1: separar lo que hizo de lo que dijo.</a:t>
             </a:r>
             <a:r>
               <a:rPr sz="2000" b="0" i="0">
@@ -5938,7 +4272,7 @@
                 </a:solidFill>
                 <a:latin typeface="Calibri"/>
               </a:rPr>
-              <a:t> Retroalimentación y ajustes — aplicar al prototipo los ajustes comprometidos en el muro, y dejar en el documento del equipo la ficha de avance completa con la lista de lo que no se arregla.</a:t>
+              <a:t> Esta es la idea central y hay que insistir en ella.</a:t>
             </a:r>
           </a:p>
           <a:p>
@@ -5954,61 +4288,7 @@
                 </a:solidFill>
                 <a:latin typeface="Calibri"/>
               </a:rPr>
-              <a:t>–   </a:t>
-            </a:r>
-            <a:r>
-              <a:rPr sz="2000" b="1" i="0">
-                <a:solidFill>
-                  <a:srgbClr val="333333"/>
-                </a:solidFill>
-                <a:latin typeface="Calibri"/>
-              </a:rPr>
-              <a:t>Trabajo independiente:</a:t>
-            </a:r>
-            <a:r>
-              <a:rPr sz="2000" b="0" i="0">
-                <a:solidFill>
-                  <a:srgbClr val="333333"/>
-                </a:solidFill>
-                <a:latin typeface="Calibri"/>
-              </a:rPr>
-              <a:t> Revisión entre pares: leer el documento de </a:t>
-            </a:r>
-            <a:r>
-              <a:rPr sz="2000" b="1" i="0">
-                <a:solidFill>
-                  <a:srgbClr val="333333"/>
-                </a:solidFill>
-                <a:latin typeface="Calibri"/>
-              </a:rPr>
-              <a:t>otro equipo</a:t>
-            </a:r>
-            <a:r>
-              <a:rPr sz="2000" b="0" i="0">
-                <a:solidFill>
-                  <a:srgbClr val="333333"/>
-                </a:solidFill>
-                <a:latin typeface="Calibri"/>
-              </a:rPr>
-              <a:t> (el docente asigna la pareja) y dejarle </a:t>
-            </a:r>
-            <a:r>
-              <a:rPr sz="2000" b="1" i="0">
-                <a:solidFill>
-                  <a:srgbClr val="333333"/>
-                </a:solidFill>
-                <a:latin typeface="Calibri"/>
-              </a:rPr>
-              <a:t>dos observaciones escritas</a:t>
-            </a:r>
-            <a:r>
-              <a:rPr sz="2000" b="0" i="0">
-                <a:solidFill>
-                  <a:srgbClr val="333333"/>
-                </a:solidFill>
-                <a:latin typeface="Calibri"/>
-              </a:rPr>
-              <a:t> con el formato de hoy — observación y expectativa, una sola cosa importante cada una.</a:t>
+              <a:t>–   Cuando alguien prueba el trabajo de un amigo, es amable: dice que estaba claro, que le gustó, que es intuitivo.</a:t>
             </a:r>
           </a:p>
           <a:p>
@@ -6024,43 +4304,7 @@
                 </a:solidFill>
                 <a:latin typeface="Calibri"/>
               </a:rPr>
-              <a:t>–   </a:t>
-            </a:r>
-            <a:r>
-              <a:rPr sz="2000" b="1" i="0">
-                <a:solidFill>
-                  <a:srgbClr val="333333"/>
-                </a:solidFill>
-                <a:latin typeface="Calibri"/>
-              </a:rPr>
-              <a:t>Clase 13 · Evaluación de impacto social y ambiental</a:t>
-            </a:r>
-            <a:r>
-              <a:rPr sz="2000" b="0" i="0">
-                <a:solidFill>
-                  <a:srgbClr val="333333"/>
-                </a:solidFill>
-                <a:latin typeface="Calibri"/>
-              </a:rPr>
-              <a:t> — vemos el </a:t>
-            </a:r>
-            <a:r>
-              <a:rPr sz="2000" b="1" i="0">
-                <a:solidFill>
-                  <a:srgbClr val="333333"/>
-                </a:solidFill>
-                <a:latin typeface="Calibri"/>
-              </a:rPr>
-              <a:t>impacto social y ambiental</a:t>
-            </a:r>
-            <a:r>
-              <a:rPr sz="2000" b="0" i="0">
-                <a:solidFill>
-                  <a:srgbClr val="333333"/>
-                </a:solidFill>
-                <a:latin typeface="Calibri"/>
-              </a:rPr>
-              <a:t> del proyecto: a quién más afecta esto aunque no lo use, y cómo se mide.</a:t>
+              <a:t>–   Y sin embargo dudó cinco segundos frente a un botón, se equivocó de pantalla y preguntó qué significaba una palabra. **Lo que hizo es el dato</a:t>
             </a:r>
           </a:p>
           <a:p>
@@ -6076,61 +4320,7 @@
                 </a:solidFill>
                 <a:latin typeface="Calibri"/>
               </a:rPr>
-              <a:t>–   </a:t>
-            </a:r>
-            <a:r>
-              <a:rPr sz="2000" b="1" i="0">
-                <a:solidFill>
-                  <a:srgbClr val="333333"/>
-                </a:solidFill>
-                <a:latin typeface="Calibri"/>
-              </a:rPr>
-              <a:t>Aviso:</a:t>
-            </a:r>
-            <a:r>
-              <a:rPr sz="2000" b="0" i="0">
-                <a:solidFill>
-                  <a:srgbClr val="333333"/>
-                </a:solidFill>
-                <a:latin typeface="Calibri"/>
-              </a:rPr>
-              <a:t> Traigan a la Clase 13 el </a:t>
-            </a:r>
-            <a:r>
-              <a:rPr sz="2000" b="1" i="0">
-                <a:solidFill>
-                  <a:srgbClr val="333333"/>
-                </a:solidFill>
-                <a:latin typeface="Calibri"/>
-              </a:rPr>
-              <a:t>listado de actores no usuarios de la Clase 3</a:t>
-            </a:r>
-            <a:r>
-              <a:rPr sz="2000" b="0" i="0">
-                <a:solidFill>
-                  <a:srgbClr val="333333"/>
-                </a:solidFill>
-                <a:latin typeface="Calibri"/>
-              </a:rPr>
-              <a:t> y el </a:t>
-            </a:r>
-            <a:r>
-              <a:rPr sz="2000" b="1" i="0">
-                <a:solidFill>
-                  <a:srgbClr val="333333"/>
-                </a:solidFill>
-                <a:latin typeface="Calibri"/>
-              </a:rPr>
-              <a:t>indicador ambiental de la sesión 5</a:t>
-            </a:r>
-            <a:r>
-              <a:rPr sz="2000" b="0" i="0">
-                <a:solidFill>
-                  <a:srgbClr val="333333"/>
-                </a:solidFill>
-                <a:latin typeface="Calibri"/>
-              </a:rPr>
-              <a:t>: los dos se usan directamente en el taller. Si los perdieron, recupérenlos del documento del equipo antes de la sesión.</a:t>
+              <a:t>–   Lo que dijo es cortesía.** No es que la persona mienta: es que nadie quiere hacer sentir mal a quien le muestra algo con orgullo.</a:t>
             </a:r>
           </a:p>
           <a:p>
@@ -6146,7 +4336,7 @@
                 </a:solidFill>
                 <a:latin typeface="Calibri"/>
               </a:rPr>
-              <a:t>–   </a:t>
+              <a:t>–   Por eso en la industria se observa y se cronometra, en vez de preguntar «¿le gustó?» — exactamente la trampa que vieron en la sesión 8. </a:t>
             </a:r>
             <a:r>
               <a:rPr sz="2000" b="1" i="0">
@@ -6155,7 +4345,7 @@
                 </a:solidFill>
                 <a:latin typeface="Calibri"/>
               </a:rPr>
-              <a:t>Antes de salir:</a:t>
+              <a:t>Paso 2: escribir el tropiezo, no la solución.</a:t>
             </a:r>
             <a:r>
               <a:rPr sz="2000" b="0" i="0">
@@ -6164,7 +4354,39 @@
                 </a:solidFill>
                 <a:latin typeface="Calibri"/>
               </a:rPr>
-              <a:t> el enlace del documento del equipo en el chat, con permiso de lectura para el docente, y el nombre del vocero de hoy.</a:t>
+              <a:t> Los estudiantes van a saltar directo a arreglar.</a:t>
+            </a:r>
+          </a:p>
+          <a:p>
+            <a:pPr>
+              <a:spcAft>
+                <a:spcPts val="800"/>
+              </a:spcAft>
+            </a:pPr>
+            <a:r>
+              <a:rPr sz="2000" b="0" i="0">
+                <a:solidFill>
+                  <a:srgbClr val="333333"/>
+                </a:solidFill>
+                <a:latin typeface="Calibri"/>
+              </a:rPr>
+              <a:t>–   Hay que frenarlos: «buscó el botón de volver arriba» es un hecho</a:t>
+            </a:r>
+          </a:p>
+          <a:p>
+            <a:pPr>
+              <a:spcAft>
+                <a:spcPts val="800"/>
+              </a:spcAft>
+            </a:pPr>
+            <a:r>
+              <a:rPr sz="2000" b="0" i="0">
+                <a:solidFill>
+                  <a:srgbClr val="333333"/>
+                </a:solidFill>
+                <a:latin typeface="Calibri"/>
+              </a:rPr>
+              <a:t>–   «hay que poner un botón arriba» es una conclusión que quizá no sea la mejor.</a:t>
             </a:r>
           </a:p>
         </p:txBody>
@@ -6239,7 +4461,2495 @@
         <p:spPr>
           <a:xfrm>
             <a:off x="0" y="0"/>
-            <a:ext cx="12191695" cy="164592"/>
+            <a:ext cx="12191695" cy="960120"/>
+          </a:xfrm>
+          <a:prstGeom prst="rect">
+            <a:avLst/>
+          </a:prstGeom>
+          <a:solidFill>
+            <a:srgbClr val="095292"/>
+          </a:solidFill>
+          <a:ln>
+            <a:noFill/>
+          </a:ln>
+        </p:spPr>
+        <p:style>
+          <a:lnRef idx="1">
+            <a:schemeClr val="accent1"/>
+          </a:lnRef>
+          <a:fillRef idx="3">
+            <a:schemeClr val="accent1"/>
+          </a:fillRef>
+          <a:effectRef idx="2">
+            <a:schemeClr val="accent1"/>
+          </a:effectRef>
+          <a:fontRef idx="minor">
+            <a:schemeClr val="lt1"/>
+          </a:fontRef>
+        </p:style>
+        <p:txBody>
+          <a:bodyPr rtlCol="0" anchor="ctr"/>
+          <a:lstStyle/>
+          <a:p>
+            <a:pPr algn="ctr"/>
+          </a:p>
+        </p:txBody>
+      </p:sp>
+      <p:sp>
+        <p:nvSpPr>
+          <p:cNvPr id="3" name="Rectangle 2"/>
+          <p:cNvSpPr/>
+          <p:nvPr/>
+        </p:nvSpPr>
+        <p:spPr>
+          <a:xfrm>
+            <a:off x="0" y="960120"/>
+            <a:ext cx="12191695" cy="41148"/>
+          </a:xfrm>
+          <a:prstGeom prst="rect">
+            <a:avLst/>
+          </a:prstGeom>
+          <a:solidFill>
+            <a:srgbClr val="FFD000"/>
+          </a:solidFill>
+          <a:ln>
+            <a:noFill/>
+          </a:ln>
+        </p:spPr>
+        <p:style>
+          <a:lnRef idx="1">
+            <a:schemeClr val="accent1"/>
+          </a:lnRef>
+          <a:fillRef idx="3">
+            <a:schemeClr val="accent1"/>
+          </a:fillRef>
+          <a:effectRef idx="2">
+            <a:schemeClr val="accent1"/>
+          </a:effectRef>
+          <a:fontRef idx="minor">
+            <a:schemeClr val="lt1"/>
+          </a:fontRef>
+        </p:style>
+        <p:txBody>
+          <a:bodyPr rtlCol="0" anchor="ctr"/>
+          <a:lstStyle/>
+          <a:p>
+            <a:pPr algn="ctr"/>
+          </a:p>
+        </p:txBody>
+      </p:sp>
+      <p:sp>
+        <p:nvSpPr>
+          <p:cNvPr id="4" name="TextBox 3"/>
+          <p:cNvSpPr txBox="1"/>
+          <p:nvPr/>
+        </p:nvSpPr>
+        <p:spPr>
+          <a:xfrm>
+            <a:off x="457200" y="164592"/>
+            <a:ext cx="11277295" cy="502920"/>
+          </a:xfrm>
+          <a:prstGeom prst="rect">
+            <a:avLst/>
+          </a:prstGeom>
+          <a:noFill/>
+        </p:spPr>
+        <p:txBody>
+          <a:bodyPr wrap="square">
+            <a:spAutoFit/>
+          </a:bodyPr>
+          <a:lstStyle/>
+          <a:p>
+            <a:r>
+              <a:rPr sz="2600" b="1" i="0">
+                <a:solidFill>
+                  <a:srgbClr val="FFFFFF"/>
+                </a:solidFill>
+                <a:latin typeface="Calibri"/>
+              </a:rPr>
+              <a:t>Lo que hizo vale más que lo que dijo, y el patrón vale más que el caso (2/3)</a:t>
+            </a:r>
+          </a:p>
+        </p:txBody>
+      </p:sp>
+      <p:sp>
+        <p:nvSpPr>
+          <p:cNvPr id="5" name="TextBox 4"/>
+          <p:cNvSpPr txBox="1"/>
+          <p:nvPr/>
+        </p:nvSpPr>
+        <p:spPr>
+          <a:xfrm>
+            <a:off x="457200" y="1170432"/>
+            <a:ext cx="11277295" cy="5230368"/>
+          </a:xfrm>
+          <a:prstGeom prst="rect">
+            <a:avLst/>
+          </a:prstGeom>
+          <a:noFill/>
+        </p:spPr>
+        <p:txBody>
+          <a:bodyPr wrap="square">
+            <a:spAutoFit/>
+          </a:bodyPr>
+          <a:lstStyle/>
+          <a:p>
+            <a:pPr>
+              <a:spcAft>
+                <a:spcPts val="800"/>
+              </a:spcAft>
+            </a:pPr>
+            <a:r>
+              <a:rPr sz="2000" b="0" i="0">
+                <a:solidFill>
+                  <a:srgbClr val="333333"/>
+                </a:solidFill>
+                <a:latin typeface="Calibri"/>
+              </a:rPr>
+              <a:t>–   Si se anota la conclusión y se pierde el hecho, ya no se puede pensar de nuevo. </a:t>
+            </a:r>
+            <a:r>
+              <a:rPr sz="2000" b="1" i="0">
+                <a:solidFill>
+                  <a:srgbClr val="333333"/>
+                </a:solidFill>
+                <a:latin typeface="Calibri"/>
+              </a:rPr>
+              <a:t>Pasos 3 y 4: clasificar y buscar el patrón.</a:t>
+            </a:r>
+            <a:r>
+              <a:rPr sz="2000" b="0" i="0">
+                <a:solidFill>
+                  <a:srgbClr val="333333"/>
+                </a:solidFill>
+                <a:latin typeface="Calibri"/>
+              </a:rPr>
+              <a:t> La tabla de los cuatro tipos es la herramienta de la sesión</a:t>
+            </a:r>
+          </a:p>
+          <a:p>
+            <a:pPr>
+              <a:spcAft>
+                <a:spcPts val="800"/>
+              </a:spcAft>
+            </a:pPr>
+            <a:r>
+              <a:rPr sz="2000" b="0" i="0">
+                <a:solidFill>
+                  <a:srgbClr val="333333"/>
+                </a:solidFill>
+                <a:latin typeface="Calibri"/>
+              </a:rPr>
+              <a:t>–   Y su valor es que </a:t>
+            </a:r>
+            <a:r>
+              <a:rPr sz="2000" b="1" i="0">
+                <a:solidFill>
+                  <a:srgbClr val="333333"/>
+                </a:solidFill>
+                <a:latin typeface="Calibri"/>
+              </a:rPr>
+              <a:t>cada tipo se arregla con un trabajo distinto y a un costo distinto</a:t>
+            </a:r>
+            <a:r>
+              <a:rPr sz="2000" b="0" i="0">
+                <a:solidFill>
+                  <a:srgbClr val="333333"/>
+                </a:solidFill>
+                <a:latin typeface="Calibri"/>
+              </a:rPr>
+              <a:t>.</a:t>
+            </a:r>
+          </a:p>
+          <a:p>
+            <a:pPr>
+              <a:spcAft>
+                <a:spcPts val="800"/>
+              </a:spcAft>
+            </a:pPr>
+            <a:r>
+              <a:rPr sz="2000" b="0" i="0">
+                <a:solidFill>
+                  <a:srgbClr val="333333"/>
+                </a:solidFill>
+                <a:latin typeface="Calibri"/>
+              </a:rPr>
+              <a:t>–   Un hallazgo de lenguaje se arregla cambiando una palabra: es el arreglo más barato que existe y el que más rinde, lo cual conecta con el bloque de textos reales de la sesión 10.</a:t>
+            </a:r>
+          </a:p>
+          <a:p>
+            <a:pPr>
+              <a:spcAft>
+                <a:spcPts val="800"/>
+              </a:spcAft>
+            </a:pPr>
+            <a:r>
+              <a:rPr sz="2000" b="0" i="0">
+                <a:solidFill>
+                  <a:srgbClr val="333333"/>
+                </a:solidFill>
+                <a:latin typeface="Calibri"/>
+              </a:rPr>
+              <a:t>–   Uno de flujo exige reordenar pantallas.</a:t>
+            </a:r>
+          </a:p>
+          <a:p>
+            <a:pPr>
+              <a:spcAft>
+                <a:spcPts val="800"/>
+              </a:spcAft>
+            </a:pPr>
+            <a:r>
+              <a:rPr sz="2000" b="0" i="0">
+                <a:solidFill>
+                  <a:srgbClr val="333333"/>
+                </a:solidFill>
+                <a:latin typeface="Calibri"/>
+              </a:rPr>
+              <a:t>–   Uno de expectativa muchas veces </a:t>
+            </a:r>
+            <a:r>
+              <a:rPr sz="2000" b="1" i="0">
+                <a:solidFill>
+                  <a:srgbClr val="333333"/>
+                </a:solidFill>
+                <a:latin typeface="Calibri"/>
+              </a:rPr>
+              <a:t>no se arregla</a:t>
+            </a:r>
+            <a:r>
+              <a:rPr sz="2000" b="0" i="0">
+                <a:solidFill>
+                  <a:srgbClr val="333333"/>
+                </a:solidFill>
+                <a:latin typeface="Calibri"/>
+              </a:rPr>
+              <a:t>, porque está fuera del alcance de la sesión 8, pero obliga a que el prototipo lo diga en vez de callarlo.</a:t>
+            </a:r>
+          </a:p>
+          <a:p>
+            <a:pPr>
+              <a:spcAft>
+                <a:spcPts val="800"/>
+              </a:spcAft>
+            </a:pPr>
+            <a:r>
+              <a:rPr sz="2000" b="0" i="0">
+                <a:solidFill>
+                  <a:srgbClr val="333333"/>
+                </a:solidFill>
+                <a:latin typeface="Calibri"/>
+              </a:rPr>
+              <a:t>–   Y uno de suposición nuestra es el más caro y el más valioso: descubrir que dábamos por obvio que el usuario tiene datos móviles, o que sabe leer una tabla, cambia una restricción del proyecto.</a:t>
+            </a:r>
+          </a:p>
+          <a:p>
+            <a:pPr>
+              <a:spcAft>
+                <a:spcPts val="800"/>
+              </a:spcAft>
+            </a:pPr>
+            <a:r>
+              <a:rPr sz="2000" b="0" i="0">
+                <a:solidFill>
+                  <a:srgbClr val="333333"/>
+                </a:solidFill>
+                <a:latin typeface="Calibri"/>
+              </a:rPr>
+              <a:t>–   Sobre el patrón, dé el criterio operativo sin pretensiones de rigor estadístico: </a:t>
+            </a:r>
+            <a:r>
+              <a:rPr sz="2000" b="1" i="0">
+                <a:solidFill>
+                  <a:srgbClr val="333333"/>
+                </a:solidFill>
+                <a:latin typeface="Calibri"/>
+              </a:rPr>
+              <a:t>un tropiezo en una persona puede ser casualidad; el mismo tropiezo en dos de tres personas es un defecto de diseño.</a:t>
+            </a:r>
+            <a:r>
+              <a:rPr sz="2000" b="0" i="0">
+                <a:solidFill>
+                  <a:srgbClr val="333333"/>
+                </a:solidFill>
+                <a:latin typeface="Calibri"/>
+              </a:rPr>
+              <a:t> Con tres o cinco pruebas no se hace estadística</a:t>
+            </a:r>
+          </a:p>
+        </p:txBody>
+      </p:sp>
+      <p:sp>
+        <p:nvSpPr>
+          <p:cNvPr id="6" name="TextBox 5"/>
+          <p:cNvSpPr txBox="1"/>
+          <p:nvPr/>
+        </p:nvSpPr>
+        <p:spPr>
+          <a:xfrm>
+            <a:off x="11185855" y="6473952"/>
+            <a:ext cx="640080" cy="274320"/>
+          </a:xfrm>
+          <a:prstGeom prst="rect">
+            <a:avLst/>
+          </a:prstGeom>
+          <a:noFill/>
+        </p:spPr>
+        <p:txBody>
+          <a:bodyPr wrap="square">
+            <a:spAutoFit/>
+          </a:bodyPr>
+          <a:lstStyle/>
+          <a:p>
+            <a:pPr algn="r"/>
+            <a:r>
+              <a:rPr sz="1100" b="0" i="0">
+                <a:solidFill>
+                  <a:srgbClr val="666666"/>
+                </a:solidFill>
+                <a:latin typeface="Calibri"/>
+              </a:rPr>
+              <a:t>13</a:t>
+            </a:r>
+          </a:p>
+        </p:txBody>
+      </p:sp>
+    </p:spTree>
+  </p:cSld>
+  <p:clrMapOvr>
+    <a:masterClrMapping/>
+  </p:clrMapOvr>
+</p:sld>
+</file>
+
+<file path=ppt/slides/slide14.xml><?xml version="1.0" encoding="utf-8"?>
+<p:sld xmlns:a="http://schemas.openxmlformats.org/drawingml/2006/main" xmlns:p="http://schemas.openxmlformats.org/presentationml/2006/main" xmlns:r="http://schemas.openxmlformats.org/officeDocument/2006/relationships">
+  <p:cSld>
+    <p:bg>
+      <p:bgPr>
+        <a:solidFill>
+          <a:srgbClr val="FFFFFF"/>
+        </a:solidFill>
+        <a:effectLst/>
+      </p:bgPr>
+    </p:bg>
+    <p:spTree>
+      <p:nvGrpSpPr>
+        <p:cNvPr id="1" name=""/>
+        <p:cNvGrpSpPr/>
+        <p:nvPr/>
+      </p:nvGrpSpPr>
+      <p:grpSpPr/>
+      <p:sp>
+        <p:nvSpPr>
+          <p:cNvPr id="2" name="Rectangle 1"/>
+          <p:cNvSpPr/>
+          <p:nvPr/>
+        </p:nvSpPr>
+        <p:spPr>
+          <a:xfrm>
+            <a:off x="0" y="0"/>
+            <a:ext cx="12191695" cy="960120"/>
+          </a:xfrm>
+          <a:prstGeom prst="rect">
+            <a:avLst/>
+          </a:prstGeom>
+          <a:solidFill>
+            <a:srgbClr val="095292"/>
+          </a:solidFill>
+          <a:ln>
+            <a:noFill/>
+          </a:ln>
+        </p:spPr>
+        <p:style>
+          <a:lnRef idx="1">
+            <a:schemeClr val="accent1"/>
+          </a:lnRef>
+          <a:fillRef idx="3">
+            <a:schemeClr val="accent1"/>
+          </a:fillRef>
+          <a:effectRef idx="2">
+            <a:schemeClr val="accent1"/>
+          </a:effectRef>
+          <a:fontRef idx="minor">
+            <a:schemeClr val="lt1"/>
+          </a:fontRef>
+        </p:style>
+        <p:txBody>
+          <a:bodyPr rtlCol="0" anchor="ctr"/>
+          <a:lstStyle/>
+          <a:p>
+            <a:pPr algn="ctr"/>
+          </a:p>
+        </p:txBody>
+      </p:sp>
+      <p:sp>
+        <p:nvSpPr>
+          <p:cNvPr id="3" name="Rectangle 2"/>
+          <p:cNvSpPr/>
+          <p:nvPr/>
+        </p:nvSpPr>
+        <p:spPr>
+          <a:xfrm>
+            <a:off x="0" y="960120"/>
+            <a:ext cx="12191695" cy="41148"/>
+          </a:xfrm>
+          <a:prstGeom prst="rect">
+            <a:avLst/>
+          </a:prstGeom>
+          <a:solidFill>
+            <a:srgbClr val="FFD000"/>
+          </a:solidFill>
+          <a:ln>
+            <a:noFill/>
+          </a:ln>
+        </p:spPr>
+        <p:style>
+          <a:lnRef idx="1">
+            <a:schemeClr val="accent1"/>
+          </a:lnRef>
+          <a:fillRef idx="3">
+            <a:schemeClr val="accent1"/>
+          </a:fillRef>
+          <a:effectRef idx="2">
+            <a:schemeClr val="accent1"/>
+          </a:effectRef>
+          <a:fontRef idx="minor">
+            <a:schemeClr val="lt1"/>
+          </a:fontRef>
+        </p:style>
+        <p:txBody>
+          <a:bodyPr rtlCol="0" anchor="ctr"/>
+          <a:lstStyle/>
+          <a:p>
+            <a:pPr algn="ctr"/>
+          </a:p>
+        </p:txBody>
+      </p:sp>
+      <p:sp>
+        <p:nvSpPr>
+          <p:cNvPr id="4" name="TextBox 3"/>
+          <p:cNvSpPr txBox="1"/>
+          <p:nvPr/>
+        </p:nvSpPr>
+        <p:spPr>
+          <a:xfrm>
+            <a:off x="457200" y="164592"/>
+            <a:ext cx="11277295" cy="502920"/>
+          </a:xfrm>
+          <a:prstGeom prst="rect">
+            <a:avLst/>
+          </a:prstGeom>
+          <a:noFill/>
+        </p:spPr>
+        <p:txBody>
+          <a:bodyPr wrap="square">
+            <a:spAutoFit/>
+          </a:bodyPr>
+          <a:lstStyle/>
+          <a:p>
+            <a:r>
+              <a:rPr sz="2600" b="1" i="0">
+                <a:solidFill>
+                  <a:srgbClr val="FFFFFF"/>
+                </a:solidFill>
+                <a:latin typeface="Calibri"/>
+              </a:rPr>
+              <a:t>Lo que hizo vale más que lo que dijo, y el patrón vale más que el caso (3/3)</a:t>
+            </a:r>
+          </a:p>
+        </p:txBody>
+      </p:sp>
+      <p:sp>
+        <p:nvSpPr>
+          <p:cNvPr id="5" name="TextBox 4"/>
+          <p:cNvSpPr txBox="1"/>
+          <p:nvPr/>
+        </p:nvSpPr>
+        <p:spPr>
+          <a:xfrm>
+            <a:off x="457200" y="1170432"/>
+            <a:ext cx="11277295" cy="5230368"/>
+          </a:xfrm>
+          <a:prstGeom prst="rect">
+            <a:avLst/>
+          </a:prstGeom>
+          <a:noFill/>
+        </p:spPr>
+        <p:txBody>
+          <a:bodyPr wrap="square">
+            <a:spAutoFit/>
+          </a:bodyPr>
+          <a:lstStyle/>
+          <a:p>
+            <a:pPr>
+              <a:spcAft>
+                <a:spcPts val="800"/>
+              </a:spcAft>
+            </a:pPr>
+            <a:r>
+              <a:rPr sz="2000" b="0" i="0">
+                <a:solidFill>
+                  <a:srgbClr val="333333"/>
+                </a:solidFill>
+                <a:latin typeface="Calibri"/>
+              </a:rPr>
+              <a:t>–   Y hay que decirlo — pero sí se hace ingeniería: la práctica profesional de pruebas de usabilidad trabaja con muy pocos usuarios justamente porque los defectos gruesos aparecen con los primeros.</a:t>
+            </a:r>
+          </a:p>
+          <a:p>
+            <a:pPr>
+              <a:spcAft>
+                <a:spcPts val="800"/>
+              </a:spcAft>
+            </a:pPr>
+            <a:r>
+              <a:rPr sz="2000" b="0" i="0">
+                <a:solidFill>
+                  <a:srgbClr val="333333"/>
+                </a:solidFill>
+                <a:latin typeface="Calibri"/>
+              </a:rPr>
+              <a:t>–   Si algún equipo probó con una sola persona, dígale que el hallazgo sigue valiendo, pero que no sabe si es patrón. </a:t>
+            </a:r>
+            <a:r>
+              <a:rPr sz="2000" b="1" i="0">
+                <a:solidFill>
+                  <a:srgbClr val="333333"/>
+                </a:solidFill>
+                <a:latin typeface="Calibri"/>
+              </a:rPr>
+              <a:t>Paso 5: decidir qué no se arregla.</a:t>
+            </a:r>
+            <a:r>
+              <a:rPr sz="2000" b="0" i="0">
+                <a:solidFill>
+                  <a:srgbClr val="333333"/>
+                </a:solidFill>
+                <a:latin typeface="Calibri"/>
+              </a:rPr>
+              <a:t> Es el paso que separa a un equipo que entendió el curso de uno que no.</a:t>
+            </a:r>
+          </a:p>
+          <a:p>
+            <a:pPr>
+              <a:spcAft>
+                <a:spcPts val="800"/>
+              </a:spcAft>
+            </a:pPr>
+            <a:r>
+              <a:rPr sz="2000" b="0" i="0">
+                <a:solidFill>
+                  <a:srgbClr val="333333"/>
+                </a:solidFill>
+                <a:latin typeface="Calibri"/>
+              </a:rPr>
+              <a:t>–   No todo cabe antes de la Clase 14, y </a:t>
+            </a:r>
+            <a:r>
+              <a:rPr sz="2000" b="1" i="0">
+                <a:solidFill>
+                  <a:srgbClr val="333333"/>
+                </a:solidFill>
+                <a:latin typeface="Calibri"/>
+              </a:rPr>
+              <a:t>lo que se deja fuera se escribe con su razón</a:t>
+            </a:r>
+            <a:r>
+              <a:rPr sz="2000" b="0" i="0">
+                <a:solidFill>
+                  <a:srgbClr val="333333"/>
+                </a:solidFill>
+                <a:latin typeface="Calibri"/>
+              </a:rPr>
+              <a:t>.</a:t>
+            </a:r>
+          </a:p>
+          <a:p>
+            <a:pPr>
+              <a:spcAft>
+                <a:spcPts val="800"/>
+              </a:spcAft>
+            </a:pPr>
+            <a:r>
+              <a:rPr sz="2000" b="0" i="0">
+                <a:solidFill>
+                  <a:srgbClr val="333333"/>
+                </a:solidFill>
+                <a:latin typeface="Calibri"/>
+              </a:rPr>
+              <a:t>–   Eso ya lo practicaron con el alcance mínimo de la sesión 8 y con los descartes de la sesión 11: es la misma disciplina.</a:t>
+            </a:r>
+          </a:p>
+        </p:txBody>
+      </p:sp>
+      <p:sp>
+        <p:nvSpPr>
+          <p:cNvPr id="6" name="TextBox 5"/>
+          <p:cNvSpPr txBox="1"/>
+          <p:nvPr/>
+        </p:nvSpPr>
+        <p:spPr>
+          <a:xfrm>
+            <a:off x="11185855" y="6473952"/>
+            <a:ext cx="640080" cy="274320"/>
+          </a:xfrm>
+          <a:prstGeom prst="rect">
+            <a:avLst/>
+          </a:prstGeom>
+          <a:noFill/>
+        </p:spPr>
+        <p:txBody>
+          <a:bodyPr wrap="square">
+            <a:spAutoFit/>
+          </a:bodyPr>
+          <a:lstStyle/>
+          <a:p>
+            <a:pPr algn="r"/>
+            <a:r>
+              <a:rPr sz="1100" b="0" i="0">
+                <a:solidFill>
+                  <a:srgbClr val="666666"/>
+                </a:solidFill>
+                <a:latin typeface="Calibri"/>
+              </a:rPr>
+              <a:t>14</a:t>
+            </a:r>
+          </a:p>
+        </p:txBody>
+      </p:sp>
+    </p:spTree>
+  </p:cSld>
+  <p:clrMapOvr>
+    <a:masterClrMapping/>
+  </p:clrMapOvr>
+</p:sld>
+</file>
+
+<file path=ppt/slides/slide15.xml><?xml version="1.0" encoding="utf-8"?>
+<p:sld xmlns:a="http://schemas.openxmlformats.org/drawingml/2006/main" xmlns:p="http://schemas.openxmlformats.org/presentationml/2006/main" xmlns:r="http://schemas.openxmlformats.org/officeDocument/2006/relationships">
+  <p:cSld>
+    <p:bg>
+      <p:bgPr>
+        <a:solidFill>
+          <a:srgbClr val="FFFFFF"/>
+        </a:solidFill>
+        <a:effectLst/>
+      </p:bgPr>
+    </p:bg>
+    <p:spTree>
+      <p:nvGrpSpPr>
+        <p:cNvPr id="1" name=""/>
+        <p:cNvGrpSpPr/>
+        <p:nvPr/>
+      </p:nvGrpSpPr>
+      <p:grpSpPr/>
+      <p:sp>
+        <p:nvSpPr>
+          <p:cNvPr id="2" name="Rectangle 1"/>
+          <p:cNvSpPr/>
+          <p:nvPr/>
+        </p:nvSpPr>
+        <p:spPr>
+          <a:xfrm>
+            <a:off x="0" y="0"/>
+            <a:ext cx="12191695" cy="960120"/>
+          </a:xfrm>
+          <a:prstGeom prst="rect">
+            <a:avLst/>
+          </a:prstGeom>
+          <a:solidFill>
+            <a:srgbClr val="095292"/>
+          </a:solidFill>
+          <a:ln>
+            <a:noFill/>
+          </a:ln>
+        </p:spPr>
+        <p:style>
+          <a:lnRef idx="1">
+            <a:schemeClr val="accent1"/>
+          </a:lnRef>
+          <a:fillRef idx="3">
+            <a:schemeClr val="accent1"/>
+          </a:fillRef>
+          <a:effectRef idx="2">
+            <a:schemeClr val="accent1"/>
+          </a:effectRef>
+          <a:fontRef idx="minor">
+            <a:schemeClr val="lt1"/>
+          </a:fontRef>
+        </p:style>
+        <p:txBody>
+          <a:bodyPr rtlCol="0" anchor="ctr"/>
+          <a:lstStyle/>
+          <a:p>
+            <a:pPr algn="ctr"/>
+          </a:p>
+        </p:txBody>
+      </p:sp>
+      <p:sp>
+        <p:nvSpPr>
+          <p:cNvPr id="3" name="Rectangle 2"/>
+          <p:cNvSpPr/>
+          <p:nvPr/>
+        </p:nvSpPr>
+        <p:spPr>
+          <a:xfrm>
+            <a:off x="0" y="960120"/>
+            <a:ext cx="12191695" cy="41148"/>
+          </a:xfrm>
+          <a:prstGeom prst="rect">
+            <a:avLst/>
+          </a:prstGeom>
+          <a:solidFill>
+            <a:srgbClr val="FFD000"/>
+          </a:solidFill>
+          <a:ln>
+            <a:noFill/>
+          </a:ln>
+        </p:spPr>
+        <p:style>
+          <a:lnRef idx="1">
+            <a:schemeClr val="accent1"/>
+          </a:lnRef>
+          <a:fillRef idx="3">
+            <a:schemeClr val="accent1"/>
+          </a:fillRef>
+          <a:effectRef idx="2">
+            <a:schemeClr val="accent1"/>
+          </a:effectRef>
+          <a:fontRef idx="minor">
+            <a:schemeClr val="lt1"/>
+          </a:fontRef>
+        </p:style>
+        <p:txBody>
+          <a:bodyPr rtlCol="0" anchor="ctr"/>
+          <a:lstStyle/>
+          <a:p>
+            <a:pPr algn="ctr"/>
+          </a:p>
+        </p:txBody>
+      </p:sp>
+      <p:sp>
+        <p:nvSpPr>
+          <p:cNvPr id="4" name="TextBox 3"/>
+          <p:cNvSpPr txBox="1"/>
+          <p:nvPr/>
+        </p:nvSpPr>
+        <p:spPr>
+          <a:xfrm>
+            <a:off x="457200" y="164592"/>
+            <a:ext cx="11277295" cy="502920"/>
+          </a:xfrm>
+          <a:prstGeom prst="rect">
+            <a:avLst/>
+          </a:prstGeom>
+          <a:noFill/>
+        </p:spPr>
+        <p:txBody>
+          <a:bodyPr wrap="square">
+            <a:spAutoFit/>
+          </a:bodyPr>
+          <a:lstStyle/>
+          <a:p>
+            <a:r>
+              <a:rPr sz="2600" b="1" i="0">
+                <a:solidFill>
+                  <a:srgbClr val="FFFFFF"/>
+                </a:solidFill>
+                <a:latin typeface="Calibri"/>
+              </a:rPr>
+              <a:t>Qué es un avance: cinco minutos que no repiten nada (1/2)</a:t>
+            </a:r>
+          </a:p>
+        </p:txBody>
+      </p:sp>
+      <p:sp>
+        <p:nvSpPr>
+          <p:cNvPr id="5" name="TextBox 4"/>
+          <p:cNvSpPr txBox="1"/>
+          <p:nvPr/>
+        </p:nvSpPr>
+        <p:spPr>
+          <a:xfrm>
+            <a:off x="457200" y="1170432"/>
+            <a:ext cx="11277295" cy="5230368"/>
+          </a:xfrm>
+          <a:prstGeom prst="rect">
+            <a:avLst/>
+          </a:prstGeom>
+          <a:noFill/>
+        </p:spPr>
+        <p:txBody>
+          <a:bodyPr wrap="square">
+            <a:spAutoFit/>
+          </a:bodyPr>
+          <a:lstStyle/>
+          <a:p>
+            <a:pPr>
+              <a:spcAft>
+                <a:spcPts val="800"/>
+              </a:spcAft>
+            </a:pPr>
+            <a:r>
+              <a:rPr sz="2000" b="0" i="0">
+                <a:solidFill>
+                  <a:srgbClr val="333333"/>
+                </a:solidFill>
+                <a:latin typeface="Calibri"/>
+              </a:rPr>
+              <a:t>–   El error universal en una presentación de avance es empezar por el principio.</a:t>
+            </a:r>
+          </a:p>
+          <a:p>
+            <a:pPr>
+              <a:spcAft>
+                <a:spcPts val="800"/>
+              </a:spcAft>
+            </a:pPr>
+            <a:r>
+              <a:rPr sz="2000" b="0" i="0">
+                <a:solidFill>
+                  <a:srgbClr val="333333"/>
+                </a:solidFill>
+                <a:latin typeface="Calibri"/>
+              </a:rPr>
+              <a:t>–   El equipo vuelve a contar el problema, los actores, el árbol de causas y las seis fases, y cuando llega a lo interesante se le acabó el tiempo.</a:t>
+            </a:r>
+          </a:p>
+          <a:p>
+            <a:pPr>
+              <a:spcAft>
+                <a:spcPts val="800"/>
+              </a:spcAft>
+            </a:pPr>
+            <a:r>
+              <a:rPr sz="2000" b="0" i="0">
+                <a:solidFill>
+                  <a:srgbClr val="333333"/>
+                </a:solidFill>
+                <a:latin typeface="Calibri"/>
+              </a:rPr>
+              <a:t>–   Hay que cortarlo de raíz con un argumento simple: </a:t>
+            </a:r>
+            <a:r>
+              <a:rPr sz="2000" b="1" i="0">
+                <a:solidFill>
+                  <a:srgbClr val="333333"/>
+                </a:solidFill>
+                <a:latin typeface="Calibri"/>
+              </a:rPr>
+              <a:t>el curso ya conoce su proyecto</a:t>
+            </a:r>
+            <a:r>
+              <a:rPr sz="2000" b="0" i="0">
+                <a:solidFill>
+                  <a:srgbClr val="333333"/>
+                </a:solidFill>
+                <a:latin typeface="Calibri"/>
+              </a:rPr>
+              <a:t>, lleva cinco sesiones oyéndolo.</a:t>
+            </a:r>
+          </a:p>
+          <a:p>
+            <a:pPr>
+              <a:spcAft>
+                <a:spcPts val="800"/>
+              </a:spcAft>
+            </a:pPr>
+            <a:r>
+              <a:rPr sz="2000" b="0" i="0">
+                <a:solidFill>
+                  <a:srgbClr val="333333"/>
+                </a:solidFill>
+                <a:latin typeface="Calibri"/>
+              </a:rPr>
+              <a:t>–   Repetirlo es gastar los cinco minutos en lo único que ya no aporta.</a:t>
+            </a:r>
+          </a:p>
+          <a:p>
+            <a:pPr>
+              <a:spcAft>
+                <a:spcPts val="800"/>
+              </a:spcAft>
+            </a:pPr>
+            <a:r>
+              <a:rPr sz="2000" b="0" i="0">
+                <a:solidFill>
+                  <a:srgbClr val="333333"/>
+                </a:solidFill>
+                <a:latin typeface="Calibri"/>
+              </a:rPr>
+              <a:t>–   Lo que sí es un avance: </a:t>
+            </a:r>
+            <a:r>
+              <a:rPr sz="2000" b="1" i="0">
+                <a:solidFill>
+                  <a:srgbClr val="333333"/>
+                </a:solidFill>
+                <a:latin typeface="Calibri"/>
+              </a:rPr>
+              <a:t>los tres hallazgos de la prueba</a:t>
+            </a:r>
+            <a:r>
+              <a:rPr sz="2000" b="0" i="0">
+                <a:solidFill>
+                  <a:srgbClr val="333333"/>
+                </a:solidFill>
+                <a:latin typeface="Calibri"/>
+              </a:rPr>
+              <a:t>, contados por lo que la persona hizo.</a:t>
+            </a:r>
+          </a:p>
+          <a:p>
+            <a:pPr>
+              <a:spcAft>
+                <a:spcPts val="800"/>
+              </a:spcAft>
+            </a:pPr>
+            <a:r>
+              <a:rPr sz="2000" b="0" i="0">
+                <a:solidFill>
+                  <a:srgbClr val="333333"/>
+                </a:solidFill>
+                <a:latin typeface="Calibri"/>
+              </a:rPr>
+              <a:t>–   Eso es lo único que el curso no sabe, y por lo tanto lo único que vale la pena contar.</a:t>
+            </a:r>
+          </a:p>
+          <a:p>
+            <a:pPr>
+              <a:spcAft>
+                <a:spcPts val="800"/>
+              </a:spcAft>
+            </a:pPr>
+            <a:r>
+              <a:rPr sz="2000" b="0" i="0">
+                <a:solidFill>
+                  <a:srgbClr val="333333"/>
+                </a:solidFill>
+                <a:latin typeface="Calibri"/>
+              </a:rPr>
+              <a:t>–   Una frase útil para dárselo como regla: *en un avance se cuenta lo que cambió desde la última vez, no lo que se es.* Y una exigencia que cambia radicalmente la calidad de la sesión: </a:t>
+            </a:r>
+            <a:r>
+              <a:rPr sz="2000" b="1" i="0">
+                <a:solidFill>
+                  <a:srgbClr val="333333"/>
+                </a:solidFill>
+                <a:latin typeface="Calibri"/>
+              </a:rPr>
+              <a:t>cada avance tiene que traer una pregunta abierta.</a:t>
+            </a:r>
+            <a:r>
+              <a:rPr sz="2000" b="0" i="0">
+                <a:solidFill>
+                  <a:srgbClr val="333333"/>
+                </a:solidFill>
+                <a:latin typeface="Calibri"/>
+              </a:rPr>
+              <a:t> «Tenemos dos maneras de arreglar esto y no nos decidimos» convierte los tres minutos de retroalimentación en algo útil; sin pregunta, los otros equipos improvisan comentarios genéricos.</a:t>
+            </a:r>
+          </a:p>
+        </p:txBody>
+      </p:sp>
+      <p:sp>
+        <p:nvSpPr>
+          <p:cNvPr id="6" name="TextBox 5"/>
+          <p:cNvSpPr txBox="1"/>
+          <p:nvPr/>
+        </p:nvSpPr>
+        <p:spPr>
+          <a:xfrm>
+            <a:off x="11185855" y="6473952"/>
+            <a:ext cx="640080" cy="274320"/>
+          </a:xfrm>
+          <a:prstGeom prst="rect">
+            <a:avLst/>
+          </a:prstGeom>
+          <a:noFill/>
+        </p:spPr>
+        <p:txBody>
+          <a:bodyPr wrap="square">
+            <a:spAutoFit/>
+          </a:bodyPr>
+          <a:lstStyle/>
+          <a:p>
+            <a:pPr algn="r"/>
+            <a:r>
+              <a:rPr sz="1100" b="0" i="0">
+                <a:solidFill>
+                  <a:srgbClr val="666666"/>
+                </a:solidFill>
+                <a:latin typeface="Calibri"/>
+              </a:rPr>
+              <a:t>15</a:t>
+            </a:r>
+          </a:p>
+        </p:txBody>
+      </p:sp>
+    </p:spTree>
+  </p:cSld>
+  <p:clrMapOvr>
+    <a:masterClrMapping/>
+  </p:clrMapOvr>
+</p:sld>
+</file>
+
+<file path=ppt/slides/slide16.xml><?xml version="1.0" encoding="utf-8"?>
+<p:sld xmlns:a="http://schemas.openxmlformats.org/drawingml/2006/main" xmlns:p="http://schemas.openxmlformats.org/presentationml/2006/main" xmlns:r="http://schemas.openxmlformats.org/officeDocument/2006/relationships">
+  <p:cSld>
+    <p:bg>
+      <p:bgPr>
+        <a:solidFill>
+          <a:srgbClr val="FFFFFF"/>
+        </a:solidFill>
+        <a:effectLst/>
+      </p:bgPr>
+    </p:bg>
+    <p:spTree>
+      <p:nvGrpSpPr>
+        <p:cNvPr id="1" name=""/>
+        <p:cNvGrpSpPr/>
+        <p:nvPr/>
+      </p:nvGrpSpPr>
+      <p:grpSpPr/>
+      <p:sp>
+        <p:nvSpPr>
+          <p:cNvPr id="2" name="Rectangle 1"/>
+          <p:cNvSpPr/>
+          <p:nvPr/>
+        </p:nvSpPr>
+        <p:spPr>
+          <a:xfrm>
+            <a:off x="0" y="0"/>
+            <a:ext cx="12191695" cy="960120"/>
+          </a:xfrm>
+          <a:prstGeom prst="rect">
+            <a:avLst/>
+          </a:prstGeom>
+          <a:solidFill>
+            <a:srgbClr val="095292"/>
+          </a:solidFill>
+          <a:ln>
+            <a:noFill/>
+          </a:ln>
+        </p:spPr>
+        <p:style>
+          <a:lnRef idx="1">
+            <a:schemeClr val="accent1"/>
+          </a:lnRef>
+          <a:fillRef idx="3">
+            <a:schemeClr val="accent1"/>
+          </a:fillRef>
+          <a:effectRef idx="2">
+            <a:schemeClr val="accent1"/>
+          </a:effectRef>
+          <a:fontRef idx="minor">
+            <a:schemeClr val="lt1"/>
+          </a:fontRef>
+        </p:style>
+        <p:txBody>
+          <a:bodyPr rtlCol="0" anchor="ctr"/>
+          <a:lstStyle/>
+          <a:p>
+            <a:pPr algn="ctr"/>
+          </a:p>
+        </p:txBody>
+      </p:sp>
+      <p:sp>
+        <p:nvSpPr>
+          <p:cNvPr id="3" name="Rectangle 2"/>
+          <p:cNvSpPr/>
+          <p:nvPr/>
+        </p:nvSpPr>
+        <p:spPr>
+          <a:xfrm>
+            <a:off x="0" y="960120"/>
+            <a:ext cx="12191695" cy="41148"/>
+          </a:xfrm>
+          <a:prstGeom prst="rect">
+            <a:avLst/>
+          </a:prstGeom>
+          <a:solidFill>
+            <a:srgbClr val="FFD000"/>
+          </a:solidFill>
+          <a:ln>
+            <a:noFill/>
+          </a:ln>
+        </p:spPr>
+        <p:style>
+          <a:lnRef idx="1">
+            <a:schemeClr val="accent1"/>
+          </a:lnRef>
+          <a:fillRef idx="3">
+            <a:schemeClr val="accent1"/>
+          </a:fillRef>
+          <a:effectRef idx="2">
+            <a:schemeClr val="accent1"/>
+          </a:effectRef>
+          <a:fontRef idx="minor">
+            <a:schemeClr val="lt1"/>
+          </a:fontRef>
+        </p:style>
+        <p:txBody>
+          <a:bodyPr rtlCol="0" anchor="ctr"/>
+          <a:lstStyle/>
+          <a:p>
+            <a:pPr algn="ctr"/>
+          </a:p>
+        </p:txBody>
+      </p:sp>
+      <p:sp>
+        <p:nvSpPr>
+          <p:cNvPr id="4" name="TextBox 3"/>
+          <p:cNvSpPr txBox="1"/>
+          <p:nvPr/>
+        </p:nvSpPr>
+        <p:spPr>
+          <a:xfrm>
+            <a:off x="457200" y="164592"/>
+            <a:ext cx="11277295" cy="502920"/>
+          </a:xfrm>
+          <a:prstGeom prst="rect">
+            <a:avLst/>
+          </a:prstGeom>
+          <a:noFill/>
+        </p:spPr>
+        <p:txBody>
+          <a:bodyPr wrap="square">
+            <a:spAutoFit/>
+          </a:bodyPr>
+          <a:lstStyle/>
+          <a:p>
+            <a:r>
+              <a:rPr sz="2600" b="1" i="0">
+                <a:solidFill>
+                  <a:srgbClr val="FFFFFF"/>
+                </a:solidFill>
+                <a:latin typeface="Calibri"/>
+              </a:rPr>
+              <a:t>Qué es un avance: cinco minutos que no repiten nada (2/2)</a:t>
+            </a:r>
+          </a:p>
+        </p:txBody>
+      </p:sp>
+      <p:sp>
+        <p:nvSpPr>
+          <p:cNvPr id="5" name="TextBox 4"/>
+          <p:cNvSpPr txBox="1"/>
+          <p:nvPr/>
+        </p:nvSpPr>
+        <p:spPr>
+          <a:xfrm>
+            <a:off x="457200" y="1170432"/>
+            <a:ext cx="11277295" cy="5230368"/>
+          </a:xfrm>
+          <a:prstGeom prst="rect">
+            <a:avLst/>
+          </a:prstGeom>
+          <a:noFill/>
+        </p:spPr>
+        <p:txBody>
+          <a:bodyPr wrap="square">
+            <a:spAutoFit/>
+          </a:bodyPr>
+          <a:lstStyle/>
+          <a:p>
+            <a:pPr>
+              <a:spcAft>
+                <a:spcPts val="800"/>
+              </a:spcAft>
+            </a:pPr>
+            <a:r>
+              <a:rPr sz="2000" b="0" i="0">
+                <a:solidFill>
+                  <a:srgbClr val="333333"/>
+                </a:solidFill>
+                <a:latin typeface="Calibri"/>
+              </a:rPr>
+              <a:t>–   Exíjala explícitamente al repartir el taller —es uno de los cuatro bloques de la ficha— y verá la diferencia.</a:t>
+            </a:r>
+          </a:p>
+          <a:p>
+            <a:pPr>
+              <a:spcAft>
+                <a:spcPts val="800"/>
+              </a:spcAft>
+            </a:pPr>
+            <a:r>
+              <a:rPr sz="2000" b="0" i="0">
+                <a:solidFill>
+                  <a:srgbClr val="333333"/>
+                </a:solidFill>
+                <a:latin typeface="Calibri"/>
+              </a:rPr>
+              <a:t>–   Por último, la parte incómoda: </a:t>
+            </a:r>
+            <a:r>
+              <a:rPr sz="2000" b="1" i="0">
+                <a:solidFill>
+                  <a:srgbClr val="333333"/>
+                </a:solidFill>
+                <a:latin typeface="Calibri"/>
+              </a:rPr>
+              <a:t>admitir lo pendiente</a:t>
+            </a:r>
+            <a:r>
+              <a:rPr sz="2000" b="0" i="0">
+                <a:solidFill>
+                  <a:srgbClr val="333333"/>
+                </a:solidFill>
+                <a:latin typeface="Calibri"/>
+              </a:rPr>
+              <a:t>.</a:t>
+            </a:r>
+          </a:p>
+          <a:p>
+            <a:pPr>
+              <a:spcAft>
+                <a:spcPts val="800"/>
+              </a:spcAft>
+            </a:pPr>
+            <a:r>
+              <a:rPr sz="2000" b="0" i="0">
+                <a:solidFill>
+                  <a:srgbClr val="333333"/>
+                </a:solidFill>
+                <a:latin typeface="Calibri"/>
+              </a:rPr>
+              <a:t>–   Los equipos tienden a maquillar el avance porque hay compañeros mirando.</a:t>
+            </a:r>
+          </a:p>
+          <a:p>
+            <a:pPr>
+              <a:spcAft>
+                <a:spcPts val="800"/>
+              </a:spcAft>
+            </a:pPr>
+            <a:r>
+              <a:rPr sz="2000" b="0" i="0">
+                <a:solidFill>
+                  <a:srgbClr val="333333"/>
+                </a:solidFill>
+                <a:latin typeface="Calibri"/>
+              </a:rPr>
+              <a:t>–   El argumento que funciona no es moral sino de conveniencia: </a:t>
+            </a:r>
+            <a:r>
+              <a:rPr sz="2000" b="1" i="0">
+                <a:solidFill>
+                  <a:srgbClr val="333333"/>
+                </a:solidFill>
+                <a:latin typeface="Calibri"/>
+              </a:rPr>
+              <a:t>esconder lo pendiente hoy es pagarlo en la Clase 15</a:t>
+            </a:r>
+            <a:r>
+              <a:rPr sz="2000" b="0" i="0">
+                <a:solidFill>
+                  <a:srgbClr val="333333"/>
+                </a:solidFill>
+                <a:latin typeface="Calibri"/>
+              </a:rPr>
+              <a:t>, cuando ya hay nota de por medio y ya no hay tiempo de arreglarlo.</a:t>
+            </a:r>
+          </a:p>
+          <a:p>
+            <a:pPr>
+              <a:spcAft>
+                <a:spcPts val="800"/>
+              </a:spcAft>
+            </a:pPr>
+            <a:r>
+              <a:rPr sz="2000" b="0" i="0">
+                <a:solidFill>
+                  <a:srgbClr val="333333"/>
+                </a:solidFill>
+                <a:latin typeface="Calibri"/>
+              </a:rPr>
+              <a:t>–   Hoy la retroalimentación es gratis; en la Clase 15 vale el 15 % del curso.</a:t>
+            </a:r>
+          </a:p>
+        </p:txBody>
+      </p:sp>
+      <p:sp>
+        <p:nvSpPr>
+          <p:cNvPr id="6" name="TextBox 5"/>
+          <p:cNvSpPr txBox="1"/>
+          <p:nvPr/>
+        </p:nvSpPr>
+        <p:spPr>
+          <a:xfrm>
+            <a:off x="11185855" y="6473952"/>
+            <a:ext cx="640080" cy="274320"/>
+          </a:xfrm>
+          <a:prstGeom prst="rect">
+            <a:avLst/>
+          </a:prstGeom>
+          <a:noFill/>
+        </p:spPr>
+        <p:txBody>
+          <a:bodyPr wrap="square">
+            <a:spAutoFit/>
+          </a:bodyPr>
+          <a:lstStyle/>
+          <a:p>
+            <a:pPr algn="r"/>
+            <a:r>
+              <a:rPr sz="1100" b="0" i="0">
+                <a:solidFill>
+                  <a:srgbClr val="666666"/>
+                </a:solidFill>
+                <a:latin typeface="Calibri"/>
+              </a:rPr>
+              <a:t>16</a:t>
+            </a:r>
+          </a:p>
+        </p:txBody>
+      </p:sp>
+    </p:spTree>
+  </p:cSld>
+  <p:clrMapOvr>
+    <a:masterClrMapping/>
+  </p:clrMapOvr>
+</p:sld>
+</file>
+
+<file path=ppt/slides/slide17.xml><?xml version="1.0" encoding="utf-8"?>
+<p:sld xmlns:a="http://schemas.openxmlformats.org/drawingml/2006/main" xmlns:p="http://schemas.openxmlformats.org/presentationml/2006/main" xmlns:r="http://schemas.openxmlformats.org/officeDocument/2006/relationships">
+  <p:cSld>
+    <p:bg>
+      <p:bgPr>
+        <a:solidFill>
+          <a:srgbClr val="FFFFFF"/>
+        </a:solidFill>
+        <a:effectLst/>
+      </p:bgPr>
+    </p:bg>
+    <p:spTree>
+      <p:nvGrpSpPr>
+        <p:cNvPr id="1" name=""/>
+        <p:cNvGrpSpPr/>
+        <p:nvPr/>
+      </p:nvGrpSpPr>
+      <p:grpSpPr/>
+      <p:sp>
+        <p:nvSpPr>
+          <p:cNvPr id="2" name="Rectangle 1"/>
+          <p:cNvSpPr/>
+          <p:nvPr/>
+        </p:nvSpPr>
+        <p:spPr>
+          <a:xfrm>
+            <a:off x="0" y="0"/>
+            <a:ext cx="12191695" cy="960120"/>
+          </a:xfrm>
+          <a:prstGeom prst="rect">
+            <a:avLst/>
+          </a:prstGeom>
+          <a:solidFill>
+            <a:srgbClr val="095292"/>
+          </a:solidFill>
+          <a:ln>
+            <a:noFill/>
+          </a:ln>
+        </p:spPr>
+        <p:style>
+          <a:lnRef idx="1">
+            <a:schemeClr val="accent1"/>
+          </a:lnRef>
+          <a:fillRef idx="3">
+            <a:schemeClr val="accent1"/>
+          </a:fillRef>
+          <a:effectRef idx="2">
+            <a:schemeClr val="accent1"/>
+          </a:effectRef>
+          <a:fontRef idx="minor">
+            <a:schemeClr val="lt1"/>
+          </a:fontRef>
+        </p:style>
+        <p:txBody>
+          <a:bodyPr rtlCol="0" anchor="ctr"/>
+          <a:lstStyle/>
+          <a:p>
+            <a:pPr algn="ctr"/>
+          </a:p>
+        </p:txBody>
+      </p:sp>
+      <p:sp>
+        <p:nvSpPr>
+          <p:cNvPr id="3" name="Rectangle 2"/>
+          <p:cNvSpPr/>
+          <p:nvPr/>
+        </p:nvSpPr>
+        <p:spPr>
+          <a:xfrm>
+            <a:off x="0" y="960120"/>
+            <a:ext cx="12191695" cy="41148"/>
+          </a:xfrm>
+          <a:prstGeom prst="rect">
+            <a:avLst/>
+          </a:prstGeom>
+          <a:solidFill>
+            <a:srgbClr val="FFD000"/>
+          </a:solidFill>
+          <a:ln>
+            <a:noFill/>
+          </a:ln>
+        </p:spPr>
+        <p:style>
+          <a:lnRef idx="1">
+            <a:schemeClr val="accent1"/>
+          </a:lnRef>
+          <a:fillRef idx="3">
+            <a:schemeClr val="accent1"/>
+          </a:fillRef>
+          <a:effectRef idx="2">
+            <a:schemeClr val="accent1"/>
+          </a:effectRef>
+          <a:fontRef idx="minor">
+            <a:schemeClr val="lt1"/>
+          </a:fontRef>
+        </p:style>
+        <p:txBody>
+          <a:bodyPr rtlCol="0" anchor="ctr"/>
+          <a:lstStyle/>
+          <a:p>
+            <a:pPr algn="ctr"/>
+          </a:p>
+        </p:txBody>
+      </p:sp>
+      <p:sp>
+        <p:nvSpPr>
+          <p:cNvPr id="4" name="TextBox 3"/>
+          <p:cNvSpPr txBox="1"/>
+          <p:nvPr/>
+        </p:nvSpPr>
+        <p:spPr>
+          <a:xfrm>
+            <a:off x="457200" y="164592"/>
+            <a:ext cx="11277295" cy="502920"/>
+          </a:xfrm>
+          <a:prstGeom prst="rect">
+            <a:avLst/>
+          </a:prstGeom>
+          <a:noFill/>
+        </p:spPr>
+        <p:txBody>
+          <a:bodyPr wrap="square">
+            <a:spAutoFit/>
+          </a:bodyPr>
+          <a:lstStyle/>
+          <a:p>
+            <a:r>
+              <a:rPr sz="2600" b="1" i="0">
+                <a:solidFill>
+                  <a:srgbClr val="FFFFFF"/>
+                </a:solidFill>
+                <a:latin typeface="Calibri"/>
+              </a:rPr>
+              <a:t>Dar y recibir: la única revisión externa gratis del semestre (1/2)</a:t>
+            </a:r>
+          </a:p>
+        </p:txBody>
+      </p:sp>
+      <p:sp>
+        <p:nvSpPr>
+          <p:cNvPr id="5" name="TextBox 4"/>
+          <p:cNvSpPr txBox="1"/>
+          <p:nvPr/>
+        </p:nvSpPr>
+        <p:spPr>
+          <a:xfrm>
+            <a:off x="457200" y="1170432"/>
+            <a:ext cx="11277295" cy="5230368"/>
+          </a:xfrm>
+          <a:prstGeom prst="rect">
+            <a:avLst/>
+          </a:prstGeom>
+          <a:noFill/>
+        </p:spPr>
+        <p:txBody>
+          <a:bodyPr wrap="square">
+            <a:spAutoFit/>
+          </a:bodyPr>
+          <a:lstStyle/>
+          <a:p>
+            <a:pPr>
+              <a:spcAft>
+                <a:spcPts val="800"/>
+              </a:spcAft>
+            </a:pPr>
+            <a:r>
+              <a:rPr sz="2000" b="0" i="0">
+                <a:solidFill>
+                  <a:srgbClr val="333333"/>
+                </a:solidFill>
+                <a:latin typeface="Calibri"/>
+              </a:rPr>
+              <a:t>–   La retroalimentación entre pares no sale bien sola: sin reglas, un grupo de primer semestre produce diez minutos de «está muy bien, me gustó».</a:t>
+            </a:r>
+          </a:p>
+          <a:p>
+            <a:pPr>
+              <a:spcAft>
+                <a:spcPts val="800"/>
+              </a:spcAft>
+            </a:pPr>
+            <a:r>
+              <a:rPr sz="2000" b="0" i="0">
+                <a:solidFill>
+                  <a:srgbClr val="333333"/>
+                </a:solidFill>
+                <a:latin typeface="Calibri"/>
+              </a:rPr>
+              <a:t>–   Por eso hoy se enseña el formato, y conviene proyectarlo mientras exponen.</a:t>
+            </a:r>
+          </a:p>
+          <a:p>
+            <a:pPr>
+              <a:spcAft>
+                <a:spcPts val="800"/>
+              </a:spcAft>
+            </a:pPr>
+            <a:r>
+              <a:rPr sz="2000" b="0" i="0">
+                <a:solidFill>
+                  <a:srgbClr val="333333"/>
+                </a:solidFill>
+                <a:latin typeface="Calibri"/>
+              </a:rPr>
+              <a:t>–   El orden </a:t>
+            </a:r>
+            <a:r>
+              <a:rPr sz="2000" b="1" i="0">
+                <a:solidFill>
+                  <a:srgbClr val="333333"/>
+                </a:solidFill>
+                <a:latin typeface="Calibri"/>
+              </a:rPr>
+              <a:t>observación, expectativa, una sola cosa</a:t>
+            </a:r>
+            <a:r>
+              <a:rPr sz="2000" b="0" i="0">
+                <a:solidFill>
+                  <a:srgbClr val="333333"/>
+                </a:solidFill>
+                <a:latin typeface="Calibri"/>
+              </a:rPr>
+              <a:t> funciona por razones concretas.</a:t>
+            </a:r>
+          </a:p>
+          <a:p>
+            <a:pPr>
+              <a:spcAft>
+                <a:spcPts val="800"/>
+              </a:spcAft>
+            </a:pPr>
+            <a:r>
+              <a:rPr sz="2000" b="0" i="0">
+                <a:solidFill>
+                  <a:srgbClr val="333333"/>
+                </a:solidFill>
+                <a:latin typeface="Calibri"/>
+              </a:rPr>
+              <a:t>–   Empezar con una </a:t>
+            </a:r>
+            <a:r>
+              <a:rPr sz="2000" b="1" i="0">
+                <a:solidFill>
+                  <a:srgbClr val="333333"/>
+                </a:solidFill>
+                <a:latin typeface="Calibri"/>
+              </a:rPr>
+              <a:t>pregunta</a:t>
+            </a:r>
+            <a:r>
+              <a:rPr sz="2000" b="0" i="0">
+                <a:solidFill>
+                  <a:srgbClr val="333333"/>
+                </a:solidFill>
+                <a:latin typeface="Calibri"/>
+              </a:rPr>
+              <a:t> en vez de una opinión evita la mitad de los comentarios equivocados</a:t>
+            </a:r>
+          </a:p>
+          <a:p>
+            <a:pPr>
+              <a:spcAft>
+                <a:spcPts val="800"/>
+              </a:spcAft>
+            </a:pPr>
+            <a:r>
+              <a:rPr sz="2000" b="0" i="0">
+                <a:solidFill>
+                  <a:srgbClr val="333333"/>
+                </a:solidFill>
+                <a:latin typeface="Calibri"/>
+              </a:rPr>
+              <a:t>–   Porque muchas veces el equipo ya tenía una razón documentada: preguntar «¿por qué eligieron mostrar la fecha ahí?» y oír «porque la información no está al minuto y no queremos mentir» cierra el tema y además enseña al que preguntó.</a:t>
+            </a:r>
+          </a:p>
+          <a:p>
+            <a:pPr>
+              <a:spcAft>
+                <a:spcPts val="800"/>
+              </a:spcAft>
+            </a:pPr>
+            <a:r>
+              <a:rPr sz="2000" b="0" i="0">
+                <a:solidFill>
+                  <a:srgbClr val="333333"/>
+                </a:solidFill>
+                <a:latin typeface="Calibri"/>
+              </a:rPr>
+              <a:t>–   Describir </a:t>
+            </a:r>
+            <a:r>
+              <a:rPr sz="2000" b="1" i="0">
+                <a:solidFill>
+                  <a:srgbClr val="333333"/>
+                </a:solidFill>
+                <a:latin typeface="Calibri"/>
+              </a:rPr>
+              <a:t>lo observable</a:t>
+            </a:r>
+            <a:r>
+              <a:rPr sz="2000" b="0" i="0">
+                <a:solidFill>
+                  <a:srgbClr val="333333"/>
+                </a:solidFill>
+                <a:latin typeface="Calibri"/>
+              </a:rPr>
+              <a:t> —«no encontré cómo volver»— entrega algo que se puede arreglar, mientras que «la navegación está confusa» solo entrega una impresión.</a:t>
+            </a:r>
+          </a:p>
+          <a:p>
+            <a:pPr>
+              <a:spcAft>
+                <a:spcPts val="800"/>
+              </a:spcAft>
+            </a:pPr>
+            <a:r>
+              <a:rPr sz="2000" b="0" i="0">
+                <a:solidFill>
+                  <a:srgbClr val="333333"/>
+                </a:solidFill>
+                <a:latin typeface="Calibri"/>
+              </a:rPr>
+              <a:t>–   Decir </a:t>
+            </a:r>
+            <a:r>
+              <a:rPr sz="2000" b="1" i="0">
+                <a:solidFill>
+                  <a:srgbClr val="333333"/>
+                </a:solidFill>
+                <a:latin typeface="Calibri"/>
+              </a:rPr>
+              <a:t>qué esperaba</a:t>
+            </a:r>
+            <a:r>
+              <a:rPr sz="2000" b="0" i="0">
+                <a:solidFill>
+                  <a:srgbClr val="333333"/>
+                </a:solidFill>
+                <a:latin typeface="Calibri"/>
+              </a:rPr>
+              <a:t> aporta un dato sin dar una orden.</a:t>
+            </a:r>
+          </a:p>
+          <a:p>
+            <a:pPr>
+              <a:spcAft>
+                <a:spcPts val="800"/>
+              </a:spcAft>
+            </a:pPr>
+            <a:r>
+              <a:rPr sz="2000" b="0" i="0">
+                <a:solidFill>
+                  <a:srgbClr val="333333"/>
+                </a:solidFill>
+                <a:latin typeface="Calibri"/>
+              </a:rPr>
+              <a:t>–   Y limitarse a </a:t>
+            </a:r>
+            <a:r>
+              <a:rPr sz="2000" b="1" i="0">
+                <a:solidFill>
+                  <a:srgbClr val="333333"/>
+                </a:solidFill>
+                <a:latin typeface="Calibri"/>
+              </a:rPr>
+              <a:t>una sola cosa</a:t>
+            </a:r>
+            <a:r>
+              <a:rPr sz="2000" b="0" i="0">
+                <a:solidFill>
+                  <a:srgbClr val="333333"/>
+                </a:solidFill>
+                <a:latin typeface="Calibri"/>
+              </a:rPr>
+              <a:t> es aritmética: en tres minutos con cinco comentarios no se aplica ninguno.</a:t>
+            </a:r>
+          </a:p>
+        </p:txBody>
+      </p:sp>
+      <p:sp>
+        <p:nvSpPr>
+          <p:cNvPr id="6" name="TextBox 5"/>
+          <p:cNvSpPr txBox="1"/>
+          <p:nvPr/>
+        </p:nvSpPr>
+        <p:spPr>
+          <a:xfrm>
+            <a:off x="11185855" y="6473952"/>
+            <a:ext cx="640080" cy="274320"/>
+          </a:xfrm>
+          <a:prstGeom prst="rect">
+            <a:avLst/>
+          </a:prstGeom>
+          <a:noFill/>
+        </p:spPr>
+        <p:txBody>
+          <a:bodyPr wrap="square">
+            <a:spAutoFit/>
+          </a:bodyPr>
+          <a:lstStyle/>
+          <a:p>
+            <a:pPr algn="r"/>
+            <a:r>
+              <a:rPr sz="1100" b="0" i="0">
+                <a:solidFill>
+                  <a:srgbClr val="666666"/>
+                </a:solidFill>
+                <a:latin typeface="Calibri"/>
+              </a:rPr>
+              <a:t>17</a:t>
+            </a:r>
+          </a:p>
+        </p:txBody>
+      </p:sp>
+    </p:spTree>
+  </p:cSld>
+  <p:clrMapOvr>
+    <a:masterClrMapping/>
+  </p:clrMapOvr>
+</p:sld>
+</file>
+
+<file path=ppt/slides/slide18.xml><?xml version="1.0" encoding="utf-8"?>
+<p:sld xmlns:a="http://schemas.openxmlformats.org/drawingml/2006/main" xmlns:p="http://schemas.openxmlformats.org/presentationml/2006/main" xmlns:r="http://schemas.openxmlformats.org/officeDocument/2006/relationships">
+  <p:cSld>
+    <p:bg>
+      <p:bgPr>
+        <a:solidFill>
+          <a:srgbClr val="FFFFFF"/>
+        </a:solidFill>
+        <a:effectLst/>
+      </p:bgPr>
+    </p:bg>
+    <p:spTree>
+      <p:nvGrpSpPr>
+        <p:cNvPr id="1" name=""/>
+        <p:cNvGrpSpPr/>
+        <p:nvPr/>
+      </p:nvGrpSpPr>
+      <p:grpSpPr/>
+      <p:sp>
+        <p:nvSpPr>
+          <p:cNvPr id="2" name="Rectangle 1"/>
+          <p:cNvSpPr/>
+          <p:nvPr/>
+        </p:nvSpPr>
+        <p:spPr>
+          <a:xfrm>
+            <a:off x="0" y="0"/>
+            <a:ext cx="12191695" cy="960120"/>
+          </a:xfrm>
+          <a:prstGeom prst="rect">
+            <a:avLst/>
+          </a:prstGeom>
+          <a:solidFill>
+            <a:srgbClr val="095292"/>
+          </a:solidFill>
+          <a:ln>
+            <a:noFill/>
+          </a:ln>
+        </p:spPr>
+        <p:style>
+          <a:lnRef idx="1">
+            <a:schemeClr val="accent1"/>
+          </a:lnRef>
+          <a:fillRef idx="3">
+            <a:schemeClr val="accent1"/>
+          </a:fillRef>
+          <a:effectRef idx="2">
+            <a:schemeClr val="accent1"/>
+          </a:effectRef>
+          <a:fontRef idx="minor">
+            <a:schemeClr val="lt1"/>
+          </a:fontRef>
+        </p:style>
+        <p:txBody>
+          <a:bodyPr rtlCol="0" anchor="ctr"/>
+          <a:lstStyle/>
+          <a:p>
+            <a:pPr algn="ctr"/>
+          </a:p>
+        </p:txBody>
+      </p:sp>
+      <p:sp>
+        <p:nvSpPr>
+          <p:cNvPr id="3" name="Rectangle 2"/>
+          <p:cNvSpPr/>
+          <p:nvPr/>
+        </p:nvSpPr>
+        <p:spPr>
+          <a:xfrm>
+            <a:off x="0" y="960120"/>
+            <a:ext cx="12191695" cy="41148"/>
+          </a:xfrm>
+          <a:prstGeom prst="rect">
+            <a:avLst/>
+          </a:prstGeom>
+          <a:solidFill>
+            <a:srgbClr val="FFD000"/>
+          </a:solidFill>
+          <a:ln>
+            <a:noFill/>
+          </a:ln>
+        </p:spPr>
+        <p:style>
+          <a:lnRef idx="1">
+            <a:schemeClr val="accent1"/>
+          </a:lnRef>
+          <a:fillRef idx="3">
+            <a:schemeClr val="accent1"/>
+          </a:fillRef>
+          <a:effectRef idx="2">
+            <a:schemeClr val="accent1"/>
+          </a:effectRef>
+          <a:fontRef idx="minor">
+            <a:schemeClr val="lt1"/>
+          </a:fontRef>
+        </p:style>
+        <p:txBody>
+          <a:bodyPr rtlCol="0" anchor="ctr"/>
+          <a:lstStyle/>
+          <a:p>
+            <a:pPr algn="ctr"/>
+          </a:p>
+        </p:txBody>
+      </p:sp>
+      <p:sp>
+        <p:nvSpPr>
+          <p:cNvPr id="4" name="TextBox 3"/>
+          <p:cNvSpPr txBox="1"/>
+          <p:nvPr/>
+        </p:nvSpPr>
+        <p:spPr>
+          <a:xfrm>
+            <a:off x="457200" y="164592"/>
+            <a:ext cx="11277295" cy="502920"/>
+          </a:xfrm>
+          <a:prstGeom prst="rect">
+            <a:avLst/>
+          </a:prstGeom>
+          <a:noFill/>
+        </p:spPr>
+        <p:txBody>
+          <a:bodyPr wrap="square">
+            <a:spAutoFit/>
+          </a:bodyPr>
+          <a:lstStyle/>
+          <a:p>
+            <a:r>
+              <a:rPr sz="2600" b="1" i="0">
+                <a:solidFill>
+                  <a:srgbClr val="FFFFFF"/>
+                </a:solidFill>
+                <a:latin typeface="Calibri"/>
+              </a:rPr>
+              <a:t>Dar y recibir: la única revisión externa gratis del semestre (2/2)</a:t>
+            </a:r>
+          </a:p>
+        </p:txBody>
+      </p:sp>
+      <p:sp>
+        <p:nvSpPr>
+          <p:cNvPr id="5" name="TextBox 4"/>
+          <p:cNvSpPr txBox="1"/>
+          <p:nvPr/>
+        </p:nvSpPr>
+        <p:spPr>
+          <a:xfrm>
+            <a:off x="457200" y="1170432"/>
+            <a:ext cx="11277295" cy="5230368"/>
+          </a:xfrm>
+          <a:prstGeom prst="rect">
+            <a:avLst/>
+          </a:prstGeom>
+          <a:noFill/>
+        </p:spPr>
+        <p:txBody>
+          <a:bodyPr wrap="square">
+            <a:spAutoFit/>
+          </a:bodyPr>
+          <a:lstStyle/>
+          <a:p>
+            <a:pPr>
+              <a:spcAft>
+                <a:spcPts val="800"/>
+              </a:spcAft>
+            </a:pPr>
+            <a:r>
+              <a:rPr sz="2000" b="0" i="0">
+                <a:solidFill>
+                  <a:srgbClr val="333333"/>
+                </a:solidFill>
+                <a:latin typeface="Calibri"/>
+              </a:rPr>
+              <a:t>–   La regla de </a:t>
+            </a:r>
+            <a:r>
+              <a:rPr sz="2000" b="1" i="0">
+                <a:solidFill>
+                  <a:srgbClr val="333333"/>
+                </a:solidFill>
+                <a:latin typeface="Calibri"/>
+              </a:rPr>
+              <a:t>hablar del trabajo y no de la persona</a:t>
+            </a:r>
+            <a:r>
+              <a:rPr sz="2000" b="0" i="0">
+                <a:solidFill>
+                  <a:srgbClr val="333333"/>
+                </a:solidFill>
+                <a:latin typeface="Calibri"/>
+              </a:rPr>
+              <a:t> hay que enunciarla en voz alta la primera vez, porque marca el clima del corte 3 completo: «este texto no lo entendí» y no «no supieron escribirlo».</a:t>
+            </a:r>
+          </a:p>
+          <a:p>
+            <a:pPr>
+              <a:spcAft>
+                <a:spcPts val="800"/>
+              </a:spcAft>
+            </a:pPr>
+            <a:r>
+              <a:rPr sz="2000" b="0" i="0">
+                <a:solidFill>
+                  <a:srgbClr val="333333"/>
+                </a:solidFill>
+                <a:latin typeface="Calibri"/>
+              </a:rPr>
+              <a:t>–   Es la diferencia entre un equipo que escucha y un equipo que se defiende.</a:t>
+            </a:r>
+          </a:p>
+          <a:p>
+            <a:pPr>
+              <a:spcAft>
+                <a:spcPts val="800"/>
+              </a:spcAft>
+            </a:pPr>
+            <a:r>
+              <a:rPr sz="2000" b="0" i="0">
+                <a:solidFill>
+                  <a:srgbClr val="333333"/>
+                </a:solidFill>
+                <a:latin typeface="Calibri"/>
+              </a:rPr>
+              <a:t>–   De las tres trampas, la que más daño hace es </a:t>
+            </a:r>
+            <a:r>
+              <a:rPr sz="2000" b="1" i="0">
+                <a:solidFill>
+                  <a:srgbClr val="333333"/>
+                </a:solidFill>
+                <a:latin typeface="Calibri"/>
+              </a:rPr>
+              <a:t>rediseñar el proyecto ajeno</a:t>
+            </a:r>
+            <a:r>
+              <a:rPr sz="2000" b="0" i="0">
+                <a:solidFill>
+                  <a:srgbClr val="333333"/>
+                </a:solidFill>
+                <a:latin typeface="Calibri"/>
+              </a:rPr>
+              <a:t>: aparece siempre, en la forma de «yo lo habría hecho con una aplicación».</a:t>
+            </a:r>
+          </a:p>
+          <a:p>
+            <a:pPr>
+              <a:spcAft>
+                <a:spcPts val="800"/>
+              </a:spcAft>
+            </a:pPr>
+            <a:r>
+              <a:rPr sz="2000" b="0" i="0">
+                <a:solidFill>
+                  <a:srgbClr val="333333"/>
+                </a:solidFill>
+                <a:latin typeface="Calibri"/>
+              </a:rPr>
+              <a:t>–   Hay que cortarla con respeto y con argumento: el otro equipo tomó decisiones documentadas en las sesiones 6 a 11 que usted no vio, y </a:t>
+            </a:r>
+            <a:r>
+              <a:rPr sz="2000" b="1" i="0">
+                <a:solidFill>
+                  <a:srgbClr val="333333"/>
+                </a:solidFill>
+                <a:latin typeface="Calibri"/>
+              </a:rPr>
+              <a:t>la retroalimentación es al avance presentado, no al proyecto que usted haría</a:t>
+            </a:r>
+            <a:r>
+              <a:rPr sz="2000" b="0" i="0">
+                <a:solidFill>
+                  <a:srgbClr val="333333"/>
+                </a:solidFill>
+                <a:latin typeface="Calibri"/>
+              </a:rPr>
+              <a:t>.</a:t>
+            </a:r>
+          </a:p>
+          <a:p>
+            <a:pPr>
+              <a:spcAft>
+                <a:spcPts val="800"/>
+              </a:spcAft>
+            </a:pPr>
+            <a:r>
+              <a:rPr sz="2000" b="0" i="0">
+                <a:solidFill>
+                  <a:srgbClr val="333333"/>
+                </a:solidFill>
+                <a:latin typeface="Calibri"/>
+              </a:rPr>
+              <a:t>–   La segunda es el </a:t>
+            </a:r>
+            <a:r>
+              <a:rPr sz="2000" b="1" i="0">
+                <a:solidFill>
+                  <a:srgbClr val="333333"/>
+                </a:solidFill>
+                <a:latin typeface="Calibri"/>
+              </a:rPr>
+              <a:t>elogio vacío</a:t>
+            </a:r>
+            <a:r>
+              <a:rPr sz="2000" b="0" i="0">
+                <a:solidFill>
+                  <a:srgbClr val="333333"/>
+                </a:solidFill>
+                <a:latin typeface="Calibri"/>
+              </a:rPr>
+              <a:t>, que se arregla pidiendo el «qué» y el «por qué» —un elogio con razón sí es útil, porque le dice al equipo qué conservar—.</a:t>
+            </a:r>
+          </a:p>
+          <a:p>
+            <a:pPr>
+              <a:spcAft>
+                <a:spcPts val="800"/>
+              </a:spcAft>
+            </a:pPr>
+            <a:r>
+              <a:rPr sz="2000" b="0" i="0">
+                <a:solidFill>
+                  <a:srgbClr val="333333"/>
+                </a:solidFill>
+                <a:latin typeface="Calibri"/>
+              </a:rPr>
+              <a:t>–   Y la tercera es de quien recibe: </a:t>
+            </a:r>
+            <a:r>
+              <a:rPr sz="2000" b="1" i="0">
+                <a:solidFill>
+                  <a:srgbClr val="333333"/>
+                </a:solidFill>
+                <a:latin typeface="Calibri"/>
+              </a:rPr>
+              <a:t>anotar, no responder</a:t>
+            </a:r>
+            <a:r>
+              <a:rPr sz="2000" b="0" i="0">
+                <a:solidFill>
+                  <a:srgbClr val="333333"/>
+                </a:solidFill>
+                <a:latin typeface="Calibri"/>
+              </a:rPr>
+              <a:t>.</a:t>
+            </a:r>
+          </a:p>
+          <a:p>
+            <a:pPr>
+              <a:spcAft>
+                <a:spcPts val="800"/>
+              </a:spcAft>
+            </a:pPr>
+            <a:r>
+              <a:rPr sz="2000" b="0" i="0">
+                <a:solidFill>
+                  <a:srgbClr val="333333"/>
+                </a:solidFill>
+                <a:latin typeface="Calibri"/>
+              </a:rPr>
+              <a:t>–   Solo se pregunta para entender.</a:t>
+            </a:r>
+          </a:p>
+          <a:p>
+            <a:pPr>
+              <a:spcAft>
+                <a:spcPts val="800"/>
+              </a:spcAft>
+            </a:pPr>
+            <a:r>
+              <a:rPr sz="2000" b="0" i="0">
+                <a:solidFill>
+                  <a:srgbClr val="333333"/>
+                </a:solidFill>
+                <a:latin typeface="Calibri"/>
+              </a:rPr>
+              <a:t>–   Cierre con el argumento de peso: estos tres minutos son </a:t>
+            </a:r>
+            <a:r>
+              <a:rPr sz="2000" b="1" i="0">
+                <a:solidFill>
+                  <a:srgbClr val="333333"/>
+                </a:solidFill>
+                <a:latin typeface="Calibri"/>
+              </a:rPr>
+              <a:t>la única revisión externa gratis</a:t>
+            </a:r>
+            <a:r>
+              <a:rPr sz="2000" b="0" i="0">
+                <a:solidFill>
+                  <a:srgbClr val="333333"/>
+                </a:solidFill>
+                <a:latin typeface="Calibri"/>
+              </a:rPr>
+              <a:t> que van a tener antes de que la exposición valga nota; defenderse en vivo es tirarlos a la basura.</a:t>
+            </a:r>
+          </a:p>
+        </p:txBody>
+      </p:sp>
+      <p:sp>
+        <p:nvSpPr>
+          <p:cNvPr id="6" name="TextBox 5"/>
+          <p:cNvSpPr txBox="1"/>
+          <p:nvPr/>
+        </p:nvSpPr>
+        <p:spPr>
+          <a:xfrm>
+            <a:off x="11185855" y="6473952"/>
+            <a:ext cx="640080" cy="274320"/>
+          </a:xfrm>
+          <a:prstGeom prst="rect">
+            <a:avLst/>
+          </a:prstGeom>
+          <a:noFill/>
+        </p:spPr>
+        <p:txBody>
+          <a:bodyPr wrap="square">
+            <a:spAutoFit/>
+          </a:bodyPr>
+          <a:lstStyle/>
+          <a:p>
+            <a:pPr algn="r"/>
+            <a:r>
+              <a:rPr sz="1100" b="0" i="0">
+                <a:solidFill>
+                  <a:srgbClr val="666666"/>
+                </a:solidFill>
+                <a:latin typeface="Calibri"/>
+              </a:rPr>
+              <a:t>18</a:t>
+            </a:r>
+          </a:p>
+        </p:txBody>
+      </p:sp>
+    </p:spTree>
+  </p:cSld>
+  <p:clrMapOvr>
+    <a:masterClrMapping/>
+  </p:clrMapOvr>
+</p:sld>
+</file>
+
+<file path=ppt/slides/slide19.xml><?xml version="1.0" encoding="utf-8"?>
+<p:sld xmlns:a="http://schemas.openxmlformats.org/drawingml/2006/main" xmlns:p="http://schemas.openxmlformats.org/presentationml/2006/main" xmlns:r="http://schemas.openxmlformats.org/officeDocument/2006/relationships">
+  <p:cSld>
+    <p:bg>
+      <p:bgPr>
+        <a:solidFill>
+          <a:srgbClr val="FFFFFF"/>
+        </a:solidFill>
+        <a:effectLst/>
+      </p:bgPr>
+    </p:bg>
+    <p:spTree>
+      <p:nvGrpSpPr>
+        <p:cNvPr id="1" name=""/>
+        <p:cNvGrpSpPr/>
+        <p:nvPr/>
+      </p:nvGrpSpPr>
+      <p:grpSpPr/>
+      <p:sp>
+        <p:nvSpPr>
+          <p:cNvPr id="2" name="Rectangle 1"/>
+          <p:cNvSpPr/>
+          <p:nvPr/>
+        </p:nvSpPr>
+        <p:spPr>
+          <a:xfrm>
+            <a:off x="0" y="0"/>
+            <a:ext cx="12191695" cy="1170432"/>
+          </a:xfrm>
+          <a:prstGeom prst="rect">
+            <a:avLst/>
+          </a:prstGeom>
+          <a:solidFill>
+            <a:srgbClr val="095292"/>
+          </a:solidFill>
+          <a:ln>
+            <a:noFill/>
+          </a:ln>
+        </p:spPr>
+        <p:style>
+          <a:lnRef idx="1">
+            <a:schemeClr val="accent1"/>
+          </a:lnRef>
+          <a:fillRef idx="3">
+            <a:schemeClr val="accent1"/>
+          </a:fillRef>
+          <a:effectRef idx="2">
+            <a:schemeClr val="accent1"/>
+          </a:effectRef>
+          <a:fontRef idx="minor">
+            <a:schemeClr val="lt1"/>
+          </a:fontRef>
+        </p:style>
+        <p:txBody>
+          <a:bodyPr rtlCol="0" anchor="ctr"/>
+          <a:lstStyle/>
+          <a:p>
+            <a:pPr algn="ctr"/>
+          </a:p>
+        </p:txBody>
+      </p:sp>
+      <p:sp>
+        <p:nvSpPr>
+          <p:cNvPr id="3" name="Rectangle 2"/>
+          <p:cNvSpPr/>
+          <p:nvPr/>
+        </p:nvSpPr>
+        <p:spPr>
+          <a:xfrm>
+            <a:off x="0" y="1170432"/>
+            <a:ext cx="12191695" cy="41148"/>
+          </a:xfrm>
+          <a:prstGeom prst="rect">
+            <a:avLst/>
+          </a:prstGeom>
+          <a:solidFill>
+            <a:srgbClr val="FFD000"/>
+          </a:solidFill>
+          <a:ln>
+            <a:noFill/>
+          </a:ln>
+        </p:spPr>
+        <p:style>
+          <a:lnRef idx="1">
+            <a:schemeClr val="accent1"/>
+          </a:lnRef>
+          <a:fillRef idx="3">
+            <a:schemeClr val="accent1"/>
+          </a:fillRef>
+          <a:effectRef idx="2">
+            <a:schemeClr val="accent1"/>
+          </a:effectRef>
+          <a:fontRef idx="minor">
+            <a:schemeClr val="lt1"/>
+          </a:fontRef>
+        </p:style>
+        <p:txBody>
+          <a:bodyPr rtlCol="0" anchor="ctr"/>
+          <a:lstStyle/>
+          <a:p>
+            <a:pPr algn="ctr"/>
+          </a:p>
+        </p:txBody>
+      </p:sp>
+      <p:sp>
+        <p:nvSpPr>
+          <p:cNvPr id="4" name="TextBox 3"/>
+          <p:cNvSpPr txBox="1"/>
+          <p:nvPr/>
+        </p:nvSpPr>
+        <p:spPr>
+          <a:xfrm>
+            <a:off x="457200" y="164592"/>
+            <a:ext cx="11277295" cy="384048"/>
+          </a:xfrm>
+          <a:prstGeom prst="rect">
+            <a:avLst/>
+          </a:prstGeom>
+          <a:noFill/>
+        </p:spPr>
+        <p:txBody>
+          <a:bodyPr wrap="square">
+            <a:spAutoFit/>
+          </a:bodyPr>
+          <a:lstStyle/>
+          <a:p>
+            <a:r>
+              <a:rPr sz="2600" b="1" i="0">
+                <a:solidFill>
+                  <a:srgbClr val="FFFFFF"/>
+                </a:solidFill>
+                <a:latin typeface="Calibri"/>
+              </a:rPr>
+              <a:t>Taller de hoy: Ficha de avance y plan de ajustes</a:t>
+            </a:r>
+          </a:p>
+        </p:txBody>
+      </p:sp>
+      <p:sp>
+        <p:nvSpPr>
+          <p:cNvPr id="5" name="TextBox 4"/>
+          <p:cNvSpPr txBox="1"/>
+          <p:nvPr/>
+        </p:nvSpPr>
+        <p:spPr>
+          <a:xfrm>
+            <a:off x="457200" y="566928"/>
+            <a:ext cx="11277295" cy="411480"/>
+          </a:xfrm>
+          <a:prstGeom prst="rect">
+            <a:avLst/>
+          </a:prstGeom>
+          <a:noFill/>
+        </p:spPr>
+        <p:txBody>
+          <a:bodyPr wrap="square">
+            <a:spAutoFit/>
+          </a:bodyPr>
+          <a:lstStyle/>
+          <a:p>
+            <a:r>
+              <a:rPr sz="1400" b="0" i="0">
+                <a:solidFill>
+                  <a:srgbClr val="B8D8EE"/>
+                </a:solidFill>
+                <a:latin typeface="Calibri"/>
+              </a:rPr>
+              <a:t>12 min en equipos · 12 min: hallazgos, clasificación, decisión y la pregunta al curso · ficha de avance de 5 bloques, con el plan de ajustes al cerrar</a:t>
+            </a:r>
+          </a:p>
+        </p:txBody>
+      </p:sp>
+      <p:sp>
+        <p:nvSpPr>
+          <p:cNvPr id="6" name="Rounded Rectangle 5"/>
+          <p:cNvSpPr/>
+          <p:nvPr/>
+        </p:nvSpPr>
+        <p:spPr>
+          <a:xfrm>
+            <a:off x="457200" y="1472184"/>
+            <a:ext cx="11277295" cy="566928"/>
+          </a:xfrm>
+          <a:prstGeom prst="roundRect">
+            <a:avLst>
+              <a:gd name="adj" fmla="val 12000"/>
+            </a:avLst>
+          </a:prstGeom>
+          <a:solidFill>
+            <a:srgbClr val="F2F2F2"/>
+          </a:solidFill>
+          <a:ln>
+            <a:noFill/>
+          </a:ln>
+        </p:spPr>
+        <p:style>
+          <a:lnRef idx="1">
+            <a:schemeClr val="accent1"/>
+          </a:lnRef>
+          <a:fillRef idx="3">
+            <a:schemeClr val="accent1"/>
+          </a:fillRef>
+          <a:effectRef idx="2">
+            <a:schemeClr val="accent1"/>
+          </a:effectRef>
+          <a:fontRef idx="minor">
+            <a:schemeClr val="lt1"/>
+          </a:fontRef>
+        </p:style>
+        <p:txBody>
+          <a:bodyPr rtlCol="0" anchor="ctr"/>
+          <a:lstStyle/>
+          <a:p>
+            <a:pPr algn="ctr"/>
+          </a:p>
+        </p:txBody>
+      </p:sp>
+      <p:sp>
+        <p:nvSpPr>
+          <p:cNvPr id="7" name="Rectangle 6"/>
+          <p:cNvSpPr/>
+          <p:nvPr/>
+        </p:nvSpPr>
+        <p:spPr>
+          <a:xfrm>
+            <a:off x="640080" y="1618487"/>
+            <a:ext cx="274320" cy="274320"/>
+          </a:xfrm>
+          <a:prstGeom prst="rect">
+            <a:avLst/>
+          </a:prstGeom>
+          <a:solidFill>
+            <a:srgbClr val="FFFFFF"/>
+          </a:solidFill>
+          <a:ln>
+            <a:solidFill>
+              <a:srgbClr val="333333"/>
+            </a:solidFill>
+          </a:ln>
+        </p:spPr>
+        <p:style>
+          <a:lnRef idx="1">
+            <a:schemeClr val="accent1"/>
+          </a:lnRef>
+          <a:fillRef idx="3">
+            <a:schemeClr val="accent1"/>
+          </a:fillRef>
+          <a:effectRef idx="2">
+            <a:schemeClr val="accent1"/>
+          </a:effectRef>
+          <a:fontRef idx="minor">
+            <a:schemeClr val="lt1"/>
+          </a:fontRef>
+        </p:style>
+        <p:txBody>
+          <a:bodyPr rtlCol="0" anchor="ctr"/>
+          <a:lstStyle/>
+          <a:p>
+            <a:pPr algn="ctr"/>
+          </a:p>
+        </p:txBody>
+      </p:sp>
+      <p:sp>
+        <p:nvSpPr>
+          <p:cNvPr id="8" name="Rectangle 7"/>
+          <p:cNvSpPr/>
+          <p:nvPr/>
+        </p:nvSpPr>
+        <p:spPr>
+          <a:xfrm>
+            <a:off x="640080" y="1618487"/>
+            <a:ext cx="73152" cy="274320"/>
           </a:xfrm>
           <a:prstGeom prst="rect">
             <a:avLst/>
@@ -6273,40 +6983,16 @@
           </a:p>
         </p:txBody>
       </p:sp>
-      <p:pic>
-        <p:nvPicPr>
-          <p:cNvPr id="3" name="Picture 2" descr="logo_uniajc_color.png"/>
-          <p:cNvPicPr>
-            <a:picLocks noChangeAspect="1"/>
-          </p:cNvPicPr>
-          <p:nvPr/>
-        </p:nvPicPr>
-        <p:blipFill>
-          <a:blip r:embed="rId2"/>
-          <a:stretch>
-            <a:fillRect/>
-          </a:stretch>
-        </p:blipFill>
-        <p:spPr>
-          <a:xfrm>
-            <a:off x="10271455" y="5998464"/>
-            <a:ext cx="1463040" cy="643233"/>
-          </a:xfrm>
-          <a:prstGeom prst="rect">
-            <a:avLst/>
-          </a:prstGeom>
-        </p:spPr>
-      </p:pic>
-      <p:sp>
-        <p:nvSpPr>
-          <p:cNvPr id="4" name="TextBox 3"/>
+      <p:sp>
+        <p:nvSpPr>
+          <p:cNvPr id="9" name="TextBox 8"/>
           <p:cNvSpPr txBox="1"/>
           <p:nvPr/>
         </p:nvSpPr>
         <p:spPr>
           <a:xfrm>
-            <a:off x="457200" y="1737360"/>
-            <a:ext cx="11277295" cy="1097280"/>
+            <a:off x="1097280" y="1563624"/>
+            <a:ext cx="10362895" cy="402336"/>
           </a:xfrm>
           <a:prstGeom prst="rect">
             <a:avLst/>
@@ -6317,29 +7003,805 @@
           <a:bodyPr wrap="square" anchor="ctr"/>
           <a:lstStyle/>
           <a:p>
+            <a:r>
+              <a:rPr sz="1500" b="1" i="0">
+                <a:solidFill>
+                  <a:srgbClr val="333333"/>
+                </a:solidFill>
+                <a:latin typeface="Calibri"/>
+              </a:rPr>
+              <a:t>LOS TRES HALLAZGOS</a:t>
+            </a:r>
+            <a:r>
+              <a:rPr sz="1500" b="0" i="0">
+                <a:solidFill>
+                  <a:srgbClr val="333333"/>
+                </a:solidFill>
+                <a:latin typeface="Calibri"/>
+              </a:rPr>
+              <a:t> — Tres tropiezos de la prueba, escritos como </a:t>
+            </a:r>
+            <a:r>
+              <a:rPr sz="1500" b="1" i="0">
+                <a:solidFill>
+                  <a:srgbClr val="333333"/>
+                </a:solidFill>
+                <a:latin typeface="Calibri"/>
+              </a:rPr>
+              <a:t>lo que la persona hizo o preguntó</a:t>
+            </a:r>
+            <a:r>
+              <a:rPr sz="1500" b="0" i="0">
+                <a:solidFill>
+                  <a:srgbClr val="333333"/>
+                </a:solidFill>
+                <a:latin typeface="Calibri"/>
+              </a:rPr>
+              <a:t> — no como lo que dijo al final, y no como la solución.</a:t>
+            </a:r>
+          </a:p>
+        </p:txBody>
+      </p:sp>
+      <p:sp>
+        <p:nvSpPr>
+          <p:cNvPr id="10" name="Rounded Rectangle 9"/>
+          <p:cNvSpPr/>
+          <p:nvPr/>
+        </p:nvSpPr>
+        <p:spPr>
+          <a:xfrm>
+            <a:off x="457200" y="2148839"/>
+            <a:ext cx="11277295" cy="566928"/>
+          </a:xfrm>
+          <a:prstGeom prst="roundRect">
+            <a:avLst>
+              <a:gd name="adj" fmla="val 12000"/>
+            </a:avLst>
+          </a:prstGeom>
+          <a:solidFill>
+            <a:srgbClr val="F2F2F2"/>
+          </a:solidFill>
+          <a:ln>
+            <a:noFill/>
+          </a:ln>
+        </p:spPr>
+        <p:style>
+          <a:lnRef idx="1">
+            <a:schemeClr val="accent1"/>
+          </a:lnRef>
+          <a:fillRef idx="3">
+            <a:schemeClr val="accent1"/>
+          </a:fillRef>
+          <a:effectRef idx="2">
+            <a:schemeClr val="accent1"/>
+          </a:effectRef>
+          <a:fontRef idx="minor">
+            <a:schemeClr val="lt1"/>
+          </a:fontRef>
+        </p:style>
+        <p:txBody>
+          <a:bodyPr rtlCol="0" anchor="ctr"/>
+          <a:lstStyle/>
+          <a:p>
             <a:pPr algn="ctr"/>
-            <a:r>
-              <a:rPr sz="3400" b="1" i="0">
-                <a:solidFill>
-                  <a:srgbClr val="095292"/>
-                </a:solidFill>
-                <a:latin typeface="Calibri"/>
-              </a:rPr>
-              <a:t>Nos vemos en la Clase 13</a:t>
-            </a:r>
-          </a:p>
-        </p:txBody>
-      </p:sp>
-      <p:sp>
-        <p:nvSpPr>
-          <p:cNvPr id="5" name="TextBox 4"/>
+          </a:p>
+        </p:txBody>
+      </p:sp>
+      <p:sp>
+        <p:nvSpPr>
+          <p:cNvPr id="11" name="Rectangle 10"/>
+          <p:cNvSpPr/>
+          <p:nvPr/>
+        </p:nvSpPr>
+        <p:spPr>
+          <a:xfrm>
+            <a:off x="640080" y="2295144"/>
+            <a:ext cx="274320" cy="274320"/>
+          </a:xfrm>
+          <a:prstGeom prst="rect">
+            <a:avLst/>
+          </a:prstGeom>
+          <a:solidFill>
+            <a:srgbClr val="FFFFFF"/>
+          </a:solidFill>
+          <a:ln>
+            <a:solidFill>
+              <a:srgbClr val="333333"/>
+            </a:solidFill>
+          </a:ln>
+        </p:spPr>
+        <p:style>
+          <a:lnRef idx="1">
+            <a:schemeClr val="accent1"/>
+          </a:lnRef>
+          <a:fillRef idx="3">
+            <a:schemeClr val="accent1"/>
+          </a:fillRef>
+          <a:effectRef idx="2">
+            <a:schemeClr val="accent1"/>
+          </a:effectRef>
+          <a:fontRef idx="minor">
+            <a:schemeClr val="lt1"/>
+          </a:fontRef>
+        </p:style>
+        <p:txBody>
+          <a:bodyPr rtlCol="0" anchor="ctr"/>
+          <a:lstStyle/>
+          <a:p>
+            <a:pPr algn="ctr"/>
+          </a:p>
+        </p:txBody>
+      </p:sp>
+      <p:sp>
+        <p:nvSpPr>
+          <p:cNvPr id="12" name="Rectangle 11"/>
+          <p:cNvSpPr/>
+          <p:nvPr/>
+        </p:nvSpPr>
+        <p:spPr>
+          <a:xfrm>
+            <a:off x="640080" y="2295144"/>
+            <a:ext cx="73152" cy="274320"/>
+          </a:xfrm>
+          <a:prstGeom prst="rect">
+            <a:avLst/>
+          </a:prstGeom>
+          <a:solidFill>
+            <a:srgbClr val="269CCB"/>
+          </a:solidFill>
+          <a:ln>
+            <a:noFill/>
+          </a:ln>
+        </p:spPr>
+        <p:style>
+          <a:lnRef idx="1">
+            <a:schemeClr val="accent1"/>
+          </a:lnRef>
+          <a:fillRef idx="3">
+            <a:schemeClr val="accent1"/>
+          </a:fillRef>
+          <a:effectRef idx="2">
+            <a:schemeClr val="accent1"/>
+          </a:effectRef>
+          <a:fontRef idx="minor">
+            <a:schemeClr val="lt1"/>
+          </a:fontRef>
+        </p:style>
+        <p:txBody>
+          <a:bodyPr rtlCol="0" anchor="ctr"/>
+          <a:lstStyle/>
+          <a:p>
+            <a:pPr algn="ctr"/>
+          </a:p>
+        </p:txBody>
+      </p:sp>
+      <p:sp>
+        <p:nvSpPr>
+          <p:cNvPr id="13" name="TextBox 12"/>
           <p:cNvSpPr txBox="1"/>
           <p:nvPr/>
         </p:nvSpPr>
         <p:spPr>
           <a:xfrm>
-            <a:off x="457200" y="3017520"/>
-            <a:ext cx="11277295" cy="1645920"/>
+            <a:off x="1097280" y="2240279"/>
+            <a:ext cx="10362895" cy="402336"/>
+          </a:xfrm>
+          <a:prstGeom prst="rect">
+            <a:avLst/>
+          </a:prstGeom>
+          <a:noFill/>
+        </p:spPr>
+        <p:txBody>
+          <a:bodyPr wrap="square" anchor="ctr"/>
+          <a:lstStyle/>
+          <a:p>
+            <a:r>
+              <a:rPr sz="1500" b="1" i="0">
+                <a:solidFill>
+                  <a:srgbClr val="333333"/>
+                </a:solidFill>
+                <a:latin typeface="Calibri"/>
+              </a:rPr>
+              <a:t>LA CLASIFICACIÓN Y EL PATRÓN</a:t>
+            </a:r>
+            <a:r>
+              <a:rPr sz="1500" b="0" i="0">
+                <a:solidFill>
+                  <a:srgbClr val="333333"/>
+                </a:solidFill>
+                <a:latin typeface="Calibri"/>
+              </a:rPr>
+              <a:t> — El tipo de cada hallazgo —lenguaje, flujo, expectativa o suposición nuestra— y si se repitió en más de una persona.</a:t>
+            </a:r>
+          </a:p>
+        </p:txBody>
+      </p:sp>
+      <p:sp>
+        <p:nvSpPr>
+          <p:cNvPr id="14" name="Rounded Rectangle 13"/>
+          <p:cNvSpPr/>
+          <p:nvPr/>
+        </p:nvSpPr>
+        <p:spPr>
+          <a:xfrm>
+            <a:off x="457200" y="2825496"/>
+            <a:ext cx="11277295" cy="566928"/>
+          </a:xfrm>
+          <a:prstGeom prst="roundRect">
+            <a:avLst>
+              <a:gd name="adj" fmla="val 12000"/>
+            </a:avLst>
+          </a:prstGeom>
+          <a:solidFill>
+            <a:srgbClr val="F2F2F2"/>
+          </a:solidFill>
+          <a:ln>
+            <a:noFill/>
+          </a:ln>
+        </p:spPr>
+        <p:style>
+          <a:lnRef idx="1">
+            <a:schemeClr val="accent1"/>
+          </a:lnRef>
+          <a:fillRef idx="3">
+            <a:schemeClr val="accent1"/>
+          </a:fillRef>
+          <a:effectRef idx="2">
+            <a:schemeClr val="accent1"/>
+          </a:effectRef>
+          <a:fontRef idx="minor">
+            <a:schemeClr val="lt1"/>
+          </a:fontRef>
+        </p:style>
+        <p:txBody>
+          <a:bodyPr rtlCol="0" anchor="ctr"/>
+          <a:lstStyle/>
+          <a:p>
+            <a:pPr algn="ctr"/>
+          </a:p>
+        </p:txBody>
+      </p:sp>
+      <p:sp>
+        <p:nvSpPr>
+          <p:cNvPr id="15" name="Rectangle 14"/>
+          <p:cNvSpPr/>
+          <p:nvPr/>
+        </p:nvSpPr>
+        <p:spPr>
+          <a:xfrm>
+            <a:off x="640080" y="2971800"/>
+            <a:ext cx="274320" cy="274320"/>
+          </a:xfrm>
+          <a:prstGeom prst="rect">
+            <a:avLst/>
+          </a:prstGeom>
+          <a:solidFill>
+            <a:srgbClr val="FFFFFF"/>
+          </a:solidFill>
+          <a:ln>
+            <a:solidFill>
+              <a:srgbClr val="333333"/>
+            </a:solidFill>
+          </a:ln>
+        </p:spPr>
+        <p:style>
+          <a:lnRef idx="1">
+            <a:schemeClr val="accent1"/>
+          </a:lnRef>
+          <a:fillRef idx="3">
+            <a:schemeClr val="accent1"/>
+          </a:fillRef>
+          <a:effectRef idx="2">
+            <a:schemeClr val="accent1"/>
+          </a:effectRef>
+          <a:fontRef idx="minor">
+            <a:schemeClr val="lt1"/>
+          </a:fontRef>
+        </p:style>
+        <p:txBody>
+          <a:bodyPr rtlCol="0" anchor="ctr"/>
+          <a:lstStyle/>
+          <a:p>
+            <a:pPr algn="ctr"/>
+          </a:p>
+        </p:txBody>
+      </p:sp>
+      <p:sp>
+        <p:nvSpPr>
+          <p:cNvPr id="16" name="Rectangle 15"/>
+          <p:cNvSpPr/>
+          <p:nvPr/>
+        </p:nvSpPr>
+        <p:spPr>
+          <a:xfrm>
+            <a:off x="640080" y="2971800"/>
+            <a:ext cx="73152" cy="274320"/>
+          </a:xfrm>
+          <a:prstGeom prst="rect">
+            <a:avLst/>
+          </a:prstGeom>
+          <a:solidFill>
+            <a:srgbClr val="269CCB"/>
+          </a:solidFill>
+          <a:ln>
+            <a:noFill/>
+          </a:ln>
+        </p:spPr>
+        <p:style>
+          <a:lnRef idx="1">
+            <a:schemeClr val="accent1"/>
+          </a:lnRef>
+          <a:fillRef idx="3">
+            <a:schemeClr val="accent1"/>
+          </a:fillRef>
+          <a:effectRef idx="2">
+            <a:schemeClr val="accent1"/>
+          </a:effectRef>
+          <a:fontRef idx="minor">
+            <a:schemeClr val="lt1"/>
+          </a:fontRef>
+        </p:style>
+        <p:txBody>
+          <a:bodyPr rtlCol="0" anchor="ctr"/>
+          <a:lstStyle/>
+          <a:p>
+            <a:pPr algn="ctr"/>
+          </a:p>
+        </p:txBody>
+      </p:sp>
+      <p:sp>
+        <p:nvSpPr>
+          <p:cNvPr id="17" name="TextBox 16"/>
+          <p:cNvSpPr txBox="1"/>
+          <p:nvPr/>
+        </p:nvSpPr>
+        <p:spPr>
+          <a:xfrm>
+            <a:off x="1097280" y="2916936"/>
+            <a:ext cx="10362895" cy="402336"/>
+          </a:xfrm>
+          <a:prstGeom prst="rect">
+            <a:avLst/>
+          </a:prstGeom>
+          <a:noFill/>
+        </p:spPr>
+        <p:txBody>
+          <a:bodyPr wrap="square" anchor="ctr"/>
+          <a:lstStyle/>
+          <a:p>
+            <a:r>
+              <a:rPr sz="1500" b="1" i="0">
+                <a:solidFill>
+                  <a:srgbClr val="333333"/>
+                </a:solidFill>
+                <a:latin typeface="Calibri"/>
+              </a:rPr>
+              <a:t>QUÉ ARREGLAMOS Y QUÉ NO</a:t>
+            </a:r>
+            <a:r>
+              <a:rPr sz="1500" b="0" i="0">
+                <a:solidFill>
+                  <a:srgbClr val="333333"/>
+                </a:solidFill>
+                <a:latin typeface="Calibri"/>
+              </a:rPr>
+              <a:t> — Lo que se arregla antes de la Clase 14, y </a:t>
+            </a:r>
+            <a:r>
+              <a:rPr sz="1500" b="1" i="0">
+                <a:solidFill>
+                  <a:srgbClr val="333333"/>
+                </a:solidFill>
+                <a:latin typeface="Calibri"/>
+              </a:rPr>
+              <a:t>lo que no se arregla con su razón</a:t>
+            </a:r>
+            <a:r>
+              <a:rPr sz="1500" b="0" i="0">
+                <a:solidFill>
+                  <a:srgbClr val="333333"/>
+                </a:solidFill>
+                <a:latin typeface="Calibri"/>
+              </a:rPr>
+              <a:t>: fuera del alcance, no alcanza el tiempo, o cambia una restricción.</a:t>
+            </a:r>
+          </a:p>
+        </p:txBody>
+      </p:sp>
+      <p:sp>
+        <p:nvSpPr>
+          <p:cNvPr id="18" name="Rounded Rectangle 17"/>
+          <p:cNvSpPr/>
+          <p:nvPr/>
+        </p:nvSpPr>
+        <p:spPr>
+          <a:xfrm>
+            <a:off x="457200" y="3502152"/>
+            <a:ext cx="11277295" cy="566928"/>
+          </a:xfrm>
+          <a:prstGeom prst="roundRect">
+            <a:avLst>
+              <a:gd name="adj" fmla="val 12000"/>
+            </a:avLst>
+          </a:prstGeom>
+          <a:solidFill>
+            <a:srgbClr val="F2F2F2"/>
+          </a:solidFill>
+          <a:ln>
+            <a:noFill/>
+          </a:ln>
+        </p:spPr>
+        <p:style>
+          <a:lnRef idx="1">
+            <a:schemeClr val="accent1"/>
+          </a:lnRef>
+          <a:fillRef idx="3">
+            <a:schemeClr val="accent1"/>
+          </a:fillRef>
+          <a:effectRef idx="2">
+            <a:schemeClr val="accent1"/>
+          </a:effectRef>
+          <a:fontRef idx="minor">
+            <a:schemeClr val="lt1"/>
+          </a:fontRef>
+        </p:style>
+        <p:txBody>
+          <a:bodyPr rtlCol="0" anchor="ctr"/>
+          <a:lstStyle/>
+          <a:p>
+            <a:pPr algn="ctr"/>
+          </a:p>
+        </p:txBody>
+      </p:sp>
+      <p:sp>
+        <p:nvSpPr>
+          <p:cNvPr id="19" name="Rectangle 18"/>
+          <p:cNvSpPr/>
+          <p:nvPr/>
+        </p:nvSpPr>
+        <p:spPr>
+          <a:xfrm>
+            <a:off x="640080" y="3648456"/>
+            <a:ext cx="274320" cy="274320"/>
+          </a:xfrm>
+          <a:prstGeom prst="rect">
+            <a:avLst/>
+          </a:prstGeom>
+          <a:solidFill>
+            <a:srgbClr val="FFFFFF"/>
+          </a:solidFill>
+          <a:ln>
+            <a:solidFill>
+              <a:srgbClr val="333333"/>
+            </a:solidFill>
+          </a:ln>
+        </p:spPr>
+        <p:style>
+          <a:lnRef idx="1">
+            <a:schemeClr val="accent1"/>
+          </a:lnRef>
+          <a:fillRef idx="3">
+            <a:schemeClr val="accent1"/>
+          </a:fillRef>
+          <a:effectRef idx="2">
+            <a:schemeClr val="accent1"/>
+          </a:effectRef>
+          <a:fontRef idx="minor">
+            <a:schemeClr val="lt1"/>
+          </a:fontRef>
+        </p:style>
+        <p:txBody>
+          <a:bodyPr rtlCol="0" anchor="ctr"/>
+          <a:lstStyle/>
+          <a:p>
+            <a:pPr algn="ctr"/>
+          </a:p>
+        </p:txBody>
+      </p:sp>
+      <p:sp>
+        <p:nvSpPr>
+          <p:cNvPr id="20" name="Rectangle 19"/>
+          <p:cNvSpPr/>
+          <p:nvPr/>
+        </p:nvSpPr>
+        <p:spPr>
+          <a:xfrm>
+            <a:off x="640080" y="3648456"/>
+            <a:ext cx="73152" cy="274320"/>
+          </a:xfrm>
+          <a:prstGeom prst="rect">
+            <a:avLst/>
+          </a:prstGeom>
+          <a:solidFill>
+            <a:srgbClr val="269CCB"/>
+          </a:solidFill>
+          <a:ln>
+            <a:noFill/>
+          </a:ln>
+        </p:spPr>
+        <p:style>
+          <a:lnRef idx="1">
+            <a:schemeClr val="accent1"/>
+          </a:lnRef>
+          <a:fillRef idx="3">
+            <a:schemeClr val="accent1"/>
+          </a:fillRef>
+          <a:effectRef idx="2">
+            <a:schemeClr val="accent1"/>
+          </a:effectRef>
+          <a:fontRef idx="minor">
+            <a:schemeClr val="lt1"/>
+          </a:fontRef>
+        </p:style>
+        <p:txBody>
+          <a:bodyPr rtlCol="0" anchor="ctr"/>
+          <a:lstStyle/>
+          <a:p>
+            <a:pPr algn="ctr"/>
+          </a:p>
+        </p:txBody>
+      </p:sp>
+      <p:sp>
+        <p:nvSpPr>
+          <p:cNvPr id="21" name="TextBox 20"/>
+          <p:cNvSpPr txBox="1"/>
+          <p:nvPr/>
+        </p:nvSpPr>
+        <p:spPr>
+          <a:xfrm>
+            <a:off x="1097280" y="3593592"/>
+            <a:ext cx="10362895" cy="402336"/>
+          </a:xfrm>
+          <a:prstGeom prst="rect">
+            <a:avLst/>
+          </a:prstGeom>
+          <a:noFill/>
+        </p:spPr>
+        <p:txBody>
+          <a:bodyPr wrap="square" anchor="ctr"/>
+          <a:lstStyle/>
+          <a:p>
+            <a:r>
+              <a:rPr sz="1500" b="1" i="0">
+                <a:solidFill>
+                  <a:srgbClr val="333333"/>
+                </a:solidFill>
+                <a:latin typeface="Calibri"/>
+              </a:rPr>
+              <a:t>LA PREGUNTA PARA EL CURSO</a:t>
+            </a:r>
+            <a:r>
+              <a:rPr sz="1500" b="0" i="0">
+                <a:solidFill>
+                  <a:srgbClr val="333333"/>
+                </a:solidFill>
+                <a:latin typeface="Calibri"/>
+              </a:rPr>
+              <a:t> — Una pregunta abierta, concreta, sobre una decisión que el equipo no logra tomar. Es lo que hace útiles los tres minutos de retroalimentación.</a:t>
+            </a:r>
+          </a:p>
+        </p:txBody>
+      </p:sp>
+      <p:sp>
+        <p:nvSpPr>
+          <p:cNvPr id="22" name="Rounded Rectangle 21"/>
+          <p:cNvSpPr/>
+          <p:nvPr/>
+        </p:nvSpPr>
+        <p:spPr>
+          <a:xfrm>
+            <a:off x="457200" y="4178808"/>
+            <a:ext cx="11277295" cy="566928"/>
+          </a:xfrm>
+          <a:prstGeom prst="roundRect">
+            <a:avLst>
+              <a:gd name="adj" fmla="val 12000"/>
+            </a:avLst>
+          </a:prstGeom>
+          <a:solidFill>
+            <a:srgbClr val="F2F2F2"/>
+          </a:solidFill>
+          <a:ln>
+            <a:noFill/>
+          </a:ln>
+        </p:spPr>
+        <p:style>
+          <a:lnRef idx="1">
+            <a:schemeClr val="accent1"/>
+          </a:lnRef>
+          <a:fillRef idx="3">
+            <a:schemeClr val="accent1"/>
+          </a:fillRef>
+          <a:effectRef idx="2">
+            <a:schemeClr val="accent1"/>
+          </a:effectRef>
+          <a:fontRef idx="minor">
+            <a:schemeClr val="lt1"/>
+          </a:fontRef>
+        </p:style>
+        <p:txBody>
+          <a:bodyPr rtlCol="0" anchor="ctr"/>
+          <a:lstStyle/>
+          <a:p>
+            <a:pPr algn="ctr"/>
+          </a:p>
+        </p:txBody>
+      </p:sp>
+      <p:sp>
+        <p:nvSpPr>
+          <p:cNvPr id="23" name="Rectangle 22"/>
+          <p:cNvSpPr/>
+          <p:nvPr/>
+        </p:nvSpPr>
+        <p:spPr>
+          <a:xfrm>
+            <a:off x="640080" y="4325112"/>
+            <a:ext cx="274320" cy="274320"/>
+          </a:xfrm>
+          <a:prstGeom prst="rect">
+            <a:avLst/>
+          </a:prstGeom>
+          <a:solidFill>
+            <a:srgbClr val="FFFFFF"/>
+          </a:solidFill>
+          <a:ln>
+            <a:solidFill>
+              <a:srgbClr val="333333"/>
+            </a:solidFill>
+          </a:ln>
+        </p:spPr>
+        <p:style>
+          <a:lnRef idx="1">
+            <a:schemeClr val="accent1"/>
+          </a:lnRef>
+          <a:fillRef idx="3">
+            <a:schemeClr val="accent1"/>
+          </a:fillRef>
+          <a:effectRef idx="2">
+            <a:schemeClr val="accent1"/>
+          </a:effectRef>
+          <a:fontRef idx="minor">
+            <a:schemeClr val="lt1"/>
+          </a:fontRef>
+        </p:style>
+        <p:txBody>
+          <a:bodyPr rtlCol="0" anchor="ctr"/>
+          <a:lstStyle/>
+          <a:p>
+            <a:pPr algn="ctr"/>
+          </a:p>
+        </p:txBody>
+      </p:sp>
+      <p:sp>
+        <p:nvSpPr>
+          <p:cNvPr id="24" name="Rectangle 23"/>
+          <p:cNvSpPr/>
+          <p:nvPr/>
+        </p:nvSpPr>
+        <p:spPr>
+          <a:xfrm>
+            <a:off x="640080" y="4325112"/>
+            <a:ext cx="73152" cy="274320"/>
+          </a:xfrm>
+          <a:prstGeom prst="rect">
+            <a:avLst/>
+          </a:prstGeom>
+          <a:solidFill>
+            <a:srgbClr val="269CCB"/>
+          </a:solidFill>
+          <a:ln>
+            <a:noFill/>
+          </a:ln>
+        </p:spPr>
+        <p:style>
+          <a:lnRef idx="1">
+            <a:schemeClr val="accent1"/>
+          </a:lnRef>
+          <a:fillRef idx="3">
+            <a:schemeClr val="accent1"/>
+          </a:fillRef>
+          <a:effectRef idx="2">
+            <a:schemeClr val="accent1"/>
+          </a:effectRef>
+          <a:fontRef idx="minor">
+            <a:schemeClr val="lt1"/>
+          </a:fontRef>
+        </p:style>
+        <p:txBody>
+          <a:bodyPr rtlCol="0" anchor="ctr"/>
+          <a:lstStyle/>
+          <a:p>
+            <a:pPr algn="ctr"/>
+          </a:p>
+        </p:txBody>
+      </p:sp>
+      <p:sp>
+        <p:nvSpPr>
+          <p:cNvPr id="25" name="TextBox 24"/>
+          <p:cNvSpPr txBox="1"/>
+          <p:nvPr/>
+        </p:nvSpPr>
+        <p:spPr>
+          <a:xfrm>
+            <a:off x="1097280" y="4270248"/>
+            <a:ext cx="10362895" cy="402336"/>
+          </a:xfrm>
+          <a:prstGeom prst="rect">
+            <a:avLst/>
+          </a:prstGeom>
+          <a:noFill/>
+        </p:spPr>
+        <p:txBody>
+          <a:bodyPr wrap="square" anchor="ctr"/>
+          <a:lstStyle/>
+          <a:p>
+            <a:r>
+              <a:rPr sz="1500" b="1" i="0">
+                <a:solidFill>
+                  <a:srgbClr val="333333"/>
+                </a:solidFill>
+                <a:latin typeface="Calibri"/>
+              </a:rPr>
+              <a:t>EL PLAN DE AJUSTES</a:t>
+            </a:r>
+            <a:r>
+              <a:rPr sz="1500" b="0" i="0">
+                <a:solidFill>
+                  <a:srgbClr val="333333"/>
+                </a:solidFill>
+                <a:latin typeface="Calibri"/>
+              </a:rPr>
+              <a:t> — Las </a:t>
+            </a:r>
+            <a:r>
+              <a:rPr sz="1500" b="1" i="0">
+                <a:solidFill>
+                  <a:srgbClr val="333333"/>
+                </a:solidFill>
+                <a:latin typeface="Calibri"/>
+              </a:rPr>
+              <a:t>dos cosas</a:t>
+            </a:r>
+            <a:r>
+              <a:rPr sz="1500" b="0" i="0">
+                <a:solidFill>
+                  <a:srgbClr val="333333"/>
+                </a:solidFill>
+                <a:latin typeface="Calibri"/>
+              </a:rPr>
+              <a:t> que el equipo va a ajustar con lo que oyó en la retroalimentación, y </a:t>
+            </a:r>
+            <a:r>
+              <a:rPr sz="1500" b="1" i="0">
+                <a:solidFill>
+                  <a:srgbClr val="333333"/>
+                </a:solidFill>
+                <a:latin typeface="Calibri"/>
+              </a:rPr>
+              <a:t>qué lo motivó</a:t>
+            </a:r>
+            <a:r>
+              <a:rPr sz="1500" b="0" i="0">
+                <a:solidFill>
+                  <a:srgbClr val="333333"/>
+                </a:solidFill>
+                <a:latin typeface="Calibri"/>
+              </a:rPr>
+              <a:t>: quién lo dijo y qué dijo. Se llena en los últimos minutos de la sesión, no antes.</a:t>
+            </a:r>
+          </a:p>
+        </p:txBody>
+      </p:sp>
+      <p:sp>
+        <p:nvSpPr>
+          <p:cNvPr id="26" name="TextBox 25"/>
+          <p:cNvSpPr txBox="1"/>
+          <p:nvPr/>
+        </p:nvSpPr>
+        <p:spPr>
+          <a:xfrm>
+            <a:off x="11185855" y="6473952"/>
+            <a:ext cx="640080" cy="274320"/>
           </a:xfrm>
           <a:prstGeom prst="rect">
             <a:avLst/>
@@ -6352,70 +7814,15 @@
           </a:bodyPr>
           <a:lstStyle/>
           <a:p>
-            <a:pPr algn="ctr">
-              <a:spcAft>
-                <a:spcPts val="600"/>
-              </a:spcAft>
-            </a:pPr>
-            <a:r>
-              <a:rPr sz="1600" b="0" i="0">
-                <a:solidFill>
-                  <a:srgbClr val="333333"/>
-                </a:solidFill>
-                <a:latin typeface="Calibri"/>
-              </a:rPr>
-              <a:t>Presentación de avances de proyectos · Clase 12</a:t>
-            </a:r>
-          </a:p>
-          <a:p>
-            <a:pPr algn="ctr">
-              <a:spcAft>
-                <a:spcPts val="600"/>
-              </a:spcAft>
-            </a:pPr>
-            <a:r>
-              <a:rPr sz="1600" b="0" i="0">
-                <a:solidFill>
-                  <a:srgbClr val="333333"/>
-                </a:solidFill>
-                <a:latin typeface="Calibri"/>
-              </a:rPr>
-              <a:t>FI300101 · UNIAJC · Ingeniería de Sistemas</a:t>
-            </a:r>
-          </a:p>
-        </p:txBody>
-      </p:sp>
-      <p:sp>
-        <p:nvSpPr>
-          <p:cNvPr id="6" name="TextBox 5"/>
-          <p:cNvSpPr txBox="1"/>
-          <p:nvPr/>
-        </p:nvSpPr>
-        <p:spPr>
-          <a:xfrm>
-            <a:off x="457200" y="4754880"/>
-            <a:ext cx="11277295" cy="640080"/>
-          </a:xfrm>
-          <a:prstGeom prst="rect">
-            <a:avLst/>
-          </a:prstGeom>
-          <a:noFill/>
-        </p:spPr>
-        <p:txBody>
-          <a:bodyPr wrap="square">
-            <a:spAutoFit/>
-          </a:bodyPr>
-          <a:lstStyle/>
-          <a:p>
-            <a:pPr algn="ctr"/>
-            <a:r>
-              <a:rPr sz="2000" b="1" i="0">
-                <a:solidFill>
-                  <a:srgbClr val="269CCB"/>
-                </a:solidFill>
-                <a:latin typeface="Calibri"/>
-              </a:rPr>
-              <a:t>La persona que prueba nunca se equivoca: si se perdió, el diseño la perdió</a:t>
+            <a:pPr algn="r"/>
+            <a:r>
+              <a:rPr sz="1100" b="0" i="0">
+                <a:solidFill>
+                  <a:srgbClr val="666666"/>
+                </a:solidFill>
+                <a:latin typeface="Calibri"/>
+              </a:rPr>
+              <a:t>19</a:t>
             </a:r>
           </a:p>
         </p:txBody>
@@ -7329,6 +8736,1792 @@
                 <a:latin typeface="Calibri"/>
               </a:rPr>
               <a:t>2</a:t>
+            </a:r>
+          </a:p>
+        </p:txBody>
+      </p:sp>
+    </p:spTree>
+  </p:cSld>
+  <p:clrMapOvr>
+    <a:masterClrMapping/>
+  </p:clrMapOvr>
+</p:sld>
+</file>
+
+<file path=ppt/slides/slide20.xml><?xml version="1.0" encoding="utf-8"?>
+<p:sld xmlns:a="http://schemas.openxmlformats.org/drawingml/2006/main" xmlns:p="http://schemas.openxmlformats.org/presentationml/2006/main" xmlns:r="http://schemas.openxmlformats.org/officeDocument/2006/relationships">
+  <p:cSld>
+    <p:bg>
+      <p:bgPr>
+        <a:solidFill>
+          <a:srgbClr val="FFFFFF"/>
+        </a:solidFill>
+        <a:effectLst/>
+      </p:bgPr>
+    </p:bg>
+    <p:spTree>
+      <p:nvGrpSpPr>
+        <p:cNvPr id="1" name=""/>
+        <p:cNvGrpSpPr/>
+        <p:nvPr/>
+      </p:nvGrpSpPr>
+      <p:grpSpPr/>
+      <p:sp>
+        <p:nvSpPr>
+          <p:cNvPr id="2" name="Rectangle 1"/>
+          <p:cNvSpPr/>
+          <p:nvPr/>
+        </p:nvSpPr>
+        <p:spPr>
+          <a:xfrm>
+            <a:off x="0" y="0"/>
+            <a:ext cx="12191695" cy="1170432"/>
+          </a:xfrm>
+          <a:prstGeom prst="rect">
+            <a:avLst/>
+          </a:prstGeom>
+          <a:solidFill>
+            <a:srgbClr val="095292"/>
+          </a:solidFill>
+          <a:ln>
+            <a:noFill/>
+          </a:ln>
+        </p:spPr>
+        <p:style>
+          <a:lnRef idx="1">
+            <a:schemeClr val="accent1"/>
+          </a:lnRef>
+          <a:fillRef idx="3">
+            <a:schemeClr val="accent1"/>
+          </a:fillRef>
+          <a:effectRef idx="2">
+            <a:schemeClr val="accent1"/>
+          </a:effectRef>
+          <a:fontRef idx="minor">
+            <a:schemeClr val="lt1"/>
+          </a:fontRef>
+        </p:style>
+        <p:txBody>
+          <a:bodyPr rtlCol="0" anchor="ctr"/>
+          <a:lstStyle/>
+          <a:p>
+            <a:pPr algn="ctr"/>
+          </a:p>
+        </p:txBody>
+      </p:sp>
+      <p:sp>
+        <p:nvSpPr>
+          <p:cNvPr id="3" name="Rectangle 2"/>
+          <p:cNvSpPr/>
+          <p:nvPr/>
+        </p:nvSpPr>
+        <p:spPr>
+          <a:xfrm>
+            <a:off x="0" y="1170432"/>
+            <a:ext cx="12191695" cy="41148"/>
+          </a:xfrm>
+          <a:prstGeom prst="rect">
+            <a:avLst/>
+          </a:prstGeom>
+          <a:solidFill>
+            <a:srgbClr val="FFD000"/>
+          </a:solidFill>
+          <a:ln>
+            <a:noFill/>
+          </a:ln>
+        </p:spPr>
+        <p:style>
+          <a:lnRef idx="1">
+            <a:schemeClr val="accent1"/>
+          </a:lnRef>
+          <a:fillRef idx="3">
+            <a:schemeClr val="accent1"/>
+          </a:fillRef>
+          <a:effectRef idx="2">
+            <a:schemeClr val="accent1"/>
+          </a:effectRef>
+          <a:fontRef idx="minor">
+            <a:schemeClr val="lt1"/>
+          </a:fontRef>
+        </p:style>
+        <p:txBody>
+          <a:bodyPr rtlCol="0" anchor="ctr"/>
+          <a:lstStyle/>
+          <a:p>
+            <a:pPr algn="ctr"/>
+          </a:p>
+        </p:txBody>
+      </p:sp>
+      <p:sp>
+        <p:nvSpPr>
+          <p:cNvPr id="4" name="TextBox 3"/>
+          <p:cNvSpPr txBox="1"/>
+          <p:nvPr/>
+        </p:nvSpPr>
+        <p:spPr>
+          <a:xfrm>
+            <a:off x="457200" y="164592"/>
+            <a:ext cx="11277295" cy="384048"/>
+          </a:xfrm>
+          <a:prstGeom prst="rect">
+            <a:avLst/>
+          </a:prstGeom>
+          <a:noFill/>
+        </p:spPr>
+        <p:txBody>
+          <a:bodyPr wrap="square">
+            <a:spAutoFit/>
+          </a:bodyPr>
+          <a:lstStyle/>
+          <a:p>
+            <a:r>
+              <a:rPr sz="2600" b="1" i="0">
+                <a:solidFill>
+                  <a:srgbClr val="FFFFFF"/>
+                </a:solidFill>
+                <a:latin typeface="Calibri"/>
+              </a:rPr>
+              <a:t>Cómo se expone en 5 minutos</a:t>
+            </a:r>
+          </a:p>
+        </p:txBody>
+      </p:sp>
+      <p:sp>
+        <p:nvSpPr>
+          <p:cNvPr id="5" name="TextBox 4"/>
+          <p:cNvSpPr txBox="1"/>
+          <p:nvPr/>
+        </p:nvSpPr>
+        <p:spPr>
+          <a:xfrm>
+            <a:off x="457200" y="566928"/>
+            <a:ext cx="11277295" cy="411480"/>
+          </a:xfrm>
+          <a:prstGeom prst="rect">
+            <a:avLst/>
+          </a:prstGeom>
+          <a:noFill/>
+        </p:spPr>
+        <p:txBody>
+          <a:bodyPr wrap="square">
+            <a:spAutoFit/>
+          </a:bodyPr>
+          <a:lstStyle/>
+          <a:p>
+            <a:r>
+              <a:rPr sz="1400" b="0" i="0">
+                <a:solidFill>
+                  <a:srgbClr val="B8D8EE"/>
+                </a:solidFill>
+                <a:latin typeface="Calibri"/>
+              </a:rPr>
+              <a:t>Habla el vocero con la pantalla ya compartida · cronómetro en pantalla · se corta al llegar a cero</a:t>
+            </a:r>
+          </a:p>
+        </p:txBody>
+      </p:sp>
+      <p:sp>
+        <p:nvSpPr>
+          <p:cNvPr id="6" name="Rounded Rectangle 5"/>
+          <p:cNvSpPr/>
+          <p:nvPr/>
+        </p:nvSpPr>
+        <p:spPr>
+          <a:xfrm>
+            <a:off x="457200" y="1444752"/>
+            <a:ext cx="11277295" cy="908913"/>
+          </a:xfrm>
+          <a:prstGeom prst="roundRect">
+            <a:avLst>
+              <a:gd name="adj" fmla="val 12000"/>
+            </a:avLst>
+          </a:prstGeom>
+          <a:solidFill>
+            <a:srgbClr val="F2F2F2"/>
+          </a:solidFill>
+          <a:ln>
+            <a:noFill/>
+          </a:ln>
+        </p:spPr>
+        <p:style>
+          <a:lnRef idx="1">
+            <a:schemeClr val="accent1"/>
+          </a:lnRef>
+          <a:fillRef idx="3">
+            <a:schemeClr val="accent1"/>
+          </a:fillRef>
+          <a:effectRef idx="2">
+            <a:schemeClr val="accent1"/>
+          </a:effectRef>
+          <a:fontRef idx="minor">
+            <a:schemeClr val="lt1"/>
+          </a:fontRef>
+        </p:style>
+        <p:txBody>
+          <a:bodyPr rtlCol="0" anchor="ctr"/>
+          <a:lstStyle/>
+          <a:p>
+            <a:pPr algn="ctr"/>
+          </a:p>
+        </p:txBody>
+      </p:sp>
+      <p:sp>
+        <p:nvSpPr>
+          <p:cNvPr id="7" name="Rounded Rectangle 6"/>
+          <p:cNvSpPr/>
+          <p:nvPr/>
+        </p:nvSpPr>
+        <p:spPr>
+          <a:xfrm>
+            <a:off x="594360" y="1679752"/>
+            <a:ext cx="438912" cy="438912"/>
+          </a:xfrm>
+          <a:prstGeom prst="roundRect">
+            <a:avLst>
+              <a:gd name="adj" fmla="val 12000"/>
+            </a:avLst>
+          </a:prstGeom>
+          <a:solidFill>
+            <a:srgbClr val="095292"/>
+          </a:solidFill>
+          <a:ln>
+            <a:noFill/>
+          </a:ln>
+        </p:spPr>
+        <p:style>
+          <a:lnRef idx="1">
+            <a:schemeClr val="accent1"/>
+          </a:lnRef>
+          <a:fillRef idx="3">
+            <a:schemeClr val="accent1"/>
+          </a:fillRef>
+          <a:effectRef idx="2">
+            <a:schemeClr val="accent1"/>
+          </a:effectRef>
+          <a:fontRef idx="minor">
+            <a:schemeClr val="lt1"/>
+          </a:fontRef>
+        </p:style>
+        <p:txBody>
+          <a:bodyPr rtlCol="0" anchor="ctr"/>
+          <a:lstStyle/>
+          <a:p>
+            <a:pPr algn="ctr"/>
+          </a:p>
+        </p:txBody>
+      </p:sp>
+      <p:sp>
+        <p:nvSpPr>
+          <p:cNvPr id="8" name="TextBox 7"/>
+          <p:cNvSpPr txBox="1"/>
+          <p:nvPr/>
+        </p:nvSpPr>
+        <p:spPr>
+          <a:xfrm>
+            <a:off x="594360" y="1679752"/>
+            <a:ext cx="438912" cy="438912"/>
+          </a:xfrm>
+          <a:prstGeom prst="rect">
+            <a:avLst/>
+          </a:prstGeom>
+          <a:noFill/>
+        </p:spPr>
+        <p:txBody>
+          <a:bodyPr wrap="square" anchor="ctr"/>
+          <a:lstStyle/>
+          <a:p>
+            <a:pPr algn="ctr"/>
+            <a:r>
+              <a:rPr sz="1600" b="1" i="0">
+                <a:solidFill>
+                  <a:srgbClr val="FFFFFF"/>
+                </a:solidFill>
+                <a:latin typeface="Calibri"/>
+              </a:rPr>
+              <a:t>1</a:t>
+            </a:r>
+          </a:p>
+        </p:txBody>
+      </p:sp>
+      <p:sp>
+        <p:nvSpPr>
+          <p:cNvPr id="9" name="TextBox 8"/>
+          <p:cNvSpPr txBox="1"/>
+          <p:nvPr/>
+        </p:nvSpPr>
+        <p:spPr>
+          <a:xfrm>
+            <a:off x="1188720" y="1536192"/>
+            <a:ext cx="10271455" cy="744321"/>
+          </a:xfrm>
+          <a:prstGeom prst="rect">
+            <a:avLst/>
+          </a:prstGeom>
+          <a:noFill/>
+        </p:spPr>
+        <p:txBody>
+          <a:bodyPr wrap="square" anchor="ctr"/>
+          <a:lstStyle/>
+          <a:p>
+            <a:r>
+              <a:rPr sz="1500" b="1" i="0">
+                <a:solidFill>
+                  <a:srgbClr val="095292"/>
+                </a:solidFill>
+                <a:latin typeface="Calibri"/>
+              </a:rPr>
+              <a:t>30 s · Recordatorio mínimo</a:t>
+            </a:r>
+          </a:p>
+          <a:p>
+            <a:pPr>
+              <a:spcBef>
+                <a:spcPts val="200"/>
+              </a:spcBef>
+            </a:pPr>
+            <a:r>
+              <a:rPr sz="1300" b="0" i="0">
+                <a:solidFill>
+                  <a:srgbClr val="333333"/>
+                </a:solidFill>
+                <a:latin typeface="Calibri"/>
+              </a:rPr>
+              <a:t>El problema en </a:t>
+            </a:r>
+            <a:r>
+              <a:rPr sz="1300" b="1" i="0">
+                <a:solidFill>
+                  <a:srgbClr val="333333"/>
+                </a:solidFill>
+                <a:latin typeface="Calibri"/>
+              </a:rPr>
+              <a:t>una frase</a:t>
+            </a:r>
+            <a:r>
+              <a:rPr sz="1300" b="0" i="0">
+                <a:solidFill>
+                  <a:srgbClr val="333333"/>
+                </a:solidFill>
+                <a:latin typeface="Calibri"/>
+              </a:rPr>
+              <a:t>. Nada más: el curso ya conoce su proyecto.</a:t>
+            </a:r>
+          </a:p>
+        </p:txBody>
+      </p:sp>
+      <p:sp>
+        <p:nvSpPr>
+          <p:cNvPr id="10" name="Rounded Rectangle 9"/>
+          <p:cNvSpPr/>
+          <p:nvPr/>
+        </p:nvSpPr>
+        <p:spPr>
+          <a:xfrm>
+            <a:off x="457200" y="2445105"/>
+            <a:ext cx="11277295" cy="908913"/>
+          </a:xfrm>
+          <a:prstGeom prst="roundRect">
+            <a:avLst>
+              <a:gd name="adj" fmla="val 12000"/>
+            </a:avLst>
+          </a:prstGeom>
+          <a:solidFill>
+            <a:srgbClr val="E8F4FA"/>
+          </a:solidFill>
+          <a:ln>
+            <a:noFill/>
+          </a:ln>
+        </p:spPr>
+        <p:style>
+          <a:lnRef idx="1">
+            <a:schemeClr val="accent1"/>
+          </a:lnRef>
+          <a:fillRef idx="3">
+            <a:schemeClr val="accent1"/>
+          </a:fillRef>
+          <a:effectRef idx="2">
+            <a:schemeClr val="accent1"/>
+          </a:effectRef>
+          <a:fontRef idx="minor">
+            <a:schemeClr val="lt1"/>
+          </a:fontRef>
+        </p:style>
+        <p:txBody>
+          <a:bodyPr rtlCol="0" anchor="ctr"/>
+          <a:lstStyle/>
+          <a:p>
+            <a:pPr algn="ctr"/>
+          </a:p>
+        </p:txBody>
+      </p:sp>
+      <p:sp>
+        <p:nvSpPr>
+          <p:cNvPr id="11" name="Rounded Rectangle 10"/>
+          <p:cNvSpPr/>
+          <p:nvPr/>
+        </p:nvSpPr>
+        <p:spPr>
+          <a:xfrm>
+            <a:off x="594360" y="2680106"/>
+            <a:ext cx="438912" cy="438912"/>
+          </a:xfrm>
+          <a:prstGeom prst="roundRect">
+            <a:avLst>
+              <a:gd name="adj" fmla="val 12000"/>
+            </a:avLst>
+          </a:prstGeom>
+          <a:solidFill>
+            <a:srgbClr val="095292"/>
+          </a:solidFill>
+          <a:ln>
+            <a:noFill/>
+          </a:ln>
+        </p:spPr>
+        <p:style>
+          <a:lnRef idx="1">
+            <a:schemeClr val="accent1"/>
+          </a:lnRef>
+          <a:fillRef idx="3">
+            <a:schemeClr val="accent1"/>
+          </a:fillRef>
+          <a:effectRef idx="2">
+            <a:schemeClr val="accent1"/>
+          </a:effectRef>
+          <a:fontRef idx="minor">
+            <a:schemeClr val="lt1"/>
+          </a:fontRef>
+        </p:style>
+        <p:txBody>
+          <a:bodyPr rtlCol="0" anchor="ctr"/>
+          <a:lstStyle/>
+          <a:p>
+            <a:pPr algn="ctr"/>
+          </a:p>
+        </p:txBody>
+      </p:sp>
+      <p:sp>
+        <p:nvSpPr>
+          <p:cNvPr id="12" name="TextBox 11"/>
+          <p:cNvSpPr txBox="1"/>
+          <p:nvPr/>
+        </p:nvSpPr>
+        <p:spPr>
+          <a:xfrm>
+            <a:off x="594360" y="2680106"/>
+            <a:ext cx="438912" cy="438912"/>
+          </a:xfrm>
+          <a:prstGeom prst="rect">
+            <a:avLst/>
+          </a:prstGeom>
+          <a:noFill/>
+        </p:spPr>
+        <p:txBody>
+          <a:bodyPr wrap="square" anchor="ctr"/>
+          <a:lstStyle/>
+          <a:p>
+            <a:pPr algn="ctr"/>
+            <a:r>
+              <a:rPr sz="1600" b="1" i="0">
+                <a:solidFill>
+                  <a:srgbClr val="FFFFFF"/>
+                </a:solidFill>
+                <a:latin typeface="Calibri"/>
+              </a:rPr>
+              <a:t>2</a:t>
+            </a:r>
+          </a:p>
+        </p:txBody>
+      </p:sp>
+      <p:sp>
+        <p:nvSpPr>
+          <p:cNvPr id="13" name="TextBox 12"/>
+          <p:cNvSpPr txBox="1"/>
+          <p:nvPr/>
+        </p:nvSpPr>
+        <p:spPr>
+          <a:xfrm>
+            <a:off x="1188720" y="2536545"/>
+            <a:ext cx="10271455" cy="744321"/>
+          </a:xfrm>
+          <a:prstGeom prst="rect">
+            <a:avLst/>
+          </a:prstGeom>
+          <a:noFill/>
+        </p:spPr>
+        <p:txBody>
+          <a:bodyPr wrap="square" anchor="ctr"/>
+          <a:lstStyle/>
+          <a:p>
+            <a:r>
+              <a:rPr sz="1500" b="1" i="0">
+                <a:solidFill>
+                  <a:srgbClr val="095292"/>
+                </a:solidFill>
+                <a:latin typeface="Calibri"/>
+              </a:rPr>
+              <a:t>2 min · Los tres hallazgos</a:t>
+            </a:r>
+          </a:p>
+          <a:p>
+            <a:pPr>
+              <a:spcBef>
+                <a:spcPts val="200"/>
+              </a:spcBef>
+            </a:pPr>
+            <a:r>
+              <a:rPr sz="1300" b="0" i="0">
+                <a:solidFill>
+                  <a:srgbClr val="333333"/>
+                </a:solidFill>
+                <a:latin typeface="Calibri"/>
+              </a:rPr>
+              <a:t>Lo que la persona </a:t>
+            </a:r>
+            <a:r>
+              <a:rPr sz="1300" b="1" i="0">
+                <a:solidFill>
+                  <a:srgbClr val="333333"/>
+                </a:solidFill>
+                <a:latin typeface="Calibri"/>
+              </a:rPr>
+              <a:t>hizo</a:t>
+            </a:r>
+            <a:r>
+              <a:rPr sz="1300" b="0" i="0">
+                <a:solidFill>
+                  <a:srgbClr val="333333"/>
+                </a:solidFill>
+                <a:latin typeface="Calibri"/>
+              </a:rPr>
+              <a:t>. Es el corazón del avance.</a:t>
+            </a:r>
+          </a:p>
+        </p:txBody>
+      </p:sp>
+      <p:sp>
+        <p:nvSpPr>
+          <p:cNvPr id="14" name="Rounded Rectangle 13"/>
+          <p:cNvSpPr/>
+          <p:nvPr/>
+        </p:nvSpPr>
+        <p:spPr>
+          <a:xfrm>
+            <a:off x="457200" y="3445459"/>
+            <a:ext cx="11277295" cy="908913"/>
+          </a:xfrm>
+          <a:prstGeom prst="roundRect">
+            <a:avLst>
+              <a:gd name="adj" fmla="val 12000"/>
+            </a:avLst>
+          </a:prstGeom>
+          <a:solidFill>
+            <a:srgbClr val="F2F2F2"/>
+          </a:solidFill>
+          <a:ln>
+            <a:noFill/>
+          </a:ln>
+        </p:spPr>
+        <p:style>
+          <a:lnRef idx="1">
+            <a:schemeClr val="accent1"/>
+          </a:lnRef>
+          <a:fillRef idx="3">
+            <a:schemeClr val="accent1"/>
+          </a:fillRef>
+          <a:effectRef idx="2">
+            <a:schemeClr val="accent1"/>
+          </a:effectRef>
+          <a:fontRef idx="minor">
+            <a:schemeClr val="lt1"/>
+          </a:fontRef>
+        </p:style>
+        <p:txBody>
+          <a:bodyPr rtlCol="0" anchor="ctr"/>
+          <a:lstStyle/>
+          <a:p>
+            <a:pPr algn="ctr"/>
+          </a:p>
+        </p:txBody>
+      </p:sp>
+      <p:sp>
+        <p:nvSpPr>
+          <p:cNvPr id="15" name="Rounded Rectangle 14"/>
+          <p:cNvSpPr/>
+          <p:nvPr/>
+        </p:nvSpPr>
+        <p:spPr>
+          <a:xfrm>
+            <a:off x="594360" y="3680460"/>
+            <a:ext cx="438912" cy="438912"/>
+          </a:xfrm>
+          <a:prstGeom prst="roundRect">
+            <a:avLst>
+              <a:gd name="adj" fmla="val 12000"/>
+            </a:avLst>
+          </a:prstGeom>
+          <a:solidFill>
+            <a:srgbClr val="095292"/>
+          </a:solidFill>
+          <a:ln>
+            <a:noFill/>
+          </a:ln>
+        </p:spPr>
+        <p:style>
+          <a:lnRef idx="1">
+            <a:schemeClr val="accent1"/>
+          </a:lnRef>
+          <a:fillRef idx="3">
+            <a:schemeClr val="accent1"/>
+          </a:fillRef>
+          <a:effectRef idx="2">
+            <a:schemeClr val="accent1"/>
+          </a:effectRef>
+          <a:fontRef idx="minor">
+            <a:schemeClr val="lt1"/>
+          </a:fontRef>
+        </p:style>
+        <p:txBody>
+          <a:bodyPr rtlCol="0" anchor="ctr"/>
+          <a:lstStyle/>
+          <a:p>
+            <a:pPr algn="ctr"/>
+          </a:p>
+        </p:txBody>
+      </p:sp>
+      <p:sp>
+        <p:nvSpPr>
+          <p:cNvPr id="16" name="TextBox 15"/>
+          <p:cNvSpPr txBox="1"/>
+          <p:nvPr/>
+        </p:nvSpPr>
+        <p:spPr>
+          <a:xfrm>
+            <a:off x="594360" y="3680460"/>
+            <a:ext cx="438912" cy="438912"/>
+          </a:xfrm>
+          <a:prstGeom prst="rect">
+            <a:avLst/>
+          </a:prstGeom>
+          <a:noFill/>
+        </p:spPr>
+        <p:txBody>
+          <a:bodyPr wrap="square" anchor="ctr"/>
+          <a:lstStyle/>
+          <a:p>
+            <a:pPr algn="ctr"/>
+            <a:r>
+              <a:rPr sz="1600" b="1" i="0">
+                <a:solidFill>
+                  <a:srgbClr val="FFFFFF"/>
+                </a:solidFill>
+                <a:latin typeface="Calibri"/>
+              </a:rPr>
+              <a:t>3</a:t>
+            </a:r>
+          </a:p>
+        </p:txBody>
+      </p:sp>
+      <p:sp>
+        <p:nvSpPr>
+          <p:cNvPr id="17" name="TextBox 16"/>
+          <p:cNvSpPr txBox="1"/>
+          <p:nvPr/>
+        </p:nvSpPr>
+        <p:spPr>
+          <a:xfrm>
+            <a:off x="1188720" y="3536899"/>
+            <a:ext cx="10271455" cy="744321"/>
+          </a:xfrm>
+          <a:prstGeom prst="rect">
+            <a:avLst/>
+          </a:prstGeom>
+          <a:noFill/>
+        </p:spPr>
+        <p:txBody>
+          <a:bodyPr wrap="square" anchor="ctr"/>
+          <a:lstStyle/>
+          <a:p>
+            <a:r>
+              <a:rPr sz="1500" b="1" i="0">
+                <a:solidFill>
+                  <a:srgbClr val="095292"/>
+                </a:solidFill>
+                <a:latin typeface="Calibri"/>
+              </a:rPr>
+              <a:t>1 min · Qué arreglan y qué no</a:t>
+            </a:r>
+          </a:p>
+          <a:p>
+            <a:pPr>
+              <a:spcBef>
+                <a:spcPts val="200"/>
+              </a:spcBef>
+            </a:pPr>
+            <a:r>
+              <a:rPr sz="1300" b="0" i="0">
+                <a:solidFill>
+                  <a:srgbClr val="333333"/>
+                </a:solidFill>
+                <a:latin typeface="Calibri"/>
+              </a:rPr>
+              <a:t>Y por qué lo que queda fuera queda fuera.</a:t>
+            </a:r>
+          </a:p>
+        </p:txBody>
+      </p:sp>
+      <p:sp>
+        <p:nvSpPr>
+          <p:cNvPr id="18" name="Rounded Rectangle 17"/>
+          <p:cNvSpPr/>
+          <p:nvPr/>
+        </p:nvSpPr>
+        <p:spPr>
+          <a:xfrm>
+            <a:off x="457200" y="4445812"/>
+            <a:ext cx="11277295" cy="908913"/>
+          </a:xfrm>
+          <a:prstGeom prst="roundRect">
+            <a:avLst>
+              <a:gd name="adj" fmla="val 12000"/>
+            </a:avLst>
+          </a:prstGeom>
+          <a:solidFill>
+            <a:srgbClr val="E8F4FA"/>
+          </a:solidFill>
+          <a:ln>
+            <a:noFill/>
+          </a:ln>
+        </p:spPr>
+        <p:style>
+          <a:lnRef idx="1">
+            <a:schemeClr val="accent1"/>
+          </a:lnRef>
+          <a:fillRef idx="3">
+            <a:schemeClr val="accent1"/>
+          </a:fillRef>
+          <a:effectRef idx="2">
+            <a:schemeClr val="accent1"/>
+          </a:effectRef>
+          <a:fontRef idx="minor">
+            <a:schemeClr val="lt1"/>
+          </a:fontRef>
+        </p:style>
+        <p:txBody>
+          <a:bodyPr rtlCol="0" anchor="ctr"/>
+          <a:lstStyle/>
+          <a:p>
+            <a:pPr algn="ctr"/>
+          </a:p>
+        </p:txBody>
+      </p:sp>
+      <p:sp>
+        <p:nvSpPr>
+          <p:cNvPr id="19" name="Rounded Rectangle 18"/>
+          <p:cNvSpPr/>
+          <p:nvPr/>
+        </p:nvSpPr>
+        <p:spPr>
+          <a:xfrm>
+            <a:off x="594360" y="4680813"/>
+            <a:ext cx="438912" cy="438912"/>
+          </a:xfrm>
+          <a:prstGeom prst="roundRect">
+            <a:avLst>
+              <a:gd name="adj" fmla="val 12000"/>
+            </a:avLst>
+          </a:prstGeom>
+          <a:solidFill>
+            <a:srgbClr val="095292"/>
+          </a:solidFill>
+          <a:ln>
+            <a:noFill/>
+          </a:ln>
+        </p:spPr>
+        <p:style>
+          <a:lnRef idx="1">
+            <a:schemeClr val="accent1"/>
+          </a:lnRef>
+          <a:fillRef idx="3">
+            <a:schemeClr val="accent1"/>
+          </a:fillRef>
+          <a:effectRef idx="2">
+            <a:schemeClr val="accent1"/>
+          </a:effectRef>
+          <a:fontRef idx="minor">
+            <a:schemeClr val="lt1"/>
+          </a:fontRef>
+        </p:style>
+        <p:txBody>
+          <a:bodyPr rtlCol="0" anchor="ctr"/>
+          <a:lstStyle/>
+          <a:p>
+            <a:pPr algn="ctr"/>
+          </a:p>
+        </p:txBody>
+      </p:sp>
+      <p:sp>
+        <p:nvSpPr>
+          <p:cNvPr id="20" name="TextBox 19"/>
+          <p:cNvSpPr txBox="1"/>
+          <p:nvPr/>
+        </p:nvSpPr>
+        <p:spPr>
+          <a:xfrm>
+            <a:off x="594360" y="4680813"/>
+            <a:ext cx="438912" cy="438912"/>
+          </a:xfrm>
+          <a:prstGeom prst="rect">
+            <a:avLst/>
+          </a:prstGeom>
+          <a:noFill/>
+        </p:spPr>
+        <p:txBody>
+          <a:bodyPr wrap="square" anchor="ctr"/>
+          <a:lstStyle/>
+          <a:p>
+            <a:pPr algn="ctr"/>
+            <a:r>
+              <a:rPr sz="1600" b="1" i="0">
+                <a:solidFill>
+                  <a:srgbClr val="FFFFFF"/>
+                </a:solidFill>
+                <a:latin typeface="Calibri"/>
+              </a:rPr>
+              <a:t>4</a:t>
+            </a:r>
+          </a:p>
+        </p:txBody>
+      </p:sp>
+      <p:sp>
+        <p:nvSpPr>
+          <p:cNvPr id="21" name="TextBox 20"/>
+          <p:cNvSpPr txBox="1"/>
+          <p:nvPr/>
+        </p:nvSpPr>
+        <p:spPr>
+          <a:xfrm>
+            <a:off x="1188720" y="4537252"/>
+            <a:ext cx="10271455" cy="744321"/>
+          </a:xfrm>
+          <a:prstGeom prst="rect">
+            <a:avLst/>
+          </a:prstGeom>
+          <a:noFill/>
+        </p:spPr>
+        <p:txBody>
+          <a:bodyPr wrap="square" anchor="ctr"/>
+          <a:lstStyle/>
+          <a:p>
+            <a:r>
+              <a:rPr sz="1500" b="1" i="0">
+                <a:solidFill>
+                  <a:srgbClr val="095292"/>
+                </a:solidFill>
+                <a:latin typeface="Calibri"/>
+              </a:rPr>
+              <a:t>1 min · La pregunta para el curso</a:t>
+            </a:r>
+          </a:p>
+          <a:p>
+            <a:pPr>
+              <a:spcBef>
+                <a:spcPts val="200"/>
+              </a:spcBef>
+            </a:pPr>
+            <a:r>
+              <a:rPr sz="1300" b="0" i="0">
+                <a:solidFill>
+                  <a:srgbClr val="333333"/>
+                </a:solidFill>
+                <a:latin typeface="Calibri"/>
+              </a:rPr>
+              <a:t>Con las dos alternativas que están considerando.</a:t>
+            </a:r>
+          </a:p>
+        </p:txBody>
+      </p:sp>
+      <p:sp>
+        <p:nvSpPr>
+          <p:cNvPr id="22" name="Rounded Rectangle 21"/>
+          <p:cNvSpPr/>
+          <p:nvPr/>
+        </p:nvSpPr>
+        <p:spPr>
+          <a:xfrm>
+            <a:off x="457200" y="5446166"/>
+            <a:ext cx="11277295" cy="908913"/>
+          </a:xfrm>
+          <a:prstGeom prst="roundRect">
+            <a:avLst>
+              <a:gd name="adj" fmla="val 12000"/>
+            </a:avLst>
+          </a:prstGeom>
+          <a:solidFill>
+            <a:srgbClr val="F2F2F2"/>
+          </a:solidFill>
+          <a:ln>
+            <a:noFill/>
+          </a:ln>
+        </p:spPr>
+        <p:style>
+          <a:lnRef idx="1">
+            <a:schemeClr val="accent1"/>
+          </a:lnRef>
+          <a:fillRef idx="3">
+            <a:schemeClr val="accent1"/>
+          </a:fillRef>
+          <a:effectRef idx="2">
+            <a:schemeClr val="accent1"/>
+          </a:effectRef>
+          <a:fontRef idx="minor">
+            <a:schemeClr val="lt1"/>
+          </a:fontRef>
+        </p:style>
+        <p:txBody>
+          <a:bodyPr rtlCol="0" anchor="ctr"/>
+          <a:lstStyle/>
+          <a:p>
+            <a:pPr algn="ctr"/>
+          </a:p>
+        </p:txBody>
+      </p:sp>
+      <p:sp>
+        <p:nvSpPr>
+          <p:cNvPr id="23" name="Rounded Rectangle 22"/>
+          <p:cNvSpPr/>
+          <p:nvPr/>
+        </p:nvSpPr>
+        <p:spPr>
+          <a:xfrm>
+            <a:off x="594360" y="5681167"/>
+            <a:ext cx="438912" cy="438912"/>
+          </a:xfrm>
+          <a:prstGeom prst="roundRect">
+            <a:avLst>
+              <a:gd name="adj" fmla="val 12000"/>
+            </a:avLst>
+          </a:prstGeom>
+          <a:solidFill>
+            <a:srgbClr val="095292"/>
+          </a:solidFill>
+          <a:ln>
+            <a:noFill/>
+          </a:ln>
+        </p:spPr>
+        <p:style>
+          <a:lnRef idx="1">
+            <a:schemeClr val="accent1"/>
+          </a:lnRef>
+          <a:fillRef idx="3">
+            <a:schemeClr val="accent1"/>
+          </a:fillRef>
+          <a:effectRef idx="2">
+            <a:schemeClr val="accent1"/>
+          </a:effectRef>
+          <a:fontRef idx="minor">
+            <a:schemeClr val="lt1"/>
+          </a:fontRef>
+        </p:style>
+        <p:txBody>
+          <a:bodyPr rtlCol="0" anchor="ctr"/>
+          <a:lstStyle/>
+          <a:p>
+            <a:pPr algn="ctr"/>
+          </a:p>
+        </p:txBody>
+      </p:sp>
+      <p:sp>
+        <p:nvSpPr>
+          <p:cNvPr id="24" name="TextBox 23"/>
+          <p:cNvSpPr txBox="1"/>
+          <p:nvPr/>
+        </p:nvSpPr>
+        <p:spPr>
+          <a:xfrm>
+            <a:off x="594360" y="5681167"/>
+            <a:ext cx="438912" cy="438912"/>
+          </a:xfrm>
+          <a:prstGeom prst="rect">
+            <a:avLst/>
+          </a:prstGeom>
+          <a:noFill/>
+        </p:spPr>
+        <p:txBody>
+          <a:bodyPr wrap="square" anchor="ctr"/>
+          <a:lstStyle/>
+          <a:p>
+            <a:pPr algn="ctr"/>
+            <a:r>
+              <a:rPr sz="1600" b="1" i="0">
+                <a:solidFill>
+                  <a:srgbClr val="FFFFFF"/>
+                </a:solidFill>
+                <a:latin typeface="Calibri"/>
+              </a:rPr>
+              <a:t>5</a:t>
+            </a:r>
+          </a:p>
+        </p:txBody>
+      </p:sp>
+      <p:sp>
+        <p:nvSpPr>
+          <p:cNvPr id="25" name="TextBox 24"/>
+          <p:cNvSpPr txBox="1"/>
+          <p:nvPr/>
+        </p:nvSpPr>
+        <p:spPr>
+          <a:xfrm>
+            <a:off x="1188720" y="5537606"/>
+            <a:ext cx="10271455" cy="744321"/>
+          </a:xfrm>
+          <a:prstGeom prst="rect">
+            <a:avLst/>
+          </a:prstGeom>
+          <a:noFill/>
+        </p:spPr>
+        <p:txBody>
+          <a:bodyPr wrap="square" anchor="ctr"/>
+          <a:lstStyle/>
+          <a:p>
+            <a:r>
+              <a:rPr sz="1500" b="1" i="0">
+                <a:solidFill>
+                  <a:srgbClr val="095292"/>
+                </a:solidFill>
+                <a:latin typeface="Calibri"/>
+              </a:rPr>
+              <a:t>30 s · Cierre</a:t>
+            </a:r>
+          </a:p>
+          <a:p>
+            <a:pPr>
+              <a:spcBef>
+                <a:spcPts val="200"/>
+              </a:spcBef>
+            </a:pPr>
+            <a:r>
+              <a:rPr sz="1300" b="0" i="0">
+                <a:solidFill>
+                  <a:srgbClr val="333333"/>
+                </a:solidFill>
+                <a:latin typeface="Calibri"/>
+              </a:rPr>
+              <a:t>Qué van a tener listo para la Clase 14.</a:t>
+            </a:r>
+          </a:p>
+        </p:txBody>
+      </p:sp>
+      <p:sp>
+        <p:nvSpPr>
+          <p:cNvPr id="26" name="TextBox 25"/>
+          <p:cNvSpPr txBox="1"/>
+          <p:nvPr/>
+        </p:nvSpPr>
+        <p:spPr>
+          <a:xfrm>
+            <a:off x="11185855" y="6473952"/>
+            <a:ext cx="640080" cy="274320"/>
+          </a:xfrm>
+          <a:prstGeom prst="rect">
+            <a:avLst/>
+          </a:prstGeom>
+          <a:noFill/>
+        </p:spPr>
+        <p:txBody>
+          <a:bodyPr wrap="square">
+            <a:spAutoFit/>
+          </a:bodyPr>
+          <a:lstStyle/>
+          <a:p>
+            <a:pPr algn="r"/>
+            <a:r>
+              <a:rPr sz="1100" b="0" i="0">
+                <a:solidFill>
+                  <a:srgbClr val="666666"/>
+                </a:solidFill>
+                <a:latin typeface="Calibri"/>
+              </a:rPr>
+              <a:t>20</a:t>
+            </a:r>
+          </a:p>
+        </p:txBody>
+      </p:sp>
+    </p:spTree>
+  </p:cSld>
+  <p:clrMapOvr>
+    <a:masterClrMapping/>
+  </p:clrMapOvr>
+</p:sld>
+</file>
+
+<file path=ppt/slides/slide21.xml><?xml version="1.0" encoding="utf-8"?>
+<p:sld xmlns:a="http://schemas.openxmlformats.org/drawingml/2006/main" xmlns:p="http://schemas.openxmlformats.org/presentationml/2006/main" xmlns:r="http://schemas.openxmlformats.org/officeDocument/2006/relationships">
+  <p:cSld>
+    <p:bg>
+      <p:bgPr>
+        <a:solidFill>
+          <a:srgbClr val="FFFFFF"/>
+        </a:solidFill>
+        <a:effectLst/>
+      </p:bgPr>
+    </p:bg>
+    <p:spTree>
+      <p:nvGrpSpPr>
+        <p:cNvPr id="1" name=""/>
+        <p:cNvGrpSpPr/>
+        <p:nvPr/>
+      </p:nvGrpSpPr>
+      <p:grpSpPr/>
+      <p:sp>
+        <p:nvSpPr>
+          <p:cNvPr id="2" name="Rectangle 1"/>
+          <p:cNvSpPr/>
+          <p:nvPr/>
+        </p:nvSpPr>
+        <p:spPr>
+          <a:xfrm>
+            <a:off x="0" y="0"/>
+            <a:ext cx="12191695" cy="960120"/>
+          </a:xfrm>
+          <a:prstGeom prst="rect">
+            <a:avLst/>
+          </a:prstGeom>
+          <a:solidFill>
+            <a:srgbClr val="095292"/>
+          </a:solidFill>
+          <a:ln>
+            <a:noFill/>
+          </a:ln>
+        </p:spPr>
+        <p:style>
+          <a:lnRef idx="1">
+            <a:schemeClr val="accent1"/>
+          </a:lnRef>
+          <a:fillRef idx="3">
+            <a:schemeClr val="accent1"/>
+          </a:fillRef>
+          <a:effectRef idx="2">
+            <a:schemeClr val="accent1"/>
+          </a:effectRef>
+          <a:fontRef idx="minor">
+            <a:schemeClr val="lt1"/>
+          </a:fontRef>
+        </p:style>
+        <p:txBody>
+          <a:bodyPr rtlCol="0" anchor="ctr"/>
+          <a:lstStyle/>
+          <a:p>
+            <a:pPr algn="ctr"/>
+          </a:p>
+        </p:txBody>
+      </p:sp>
+      <p:sp>
+        <p:nvSpPr>
+          <p:cNvPr id="3" name="Rectangle 2"/>
+          <p:cNvSpPr/>
+          <p:nvPr/>
+        </p:nvSpPr>
+        <p:spPr>
+          <a:xfrm>
+            <a:off x="0" y="960120"/>
+            <a:ext cx="12191695" cy="41148"/>
+          </a:xfrm>
+          <a:prstGeom prst="rect">
+            <a:avLst/>
+          </a:prstGeom>
+          <a:solidFill>
+            <a:srgbClr val="FFD000"/>
+          </a:solidFill>
+          <a:ln>
+            <a:noFill/>
+          </a:ln>
+        </p:spPr>
+        <p:style>
+          <a:lnRef idx="1">
+            <a:schemeClr val="accent1"/>
+          </a:lnRef>
+          <a:fillRef idx="3">
+            <a:schemeClr val="accent1"/>
+          </a:fillRef>
+          <a:effectRef idx="2">
+            <a:schemeClr val="accent1"/>
+          </a:effectRef>
+          <a:fontRef idx="minor">
+            <a:schemeClr val="lt1"/>
+          </a:fontRef>
+        </p:style>
+        <p:txBody>
+          <a:bodyPr rtlCol="0" anchor="ctr"/>
+          <a:lstStyle/>
+          <a:p>
+            <a:pPr algn="ctr"/>
+          </a:p>
+        </p:txBody>
+      </p:sp>
+      <p:sp>
+        <p:nvSpPr>
+          <p:cNvPr id="4" name="TextBox 3"/>
+          <p:cNvSpPr txBox="1"/>
+          <p:nvPr/>
+        </p:nvSpPr>
+        <p:spPr>
+          <a:xfrm>
+            <a:off x="457200" y="164592"/>
+            <a:ext cx="11277295" cy="502920"/>
+          </a:xfrm>
+          <a:prstGeom prst="rect">
+            <a:avLst/>
+          </a:prstGeom>
+          <a:noFill/>
+        </p:spPr>
+        <p:txBody>
+          <a:bodyPr wrap="square">
+            <a:spAutoFit/>
+          </a:bodyPr>
+          <a:lstStyle/>
+          <a:p>
+            <a:r>
+              <a:rPr sz="2600" b="1" i="0">
+                <a:solidFill>
+                  <a:srgbClr val="FFFFFF"/>
+                </a:solidFill>
+                <a:latin typeface="Calibri"/>
+              </a:rPr>
+              <a:t>Para la Clase 13</a:t>
+            </a:r>
+          </a:p>
+        </p:txBody>
+      </p:sp>
+      <p:sp>
+        <p:nvSpPr>
+          <p:cNvPr id="5" name="TextBox 4"/>
+          <p:cNvSpPr txBox="1"/>
+          <p:nvPr/>
+        </p:nvSpPr>
+        <p:spPr>
+          <a:xfrm>
+            <a:off x="457200" y="1170432"/>
+            <a:ext cx="11277295" cy="5230368"/>
+          </a:xfrm>
+          <a:prstGeom prst="rect">
+            <a:avLst/>
+          </a:prstGeom>
+          <a:noFill/>
+        </p:spPr>
+        <p:txBody>
+          <a:bodyPr wrap="square">
+            <a:spAutoFit/>
+          </a:bodyPr>
+          <a:lstStyle/>
+          <a:p>
+            <a:pPr>
+              <a:spcAft>
+                <a:spcPts val="800"/>
+              </a:spcAft>
+            </a:pPr>
+            <a:r>
+              <a:rPr sz="2000" b="0" i="0">
+                <a:solidFill>
+                  <a:srgbClr val="333333"/>
+                </a:solidFill>
+                <a:latin typeface="Calibri"/>
+              </a:rPr>
+              <a:t>–   </a:t>
+            </a:r>
+            <a:r>
+              <a:rPr sz="2000" b="1" i="0">
+                <a:solidFill>
+                  <a:srgbClr val="333333"/>
+                </a:solidFill>
+                <a:latin typeface="Calibri"/>
+              </a:rPr>
+              <a:t>Trabajo dirigido:</a:t>
+            </a:r>
+            <a:r>
+              <a:rPr sz="2000" b="0" i="0">
+                <a:solidFill>
+                  <a:srgbClr val="333333"/>
+                </a:solidFill>
+                <a:latin typeface="Calibri"/>
+              </a:rPr>
+              <a:t> Retroalimentación y ajustes — aplicar al prototipo los ajustes comprometidos en el muro, y dejar en el documento del equipo la ficha de avance completa con la lista de lo que no se arregla.</a:t>
+            </a:r>
+          </a:p>
+          <a:p>
+            <a:pPr>
+              <a:spcAft>
+                <a:spcPts val="800"/>
+              </a:spcAft>
+            </a:pPr>
+            <a:r>
+              <a:rPr sz="2000" b="0" i="0">
+                <a:solidFill>
+                  <a:srgbClr val="333333"/>
+                </a:solidFill>
+                <a:latin typeface="Calibri"/>
+              </a:rPr>
+              <a:t>–   </a:t>
+            </a:r>
+            <a:r>
+              <a:rPr sz="2000" b="1" i="0">
+                <a:solidFill>
+                  <a:srgbClr val="333333"/>
+                </a:solidFill>
+                <a:latin typeface="Calibri"/>
+              </a:rPr>
+              <a:t>Trabajo independiente:</a:t>
+            </a:r>
+            <a:r>
+              <a:rPr sz="2000" b="0" i="0">
+                <a:solidFill>
+                  <a:srgbClr val="333333"/>
+                </a:solidFill>
+                <a:latin typeface="Calibri"/>
+              </a:rPr>
+              <a:t> Revisión entre pares: leer el documento de </a:t>
+            </a:r>
+            <a:r>
+              <a:rPr sz="2000" b="1" i="0">
+                <a:solidFill>
+                  <a:srgbClr val="333333"/>
+                </a:solidFill>
+                <a:latin typeface="Calibri"/>
+              </a:rPr>
+              <a:t>otro equipo</a:t>
+            </a:r>
+            <a:r>
+              <a:rPr sz="2000" b="0" i="0">
+                <a:solidFill>
+                  <a:srgbClr val="333333"/>
+                </a:solidFill>
+                <a:latin typeface="Calibri"/>
+              </a:rPr>
+              <a:t> (el docente asigna la pareja) y dejarle </a:t>
+            </a:r>
+            <a:r>
+              <a:rPr sz="2000" b="1" i="0">
+                <a:solidFill>
+                  <a:srgbClr val="333333"/>
+                </a:solidFill>
+                <a:latin typeface="Calibri"/>
+              </a:rPr>
+              <a:t>dos observaciones escritas</a:t>
+            </a:r>
+            <a:r>
+              <a:rPr sz="2000" b="0" i="0">
+                <a:solidFill>
+                  <a:srgbClr val="333333"/>
+                </a:solidFill>
+                <a:latin typeface="Calibri"/>
+              </a:rPr>
+              <a:t> con el formato de hoy — observación y expectativa, una sola cosa importante cada una.</a:t>
+            </a:r>
+          </a:p>
+          <a:p>
+            <a:pPr>
+              <a:spcAft>
+                <a:spcPts val="800"/>
+              </a:spcAft>
+            </a:pPr>
+            <a:r>
+              <a:rPr sz="2000" b="0" i="0">
+                <a:solidFill>
+                  <a:srgbClr val="333333"/>
+                </a:solidFill>
+                <a:latin typeface="Calibri"/>
+              </a:rPr>
+              <a:t>–   </a:t>
+            </a:r>
+            <a:r>
+              <a:rPr sz="2000" b="1" i="0">
+                <a:solidFill>
+                  <a:srgbClr val="333333"/>
+                </a:solidFill>
+                <a:latin typeface="Calibri"/>
+              </a:rPr>
+              <a:t>Clase 13 · Evaluación de impacto social y ambiental</a:t>
+            </a:r>
+            <a:r>
+              <a:rPr sz="2000" b="0" i="0">
+                <a:solidFill>
+                  <a:srgbClr val="333333"/>
+                </a:solidFill>
+                <a:latin typeface="Calibri"/>
+              </a:rPr>
+              <a:t> — vemos el </a:t>
+            </a:r>
+            <a:r>
+              <a:rPr sz="2000" b="1" i="0">
+                <a:solidFill>
+                  <a:srgbClr val="333333"/>
+                </a:solidFill>
+                <a:latin typeface="Calibri"/>
+              </a:rPr>
+              <a:t>impacto social y ambiental</a:t>
+            </a:r>
+            <a:r>
+              <a:rPr sz="2000" b="0" i="0">
+                <a:solidFill>
+                  <a:srgbClr val="333333"/>
+                </a:solidFill>
+                <a:latin typeface="Calibri"/>
+              </a:rPr>
+              <a:t> del proyecto: a quién más afecta esto aunque no lo use, y cómo se mide.</a:t>
+            </a:r>
+          </a:p>
+          <a:p>
+            <a:pPr>
+              <a:spcAft>
+                <a:spcPts val="800"/>
+              </a:spcAft>
+            </a:pPr>
+            <a:r>
+              <a:rPr sz="2000" b="0" i="0">
+                <a:solidFill>
+                  <a:srgbClr val="333333"/>
+                </a:solidFill>
+                <a:latin typeface="Calibri"/>
+              </a:rPr>
+              <a:t>–   </a:t>
+            </a:r>
+            <a:r>
+              <a:rPr sz="2000" b="1" i="0">
+                <a:solidFill>
+                  <a:srgbClr val="333333"/>
+                </a:solidFill>
+                <a:latin typeface="Calibri"/>
+              </a:rPr>
+              <a:t>Aviso:</a:t>
+            </a:r>
+            <a:r>
+              <a:rPr sz="2000" b="0" i="0">
+                <a:solidFill>
+                  <a:srgbClr val="333333"/>
+                </a:solidFill>
+                <a:latin typeface="Calibri"/>
+              </a:rPr>
+              <a:t> Traigan a la Clase 13 el </a:t>
+            </a:r>
+            <a:r>
+              <a:rPr sz="2000" b="1" i="0">
+                <a:solidFill>
+                  <a:srgbClr val="333333"/>
+                </a:solidFill>
+                <a:latin typeface="Calibri"/>
+              </a:rPr>
+              <a:t>listado de actores no usuarios de la Clase 3</a:t>
+            </a:r>
+            <a:r>
+              <a:rPr sz="2000" b="0" i="0">
+                <a:solidFill>
+                  <a:srgbClr val="333333"/>
+                </a:solidFill>
+                <a:latin typeface="Calibri"/>
+              </a:rPr>
+              <a:t> y el </a:t>
+            </a:r>
+            <a:r>
+              <a:rPr sz="2000" b="1" i="0">
+                <a:solidFill>
+                  <a:srgbClr val="333333"/>
+                </a:solidFill>
+                <a:latin typeface="Calibri"/>
+              </a:rPr>
+              <a:t>indicador ambiental de la sesión 5</a:t>
+            </a:r>
+            <a:r>
+              <a:rPr sz="2000" b="0" i="0">
+                <a:solidFill>
+                  <a:srgbClr val="333333"/>
+                </a:solidFill>
+                <a:latin typeface="Calibri"/>
+              </a:rPr>
+              <a:t>: los dos se usan directamente en el taller. Si los perdieron, recupérenlos del documento del equipo antes de la sesión.</a:t>
+            </a:r>
+          </a:p>
+          <a:p>
+            <a:pPr>
+              <a:spcAft>
+                <a:spcPts val="800"/>
+              </a:spcAft>
+            </a:pPr>
+            <a:r>
+              <a:rPr sz="2000" b="0" i="0">
+                <a:solidFill>
+                  <a:srgbClr val="333333"/>
+                </a:solidFill>
+                <a:latin typeface="Calibri"/>
+              </a:rPr>
+              <a:t>–   </a:t>
+            </a:r>
+            <a:r>
+              <a:rPr sz="2000" b="1" i="0">
+                <a:solidFill>
+                  <a:srgbClr val="333333"/>
+                </a:solidFill>
+                <a:latin typeface="Calibri"/>
+              </a:rPr>
+              <a:t>Antes de salir:</a:t>
+            </a:r>
+            <a:r>
+              <a:rPr sz="2000" b="0" i="0">
+                <a:solidFill>
+                  <a:srgbClr val="333333"/>
+                </a:solidFill>
+                <a:latin typeface="Calibri"/>
+              </a:rPr>
+              <a:t> el enlace del documento del equipo en el chat, con permiso de lectura para el docente, y el nombre del vocero de hoy.</a:t>
+            </a:r>
+          </a:p>
+        </p:txBody>
+      </p:sp>
+      <p:sp>
+        <p:nvSpPr>
+          <p:cNvPr id="6" name="TextBox 5"/>
+          <p:cNvSpPr txBox="1"/>
+          <p:nvPr/>
+        </p:nvSpPr>
+        <p:spPr>
+          <a:xfrm>
+            <a:off x="11185855" y="6473952"/>
+            <a:ext cx="640080" cy="274320"/>
+          </a:xfrm>
+          <a:prstGeom prst="rect">
+            <a:avLst/>
+          </a:prstGeom>
+          <a:noFill/>
+        </p:spPr>
+        <p:txBody>
+          <a:bodyPr wrap="square">
+            <a:spAutoFit/>
+          </a:bodyPr>
+          <a:lstStyle/>
+          <a:p>
+            <a:pPr algn="r"/>
+            <a:r>
+              <a:rPr sz="1100" b="0" i="0">
+                <a:solidFill>
+                  <a:srgbClr val="666666"/>
+                </a:solidFill>
+                <a:latin typeface="Calibri"/>
+              </a:rPr>
+              <a:t>21</a:t>
+            </a:r>
+          </a:p>
+        </p:txBody>
+      </p:sp>
+    </p:spTree>
+  </p:cSld>
+  <p:clrMapOvr>
+    <a:masterClrMapping/>
+  </p:clrMapOvr>
+</p:sld>
+</file>
+
+<file path=ppt/slides/slide22.xml><?xml version="1.0" encoding="utf-8"?>
+<p:sld xmlns:a="http://schemas.openxmlformats.org/drawingml/2006/main" xmlns:p="http://schemas.openxmlformats.org/presentationml/2006/main" xmlns:r="http://schemas.openxmlformats.org/officeDocument/2006/relationships">
+  <p:cSld>
+    <p:bg>
+      <p:bgPr>
+        <a:solidFill>
+          <a:srgbClr val="FFFFFF"/>
+        </a:solidFill>
+        <a:effectLst/>
+      </p:bgPr>
+    </p:bg>
+    <p:spTree>
+      <p:nvGrpSpPr>
+        <p:cNvPr id="1" name=""/>
+        <p:cNvGrpSpPr/>
+        <p:nvPr/>
+      </p:nvGrpSpPr>
+      <p:grpSpPr/>
+      <p:sp>
+        <p:nvSpPr>
+          <p:cNvPr id="2" name="Rectangle 1"/>
+          <p:cNvSpPr/>
+          <p:nvPr/>
+        </p:nvSpPr>
+        <p:spPr>
+          <a:xfrm>
+            <a:off x="0" y="0"/>
+            <a:ext cx="12191695" cy="164592"/>
+          </a:xfrm>
+          <a:prstGeom prst="rect">
+            <a:avLst/>
+          </a:prstGeom>
+          <a:solidFill>
+            <a:srgbClr val="269CCB"/>
+          </a:solidFill>
+          <a:ln>
+            <a:noFill/>
+          </a:ln>
+        </p:spPr>
+        <p:style>
+          <a:lnRef idx="1">
+            <a:schemeClr val="accent1"/>
+          </a:lnRef>
+          <a:fillRef idx="3">
+            <a:schemeClr val="accent1"/>
+          </a:fillRef>
+          <a:effectRef idx="2">
+            <a:schemeClr val="accent1"/>
+          </a:effectRef>
+          <a:fontRef idx="minor">
+            <a:schemeClr val="lt1"/>
+          </a:fontRef>
+        </p:style>
+        <p:txBody>
+          <a:bodyPr rtlCol="0" anchor="ctr"/>
+          <a:lstStyle/>
+          <a:p>
+            <a:pPr algn="ctr"/>
+          </a:p>
+        </p:txBody>
+      </p:sp>
+      <p:pic>
+        <p:nvPicPr>
+          <p:cNvPr id="3" name="Picture 2" descr="logo_uniajc_color.png"/>
+          <p:cNvPicPr>
+            <a:picLocks noChangeAspect="1"/>
+          </p:cNvPicPr>
+          <p:nvPr/>
+        </p:nvPicPr>
+        <p:blipFill>
+          <a:blip r:embed="rId2"/>
+          <a:stretch>
+            <a:fillRect/>
+          </a:stretch>
+        </p:blipFill>
+        <p:spPr>
+          <a:xfrm>
+            <a:off x="10271455" y="5998464"/>
+            <a:ext cx="1463040" cy="643233"/>
+          </a:xfrm>
+          <a:prstGeom prst="rect">
+            <a:avLst/>
+          </a:prstGeom>
+        </p:spPr>
+      </p:pic>
+      <p:sp>
+        <p:nvSpPr>
+          <p:cNvPr id="4" name="TextBox 3"/>
+          <p:cNvSpPr txBox="1"/>
+          <p:nvPr/>
+        </p:nvSpPr>
+        <p:spPr>
+          <a:xfrm>
+            <a:off x="457200" y="1737360"/>
+            <a:ext cx="11277295" cy="1097280"/>
+          </a:xfrm>
+          <a:prstGeom prst="rect">
+            <a:avLst/>
+          </a:prstGeom>
+          <a:noFill/>
+        </p:spPr>
+        <p:txBody>
+          <a:bodyPr wrap="square" anchor="ctr"/>
+          <a:lstStyle/>
+          <a:p>
+            <a:pPr algn="ctr"/>
+            <a:r>
+              <a:rPr sz="3400" b="1" i="0">
+                <a:solidFill>
+                  <a:srgbClr val="095292"/>
+                </a:solidFill>
+                <a:latin typeface="Calibri"/>
+              </a:rPr>
+              <a:t>Nos vemos en la Clase 13</a:t>
+            </a:r>
+          </a:p>
+        </p:txBody>
+      </p:sp>
+      <p:sp>
+        <p:nvSpPr>
+          <p:cNvPr id="5" name="TextBox 4"/>
+          <p:cNvSpPr txBox="1"/>
+          <p:nvPr/>
+        </p:nvSpPr>
+        <p:spPr>
+          <a:xfrm>
+            <a:off x="457200" y="3017520"/>
+            <a:ext cx="11277295" cy="1645920"/>
+          </a:xfrm>
+          <a:prstGeom prst="rect">
+            <a:avLst/>
+          </a:prstGeom>
+          <a:noFill/>
+        </p:spPr>
+        <p:txBody>
+          <a:bodyPr wrap="square">
+            <a:spAutoFit/>
+          </a:bodyPr>
+          <a:lstStyle/>
+          <a:p>
+            <a:pPr algn="ctr">
+              <a:spcAft>
+                <a:spcPts val="600"/>
+              </a:spcAft>
+            </a:pPr>
+            <a:r>
+              <a:rPr sz="1600" b="0" i="0">
+                <a:solidFill>
+                  <a:srgbClr val="333333"/>
+                </a:solidFill>
+                <a:latin typeface="Calibri"/>
+              </a:rPr>
+              <a:t>Presentación de avances de proyectos · Clase 12</a:t>
+            </a:r>
+          </a:p>
+          <a:p>
+            <a:pPr algn="ctr">
+              <a:spcAft>
+                <a:spcPts val="600"/>
+              </a:spcAft>
+            </a:pPr>
+            <a:r>
+              <a:rPr sz="1600" b="0" i="0">
+                <a:solidFill>
+                  <a:srgbClr val="333333"/>
+                </a:solidFill>
+                <a:latin typeface="Calibri"/>
+              </a:rPr>
+              <a:t>FI300101 · UNIAJC · Ingeniería de Sistemas</a:t>
+            </a:r>
+          </a:p>
+        </p:txBody>
+      </p:sp>
+      <p:sp>
+        <p:nvSpPr>
+          <p:cNvPr id="6" name="TextBox 5"/>
+          <p:cNvSpPr txBox="1"/>
+          <p:nvPr/>
+        </p:nvSpPr>
+        <p:spPr>
+          <a:xfrm>
+            <a:off x="457200" y="4754880"/>
+            <a:ext cx="11277295" cy="640080"/>
+          </a:xfrm>
+          <a:prstGeom prst="rect">
+            <a:avLst/>
+          </a:prstGeom>
+          <a:noFill/>
+        </p:spPr>
+        <p:txBody>
+          <a:bodyPr wrap="square">
+            <a:spAutoFit/>
+          </a:bodyPr>
+          <a:lstStyle/>
+          <a:p>
+            <a:pPr algn="ctr"/>
+            <a:r>
+              <a:rPr sz="2000" b="1" i="0">
+                <a:solidFill>
+                  <a:srgbClr val="269CCB"/>
+                </a:solidFill>
+                <a:latin typeface="Calibri"/>
+              </a:rPr>
+              <a:t>La persona que prueba nunca se equivoca: si se perdió, el diseño la perdió</a:t>
             </a:r>
           </a:p>
         </p:txBody>

--- a/Introduccion a la Ingenieria/Clases/Clase 12 - Presentacion de avances de proyectos/Presentacion.pptx
+++ b/Introduccion a la Ingenieria/Clases/Clase 12 - Presentacion de avances de proyectos/Presentacion.pptx
@@ -3666,7 +3666,7 @@
                 </a:solidFill>
                 <a:latin typeface="Calibri"/>
               </a:rPr>
-              <a:t>–   El gancho de hoy funciona porque todos los equipos van a reconocerse en él.</a:t>
+              <a:t>–   Le pidieron a alguien ajeno que usara el prototipo y, casi con seguridad, en algún momento intervinieron: «no, ahí no, toca acá».</a:t>
             </a:r>
           </a:p>
           <a:p>
@@ -3682,7 +3682,25 @@
                 </a:solidFill>
                 <a:latin typeface="Calibri"/>
               </a:rPr>
-              <a:t>–   Le pidieron a alguien ajeno que usara el prototipo y, casi con seguridad, en algún momento intervinieron: «no, ahí no, toca acá».</a:t>
+              <a:t>–   El giro que hay que hacer explícito, y que es el eje de la sesión: </a:t>
+            </a:r>
+            <a:r>
+              <a:rPr sz="2000" b="1" i="0">
+                <a:solidFill>
+                  <a:srgbClr val="333333"/>
+                </a:solidFill>
+                <a:latin typeface="Calibri"/>
+              </a:rPr>
+              <a:t>cada intervención es un hallazgo, no un error de la persona.</a:t>
+            </a:r>
+            <a:r>
+              <a:rPr sz="2000" b="0" i="0">
+                <a:solidFill>
+                  <a:srgbClr val="333333"/>
+                </a:solidFill>
+                <a:latin typeface="Calibri"/>
+              </a:rPr>
+              <a:t> Si tuvieron que explicar algo, el prototipo no lo explicaba.</a:t>
             </a:r>
           </a:p>
           <a:p>
@@ -3698,73 +3716,7 @@
                 </a:solidFill>
                 <a:latin typeface="Calibri"/>
               </a:rPr>
-              <a:t>–   Esa frase es el dato más valioso que el equipo tiene hoy, y viene disfrazada de incomodidad.</a:t>
-            </a:r>
-          </a:p>
-          <a:p>
-            <a:pPr>
-              <a:spcAft>
-                <a:spcPts val="800"/>
-              </a:spcAft>
-            </a:pPr>
-            <a:r>
-              <a:rPr sz="2000" b="0" i="0">
-                <a:solidFill>
-                  <a:srgbClr val="333333"/>
-                </a:solidFill>
-                <a:latin typeface="Calibri"/>
-              </a:rPr>
-              <a:t>–   El giro que hay que hacer explícito, y que es el eje de la sesión: </a:t>
-            </a:r>
-            <a:r>
-              <a:rPr sz="2000" b="1" i="0">
-                <a:solidFill>
-                  <a:srgbClr val="333333"/>
-                </a:solidFill>
-                <a:latin typeface="Calibri"/>
-              </a:rPr>
-              <a:t>cada intervención es un hallazgo, no un error de la persona.</a:t>
-            </a:r>
-            <a:r>
-              <a:rPr sz="2000" b="0" i="0">
-                <a:solidFill>
-                  <a:srgbClr val="333333"/>
-                </a:solidFill>
-                <a:latin typeface="Calibri"/>
-              </a:rPr>
-              <a:t> Si tuvieron que explicar algo, el prototipo no lo explicaba.</a:t>
-            </a:r>
-          </a:p>
-          <a:p>
-            <a:pPr>
-              <a:spcAft>
-                <a:spcPts val="800"/>
-              </a:spcAft>
-            </a:pPr>
-            <a:r>
-              <a:rPr sz="2000" b="0" i="0">
-                <a:solidFill>
-                  <a:srgbClr val="333333"/>
-                </a:solidFill>
-                <a:latin typeface="Calibri"/>
-              </a:rPr>
-              <a:t>–   Y en la vida real nadie va a estar al lado del usuario para aclarárselo.</a:t>
-            </a:r>
-          </a:p>
-          <a:p>
-            <a:pPr>
-              <a:spcAft>
-                <a:spcPts val="800"/>
-              </a:spcAft>
-            </a:pPr>
-            <a:r>
-              <a:rPr sz="2000" b="0" i="0">
-                <a:solidFill>
-                  <a:srgbClr val="333333"/>
-                </a:solidFill>
-                <a:latin typeface="Calibri"/>
-              </a:rPr>
-              <a:t>–   Ese número, además de romper el hielo, le dice de inmediato quién hizo la prueba y quién no.</a:t>
+              <a:t>–   Un equipo que responde «ninguna, quedó perfecto» casi siempre no probó, o probó con la mamá de un integrante mientras le explicaba todo.</a:t>
             </a:r>
           </a:p>
         </p:txBody>
@@ -3984,22 +3936,6 @@
                 </a:solidFill>
                 <a:latin typeface="Calibri"/>
               </a:rPr>
-              <a:t>–   Un equipo que responde «ninguna, quedó perfecto» casi siempre no probó, o probó con la mamá de un integrante mientras le explicaba todo.</a:t>
-            </a:r>
-          </a:p>
-          <a:p>
-            <a:pPr>
-              <a:spcAft>
-                <a:spcPts val="800"/>
-              </a:spcAft>
-            </a:pPr>
-            <a:r>
-              <a:rPr sz="2000" b="0" i="0">
-                <a:solidFill>
-                  <a:srgbClr val="333333"/>
-                </a:solidFill>
-                <a:latin typeface="Calibri"/>
-              </a:rPr>
               <a:t>–   Y aquí conviene ser directo, porque es la primera sesión del corte 3 y las reglas se fijan hoy: </a:t>
             </a:r>
             <a:r>
@@ -4336,40 +4272,6 @@
                 </a:solidFill>
                 <a:latin typeface="Calibri"/>
               </a:rPr>
-              <a:t>–   Por eso en la industria se observa y se cronometra, en vez de preguntar «¿le gustó?» — exactamente la trampa que vieron en la sesión 8. </a:t>
-            </a:r>
-            <a:r>
-              <a:rPr sz="2000" b="1" i="0">
-                <a:solidFill>
-                  <a:srgbClr val="333333"/>
-                </a:solidFill>
-                <a:latin typeface="Calibri"/>
-              </a:rPr>
-              <a:t>Paso 2: escribir el tropiezo, no la solución.</a:t>
-            </a:r>
-            <a:r>
-              <a:rPr sz="2000" b="0" i="0">
-                <a:solidFill>
-                  <a:srgbClr val="333333"/>
-                </a:solidFill>
-                <a:latin typeface="Calibri"/>
-              </a:rPr>
-              <a:t> Los estudiantes van a saltar directo a arreglar.</a:t>
-            </a:r>
-          </a:p>
-          <a:p>
-            <a:pPr>
-              <a:spcAft>
-                <a:spcPts val="800"/>
-              </a:spcAft>
-            </a:pPr>
-            <a:r>
-              <a:rPr sz="2000" b="0" i="0">
-                <a:solidFill>
-                  <a:srgbClr val="333333"/>
-                </a:solidFill>
-                <a:latin typeface="Calibri"/>
-              </a:rPr>
               <a:t>–   Hay que frenarlos: «buscó el botón de volver arriba» es un hecho</a:t>
             </a:r>
           </a:p>
@@ -4690,7 +4592,25 @@
                 </a:solidFill>
                 <a:latin typeface="Calibri"/>
               </a:rPr>
-              <a:t>–   Uno de flujo exige reordenar pantallas.</a:t>
+              <a:t>–   Uno de expectativa muchas veces </a:t>
+            </a:r>
+            <a:r>
+              <a:rPr sz="2000" b="1" i="0">
+                <a:solidFill>
+                  <a:srgbClr val="333333"/>
+                </a:solidFill>
+                <a:latin typeface="Calibri"/>
+              </a:rPr>
+              <a:t>no se arregla</a:t>
+            </a:r>
+            <a:r>
+              <a:rPr sz="2000" b="0" i="0">
+                <a:solidFill>
+                  <a:srgbClr val="333333"/>
+                </a:solidFill>
+                <a:latin typeface="Calibri"/>
+              </a:rPr>
+              <a:t>, porque está fuera del alcance de la sesión 8, pero obliga a que el prototipo lo diga en vez de callarlo.</a:t>
             </a:r>
           </a:p>
           <a:p>
@@ -4706,75 +4626,7 @@
                 </a:solidFill>
                 <a:latin typeface="Calibri"/>
               </a:rPr>
-              <a:t>–   Uno de expectativa muchas veces </a:t>
-            </a:r>
-            <a:r>
-              <a:rPr sz="2000" b="1" i="0">
-                <a:solidFill>
-                  <a:srgbClr val="333333"/>
-                </a:solidFill>
-                <a:latin typeface="Calibri"/>
-              </a:rPr>
-              <a:t>no se arregla</a:t>
-            </a:r>
-            <a:r>
-              <a:rPr sz="2000" b="0" i="0">
-                <a:solidFill>
-                  <a:srgbClr val="333333"/>
-                </a:solidFill>
-                <a:latin typeface="Calibri"/>
-              </a:rPr>
-              <a:t>, porque está fuera del alcance de la sesión 8, pero obliga a que el prototipo lo diga en vez de callarlo.</a:t>
-            </a:r>
-          </a:p>
-          <a:p>
-            <a:pPr>
-              <a:spcAft>
-                <a:spcPts val="800"/>
-              </a:spcAft>
-            </a:pPr>
-            <a:r>
-              <a:rPr sz="2000" b="0" i="0">
-                <a:solidFill>
-                  <a:srgbClr val="333333"/>
-                </a:solidFill>
-                <a:latin typeface="Calibri"/>
-              </a:rPr>
               <a:t>–   Y uno de suposición nuestra es el más caro y el más valioso: descubrir que dábamos por obvio que el usuario tiene datos móviles, o que sabe leer una tabla, cambia una restricción del proyecto.</a:t>
-            </a:r>
-          </a:p>
-          <a:p>
-            <a:pPr>
-              <a:spcAft>
-                <a:spcPts val="800"/>
-              </a:spcAft>
-            </a:pPr>
-            <a:r>
-              <a:rPr sz="2000" b="0" i="0">
-                <a:solidFill>
-                  <a:srgbClr val="333333"/>
-                </a:solidFill>
-                <a:latin typeface="Calibri"/>
-              </a:rPr>
-              <a:t>–   Sobre el patrón, dé el criterio operativo sin pretensiones de rigor estadístico: </a:t>
-            </a:r>
-            <a:r>
-              <a:rPr sz="2000" b="1" i="0">
-                <a:solidFill>
-                  <a:srgbClr val="333333"/>
-                </a:solidFill>
-                <a:latin typeface="Calibri"/>
-              </a:rPr>
-              <a:t>un tropiezo en una persona puede ser casualidad; el mismo tropiezo en dos de tres personas es un defecto de diseño.</a:t>
-            </a:r>
-            <a:r>
-              <a:rPr sz="2000" b="0" i="0">
-                <a:solidFill>
-                  <a:srgbClr val="333333"/>
-                </a:solidFill>
-                <a:latin typeface="Calibri"/>
-              </a:rPr>
-              <a:t> Con tres o cinco pruebas no se hace estadística</a:t>
             </a:r>
           </a:p>
         </p:txBody>
@@ -4994,7 +4846,25 @@
                 </a:solidFill>
                 <a:latin typeface="Calibri"/>
               </a:rPr>
-              <a:t>–   Y hay que decirlo — pero sí se hace ingeniería: la práctica profesional de pruebas de usabilidad trabaja con muy pocos usuarios justamente porque los defectos gruesos aparecen con los primeros.</a:t>
+              <a:t>–   Sobre el patrón, dé el criterio operativo sin pretensiones de rigor estadístico: </a:t>
+            </a:r>
+            <a:r>
+              <a:rPr sz="2000" b="1" i="0">
+                <a:solidFill>
+                  <a:srgbClr val="333333"/>
+                </a:solidFill>
+                <a:latin typeface="Calibri"/>
+              </a:rPr>
+              <a:t>un tropiezo en una persona puede ser casualidad; el mismo tropiezo en dos de tres personas es un defecto de diseño.</a:t>
+            </a:r>
+            <a:r>
+              <a:rPr sz="2000" b="0" i="0">
+                <a:solidFill>
+                  <a:srgbClr val="333333"/>
+                </a:solidFill>
+                <a:latin typeface="Calibri"/>
+              </a:rPr>
+              <a:t> Con tres o cinco pruebas no se hace estadística</a:t>
             </a:r>
           </a:p>
           <a:p>
@@ -5010,25 +4880,7 @@
                 </a:solidFill>
                 <a:latin typeface="Calibri"/>
               </a:rPr>
-              <a:t>–   Si algún equipo probó con una sola persona, dígale que el hallazgo sigue valiendo, pero que no sabe si es patrón. </a:t>
-            </a:r>
-            <a:r>
-              <a:rPr sz="2000" b="1" i="0">
-                <a:solidFill>
-                  <a:srgbClr val="333333"/>
-                </a:solidFill>
-                <a:latin typeface="Calibri"/>
-              </a:rPr>
-              <a:t>Paso 5: decidir qué no se arregla.</a:t>
-            </a:r>
-            <a:r>
-              <a:rPr sz="2000" b="0" i="0">
-                <a:solidFill>
-                  <a:srgbClr val="333333"/>
-                </a:solidFill>
-                <a:latin typeface="Calibri"/>
-              </a:rPr>
-              <a:t> Es el paso que separa a un equipo que entendió el curso de uno que no.</a:t>
+              <a:t>–   Y hay que decirlo — pero sí se hace ingeniería: la práctica profesional de pruebas de usabilidad trabaja con muy pocos usuarios justamente porque los defectos gruesos aparecen con los primeros.</a:t>
             </a:r>
           </a:p>
           <a:p>
@@ -5044,7 +4896,7 @@
                 </a:solidFill>
                 <a:latin typeface="Calibri"/>
               </a:rPr>
-              <a:t>–   No todo cabe antes de la Clase 14, y </a:t>
+              <a:t>–   Si algún equipo probó con una sola persona, dígale que el hallazgo sigue valiendo, pero que no sabe si es patrón. </a:t>
             </a:r>
             <a:r>
               <a:rPr sz="2000" b="1" i="0">
@@ -5053,7 +4905,7 @@
                 </a:solidFill>
                 <a:latin typeface="Calibri"/>
               </a:rPr>
-              <a:t>lo que se deja fuera se escribe con su razón</a:t>
+              <a:t>Paso 5: decidir qué no se arregla.</a:t>
             </a:r>
             <a:r>
               <a:rPr sz="2000" b="0" i="0">
@@ -5062,7 +4914,7 @@
                 </a:solidFill>
                 <a:latin typeface="Calibri"/>
               </a:rPr>
-              <a:t>.</a:t>
+              <a:t> Es el paso que separa a un equipo que entendió el curso de uno que no.</a:t>
             </a:r>
           </a:p>
           <a:p>
@@ -5078,7 +4930,25 @@
                 </a:solidFill>
                 <a:latin typeface="Calibri"/>
               </a:rPr>
-              <a:t>–   Eso ya lo practicaron con el alcance mínimo de la sesión 8 y con los descartes de la sesión 11: es la misma disciplina.</a:t>
+              <a:t>–   No todo cabe antes de la Clase 14, y </a:t>
+            </a:r>
+            <a:r>
+              <a:rPr sz="2000" b="1" i="0">
+                <a:solidFill>
+                  <a:srgbClr val="333333"/>
+                </a:solidFill>
+                <a:latin typeface="Calibri"/>
+              </a:rPr>
+              <a:t>lo que se deja fuera se escribe con su razón</a:t>
+            </a:r>
+            <a:r>
+              <a:rPr sz="2000" b="0" i="0">
+                <a:solidFill>
+                  <a:srgbClr val="333333"/>
+                </a:solidFill>
+                <a:latin typeface="Calibri"/>
+              </a:rPr>
+              <a:t>.</a:t>
             </a:r>
           </a:p>
         </p:txBody>
@@ -5314,7 +5184,25 @@
                 </a:solidFill>
                 <a:latin typeface="Calibri"/>
               </a:rPr>
-              <a:t>–   El equipo vuelve a contar el problema, los actores, el árbol de causas y las seis fases, y cuando llega a lo interesante se le acabó el tiempo.</a:t>
+              <a:t>–   Hay que cortarlo de raíz con un argumento simple: </a:t>
+            </a:r>
+            <a:r>
+              <a:rPr sz="2000" b="1" i="0">
+                <a:solidFill>
+                  <a:srgbClr val="333333"/>
+                </a:solidFill>
+                <a:latin typeface="Calibri"/>
+              </a:rPr>
+              <a:t>el curso ya conoce su proyecto</a:t>
+            </a:r>
+            <a:r>
+              <a:rPr sz="2000" b="0" i="0">
+                <a:solidFill>
+                  <a:srgbClr val="333333"/>
+                </a:solidFill>
+                <a:latin typeface="Calibri"/>
+              </a:rPr>
+              <a:t>, lleva cinco sesiones oyéndolo.</a:t>
             </a:r>
           </a:p>
           <a:p>
@@ -5330,91 +5218,7 @@
                 </a:solidFill>
                 <a:latin typeface="Calibri"/>
               </a:rPr>
-              <a:t>–   Hay que cortarlo de raíz con un argumento simple: </a:t>
-            </a:r>
-            <a:r>
-              <a:rPr sz="2000" b="1" i="0">
-                <a:solidFill>
-                  <a:srgbClr val="333333"/>
-                </a:solidFill>
-                <a:latin typeface="Calibri"/>
-              </a:rPr>
-              <a:t>el curso ya conoce su proyecto</a:t>
-            </a:r>
-            <a:r>
-              <a:rPr sz="2000" b="0" i="0">
-                <a:solidFill>
-                  <a:srgbClr val="333333"/>
-                </a:solidFill>
-                <a:latin typeface="Calibri"/>
-              </a:rPr>
-              <a:t>, lleva cinco sesiones oyéndolo.</a:t>
-            </a:r>
-          </a:p>
-          <a:p>
-            <a:pPr>
-              <a:spcAft>
-                <a:spcPts val="800"/>
-              </a:spcAft>
-            </a:pPr>
-            <a:r>
-              <a:rPr sz="2000" b="0" i="0">
-                <a:solidFill>
-                  <a:srgbClr val="333333"/>
-                </a:solidFill>
-                <a:latin typeface="Calibri"/>
-              </a:rPr>
               <a:t>–   Repetirlo es gastar los cinco minutos en lo único que ya no aporta.</a:t>
-            </a:r>
-          </a:p>
-          <a:p>
-            <a:pPr>
-              <a:spcAft>
-                <a:spcPts val="800"/>
-              </a:spcAft>
-            </a:pPr>
-            <a:r>
-              <a:rPr sz="2000" b="0" i="0">
-                <a:solidFill>
-                  <a:srgbClr val="333333"/>
-                </a:solidFill>
-                <a:latin typeface="Calibri"/>
-              </a:rPr>
-              <a:t>–   Lo que sí es un avance: </a:t>
-            </a:r>
-            <a:r>
-              <a:rPr sz="2000" b="1" i="0">
-                <a:solidFill>
-                  <a:srgbClr val="333333"/>
-                </a:solidFill>
-                <a:latin typeface="Calibri"/>
-              </a:rPr>
-              <a:t>los tres hallazgos de la prueba</a:t>
-            </a:r>
-            <a:r>
-              <a:rPr sz="2000" b="0" i="0">
-                <a:solidFill>
-                  <a:srgbClr val="333333"/>
-                </a:solidFill>
-                <a:latin typeface="Calibri"/>
-              </a:rPr>
-              <a:t>, contados por lo que la persona hizo.</a:t>
-            </a:r>
-          </a:p>
-          <a:p>
-            <a:pPr>
-              <a:spcAft>
-                <a:spcPts val="800"/>
-              </a:spcAft>
-            </a:pPr>
-            <a:r>
-              <a:rPr sz="2000" b="0" i="0">
-                <a:solidFill>
-                  <a:srgbClr val="333333"/>
-                </a:solidFill>
-                <a:latin typeface="Calibri"/>
-              </a:rPr>
-              <a:t>–   Eso es lo único que el curso no sabe, y por lo tanto lo único que vale la pena contar.</a:t>
             </a:r>
           </a:p>
           <a:p>
@@ -5718,22 +5522,6 @@
                 </a:solidFill>
                 <a:latin typeface="Calibri"/>
               </a:rPr>
-              <a:t>–   Los equipos tienden a maquillar el avance porque hay compañeros mirando.</a:t>
-            </a:r>
-          </a:p>
-          <a:p>
-            <a:pPr>
-              <a:spcAft>
-                <a:spcPts val="800"/>
-              </a:spcAft>
-            </a:pPr>
-            <a:r>
-              <a:rPr sz="2000" b="0" i="0">
-                <a:solidFill>
-                  <a:srgbClr val="333333"/>
-                </a:solidFill>
-                <a:latin typeface="Calibri"/>
-              </a:rPr>
               <a:t>–   El argumento que funciona no es moral sino de conveniencia: </a:t>
             </a:r>
             <a:r>
@@ -6004,7 +5792,25 @@
                 </a:solidFill>
                 <a:latin typeface="Calibri"/>
               </a:rPr>
-              <a:t>–   Por eso hoy se enseña el formato, y conviene proyectarlo mientras exponen.</a:t>
+              <a:t>–   Empezar con una </a:t>
+            </a:r>
+            <a:r>
+              <a:rPr sz="2000" b="1" i="0">
+                <a:solidFill>
+                  <a:srgbClr val="333333"/>
+                </a:solidFill>
+                <a:latin typeface="Calibri"/>
+              </a:rPr>
+              <a:t>pregunta</a:t>
+            </a:r>
+            <a:r>
+              <a:rPr sz="2000" b="0" i="0">
+                <a:solidFill>
+                  <a:srgbClr val="333333"/>
+                </a:solidFill>
+                <a:latin typeface="Calibri"/>
+              </a:rPr>
+              <a:t> en vez de una opinión evita la mitad de los comentarios equivocados</a:t>
             </a:r>
           </a:p>
           <a:p>
@@ -6020,25 +5826,7 @@
                 </a:solidFill>
                 <a:latin typeface="Calibri"/>
               </a:rPr>
-              <a:t>–   El orden </a:t>
-            </a:r>
-            <a:r>
-              <a:rPr sz="2000" b="1" i="0">
-                <a:solidFill>
-                  <a:srgbClr val="333333"/>
-                </a:solidFill>
-                <a:latin typeface="Calibri"/>
-              </a:rPr>
-              <a:t>observación, expectativa, una sola cosa</a:t>
-            </a:r>
-            <a:r>
-              <a:rPr sz="2000" b="0" i="0">
-                <a:solidFill>
-                  <a:srgbClr val="333333"/>
-                </a:solidFill>
-                <a:latin typeface="Calibri"/>
-              </a:rPr>
-              <a:t> funciona por razones concretas.</a:t>
+              <a:t>–   Porque muchas veces el equipo ya tenía una razón documentada: preguntar «¿por qué eligieron mostrar la fecha ahí?» y oír «porque la información no está al minuto y no queremos mentir» cierra el tema y además enseña al que preguntó.</a:t>
             </a:r>
           </a:p>
           <a:p>
@@ -6054,7 +5842,7 @@
                 </a:solidFill>
                 <a:latin typeface="Calibri"/>
               </a:rPr>
-              <a:t>–   Empezar con una </a:t>
+              <a:t>–   Y limitarse a </a:t>
             </a:r>
             <a:r>
               <a:rPr sz="2000" b="1" i="0">
@@ -6063,7 +5851,7 @@
                 </a:solidFill>
                 <a:latin typeface="Calibri"/>
               </a:rPr>
-              <a:t>pregunta</a:t>
+              <a:t>una sola cosa</a:t>
             </a:r>
             <a:r>
               <a:rPr sz="2000" b="0" i="0">
@@ -6072,7 +5860,7 @@
                 </a:solidFill>
                 <a:latin typeface="Calibri"/>
               </a:rPr>
-              <a:t> en vez de una opinión evita la mitad de los comentarios equivocados</a:t>
+              <a:t> es aritmética: en tres minutos con cinco comentarios no se aplica ninguno.</a:t>
             </a:r>
           </a:p>
           <a:p>
@@ -6088,15 +5876,17 @@
                 </a:solidFill>
                 <a:latin typeface="Calibri"/>
               </a:rPr>
-              <a:t>–   Porque muchas veces el equipo ya tenía una razón documentada: preguntar «¿por qué eligieron mostrar la fecha ahí?» y oír «porque la información no está al minuto y no queremos mentir» cierra el tema y además enseña al que preguntó.</a:t>
-            </a:r>
-          </a:p>
-          <a:p>
-            <a:pPr>
-              <a:spcAft>
-                <a:spcPts val="800"/>
-              </a:spcAft>
-            </a:pPr>
+              <a:t>–   La regla de </a:t>
+            </a:r>
+            <a:r>
+              <a:rPr sz="2000" b="1" i="0">
+                <a:solidFill>
+                  <a:srgbClr val="333333"/>
+                </a:solidFill>
+                <a:latin typeface="Calibri"/>
+              </a:rPr>
+              <a:t>hablar del trabajo y no de la persona</a:t>
+            </a:r>
             <a:r>
               <a:rPr sz="2000" b="0" i="0">
                 <a:solidFill>
@@ -6104,93 +5894,7 @@
                 </a:solidFill>
                 <a:latin typeface="Calibri"/>
               </a:rPr>
-              <a:t>–   Describir </a:t>
-            </a:r>
-            <a:r>
-              <a:rPr sz="2000" b="1" i="0">
-                <a:solidFill>
-                  <a:srgbClr val="333333"/>
-                </a:solidFill>
-                <a:latin typeface="Calibri"/>
-              </a:rPr>
-              <a:t>lo observable</a:t>
-            </a:r>
-            <a:r>
-              <a:rPr sz="2000" b="0" i="0">
-                <a:solidFill>
-                  <a:srgbClr val="333333"/>
-                </a:solidFill>
-                <a:latin typeface="Calibri"/>
-              </a:rPr>
-              <a:t> —«no encontré cómo volver»— entrega algo que se puede arreglar, mientras que «la navegación está confusa» solo entrega una impresión.</a:t>
-            </a:r>
-          </a:p>
-          <a:p>
-            <a:pPr>
-              <a:spcAft>
-                <a:spcPts val="800"/>
-              </a:spcAft>
-            </a:pPr>
-            <a:r>
-              <a:rPr sz="2000" b="0" i="0">
-                <a:solidFill>
-                  <a:srgbClr val="333333"/>
-                </a:solidFill>
-                <a:latin typeface="Calibri"/>
-              </a:rPr>
-              <a:t>–   Decir </a:t>
-            </a:r>
-            <a:r>
-              <a:rPr sz="2000" b="1" i="0">
-                <a:solidFill>
-                  <a:srgbClr val="333333"/>
-                </a:solidFill>
-                <a:latin typeface="Calibri"/>
-              </a:rPr>
-              <a:t>qué esperaba</a:t>
-            </a:r>
-            <a:r>
-              <a:rPr sz="2000" b="0" i="0">
-                <a:solidFill>
-                  <a:srgbClr val="333333"/>
-                </a:solidFill>
-                <a:latin typeface="Calibri"/>
-              </a:rPr>
-              <a:t> aporta un dato sin dar una orden.</a:t>
-            </a:r>
-          </a:p>
-          <a:p>
-            <a:pPr>
-              <a:spcAft>
-                <a:spcPts val="800"/>
-              </a:spcAft>
-            </a:pPr>
-            <a:r>
-              <a:rPr sz="2000" b="0" i="0">
-                <a:solidFill>
-                  <a:srgbClr val="333333"/>
-                </a:solidFill>
-                <a:latin typeface="Calibri"/>
-              </a:rPr>
-              <a:t>–   Y limitarse a </a:t>
-            </a:r>
-            <a:r>
-              <a:rPr sz="2000" b="1" i="0">
-                <a:solidFill>
-                  <a:srgbClr val="333333"/>
-                </a:solidFill>
-                <a:latin typeface="Calibri"/>
-              </a:rPr>
-              <a:t>una sola cosa</a:t>
-            </a:r>
-            <a:r>
-              <a:rPr sz="2000" b="0" i="0">
-                <a:solidFill>
-                  <a:srgbClr val="333333"/>
-                </a:solidFill>
-                <a:latin typeface="Calibri"/>
-              </a:rPr>
-              <a:t> es aritmética: en tres minutos con cinco comentarios no se aplica ninguno.</a:t>
+              <a:t> hay que enunciarla en voz alta la primera vez, porque marca el clima del corte 3 completo: «este texto no lo entendí» y no «no supieron escribirlo».</a:t>
             </a:r>
           </a:p>
         </p:txBody>
@@ -6410,7 +6114,7 @@
                 </a:solidFill>
                 <a:latin typeface="Calibri"/>
               </a:rPr>
-              <a:t>–   La regla de </a:t>
+              <a:t>–   De las tres trampas, la que más daño hace es </a:t>
             </a:r>
             <a:r>
               <a:rPr sz="2000" b="1" i="0">
@@ -6419,7 +6123,7 @@
                 </a:solidFill>
                 <a:latin typeface="Calibri"/>
               </a:rPr>
-              <a:t>hablar del trabajo y no de la persona</a:t>
+              <a:t>rediseñar el proyecto ajeno</a:t>
             </a:r>
             <a:r>
               <a:rPr sz="2000" b="0" i="0">
@@ -6428,7 +6132,7 @@
                 </a:solidFill>
                 <a:latin typeface="Calibri"/>
               </a:rPr>
-              <a:t> hay que enunciarla en voz alta la primera vez, porque marca el clima del corte 3 completo: «este texto no lo entendí» y no «no supieron escribirlo».</a:t>
+              <a:t>: aparece siempre, en la forma de «yo lo habría hecho con una aplicación».</a:t>
             </a:r>
           </a:p>
           <a:p>
@@ -6444,7 +6148,25 @@
                 </a:solidFill>
                 <a:latin typeface="Calibri"/>
               </a:rPr>
-              <a:t>–   Es la diferencia entre un equipo que escucha y un equipo que se defiende.</a:t>
+              <a:t>–   Hay que cortarla con respeto y con argumento: el otro equipo tomó decisiones documentadas en las sesiones 6 a 11 que usted no vio, y </a:t>
+            </a:r>
+            <a:r>
+              <a:rPr sz="2000" b="1" i="0">
+                <a:solidFill>
+                  <a:srgbClr val="333333"/>
+                </a:solidFill>
+                <a:latin typeface="Calibri"/>
+              </a:rPr>
+              <a:t>la retroalimentación es al avance presentado, no al proyecto que usted haría</a:t>
+            </a:r>
+            <a:r>
+              <a:rPr sz="2000" b="0" i="0">
+                <a:solidFill>
+                  <a:srgbClr val="333333"/>
+                </a:solidFill>
+                <a:latin typeface="Calibri"/>
+              </a:rPr>
+              <a:t>.</a:t>
             </a:r>
           </a:p>
           <a:p>
@@ -6460,7 +6182,7 @@
                 </a:solidFill>
                 <a:latin typeface="Calibri"/>
               </a:rPr>
-              <a:t>–   De las tres trampas, la que más daño hace es </a:t>
+              <a:t>–   La segunda es el </a:t>
             </a:r>
             <a:r>
               <a:rPr sz="2000" b="1" i="0">
@@ -6469,7 +6191,7 @@
                 </a:solidFill>
                 <a:latin typeface="Calibri"/>
               </a:rPr>
-              <a:t>rediseñar el proyecto ajeno</a:t>
+              <a:t>elogio vacío</a:t>
             </a:r>
             <a:r>
               <a:rPr sz="2000" b="0" i="0">
@@ -6478,7 +6200,7 @@
                 </a:solidFill>
                 <a:latin typeface="Calibri"/>
               </a:rPr>
-              <a:t>: aparece siempre, en la forma de «yo lo habría hecho con una aplicación».</a:t>
+              <a:t>, que se arregla pidiendo el «qué» y el «por qué» —un elogio con razón sí es útil, porque le dice al equipo qué conservar—.</a:t>
             </a:r>
           </a:p>
           <a:p>
@@ -6494,7 +6216,7 @@
                 </a:solidFill>
                 <a:latin typeface="Calibri"/>
               </a:rPr>
-              <a:t>–   Hay que cortarla con respeto y con argumento: el otro equipo tomó decisiones documentadas en las sesiones 6 a 11 que usted no vio, y </a:t>
+              <a:t>–   Y la tercera es de quien recibe: </a:t>
             </a:r>
             <a:r>
               <a:rPr sz="2000" b="1" i="0">
@@ -6503,7 +6225,7 @@
                 </a:solidFill>
                 <a:latin typeface="Calibri"/>
               </a:rPr>
-              <a:t>la retroalimentación es al avance presentado, no al proyecto que usted haría</a:t>
+              <a:t>anotar, no responder</a:t>
             </a:r>
             <a:r>
               <a:rPr sz="2000" b="0" i="0">
@@ -6513,90 +6235,6 @@
                 <a:latin typeface="Calibri"/>
               </a:rPr>
               <a:t>.</a:t>
-            </a:r>
-          </a:p>
-          <a:p>
-            <a:pPr>
-              <a:spcAft>
-                <a:spcPts val="800"/>
-              </a:spcAft>
-            </a:pPr>
-            <a:r>
-              <a:rPr sz="2000" b="0" i="0">
-                <a:solidFill>
-                  <a:srgbClr val="333333"/>
-                </a:solidFill>
-                <a:latin typeface="Calibri"/>
-              </a:rPr>
-              <a:t>–   La segunda es el </a:t>
-            </a:r>
-            <a:r>
-              <a:rPr sz="2000" b="1" i="0">
-                <a:solidFill>
-                  <a:srgbClr val="333333"/>
-                </a:solidFill>
-                <a:latin typeface="Calibri"/>
-              </a:rPr>
-              <a:t>elogio vacío</a:t>
-            </a:r>
-            <a:r>
-              <a:rPr sz="2000" b="0" i="0">
-                <a:solidFill>
-                  <a:srgbClr val="333333"/>
-                </a:solidFill>
-                <a:latin typeface="Calibri"/>
-              </a:rPr>
-              <a:t>, que se arregla pidiendo el «qué» y el «por qué» —un elogio con razón sí es útil, porque le dice al equipo qué conservar—.</a:t>
-            </a:r>
-          </a:p>
-          <a:p>
-            <a:pPr>
-              <a:spcAft>
-                <a:spcPts val="800"/>
-              </a:spcAft>
-            </a:pPr>
-            <a:r>
-              <a:rPr sz="2000" b="0" i="0">
-                <a:solidFill>
-                  <a:srgbClr val="333333"/>
-                </a:solidFill>
-                <a:latin typeface="Calibri"/>
-              </a:rPr>
-              <a:t>–   Y la tercera es de quien recibe: </a:t>
-            </a:r>
-            <a:r>
-              <a:rPr sz="2000" b="1" i="0">
-                <a:solidFill>
-                  <a:srgbClr val="333333"/>
-                </a:solidFill>
-                <a:latin typeface="Calibri"/>
-              </a:rPr>
-              <a:t>anotar, no responder</a:t>
-            </a:r>
-            <a:r>
-              <a:rPr sz="2000" b="0" i="0">
-                <a:solidFill>
-                  <a:srgbClr val="333333"/>
-                </a:solidFill>
-                <a:latin typeface="Calibri"/>
-              </a:rPr>
-              <a:t>.</a:t>
-            </a:r>
-          </a:p>
-          <a:p>
-            <a:pPr>
-              <a:spcAft>
-                <a:spcPts val="800"/>
-              </a:spcAft>
-            </a:pPr>
-            <a:r>
-              <a:rPr sz="2000" b="0" i="0">
-                <a:solidFill>
-                  <a:srgbClr val="333333"/>
-                </a:solidFill>
-                <a:latin typeface="Calibri"/>
-              </a:rPr>
-              <a:t>–   Solo se pregunta para entender.</a:t>
             </a:r>
           </a:p>
           <a:p>

--- a/Introduccion a la Ingenieria/Clases/Clase 12 - Presentacion de avances de proyectos/Presentacion.pptx
+++ b/Introduccion a la Ingenieria/Clases/Clase 12 - Presentacion de avances de proyectos/Presentacion.pptx
@@ -27,6 +27,8 @@
     <p:sldId id="275" r:id="rId26"/>
     <p:sldId id="276" r:id="rId27"/>
     <p:sldId id="277" r:id="rId28"/>
+    <p:sldId id="278" r:id="rId29"/>
+    <p:sldId id="279" r:id="rId30"/>
   </p:sldIdLst>
   <p:sldSz cx="12191695" cy="6858000" type="screen4x3"/>
   <p:notesSz cx="6858000" cy="9144000"/>
@@ -6343,7 +6345,7 @@
         <p:spPr>
           <a:xfrm>
             <a:off x="0" y="0"/>
-            <a:ext cx="12191695" cy="1170432"/>
+            <a:ext cx="12191695" cy="960120"/>
           </a:xfrm>
           <a:prstGeom prst="rect">
             <a:avLst/>
@@ -6385,7 +6387,7 @@
         </p:nvSpPr>
         <p:spPr>
           <a:xfrm>
-            <a:off x="0" y="1170432"/>
+            <a:off x="0" y="960120"/>
             <a:ext cx="12191695" cy="41148"/>
           </a:xfrm>
           <a:prstGeom prst="rect">
@@ -6429,7 +6431,7 @@
         <p:spPr>
           <a:xfrm>
             <a:off x="457200" y="164592"/>
-            <a:ext cx="11277295" cy="384048"/>
+            <a:ext cx="11277295" cy="502920"/>
           </a:xfrm>
           <a:prstGeom prst="rect">
             <a:avLst/>
@@ -6449,55 +6451,21 @@
                 </a:solidFill>
                 <a:latin typeface="Calibri"/>
               </a:rPr>
-              <a:t>Taller de hoy: Ficha de avance y plan de ajustes</a:t>
-            </a:r>
-          </a:p>
-        </p:txBody>
-      </p:sp>
-      <p:sp>
-        <p:nvSpPr>
-          <p:cNvPr id="5" name="TextBox 4"/>
-          <p:cNvSpPr txBox="1"/>
-          <p:nvPr/>
-        </p:nvSpPr>
-        <p:spPr>
-          <a:xfrm>
-            <a:off x="457200" y="566928"/>
-            <a:ext cx="11277295" cy="411480"/>
-          </a:xfrm>
-          <a:prstGeom prst="rect">
-            <a:avLst/>
-          </a:prstGeom>
-          <a:noFill/>
-        </p:spPr>
-        <p:txBody>
-          <a:bodyPr wrap="square">
-            <a:spAutoFit/>
-          </a:bodyPr>
-          <a:lstStyle/>
-          <a:p>
-            <a:r>
-              <a:rPr sz="1400" b="0" i="0">
-                <a:solidFill>
-                  <a:srgbClr val="B8D8EE"/>
-                </a:solidFill>
-                <a:latin typeface="Calibri"/>
-              </a:rPr>
-              <a:t>12 min en equipos · 12 min: hallazgos, clasificación, decisión y la pregunta al curso · ficha de avance de 5 bloques, con el plan de ajustes al cerrar</a:t>
-            </a:r>
-          </a:p>
-        </p:txBody>
-      </p:sp>
-      <p:sp>
-        <p:nvSpPr>
-          <p:cNvPr id="6" name="Rounded Rectangle 5"/>
+              <a:t>Plantilla del entregable: los 5 bloques</a:t>
+            </a:r>
+          </a:p>
+        </p:txBody>
+      </p:sp>
+      <p:sp>
+        <p:nvSpPr>
+          <p:cNvPr id="5" name="Rounded Rectangle 4"/>
           <p:cNvSpPr/>
           <p:nvPr/>
         </p:nvSpPr>
         <p:spPr>
           <a:xfrm>
-            <a:off x="457200" y="1472184"/>
-            <a:ext cx="11277295" cy="566928"/>
+            <a:off x="457200" y="1261872"/>
+            <a:ext cx="11277295" cy="5093208"/>
           </a:xfrm>
           <a:prstGeom prst="roundRect">
             <a:avLst>
@@ -6505,7 +6473,7 @@
             </a:avLst>
           </a:prstGeom>
           <a:solidFill>
-            <a:srgbClr val="F2F2F2"/>
+            <a:srgbClr val="1E2A38"/>
           </a:solidFill>
           <a:ln>
             <a:noFill/>
@@ -6535,25 +6503,23 @@
       </p:sp>
       <p:sp>
         <p:nvSpPr>
-          <p:cNvPr id="7" name="Rectangle 6"/>
+          <p:cNvPr id="6" name="Rectangle 5"/>
           <p:cNvSpPr/>
           <p:nvPr/>
         </p:nvSpPr>
         <p:spPr>
           <a:xfrm>
-            <a:off x="640080" y="1618487"/>
-            <a:ext cx="274320" cy="274320"/>
+            <a:off x="457200" y="1261872"/>
+            <a:ext cx="11277295" cy="320040"/>
           </a:xfrm>
           <a:prstGeom prst="rect">
             <a:avLst/>
           </a:prstGeom>
           <a:solidFill>
-            <a:srgbClr val="FFFFFF"/>
+            <a:srgbClr val="095292"/>
           </a:solidFill>
           <a:ln>
-            <a:solidFill>
-              <a:srgbClr val="333333"/>
-            </a:solidFill>
+            <a:noFill/>
           </a:ln>
         </p:spPr>
         <p:style>
@@ -6580,859 +6546,222 @@
       </p:sp>
       <p:sp>
         <p:nvSpPr>
-          <p:cNvPr id="8" name="Rectangle 7"/>
-          <p:cNvSpPr/>
-          <p:nvPr/>
-        </p:nvSpPr>
-        <p:spPr>
-          <a:xfrm>
-            <a:off x="640080" y="1618487"/>
-            <a:ext cx="73152" cy="274320"/>
-          </a:xfrm>
-          <a:prstGeom prst="rect">
-            <a:avLst/>
-          </a:prstGeom>
-          <a:solidFill>
-            <a:srgbClr val="269CCB"/>
-          </a:solidFill>
-          <a:ln>
-            <a:noFill/>
-          </a:ln>
-        </p:spPr>
-        <p:style>
-          <a:lnRef idx="1">
-            <a:schemeClr val="accent1"/>
-          </a:lnRef>
-          <a:fillRef idx="3">
-            <a:schemeClr val="accent1"/>
-          </a:fillRef>
-          <a:effectRef idx="2">
-            <a:schemeClr val="accent1"/>
-          </a:effectRef>
-          <a:fontRef idx="minor">
-            <a:schemeClr val="lt1"/>
-          </a:fontRef>
-        </p:style>
-        <p:txBody>
-          <a:bodyPr rtlCol="0" anchor="ctr"/>
-          <a:lstStyle/>
-          <a:p>
-            <a:pPr algn="ctr"/>
+          <p:cNvPr id="7" name="TextBox 6"/>
+          <p:cNvSpPr txBox="1"/>
+          <p:nvPr/>
+        </p:nvSpPr>
+        <p:spPr>
+          <a:xfrm>
+            <a:off x="685800" y="1307592"/>
+            <a:ext cx="10820095" cy="256032"/>
+          </a:xfrm>
+          <a:prstGeom prst="rect">
+            <a:avLst/>
+          </a:prstGeom>
+          <a:noFill/>
+        </p:spPr>
+        <p:txBody>
+          <a:bodyPr wrap="square" anchor="ctr"/>
+          <a:lstStyle/>
+          <a:p>
+            <a:r>
+              <a:rPr sz="1000" b="1" i="0">
+                <a:solidFill>
+                  <a:srgbClr val="269CCB"/>
+                </a:solidFill>
+                <a:latin typeface="Calibri"/>
+              </a:rPr>
+              <a:t>● ● ●</a:t>
+            </a:r>
+          </a:p>
+        </p:txBody>
+      </p:sp>
+      <p:sp>
+        <p:nvSpPr>
+          <p:cNvPr id="8" name="TextBox 7"/>
+          <p:cNvSpPr txBox="1"/>
+          <p:nvPr/>
+        </p:nvSpPr>
+        <p:spPr>
+          <a:xfrm>
+            <a:off x="777240" y="1719072"/>
+            <a:ext cx="10637215" cy="4453128"/>
+          </a:xfrm>
+          <a:prstGeom prst="rect">
+            <a:avLst/>
+          </a:prstGeom>
+          <a:noFill/>
+        </p:spPr>
+        <p:txBody>
+          <a:bodyPr wrap="square">
+            <a:spAutoFit/>
+          </a:bodyPr>
+          <a:lstStyle/>
+          <a:p>
+            <a:pPr>
+              <a:spcAft>
+                <a:spcPts val="400"/>
+              </a:spcAft>
+            </a:pPr>
+            <a:r>
+              <a:rPr sz="1400" b="0" i="0">
+                <a:solidFill>
+                  <a:srgbClr val="FFFFFF"/>
+                </a:solidFill>
+                <a:latin typeface="Calibri"/>
+              </a:rPr>
+              <a:t># Ficha de avance y plan de ajustes</a:t>
+            </a:r>
+          </a:p>
+          <a:p>
+            <a:pPr>
+              <a:spcAft>
+                <a:spcPts val="400"/>
+              </a:spcAft>
+            </a:pPr>
+            <a:r>
+              <a:rPr sz="1400" b="0" i="0">
+                <a:solidFill>
+                  <a:srgbClr val="FFFFFF"/>
+                </a:solidFill>
+                <a:latin typeface="Calibri"/>
+              </a:rPr>
+              <a:t># Documento del equipo · un bloque por titulo, sin cambiar los nombres</a:t>
+            </a:r>
+          </a:p>
+          <a:p>
+            <a:pPr>
+              <a:spcAft>
+                <a:spcPts val="400"/>
+              </a:spcAft>
+            </a:pPr>
+            <a:r>
+              <a:rPr sz="1400" b="0" i="0">
+                <a:solidFill>
+                  <a:srgbClr val="FFFFFF"/>
+                </a:solidFill>
+                <a:latin typeface="Calibri"/>
+              </a:rPr>
+              <a:t/>
+            </a:r>
+          </a:p>
+          <a:p>
+            <a:pPr>
+              <a:spcAft>
+                <a:spcPts val="400"/>
+              </a:spcAft>
+            </a:pPr>
+            <a:r>
+              <a:rPr sz="1400" b="0" i="0">
+                <a:solidFill>
+                  <a:srgbClr val="FFFFFF"/>
+                </a:solidFill>
+                <a:latin typeface="Calibri"/>
+              </a:rPr>
+              <a:t>## 1. LOS TRES HALLAZGOS</a:t>
+            </a:r>
+          </a:p>
+          <a:p>
+            <a:pPr>
+              <a:spcAft>
+                <a:spcPts val="400"/>
+              </a:spcAft>
+            </a:pPr>
+            <a:r>
+              <a:rPr sz="1400" b="0" i="0">
+                <a:solidFill>
+                  <a:srgbClr val="FFFFFF"/>
+                </a:solidFill>
+                <a:latin typeface="Calibri"/>
+              </a:rPr>
+              <a:t>## 2. LA CLASIFICACIÓN Y EL PATRÓN</a:t>
+            </a:r>
+          </a:p>
+          <a:p>
+            <a:pPr>
+              <a:spcAft>
+                <a:spcPts val="400"/>
+              </a:spcAft>
+            </a:pPr>
+            <a:r>
+              <a:rPr sz="1400" b="0" i="0">
+                <a:solidFill>
+                  <a:srgbClr val="FFFFFF"/>
+                </a:solidFill>
+                <a:latin typeface="Calibri"/>
+              </a:rPr>
+              <a:t>## 3. QUÉ ARREGLAMOS Y QUÉ NO</a:t>
+            </a:r>
+          </a:p>
+          <a:p>
+            <a:pPr>
+              <a:spcAft>
+                <a:spcPts val="400"/>
+              </a:spcAft>
+            </a:pPr>
+            <a:r>
+              <a:rPr sz="1400" b="0" i="0">
+                <a:solidFill>
+                  <a:srgbClr val="FFFFFF"/>
+                </a:solidFill>
+                <a:latin typeface="Calibri"/>
+              </a:rPr>
+              <a:t>## 4. LA PREGUNTA PARA EL CURSO</a:t>
+            </a:r>
+          </a:p>
+          <a:p>
+            <a:pPr>
+              <a:spcAft>
+                <a:spcPts val="400"/>
+              </a:spcAft>
+            </a:pPr>
+            <a:r>
+              <a:rPr sz="1400" b="0" i="0">
+                <a:solidFill>
+                  <a:srgbClr val="FFFFFF"/>
+                </a:solidFill>
+                <a:latin typeface="Calibri"/>
+              </a:rPr>
+              <a:t>## 5. EL PLAN DE AJUSTES</a:t>
+            </a:r>
+          </a:p>
+          <a:p>
+            <a:pPr>
+              <a:spcAft>
+                <a:spcPts val="400"/>
+              </a:spcAft>
+            </a:pPr>
+            <a:r>
+              <a:rPr sz="1400" b="0" i="0">
+                <a:solidFill>
+                  <a:srgbClr val="FFFFFF"/>
+                </a:solidFill>
+                <a:latin typeface="Calibri"/>
+              </a:rPr>
+              <a:t/>
+            </a:r>
+          </a:p>
+          <a:p>
+            <a:pPr>
+              <a:spcAft>
+                <a:spcPts val="400"/>
+              </a:spcAft>
+            </a:pPr>
+            <a:r>
+              <a:rPr sz="1400" b="0" i="0">
+                <a:solidFill>
+                  <a:srgbClr val="FFFFFF"/>
+                </a:solidFill>
+                <a:latin typeface="Calibri"/>
+              </a:rPr>
+              <a:t># Los titulos van TAL CUAL: son con los que se califica.</a:t>
+            </a:r>
           </a:p>
         </p:txBody>
       </p:sp>
       <p:sp>
         <p:nvSpPr>
           <p:cNvPr id="9" name="TextBox 8"/>
-          <p:cNvSpPr txBox="1"/>
-          <p:nvPr/>
-        </p:nvSpPr>
-        <p:spPr>
-          <a:xfrm>
-            <a:off x="1097280" y="1563624"/>
-            <a:ext cx="10362895" cy="402336"/>
-          </a:xfrm>
-          <a:prstGeom prst="rect">
-            <a:avLst/>
-          </a:prstGeom>
-          <a:noFill/>
-        </p:spPr>
-        <p:txBody>
-          <a:bodyPr wrap="square" anchor="ctr"/>
-          <a:lstStyle/>
-          <a:p>
-            <a:r>
-              <a:rPr sz="1500" b="1" i="0">
-                <a:solidFill>
-                  <a:srgbClr val="333333"/>
-                </a:solidFill>
-                <a:latin typeface="Calibri"/>
-              </a:rPr>
-              <a:t>LOS TRES HALLAZGOS</a:t>
-            </a:r>
-            <a:r>
-              <a:rPr sz="1500" b="0" i="0">
-                <a:solidFill>
-                  <a:srgbClr val="333333"/>
-                </a:solidFill>
-                <a:latin typeface="Calibri"/>
-              </a:rPr>
-              <a:t> — Tres tropiezos de la prueba, escritos como </a:t>
-            </a:r>
-            <a:r>
-              <a:rPr sz="1500" b="1" i="0">
-                <a:solidFill>
-                  <a:srgbClr val="333333"/>
-                </a:solidFill>
-                <a:latin typeface="Calibri"/>
-              </a:rPr>
-              <a:t>lo que la persona hizo o preguntó</a:t>
-            </a:r>
-            <a:r>
-              <a:rPr sz="1500" b="0" i="0">
-                <a:solidFill>
-                  <a:srgbClr val="333333"/>
-                </a:solidFill>
-                <a:latin typeface="Calibri"/>
-              </a:rPr>
-              <a:t> — no como lo que dijo al final, y no como la solución.</a:t>
-            </a:r>
-          </a:p>
-        </p:txBody>
-      </p:sp>
-      <p:sp>
-        <p:nvSpPr>
-          <p:cNvPr id="10" name="Rounded Rectangle 9"/>
-          <p:cNvSpPr/>
-          <p:nvPr/>
-        </p:nvSpPr>
-        <p:spPr>
-          <a:xfrm>
-            <a:off x="457200" y="2148839"/>
-            <a:ext cx="11277295" cy="566928"/>
-          </a:xfrm>
-          <a:prstGeom prst="roundRect">
-            <a:avLst>
-              <a:gd name="adj" fmla="val 12000"/>
-            </a:avLst>
-          </a:prstGeom>
-          <a:solidFill>
-            <a:srgbClr val="F2F2F2"/>
-          </a:solidFill>
-          <a:ln>
-            <a:noFill/>
-          </a:ln>
-        </p:spPr>
-        <p:style>
-          <a:lnRef idx="1">
-            <a:schemeClr val="accent1"/>
-          </a:lnRef>
-          <a:fillRef idx="3">
-            <a:schemeClr val="accent1"/>
-          </a:fillRef>
-          <a:effectRef idx="2">
-            <a:schemeClr val="accent1"/>
-          </a:effectRef>
-          <a:fontRef idx="minor">
-            <a:schemeClr val="lt1"/>
-          </a:fontRef>
-        </p:style>
-        <p:txBody>
-          <a:bodyPr rtlCol="0" anchor="ctr"/>
-          <a:lstStyle/>
-          <a:p>
-            <a:pPr algn="ctr"/>
-          </a:p>
-        </p:txBody>
-      </p:sp>
-      <p:sp>
-        <p:nvSpPr>
-          <p:cNvPr id="11" name="Rectangle 10"/>
-          <p:cNvSpPr/>
-          <p:nvPr/>
-        </p:nvSpPr>
-        <p:spPr>
-          <a:xfrm>
-            <a:off x="640080" y="2295144"/>
-            <a:ext cx="274320" cy="274320"/>
-          </a:xfrm>
-          <a:prstGeom prst="rect">
-            <a:avLst/>
-          </a:prstGeom>
-          <a:solidFill>
-            <a:srgbClr val="FFFFFF"/>
-          </a:solidFill>
-          <a:ln>
-            <a:solidFill>
-              <a:srgbClr val="333333"/>
-            </a:solidFill>
-          </a:ln>
-        </p:spPr>
-        <p:style>
-          <a:lnRef idx="1">
-            <a:schemeClr val="accent1"/>
-          </a:lnRef>
-          <a:fillRef idx="3">
-            <a:schemeClr val="accent1"/>
-          </a:fillRef>
-          <a:effectRef idx="2">
-            <a:schemeClr val="accent1"/>
-          </a:effectRef>
-          <a:fontRef idx="minor">
-            <a:schemeClr val="lt1"/>
-          </a:fontRef>
-        </p:style>
-        <p:txBody>
-          <a:bodyPr rtlCol="0" anchor="ctr"/>
-          <a:lstStyle/>
-          <a:p>
-            <a:pPr algn="ctr"/>
-          </a:p>
-        </p:txBody>
-      </p:sp>
-      <p:sp>
-        <p:nvSpPr>
-          <p:cNvPr id="12" name="Rectangle 11"/>
-          <p:cNvSpPr/>
-          <p:nvPr/>
-        </p:nvSpPr>
-        <p:spPr>
-          <a:xfrm>
-            <a:off x="640080" y="2295144"/>
-            <a:ext cx="73152" cy="274320"/>
-          </a:xfrm>
-          <a:prstGeom prst="rect">
-            <a:avLst/>
-          </a:prstGeom>
-          <a:solidFill>
-            <a:srgbClr val="269CCB"/>
-          </a:solidFill>
-          <a:ln>
-            <a:noFill/>
-          </a:ln>
-        </p:spPr>
-        <p:style>
-          <a:lnRef idx="1">
-            <a:schemeClr val="accent1"/>
-          </a:lnRef>
-          <a:fillRef idx="3">
-            <a:schemeClr val="accent1"/>
-          </a:fillRef>
-          <a:effectRef idx="2">
-            <a:schemeClr val="accent1"/>
-          </a:effectRef>
-          <a:fontRef idx="minor">
-            <a:schemeClr val="lt1"/>
-          </a:fontRef>
-        </p:style>
-        <p:txBody>
-          <a:bodyPr rtlCol="0" anchor="ctr"/>
-          <a:lstStyle/>
-          <a:p>
-            <a:pPr algn="ctr"/>
-          </a:p>
-        </p:txBody>
-      </p:sp>
-      <p:sp>
-        <p:nvSpPr>
-          <p:cNvPr id="13" name="TextBox 12"/>
-          <p:cNvSpPr txBox="1"/>
-          <p:nvPr/>
-        </p:nvSpPr>
-        <p:spPr>
-          <a:xfrm>
-            <a:off x="1097280" y="2240279"/>
-            <a:ext cx="10362895" cy="402336"/>
-          </a:xfrm>
-          <a:prstGeom prst="rect">
-            <a:avLst/>
-          </a:prstGeom>
-          <a:noFill/>
-        </p:spPr>
-        <p:txBody>
-          <a:bodyPr wrap="square" anchor="ctr"/>
-          <a:lstStyle/>
-          <a:p>
-            <a:r>
-              <a:rPr sz="1500" b="1" i="0">
-                <a:solidFill>
-                  <a:srgbClr val="333333"/>
-                </a:solidFill>
-                <a:latin typeface="Calibri"/>
-              </a:rPr>
-              <a:t>LA CLASIFICACIÓN Y EL PATRÓN</a:t>
-            </a:r>
-            <a:r>
-              <a:rPr sz="1500" b="0" i="0">
-                <a:solidFill>
-                  <a:srgbClr val="333333"/>
-                </a:solidFill>
-                <a:latin typeface="Calibri"/>
-              </a:rPr>
-              <a:t> — El tipo de cada hallazgo —lenguaje, flujo, expectativa o suposición nuestra— y si se repitió en más de una persona.</a:t>
-            </a:r>
-          </a:p>
-        </p:txBody>
-      </p:sp>
-      <p:sp>
-        <p:nvSpPr>
-          <p:cNvPr id="14" name="Rounded Rectangle 13"/>
-          <p:cNvSpPr/>
-          <p:nvPr/>
-        </p:nvSpPr>
-        <p:spPr>
-          <a:xfrm>
-            <a:off x="457200" y="2825496"/>
-            <a:ext cx="11277295" cy="566928"/>
-          </a:xfrm>
-          <a:prstGeom prst="roundRect">
-            <a:avLst>
-              <a:gd name="adj" fmla="val 12000"/>
-            </a:avLst>
-          </a:prstGeom>
-          <a:solidFill>
-            <a:srgbClr val="F2F2F2"/>
-          </a:solidFill>
-          <a:ln>
-            <a:noFill/>
-          </a:ln>
-        </p:spPr>
-        <p:style>
-          <a:lnRef idx="1">
-            <a:schemeClr val="accent1"/>
-          </a:lnRef>
-          <a:fillRef idx="3">
-            <a:schemeClr val="accent1"/>
-          </a:fillRef>
-          <a:effectRef idx="2">
-            <a:schemeClr val="accent1"/>
-          </a:effectRef>
-          <a:fontRef idx="minor">
-            <a:schemeClr val="lt1"/>
-          </a:fontRef>
-        </p:style>
-        <p:txBody>
-          <a:bodyPr rtlCol="0" anchor="ctr"/>
-          <a:lstStyle/>
-          <a:p>
-            <a:pPr algn="ctr"/>
-          </a:p>
-        </p:txBody>
-      </p:sp>
-      <p:sp>
-        <p:nvSpPr>
-          <p:cNvPr id="15" name="Rectangle 14"/>
-          <p:cNvSpPr/>
-          <p:nvPr/>
-        </p:nvSpPr>
-        <p:spPr>
-          <a:xfrm>
-            <a:off x="640080" y="2971800"/>
-            <a:ext cx="274320" cy="274320"/>
-          </a:xfrm>
-          <a:prstGeom prst="rect">
-            <a:avLst/>
-          </a:prstGeom>
-          <a:solidFill>
-            <a:srgbClr val="FFFFFF"/>
-          </a:solidFill>
-          <a:ln>
-            <a:solidFill>
-              <a:srgbClr val="333333"/>
-            </a:solidFill>
-          </a:ln>
-        </p:spPr>
-        <p:style>
-          <a:lnRef idx="1">
-            <a:schemeClr val="accent1"/>
-          </a:lnRef>
-          <a:fillRef idx="3">
-            <a:schemeClr val="accent1"/>
-          </a:fillRef>
-          <a:effectRef idx="2">
-            <a:schemeClr val="accent1"/>
-          </a:effectRef>
-          <a:fontRef idx="minor">
-            <a:schemeClr val="lt1"/>
-          </a:fontRef>
-        </p:style>
-        <p:txBody>
-          <a:bodyPr rtlCol="0" anchor="ctr"/>
-          <a:lstStyle/>
-          <a:p>
-            <a:pPr algn="ctr"/>
-          </a:p>
-        </p:txBody>
-      </p:sp>
-      <p:sp>
-        <p:nvSpPr>
-          <p:cNvPr id="16" name="Rectangle 15"/>
-          <p:cNvSpPr/>
-          <p:nvPr/>
-        </p:nvSpPr>
-        <p:spPr>
-          <a:xfrm>
-            <a:off x="640080" y="2971800"/>
-            <a:ext cx="73152" cy="274320"/>
-          </a:xfrm>
-          <a:prstGeom prst="rect">
-            <a:avLst/>
-          </a:prstGeom>
-          <a:solidFill>
-            <a:srgbClr val="269CCB"/>
-          </a:solidFill>
-          <a:ln>
-            <a:noFill/>
-          </a:ln>
-        </p:spPr>
-        <p:style>
-          <a:lnRef idx="1">
-            <a:schemeClr val="accent1"/>
-          </a:lnRef>
-          <a:fillRef idx="3">
-            <a:schemeClr val="accent1"/>
-          </a:fillRef>
-          <a:effectRef idx="2">
-            <a:schemeClr val="accent1"/>
-          </a:effectRef>
-          <a:fontRef idx="minor">
-            <a:schemeClr val="lt1"/>
-          </a:fontRef>
-        </p:style>
-        <p:txBody>
-          <a:bodyPr rtlCol="0" anchor="ctr"/>
-          <a:lstStyle/>
-          <a:p>
-            <a:pPr algn="ctr"/>
-          </a:p>
-        </p:txBody>
-      </p:sp>
-      <p:sp>
-        <p:nvSpPr>
-          <p:cNvPr id="17" name="TextBox 16"/>
-          <p:cNvSpPr txBox="1"/>
-          <p:nvPr/>
-        </p:nvSpPr>
-        <p:spPr>
-          <a:xfrm>
-            <a:off x="1097280" y="2916936"/>
-            <a:ext cx="10362895" cy="402336"/>
-          </a:xfrm>
-          <a:prstGeom prst="rect">
-            <a:avLst/>
-          </a:prstGeom>
-          <a:noFill/>
-        </p:spPr>
-        <p:txBody>
-          <a:bodyPr wrap="square" anchor="ctr"/>
-          <a:lstStyle/>
-          <a:p>
-            <a:r>
-              <a:rPr sz="1500" b="1" i="0">
-                <a:solidFill>
-                  <a:srgbClr val="333333"/>
-                </a:solidFill>
-                <a:latin typeface="Calibri"/>
-              </a:rPr>
-              <a:t>QUÉ ARREGLAMOS Y QUÉ NO</a:t>
-            </a:r>
-            <a:r>
-              <a:rPr sz="1500" b="0" i="0">
-                <a:solidFill>
-                  <a:srgbClr val="333333"/>
-                </a:solidFill>
-                <a:latin typeface="Calibri"/>
-              </a:rPr>
-              <a:t> — Lo que se arregla antes de la Clase 14, y </a:t>
-            </a:r>
-            <a:r>
-              <a:rPr sz="1500" b="1" i="0">
-                <a:solidFill>
-                  <a:srgbClr val="333333"/>
-                </a:solidFill>
-                <a:latin typeface="Calibri"/>
-              </a:rPr>
-              <a:t>lo que no se arregla con su razón</a:t>
-            </a:r>
-            <a:r>
-              <a:rPr sz="1500" b="0" i="0">
-                <a:solidFill>
-                  <a:srgbClr val="333333"/>
-                </a:solidFill>
-                <a:latin typeface="Calibri"/>
-              </a:rPr>
-              <a:t>: fuera del alcance, no alcanza el tiempo, o cambia una restricción.</a:t>
-            </a:r>
-          </a:p>
-        </p:txBody>
-      </p:sp>
-      <p:sp>
-        <p:nvSpPr>
-          <p:cNvPr id="18" name="Rounded Rectangle 17"/>
-          <p:cNvSpPr/>
-          <p:nvPr/>
-        </p:nvSpPr>
-        <p:spPr>
-          <a:xfrm>
-            <a:off x="457200" y="3502152"/>
-            <a:ext cx="11277295" cy="566928"/>
-          </a:xfrm>
-          <a:prstGeom prst="roundRect">
-            <a:avLst>
-              <a:gd name="adj" fmla="val 12000"/>
-            </a:avLst>
-          </a:prstGeom>
-          <a:solidFill>
-            <a:srgbClr val="F2F2F2"/>
-          </a:solidFill>
-          <a:ln>
-            <a:noFill/>
-          </a:ln>
-        </p:spPr>
-        <p:style>
-          <a:lnRef idx="1">
-            <a:schemeClr val="accent1"/>
-          </a:lnRef>
-          <a:fillRef idx="3">
-            <a:schemeClr val="accent1"/>
-          </a:fillRef>
-          <a:effectRef idx="2">
-            <a:schemeClr val="accent1"/>
-          </a:effectRef>
-          <a:fontRef idx="minor">
-            <a:schemeClr val="lt1"/>
-          </a:fontRef>
-        </p:style>
-        <p:txBody>
-          <a:bodyPr rtlCol="0" anchor="ctr"/>
-          <a:lstStyle/>
-          <a:p>
-            <a:pPr algn="ctr"/>
-          </a:p>
-        </p:txBody>
-      </p:sp>
-      <p:sp>
-        <p:nvSpPr>
-          <p:cNvPr id="19" name="Rectangle 18"/>
-          <p:cNvSpPr/>
-          <p:nvPr/>
-        </p:nvSpPr>
-        <p:spPr>
-          <a:xfrm>
-            <a:off x="640080" y="3648456"/>
-            <a:ext cx="274320" cy="274320"/>
-          </a:xfrm>
-          <a:prstGeom prst="rect">
-            <a:avLst/>
-          </a:prstGeom>
-          <a:solidFill>
-            <a:srgbClr val="FFFFFF"/>
-          </a:solidFill>
-          <a:ln>
-            <a:solidFill>
-              <a:srgbClr val="333333"/>
-            </a:solidFill>
-          </a:ln>
-        </p:spPr>
-        <p:style>
-          <a:lnRef idx="1">
-            <a:schemeClr val="accent1"/>
-          </a:lnRef>
-          <a:fillRef idx="3">
-            <a:schemeClr val="accent1"/>
-          </a:fillRef>
-          <a:effectRef idx="2">
-            <a:schemeClr val="accent1"/>
-          </a:effectRef>
-          <a:fontRef idx="minor">
-            <a:schemeClr val="lt1"/>
-          </a:fontRef>
-        </p:style>
-        <p:txBody>
-          <a:bodyPr rtlCol="0" anchor="ctr"/>
-          <a:lstStyle/>
-          <a:p>
-            <a:pPr algn="ctr"/>
-          </a:p>
-        </p:txBody>
-      </p:sp>
-      <p:sp>
-        <p:nvSpPr>
-          <p:cNvPr id="20" name="Rectangle 19"/>
-          <p:cNvSpPr/>
-          <p:nvPr/>
-        </p:nvSpPr>
-        <p:spPr>
-          <a:xfrm>
-            <a:off x="640080" y="3648456"/>
-            <a:ext cx="73152" cy="274320"/>
-          </a:xfrm>
-          <a:prstGeom prst="rect">
-            <a:avLst/>
-          </a:prstGeom>
-          <a:solidFill>
-            <a:srgbClr val="269CCB"/>
-          </a:solidFill>
-          <a:ln>
-            <a:noFill/>
-          </a:ln>
-        </p:spPr>
-        <p:style>
-          <a:lnRef idx="1">
-            <a:schemeClr val="accent1"/>
-          </a:lnRef>
-          <a:fillRef idx="3">
-            <a:schemeClr val="accent1"/>
-          </a:fillRef>
-          <a:effectRef idx="2">
-            <a:schemeClr val="accent1"/>
-          </a:effectRef>
-          <a:fontRef idx="minor">
-            <a:schemeClr val="lt1"/>
-          </a:fontRef>
-        </p:style>
-        <p:txBody>
-          <a:bodyPr rtlCol="0" anchor="ctr"/>
-          <a:lstStyle/>
-          <a:p>
-            <a:pPr algn="ctr"/>
-          </a:p>
-        </p:txBody>
-      </p:sp>
-      <p:sp>
-        <p:nvSpPr>
-          <p:cNvPr id="21" name="TextBox 20"/>
-          <p:cNvSpPr txBox="1"/>
-          <p:nvPr/>
-        </p:nvSpPr>
-        <p:spPr>
-          <a:xfrm>
-            <a:off x="1097280" y="3593592"/>
-            <a:ext cx="10362895" cy="402336"/>
-          </a:xfrm>
-          <a:prstGeom prst="rect">
-            <a:avLst/>
-          </a:prstGeom>
-          <a:noFill/>
-        </p:spPr>
-        <p:txBody>
-          <a:bodyPr wrap="square" anchor="ctr"/>
-          <a:lstStyle/>
-          <a:p>
-            <a:r>
-              <a:rPr sz="1500" b="1" i="0">
-                <a:solidFill>
-                  <a:srgbClr val="333333"/>
-                </a:solidFill>
-                <a:latin typeface="Calibri"/>
-              </a:rPr>
-              <a:t>LA PREGUNTA PARA EL CURSO</a:t>
-            </a:r>
-            <a:r>
-              <a:rPr sz="1500" b="0" i="0">
-                <a:solidFill>
-                  <a:srgbClr val="333333"/>
-                </a:solidFill>
-                <a:latin typeface="Calibri"/>
-              </a:rPr>
-              <a:t> — Una pregunta abierta, concreta, sobre una decisión que el equipo no logra tomar. Es lo que hace útiles los tres minutos de retroalimentación.</a:t>
-            </a:r>
-          </a:p>
-        </p:txBody>
-      </p:sp>
-      <p:sp>
-        <p:nvSpPr>
-          <p:cNvPr id="22" name="Rounded Rectangle 21"/>
-          <p:cNvSpPr/>
-          <p:nvPr/>
-        </p:nvSpPr>
-        <p:spPr>
-          <a:xfrm>
-            <a:off x="457200" y="4178808"/>
-            <a:ext cx="11277295" cy="566928"/>
-          </a:xfrm>
-          <a:prstGeom prst="roundRect">
-            <a:avLst>
-              <a:gd name="adj" fmla="val 12000"/>
-            </a:avLst>
-          </a:prstGeom>
-          <a:solidFill>
-            <a:srgbClr val="F2F2F2"/>
-          </a:solidFill>
-          <a:ln>
-            <a:noFill/>
-          </a:ln>
-        </p:spPr>
-        <p:style>
-          <a:lnRef idx="1">
-            <a:schemeClr val="accent1"/>
-          </a:lnRef>
-          <a:fillRef idx="3">
-            <a:schemeClr val="accent1"/>
-          </a:fillRef>
-          <a:effectRef idx="2">
-            <a:schemeClr val="accent1"/>
-          </a:effectRef>
-          <a:fontRef idx="minor">
-            <a:schemeClr val="lt1"/>
-          </a:fontRef>
-        </p:style>
-        <p:txBody>
-          <a:bodyPr rtlCol="0" anchor="ctr"/>
-          <a:lstStyle/>
-          <a:p>
-            <a:pPr algn="ctr"/>
-          </a:p>
-        </p:txBody>
-      </p:sp>
-      <p:sp>
-        <p:nvSpPr>
-          <p:cNvPr id="23" name="Rectangle 22"/>
-          <p:cNvSpPr/>
-          <p:nvPr/>
-        </p:nvSpPr>
-        <p:spPr>
-          <a:xfrm>
-            <a:off x="640080" y="4325112"/>
-            <a:ext cx="274320" cy="274320"/>
-          </a:xfrm>
-          <a:prstGeom prst="rect">
-            <a:avLst/>
-          </a:prstGeom>
-          <a:solidFill>
-            <a:srgbClr val="FFFFFF"/>
-          </a:solidFill>
-          <a:ln>
-            <a:solidFill>
-              <a:srgbClr val="333333"/>
-            </a:solidFill>
-          </a:ln>
-        </p:spPr>
-        <p:style>
-          <a:lnRef idx="1">
-            <a:schemeClr val="accent1"/>
-          </a:lnRef>
-          <a:fillRef idx="3">
-            <a:schemeClr val="accent1"/>
-          </a:fillRef>
-          <a:effectRef idx="2">
-            <a:schemeClr val="accent1"/>
-          </a:effectRef>
-          <a:fontRef idx="minor">
-            <a:schemeClr val="lt1"/>
-          </a:fontRef>
-        </p:style>
-        <p:txBody>
-          <a:bodyPr rtlCol="0" anchor="ctr"/>
-          <a:lstStyle/>
-          <a:p>
-            <a:pPr algn="ctr"/>
-          </a:p>
-        </p:txBody>
-      </p:sp>
-      <p:sp>
-        <p:nvSpPr>
-          <p:cNvPr id="24" name="Rectangle 23"/>
-          <p:cNvSpPr/>
-          <p:nvPr/>
-        </p:nvSpPr>
-        <p:spPr>
-          <a:xfrm>
-            <a:off x="640080" y="4325112"/>
-            <a:ext cx="73152" cy="274320"/>
-          </a:xfrm>
-          <a:prstGeom prst="rect">
-            <a:avLst/>
-          </a:prstGeom>
-          <a:solidFill>
-            <a:srgbClr val="269CCB"/>
-          </a:solidFill>
-          <a:ln>
-            <a:noFill/>
-          </a:ln>
-        </p:spPr>
-        <p:style>
-          <a:lnRef idx="1">
-            <a:schemeClr val="accent1"/>
-          </a:lnRef>
-          <a:fillRef idx="3">
-            <a:schemeClr val="accent1"/>
-          </a:fillRef>
-          <a:effectRef idx="2">
-            <a:schemeClr val="accent1"/>
-          </a:effectRef>
-          <a:fontRef idx="minor">
-            <a:schemeClr val="lt1"/>
-          </a:fontRef>
-        </p:style>
-        <p:txBody>
-          <a:bodyPr rtlCol="0" anchor="ctr"/>
-          <a:lstStyle/>
-          <a:p>
-            <a:pPr algn="ctr"/>
-          </a:p>
-        </p:txBody>
-      </p:sp>
-      <p:sp>
-        <p:nvSpPr>
-          <p:cNvPr id="25" name="TextBox 24"/>
-          <p:cNvSpPr txBox="1"/>
-          <p:nvPr/>
-        </p:nvSpPr>
-        <p:spPr>
-          <a:xfrm>
-            <a:off x="1097280" y="4270248"/>
-            <a:ext cx="10362895" cy="402336"/>
-          </a:xfrm>
-          <a:prstGeom prst="rect">
-            <a:avLst/>
-          </a:prstGeom>
-          <a:noFill/>
-        </p:spPr>
-        <p:txBody>
-          <a:bodyPr wrap="square" anchor="ctr"/>
-          <a:lstStyle/>
-          <a:p>
-            <a:r>
-              <a:rPr sz="1500" b="1" i="0">
-                <a:solidFill>
-                  <a:srgbClr val="333333"/>
-                </a:solidFill>
-                <a:latin typeface="Calibri"/>
-              </a:rPr>
-              <a:t>EL PLAN DE AJUSTES</a:t>
-            </a:r>
-            <a:r>
-              <a:rPr sz="1500" b="0" i="0">
-                <a:solidFill>
-                  <a:srgbClr val="333333"/>
-                </a:solidFill>
-                <a:latin typeface="Calibri"/>
-              </a:rPr>
-              <a:t> — Las </a:t>
-            </a:r>
-            <a:r>
-              <a:rPr sz="1500" b="1" i="0">
-                <a:solidFill>
-                  <a:srgbClr val="333333"/>
-                </a:solidFill>
-                <a:latin typeface="Calibri"/>
-              </a:rPr>
-              <a:t>dos cosas</a:t>
-            </a:r>
-            <a:r>
-              <a:rPr sz="1500" b="0" i="0">
-                <a:solidFill>
-                  <a:srgbClr val="333333"/>
-                </a:solidFill>
-                <a:latin typeface="Calibri"/>
-              </a:rPr>
-              <a:t> que el equipo va a ajustar con lo que oyó en la retroalimentación, y </a:t>
-            </a:r>
-            <a:r>
-              <a:rPr sz="1500" b="1" i="0">
-                <a:solidFill>
-                  <a:srgbClr val="333333"/>
-                </a:solidFill>
-                <a:latin typeface="Calibri"/>
-              </a:rPr>
-              <a:t>qué lo motivó</a:t>
-            </a:r>
-            <a:r>
-              <a:rPr sz="1500" b="0" i="0">
-                <a:solidFill>
-                  <a:srgbClr val="333333"/>
-                </a:solidFill>
-                <a:latin typeface="Calibri"/>
-              </a:rPr>
-              <a:t>: quién lo dijo y qué dijo. Se llena en los últimos minutos de la sesión, no antes.</a:t>
-            </a:r>
-          </a:p>
-        </p:txBody>
-      </p:sp>
-      <p:sp>
-        <p:nvSpPr>
-          <p:cNvPr id="26" name="TextBox 25"/>
           <p:cNvSpPr txBox="1"/>
           <p:nvPr/>
         </p:nvSpPr>
@@ -8413,7 +7742,7 @@
         <p:spPr>
           <a:xfrm>
             <a:off x="0" y="0"/>
-            <a:ext cx="12191695" cy="1170432"/>
+            <a:ext cx="12191695" cy="960120"/>
           </a:xfrm>
           <a:prstGeom prst="rect">
             <a:avLst/>
@@ -8455,7 +7784,7 @@
         </p:nvSpPr>
         <p:spPr>
           <a:xfrm>
-            <a:off x="0" y="1170432"/>
+            <a:off x="0" y="960120"/>
             <a:ext cx="12191695" cy="41148"/>
           </a:xfrm>
           <a:prstGeom prst="rect">
@@ -8499,7 +7828,7 @@
         <p:spPr>
           <a:xfrm>
             <a:off x="457200" y="164592"/>
-            <a:ext cx="11277295" cy="384048"/>
+            <a:ext cx="11277295" cy="502920"/>
           </a:xfrm>
           <a:prstGeom prst="rect">
             <a:avLst/>
@@ -8519,55 +7848,21 @@
                 </a:solidFill>
                 <a:latin typeface="Calibri"/>
               </a:rPr>
-              <a:t>Cómo se expone en 5 minutos</a:t>
-            </a:r>
-          </a:p>
-        </p:txBody>
-      </p:sp>
-      <p:sp>
-        <p:nvSpPr>
-          <p:cNvPr id="5" name="TextBox 4"/>
-          <p:cNvSpPr txBox="1"/>
-          <p:nvPr/>
-        </p:nvSpPr>
-        <p:spPr>
-          <a:xfrm>
-            <a:off x="457200" y="566928"/>
-            <a:ext cx="11277295" cy="411480"/>
-          </a:xfrm>
-          <a:prstGeom prst="rect">
-            <a:avLst/>
-          </a:prstGeom>
-          <a:noFill/>
-        </p:spPr>
-        <p:txBody>
-          <a:bodyPr wrap="square">
-            <a:spAutoFit/>
-          </a:bodyPr>
-          <a:lstStyle/>
-          <a:p>
-            <a:r>
-              <a:rPr sz="1400" b="0" i="0">
-                <a:solidFill>
-                  <a:srgbClr val="B8D8EE"/>
-                </a:solidFill>
-                <a:latin typeface="Calibri"/>
-              </a:rPr>
-              <a:t>Habla el vocero con la pantalla ya compartida · cronómetro en pantalla · se corta al llegar a cero</a:t>
-            </a:r>
-          </a:p>
-        </p:txBody>
-      </p:sp>
-      <p:sp>
-        <p:nvSpPr>
-          <p:cNvPr id="6" name="Rounded Rectangle 5"/>
+              <a:t>Guion de la exposicion, con tiempos</a:t>
+            </a:r>
+          </a:p>
+        </p:txBody>
+      </p:sp>
+      <p:sp>
+        <p:nvSpPr>
+          <p:cNvPr id="5" name="Rounded Rectangle 4"/>
           <p:cNvSpPr/>
           <p:nvPr/>
         </p:nvSpPr>
         <p:spPr>
           <a:xfrm>
-            <a:off x="457200" y="1444752"/>
-            <a:ext cx="11277295" cy="908913"/>
+            <a:off x="457200" y="1261872"/>
+            <a:ext cx="11277295" cy="5093208"/>
           </a:xfrm>
           <a:prstGeom prst="roundRect">
             <a:avLst>
@@ -8575,7 +7870,7 @@
             </a:avLst>
           </a:prstGeom>
           <a:solidFill>
-            <a:srgbClr val="F2F2F2"/>
+            <a:srgbClr val="1E2A38"/>
           </a:solidFill>
           <a:ln>
             <a:noFill/>
@@ -8605,19 +7900,17 @@
       </p:sp>
       <p:sp>
         <p:nvSpPr>
-          <p:cNvPr id="7" name="Rounded Rectangle 6"/>
+          <p:cNvPr id="6" name="Rectangle 5"/>
           <p:cNvSpPr/>
           <p:nvPr/>
         </p:nvSpPr>
         <p:spPr>
           <a:xfrm>
-            <a:off x="594360" y="1679752"/>
-            <a:ext cx="438912" cy="438912"/>
-          </a:xfrm>
-          <a:prstGeom prst="roundRect">
-            <a:avLst>
-              <a:gd name="adj" fmla="val 12000"/>
-            </a:avLst>
+            <a:off x="457200" y="1261872"/>
+            <a:ext cx="11277295" cy="320040"/>
+          </a:xfrm>
+          <a:prstGeom prst="rect">
+            <a:avLst/>
           </a:prstGeom>
           <a:solidFill>
             <a:srgbClr val="095292"/>
@@ -8650,14 +7943,46 @@
       </p:sp>
       <p:sp>
         <p:nvSpPr>
+          <p:cNvPr id="7" name="TextBox 6"/>
+          <p:cNvSpPr txBox="1"/>
+          <p:nvPr/>
+        </p:nvSpPr>
+        <p:spPr>
+          <a:xfrm>
+            <a:off x="685800" y="1307592"/>
+            <a:ext cx="10820095" cy="256032"/>
+          </a:xfrm>
+          <a:prstGeom prst="rect">
+            <a:avLst/>
+          </a:prstGeom>
+          <a:noFill/>
+        </p:spPr>
+        <p:txBody>
+          <a:bodyPr wrap="square" anchor="ctr"/>
+          <a:lstStyle/>
+          <a:p>
+            <a:r>
+              <a:rPr sz="1000" b="1" i="0">
+                <a:solidFill>
+                  <a:srgbClr val="269CCB"/>
+                </a:solidFill>
+                <a:latin typeface="Calibri"/>
+              </a:rPr>
+              <a:t>● ● ●</a:t>
+            </a:r>
+          </a:p>
+        </p:txBody>
+      </p:sp>
+      <p:sp>
+        <p:nvSpPr>
           <p:cNvPr id="8" name="TextBox 7"/>
           <p:cNvSpPr txBox="1"/>
           <p:nvPr/>
         </p:nvSpPr>
         <p:spPr>
           <a:xfrm>
-            <a:off x="594360" y="1679752"/>
-            <a:ext cx="438912" cy="438912"/>
+            <a:off x="777240" y="1719072"/>
+            <a:ext cx="10637215" cy="4453128"/>
           </a:xfrm>
           <a:prstGeom prst="rect">
             <a:avLst/>
@@ -8665,18 +7990,168 @@
           <a:noFill/>
         </p:spPr>
         <p:txBody>
-          <a:bodyPr wrap="square" anchor="ctr"/>
-          <a:lstStyle/>
-          <a:p>
-            <a:pPr algn="ctr"/>
-            <a:r>
-              <a:rPr sz="1600" b="1" i="0">
+          <a:bodyPr wrap="square">
+            <a:spAutoFit/>
+          </a:bodyPr>
+          <a:lstStyle/>
+          <a:p>
+            <a:pPr>
+              <a:spcAft>
+                <a:spcPts val="400"/>
+              </a:spcAft>
+            </a:pPr>
+            <a:r>
+              <a:rPr sz="1400" b="0" i="0">
                 <a:solidFill>
                   <a:srgbClr val="FFFFFF"/>
                 </a:solidFill>
                 <a:latin typeface="Calibri"/>
               </a:rPr>
-              <a:t>1</a:t>
+              <a:t># Exposicion de hoy · lo que se califica es el reparto, no el total</a:t>
+            </a:r>
+          </a:p>
+          <a:p>
+            <a:pPr>
+              <a:spcAft>
+                <a:spcPts val="400"/>
+              </a:spcAft>
+            </a:pPr>
+            <a:r>
+              <a:rPr sz="1400" b="0" i="0">
+                <a:solidFill>
+                  <a:srgbClr val="FFFFFF"/>
+                </a:solidFill>
+                <a:latin typeface="Calibri"/>
+              </a:rPr>
+              <a:t/>
+            </a:r>
+          </a:p>
+          <a:p>
+            <a:pPr>
+              <a:spcAft>
+                <a:spcPts val="400"/>
+              </a:spcAft>
+            </a:pPr>
+            <a:r>
+              <a:rPr sz="1400" b="0" i="0">
+                <a:solidFill>
+                  <a:srgbClr val="FFFFFF"/>
+                </a:solidFill>
+                <a:latin typeface="Calibri"/>
+              </a:rPr>
+              <a:t>30 s · Recordatorio mínimo         El problema en **una frase**. Nada más: el c</a:t>
+            </a:r>
+          </a:p>
+          <a:p>
+            <a:pPr>
+              <a:spcAft>
+                <a:spcPts val="400"/>
+              </a:spcAft>
+            </a:pPr>
+            <a:r>
+              <a:rPr sz="1400" b="0" i="0">
+                <a:solidFill>
+                  <a:srgbClr val="FFFFFF"/>
+                </a:solidFill>
+                <a:latin typeface="Calibri"/>
+              </a:rPr>
+              <a:t>2 min · Los tres hallazgos         Lo que la persona **hizo**. Es el corazón de</a:t>
+            </a:r>
+          </a:p>
+          <a:p>
+            <a:pPr>
+              <a:spcAft>
+                <a:spcPts val="400"/>
+              </a:spcAft>
+            </a:pPr>
+            <a:r>
+              <a:rPr sz="1400" b="0" i="0">
+                <a:solidFill>
+                  <a:srgbClr val="FFFFFF"/>
+                </a:solidFill>
+                <a:latin typeface="Calibri"/>
+              </a:rPr>
+              <a:t>1 min · Qué arreglan y qué no      Y por qué lo que queda fuera queda fuera.</a:t>
+            </a:r>
+          </a:p>
+          <a:p>
+            <a:pPr>
+              <a:spcAft>
+                <a:spcPts val="400"/>
+              </a:spcAft>
+            </a:pPr>
+            <a:r>
+              <a:rPr sz="1400" b="0" i="0">
+                <a:solidFill>
+                  <a:srgbClr val="FFFFFF"/>
+                </a:solidFill>
+                <a:latin typeface="Calibri"/>
+              </a:rPr>
+              <a:t>1 min · La pregunta para el curso  Con las dos alternativas que están considera</a:t>
+            </a:r>
+          </a:p>
+          <a:p>
+            <a:pPr>
+              <a:spcAft>
+                <a:spcPts val="400"/>
+              </a:spcAft>
+            </a:pPr>
+            <a:r>
+              <a:rPr sz="1400" b="0" i="0">
+                <a:solidFill>
+                  <a:srgbClr val="FFFFFF"/>
+                </a:solidFill>
+                <a:latin typeface="Calibri"/>
+              </a:rPr>
+              <a:t>30 s · Cierre                      Qué van a tener listo para la Clase 14.</a:t>
+            </a:r>
+          </a:p>
+          <a:p>
+            <a:pPr>
+              <a:spcAft>
+                <a:spcPts val="400"/>
+              </a:spcAft>
+            </a:pPr>
+            <a:r>
+              <a:rPr sz="1400" b="0" i="0">
+                <a:solidFill>
+                  <a:srgbClr val="FFFFFF"/>
+                </a:solidFill>
+                <a:latin typeface="Calibri"/>
+              </a:rPr>
+              <a:t/>
+            </a:r>
+          </a:p>
+          <a:p>
+            <a:pPr>
+              <a:spcAft>
+                <a:spcPts val="400"/>
+              </a:spcAft>
+            </a:pPr>
+            <a:r>
+              <a:rPr sz="1400" b="0" i="0">
+                <a:solidFill>
+                  <a:srgbClr val="FFFFFF"/>
+                </a:solidFill>
+                <a:latin typeface="Calibri"/>
+              </a:rPr>
+              <a:t># El tramo marcado como obligatorio es el que el jurado califica:</a:t>
+            </a:r>
+          </a:p>
+          <a:p>
+            <a:pPr>
+              <a:spcAft>
+                <a:spcPts val="400"/>
+              </a:spcAft>
+            </a:pPr>
+            <a:r>
+              <a:rPr sz="1400" b="0" i="0">
+                <a:solidFill>
+                  <a:srgbClr val="FFFFFF"/>
+                </a:solidFill>
+                <a:latin typeface="Calibri"/>
+              </a:rPr>
+              <a:t># si el guion no esta cronometrado, es el que se queda sin tiempo.</a:t>
             </a:r>
           </a:p>
         </p:txBody>
@@ -8684,774 +8159,6 @@
       <p:sp>
         <p:nvSpPr>
           <p:cNvPr id="9" name="TextBox 8"/>
-          <p:cNvSpPr txBox="1"/>
-          <p:nvPr/>
-        </p:nvSpPr>
-        <p:spPr>
-          <a:xfrm>
-            <a:off x="1188720" y="1536192"/>
-            <a:ext cx="10271455" cy="744321"/>
-          </a:xfrm>
-          <a:prstGeom prst="rect">
-            <a:avLst/>
-          </a:prstGeom>
-          <a:noFill/>
-        </p:spPr>
-        <p:txBody>
-          <a:bodyPr wrap="square" anchor="ctr"/>
-          <a:lstStyle/>
-          <a:p>
-            <a:r>
-              <a:rPr sz="1500" b="1" i="0">
-                <a:solidFill>
-                  <a:srgbClr val="095292"/>
-                </a:solidFill>
-                <a:latin typeface="Calibri"/>
-              </a:rPr>
-              <a:t>30 s · Recordatorio mínimo</a:t>
-            </a:r>
-          </a:p>
-          <a:p>
-            <a:pPr>
-              <a:spcBef>
-                <a:spcPts val="200"/>
-              </a:spcBef>
-            </a:pPr>
-            <a:r>
-              <a:rPr sz="1300" b="0" i="0">
-                <a:solidFill>
-                  <a:srgbClr val="333333"/>
-                </a:solidFill>
-                <a:latin typeface="Calibri"/>
-              </a:rPr>
-              <a:t>El problema en </a:t>
-            </a:r>
-            <a:r>
-              <a:rPr sz="1300" b="1" i="0">
-                <a:solidFill>
-                  <a:srgbClr val="333333"/>
-                </a:solidFill>
-                <a:latin typeface="Calibri"/>
-              </a:rPr>
-              <a:t>una frase</a:t>
-            </a:r>
-            <a:r>
-              <a:rPr sz="1300" b="0" i="0">
-                <a:solidFill>
-                  <a:srgbClr val="333333"/>
-                </a:solidFill>
-                <a:latin typeface="Calibri"/>
-              </a:rPr>
-              <a:t>. Nada más: el curso ya conoce su proyecto.</a:t>
-            </a:r>
-          </a:p>
-        </p:txBody>
-      </p:sp>
-      <p:sp>
-        <p:nvSpPr>
-          <p:cNvPr id="10" name="Rounded Rectangle 9"/>
-          <p:cNvSpPr/>
-          <p:nvPr/>
-        </p:nvSpPr>
-        <p:spPr>
-          <a:xfrm>
-            <a:off x="457200" y="2445105"/>
-            <a:ext cx="11277295" cy="908913"/>
-          </a:xfrm>
-          <a:prstGeom prst="roundRect">
-            <a:avLst>
-              <a:gd name="adj" fmla="val 12000"/>
-            </a:avLst>
-          </a:prstGeom>
-          <a:solidFill>
-            <a:srgbClr val="E8F4FA"/>
-          </a:solidFill>
-          <a:ln>
-            <a:noFill/>
-          </a:ln>
-        </p:spPr>
-        <p:style>
-          <a:lnRef idx="1">
-            <a:schemeClr val="accent1"/>
-          </a:lnRef>
-          <a:fillRef idx="3">
-            <a:schemeClr val="accent1"/>
-          </a:fillRef>
-          <a:effectRef idx="2">
-            <a:schemeClr val="accent1"/>
-          </a:effectRef>
-          <a:fontRef idx="minor">
-            <a:schemeClr val="lt1"/>
-          </a:fontRef>
-        </p:style>
-        <p:txBody>
-          <a:bodyPr rtlCol="0" anchor="ctr"/>
-          <a:lstStyle/>
-          <a:p>
-            <a:pPr algn="ctr"/>
-          </a:p>
-        </p:txBody>
-      </p:sp>
-      <p:sp>
-        <p:nvSpPr>
-          <p:cNvPr id="11" name="Rounded Rectangle 10"/>
-          <p:cNvSpPr/>
-          <p:nvPr/>
-        </p:nvSpPr>
-        <p:spPr>
-          <a:xfrm>
-            <a:off x="594360" y="2680106"/>
-            <a:ext cx="438912" cy="438912"/>
-          </a:xfrm>
-          <a:prstGeom prst="roundRect">
-            <a:avLst>
-              <a:gd name="adj" fmla="val 12000"/>
-            </a:avLst>
-          </a:prstGeom>
-          <a:solidFill>
-            <a:srgbClr val="095292"/>
-          </a:solidFill>
-          <a:ln>
-            <a:noFill/>
-          </a:ln>
-        </p:spPr>
-        <p:style>
-          <a:lnRef idx="1">
-            <a:schemeClr val="accent1"/>
-          </a:lnRef>
-          <a:fillRef idx="3">
-            <a:schemeClr val="accent1"/>
-          </a:fillRef>
-          <a:effectRef idx="2">
-            <a:schemeClr val="accent1"/>
-          </a:effectRef>
-          <a:fontRef idx="minor">
-            <a:schemeClr val="lt1"/>
-          </a:fontRef>
-        </p:style>
-        <p:txBody>
-          <a:bodyPr rtlCol="0" anchor="ctr"/>
-          <a:lstStyle/>
-          <a:p>
-            <a:pPr algn="ctr"/>
-          </a:p>
-        </p:txBody>
-      </p:sp>
-      <p:sp>
-        <p:nvSpPr>
-          <p:cNvPr id="12" name="TextBox 11"/>
-          <p:cNvSpPr txBox="1"/>
-          <p:nvPr/>
-        </p:nvSpPr>
-        <p:spPr>
-          <a:xfrm>
-            <a:off x="594360" y="2680106"/>
-            <a:ext cx="438912" cy="438912"/>
-          </a:xfrm>
-          <a:prstGeom prst="rect">
-            <a:avLst/>
-          </a:prstGeom>
-          <a:noFill/>
-        </p:spPr>
-        <p:txBody>
-          <a:bodyPr wrap="square" anchor="ctr"/>
-          <a:lstStyle/>
-          <a:p>
-            <a:pPr algn="ctr"/>
-            <a:r>
-              <a:rPr sz="1600" b="1" i="0">
-                <a:solidFill>
-                  <a:srgbClr val="FFFFFF"/>
-                </a:solidFill>
-                <a:latin typeface="Calibri"/>
-              </a:rPr>
-              <a:t>2</a:t>
-            </a:r>
-          </a:p>
-        </p:txBody>
-      </p:sp>
-      <p:sp>
-        <p:nvSpPr>
-          <p:cNvPr id="13" name="TextBox 12"/>
-          <p:cNvSpPr txBox="1"/>
-          <p:nvPr/>
-        </p:nvSpPr>
-        <p:spPr>
-          <a:xfrm>
-            <a:off x="1188720" y="2536545"/>
-            <a:ext cx="10271455" cy="744321"/>
-          </a:xfrm>
-          <a:prstGeom prst="rect">
-            <a:avLst/>
-          </a:prstGeom>
-          <a:noFill/>
-        </p:spPr>
-        <p:txBody>
-          <a:bodyPr wrap="square" anchor="ctr"/>
-          <a:lstStyle/>
-          <a:p>
-            <a:r>
-              <a:rPr sz="1500" b="1" i="0">
-                <a:solidFill>
-                  <a:srgbClr val="095292"/>
-                </a:solidFill>
-                <a:latin typeface="Calibri"/>
-              </a:rPr>
-              <a:t>2 min · Los tres hallazgos</a:t>
-            </a:r>
-          </a:p>
-          <a:p>
-            <a:pPr>
-              <a:spcBef>
-                <a:spcPts val="200"/>
-              </a:spcBef>
-            </a:pPr>
-            <a:r>
-              <a:rPr sz="1300" b="0" i="0">
-                <a:solidFill>
-                  <a:srgbClr val="333333"/>
-                </a:solidFill>
-                <a:latin typeface="Calibri"/>
-              </a:rPr>
-              <a:t>Lo que la persona </a:t>
-            </a:r>
-            <a:r>
-              <a:rPr sz="1300" b="1" i="0">
-                <a:solidFill>
-                  <a:srgbClr val="333333"/>
-                </a:solidFill>
-                <a:latin typeface="Calibri"/>
-              </a:rPr>
-              <a:t>hizo</a:t>
-            </a:r>
-            <a:r>
-              <a:rPr sz="1300" b="0" i="0">
-                <a:solidFill>
-                  <a:srgbClr val="333333"/>
-                </a:solidFill>
-                <a:latin typeface="Calibri"/>
-              </a:rPr>
-              <a:t>. Es el corazón del avance.</a:t>
-            </a:r>
-          </a:p>
-        </p:txBody>
-      </p:sp>
-      <p:sp>
-        <p:nvSpPr>
-          <p:cNvPr id="14" name="Rounded Rectangle 13"/>
-          <p:cNvSpPr/>
-          <p:nvPr/>
-        </p:nvSpPr>
-        <p:spPr>
-          <a:xfrm>
-            <a:off x="457200" y="3445459"/>
-            <a:ext cx="11277295" cy="908913"/>
-          </a:xfrm>
-          <a:prstGeom prst="roundRect">
-            <a:avLst>
-              <a:gd name="adj" fmla="val 12000"/>
-            </a:avLst>
-          </a:prstGeom>
-          <a:solidFill>
-            <a:srgbClr val="F2F2F2"/>
-          </a:solidFill>
-          <a:ln>
-            <a:noFill/>
-          </a:ln>
-        </p:spPr>
-        <p:style>
-          <a:lnRef idx="1">
-            <a:schemeClr val="accent1"/>
-          </a:lnRef>
-          <a:fillRef idx="3">
-            <a:schemeClr val="accent1"/>
-          </a:fillRef>
-          <a:effectRef idx="2">
-            <a:schemeClr val="accent1"/>
-          </a:effectRef>
-          <a:fontRef idx="minor">
-            <a:schemeClr val="lt1"/>
-          </a:fontRef>
-        </p:style>
-        <p:txBody>
-          <a:bodyPr rtlCol="0" anchor="ctr"/>
-          <a:lstStyle/>
-          <a:p>
-            <a:pPr algn="ctr"/>
-          </a:p>
-        </p:txBody>
-      </p:sp>
-      <p:sp>
-        <p:nvSpPr>
-          <p:cNvPr id="15" name="Rounded Rectangle 14"/>
-          <p:cNvSpPr/>
-          <p:nvPr/>
-        </p:nvSpPr>
-        <p:spPr>
-          <a:xfrm>
-            <a:off x="594360" y="3680460"/>
-            <a:ext cx="438912" cy="438912"/>
-          </a:xfrm>
-          <a:prstGeom prst="roundRect">
-            <a:avLst>
-              <a:gd name="adj" fmla="val 12000"/>
-            </a:avLst>
-          </a:prstGeom>
-          <a:solidFill>
-            <a:srgbClr val="095292"/>
-          </a:solidFill>
-          <a:ln>
-            <a:noFill/>
-          </a:ln>
-        </p:spPr>
-        <p:style>
-          <a:lnRef idx="1">
-            <a:schemeClr val="accent1"/>
-          </a:lnRef>
-          <a:fillRef idx="3">
-            <a:schemeClr val="accent1"/>
-          </a:fillRef>
-          <a:effectRef idx="2">
-            <a:schemeClr val="accent1"/>
-          </a:effectRef>
-          <a:fontRef idx="minor">
-            <a:schemeClr val="lt1"/>
-          </a:fontRef>
-        </p:style>
-        <p:txBody>
-          <a:bodyPr rtlCol="0" anchor="ctr"/>
-          <a:lstStyle/>
-          <a:p>
-            <a:pPr algn="ctr"/>
-          </a:p>
-        </p:txBody>
-      </p:sp>
-      <p:sp>
-        <p:nvSpPr>
-          <p:cNvPr id="16" name="TextBox 15"/>
-          <p:cNvSpPr txBox="1"/>
-          <p:nvPr/>
-        </p:nvSpPr>
-        <p:spPr>
-          <a:xfrm>
-            <a:off x="594360" y="3680460"/>
-            <a:ext cx="438912" cy="438912"/>
-          </a:xfrm>
-          <a:prstGeom prst="rect">
-            <a:avLst/>
-          </a:prstGeom>
-          <a:noFill/>
-        </p:spPr>
-        <p:txBody>
-          <a:bodyPr wrap="square" anchor="ctr"/>
-          <a:lstStyle/>
-          <a:p>
-            <a:pPr algn="ctr"/>
-            <a:r>
-              <a:rPr sz="1600" b="1" i="0">
-                <a:solidFill>
-                  <a:srgbClr val="FFFFFF"/>
-                </a:solidFill>
-                <a:latin typeface="Calibri"/>
-              </a:rPr>
-              <a:t>3</a:t>
-            </a:r>
-          </a:p>
-        </p:txBody>
-      </p:sp>
-      <p:sp>
-        <p:nvSpPr>
-          <p:cNvPr id="17" name="TextBox 16"/>
-          <p:cNvSpPr txBox="1"/>
-          <p:nvPr/>
-        </p:nvSpPr>
-        <p:spPr>
-          <a:xfrm>
-            <a:off x="1188720" y="3536899"/>
-            <a:ext cx="10271455" cy="744321"/>
-          </a:xfrm>
-          <a:prstGeom prst="rect">
-            <a:avLst/>
-          </a:prstGeom>
-          <a:noFill/>
-        </p:spPr>
-        <p:txBody>
-          <a:bodyPr wrap="square" anchor="ctr"/>
-          <a:lstStyle/>
-          <a:p>
-            <a:r>
-              <a:rPr sz="1500" b="1" i="0">
-                <a:solidFill>
-                  <a:srgbClr val="095292"/>
-                </a:solidFill>
-                <a:latin typeface="Calibri"/>
-              </a:rPr>
-              <a:t>1 min · Qué arreglan y qué no</a:t>
-            </a:r>
-          </a:p>
-          <a:p>
-            <a:pPr>
-              <a:spcBef>
-                <a:spcPts val="200"/>
-              </a:spcBef>
-            </a:pPr>
-            <a:r>
-              <a:rPr sz="1300" b="0" i="0">
-                <a:solidFill>
-                  <a:srgbClr val="333333"/>
-                </a:solidFill>
-                <a:latin typeface="Calibri"/>
-              </a:rPr>
-              <a:t>Y por qué lo que queda fuera queda fuera.</a:t>
-            </a:r>
-          </a:p>
-        </p:txBody>
-      </p:sp>
-      <p:sp>
-        <p:nvSpPr>
-          <p:cNvPr id="18" name="Rounded Rectangle 17"/>
-          <p:cNvSpPr/>
-          <p:nvPr/>
-        </p:nvSpPr>
-        <p:spPr>
-          <a:xfrm>
-            <a:off x="457200" y="4445812"/>
-            <a:ext cx="11277295" cy="908913"/>
-          </a:xfrm>
-          <a:prstGeom prst="roundRect">
-            <a:avLst>
-              <a:gd name="adj" fmla="val 12000"/>
-            </a:avLst>
-          </a:prstGeom>
-          <a:solidFill>
-            <a:srgbClr val="E8F4FA"/>
-          </a:solidFill>
-          <a:ln>
-            <a:noFill/>
-          </a:ln>
-        </p:spPr>
-        <p:style>
-          <a:lnRef idx="1">
-            <a:schemeClr val="accent1"/>
-          </a:lnRef>
-          <a:fillRef idx="3">
-            <a:schemeClr val="accent1"/>
-          </a:fillRef>
-          <a:effectRef idx="2">
-            <a:schemeClr val="accent1"/>
-          </a:effectRef>
-          <a:fontRef idx="minor">
-            <a:schemeClr val="lt1"/>
-          </a:fontRef>
-        </p:style>
-        <p:txBody>
-          <a:bodyPr rtlCol="0" anchor="ctr"/>
-          <a:lstStyle/>
-          <a:p>
-            <a:pPr algn="ctr"/>
-          </a:p>
-        </p:txBody>
-      </p:sp>
-      <p:sp>
-        <p:nvSpPr>
-          <p:cNvPr id="19" name="Rounded Rectangle 18"/>
-          <p:cNvSpPr/>
-          <p:nvPr/>
-        </p:nvSpPr>
-        <p:spPr>
-          <a:xfrm>
-            <a:off x="594360" y="4680813"/>
-            <a:ext cx="438912" cy="438912"/>
-          </a:xfrm>
-          <a:prstGeom prst="roundRect">
-            <a:avLst>
-              <a:gd name="adj" fmla="val 12000"/>
-            </a:avLst>
-          </a:prstGeom>
-          <a:solidFill>
-            <a:srgbClr val="095292"/>
-          </a:solidFill>
-          <a:ln>
-            <a:noFill/>
-          </a:ln>
-        </p:spPr>
-        <p:style>
-          <a:lnRef idx="1">
-            <a:schemeClr val="accent1"/>
-          </a:lnRef>
-          <a:fillRef idx="3">
-            <a:schemeClr val="accent1"/>
-          </a:fillRef>
-          <a:effectRef idx="2">
-            <a:schemeClr val="accent1"/>
-          </a:effectRef>
-          <a:fontRef idx="minor">
-            <a:schemeClr val="lt1"/>
-          </a:fontRef>
-        </p:style>
-        <p:txBody>
-          <a:bodyPr rtlCol="0" anchor="ctr"/>
-          <a:lstStyle/>
-          <a:p>
-            <a:pPr algn="ctr"/>
-          </a:p>
-        </p:txBody>
-      </p:sp>
-      <p:sp>
-        <p:nvSpPr>
-          <p:cNvPr id="20" name="TextBox 19"/>
-          <p:cNvSpPr txBox="1"/>
-          <p:nvPr/>
-        </p:nvSpPr>
-        <p:spPr>
-          <a:xfrm>
-            <a:off x="594360" y="4680813"/>
-            <a:ext cx="438912" cy="438912"/>
-          </a:xfrm>
-          <a:prstGeom prst="rect">
-            <a:avLst/>
-          </a:prstGeom>
-          <a:noFill/>
-        </p:spPr>
-        <p:txBody>
-          <a:bodyPr wrap="square" anchor="ctr"/>
-          <a:lstStyle/>
-          <a:p>
-            <a:pPr algn="ctr"/>
-            <a:r>
-              <a:rPr sz="1600" b="1" i="0">
-                <a:solidFill>
-                  <a:srgbClr val="FFFFFF"/>
-                </a:solidFill>
-                <a:latin typeface="Calibri"/>
-              </a:rPr>
-              <a:t>4</a:t>
-            </a:r>
-          </a:p>
-        </p:txBody>
-      </p:sp>
-      <p:sp>
-        <p:nvSpPr>
-          <p:cNvPr id="21" name="TextBox 20"/>
-          <p:cNvSpPr txBox="1"/>
-          <p:nvPr/>
-        </p:nvSpPr>
-        <p:spPr>
-          <a:xfrm>
-            <a:off x="1188720" y="4537252"/>
-            <a:ext cx="10271455" cy="744321"/>
-          </a:xfrm>
-          <a:prstGeom prst="rect">
-            <a:avLst/>
-          </a:prstGeom>
-          <a:noFill/>
-        </p:spPr>
-        <p:txBody>
-          <a:bodyPr wrap="square" anchor="ctr"/>
-          <a:lstStyle/>
-          <a:p>
-            <a:r>
-              <a:rPr sz="1500" b="1" i="0">
-                <a:solidFill>
-                  <a:srgbClr val="095292"/>
-                </a:solidFill>
-                <a:latin typeface="Calibri"/>
-              </a:rPr>
-              <a:t>1 min · La pregunta para el curso</a:t>
-            </a:r>
-          </a:p>
-          <a:p>
-            <a:pPr>
-              <a:spcBef>
-                <a:spcPts val="200"/>
-              </a:spcBef>
-            </a:pPr>
-            <a:r>
-              <a:rPr sz="1300" b="0" i="0">
-                <a:solidFill>
-                  <a:srgbClr val="333333"/>
-                </a:solidFill>
-                <a:latin typeface="Calibri"/>
-              </a:rPr>
-              <a:t>Con las dos alternativas que están considerando.</a:t>
-            </a:r>
-          </a:p>
-        </p:txBody>
-      </p:sp>
-      <p:sp>
-        <p:nvSpPr>
-          <p:cNvPr id="22" name="Rounded Rectangle 21"/>
-          <p:cNvSpPr/>
-          <p:nvPr/>
-        </p:nvSpPr>
-        <p:spPr>
-          <a:xfrm>
-            <a:off x="457200" y="5446166"/>
-            <a:ext cx="11277295" cy="908913"/>
-          </a:xfrm>
-          <a:prstGeom prst="roundRect">
-            <a:avLst>
-              <a:gd name="adj" fmla="val 12000"/>
-            </a:avLst>
-          </a:prstGeom>
-          <a:solidFill>
-            <a:srgbClr val="F2F2F2"/>
-          </a:solidFill>
-          <a:ln>
-            <a:noFill/>
-          </a:ln>
-        </p:spPr>
-        <p:style>
-          <a:lnRef idx="1">
-            <a:schemeClr val="accent1"/>
-          </a:lnRef>
-          <a:fillRef idx="3">
-            <a:schemeClr val="accent1"/>
-          </a:fillRef>
-          <a:effectRef idx="2">
-            <a:schemeClr val="accent1"/>
-          </a:effectRef>
-          <a:fontRef idx="minor">
-            <a:schemeClr val="lt1"/>
-          </a:fontRef>
-        </p:style>
-        <p:txBody>
-          <a:bodyPr rtlCol="0" anchor="ctr"/>
-          <a:lstStyle/>
-          <a:p>
-            <a:pPr algn="ctr"/>
-          </a:p>
-        </p:txBody>
-      </p:sp>
-      <p:sp>
-        <p:nvSpPr>
-          <p:cNvPr id="23" name="Rounded Rectangle 22"/>
-          <p:cNvSpPr/>
-          <p:nvPr/>
-        </p:nvSpPr>
-        <p:spPr>
-          <a:xfrm>
-            <a:off x="594360" y="5681167"/>
-            <a:ext cx="438912" cy="438912"/>
-          </a:xfrm>
-          <a:prstGeom prst="roundRect">
-            <a:avLst>
-              <a:gd name="adj" fmla="val 12000"/>
-            </a:avLst>
-          </a:prstGeom>
-          <a:solidFill>
-            <a:srgbClr val="095292"/>
-          </a:solidFill>
-          <a:ln>
-            <a:noFill/>
-          </a:ln>
-        </p:spPr>
-        <p:style>
-          <a:lnRef idx="1">
-            <a:schemeClr val="accent1"/>
-          </a:lnRef>
-          <a:fillRef idx="3">
-            <a:schemeClr val="accent1"/>
-          </a:fillRef>
-          <a:effectRef idx="2">
-            <a:schemeClr val="accent1"/>
-          </a:effectRef>
-          <a:fontRef idx="minor">
-            <a:schemeClr val="lt1"/>
-          </a:fontRef>
-        </p:style>
-        <p:txBody>
-          <a:bodyPr rtlCol="0" anchor="ctr"/>
-          <a:lstStyle/>
-          <a:p>
-            <a:pPr algn="ctr"/>
-          </a:p>
-        </p:txBody>
-      </p:sp>
-      <p:sp>
-        <p:nvSpPr>
-          <p:cNvPr id="24" name="TextBox 23"/>
-          <p:cNvSpPr txBox="1"/>
-          <p:nvPr/>
-        </p:nvSpPr>
-        <p:spPr>
-          <a:xfrm>
-            <a:off x="594360" y="5681167"/>
-            <a:ext cx="438912" cy="438912"/>
-          </a:xfrm>
-          <a:prstGeom prst="rect">
-            <a:avLst/>
-          </a:prstGeom>
-          <a:noFill/>
-        </p:spPr>
-        <p:txBody>
-          <a:bodyPr wrap="square" anchor="ctr"/>
-          <a:lstStyle/>
-          <a:p>
-            <a:pPr algn="ctr"/>
-            <a:r>
-              <a:rPr sz="1600" b="1" i="0">
-                <a:solidFill>
-                  <a:srgbClr val="FFFFFF"/>
-                </a:solidFill>
-                <a:latin typeface="Calibri"/>
-              </a:rPr>
-              <a:t>5</a:t>
-            </a:r>
-          </a:p>
-        </p:txBody>
-      </p:sp>
-      <p:sp>
-        <p:nvSpPr>
-          <p:cNvPr id="25" name="TextBox 24"/>
-          <p:cNvSpPr txBox="1"/>
-          <p:nvPr/>
-        </p:nvSpPr>
-        <p:spPr>
-          <a:xfrm>
-            <a:off x="1188720" y="5537606"/>
-            <a:ext cx="10271455" cy="744321"/>
-          </a:xfrm>
-          <a:prstGeom prst="rect">
-            <a:avLst/>
-          </a:prstGeom>
-          <a:noFill/>
-        </p:spPr>
-        <p:txBody>
-          <a:bodyPr wrap="square" anchor="ctr"/>
-          <a:lstStyle/>
-          <a:p>
-            <a:r>
-              <a:rPr sz="1500" b="1" i="0">
-                <a:solidFill>
-                  <a:srgbClr val="095292"/>
-                </a:solidFill>
-                <a:latin typeface="Calibri"/>
-              </a:rPr>
-              <a:t>30 s · Cierre</a:t>
-            </a:r>
-          </a:p>
-          <a:p>
-            <a:pPr>
-              <a:spcBef>
-                <a:spcPts val="200"/>
-              </a:spcBef>
-            </a:pPr>
-            <a:r>
-              <a:rPr sz="1300" b="0" i="0">
-                <a:solidFill>
-                  <a:srgbClr val="333333"/>
-                </a:solidFill>
-                <a:latin typeface="Calibri"/>
-              </a:rPr>
-              <a:t>Qué van a tener listo para la Clase 14.</a:t>
-            </a:r>
-          </a:p>
-        </p:txBody>
-      </p:sp>
-      <p:sp>
-        <p:nvSpPr>
-          <p:cNvPr id="26" name="TextBox 25"/>
           <p:cNvSpPr txBox="1"/>
           <p:nvPr/>
         </p:nvSpPr>
@@ -9519,7 +8226,7 @@
         <p:spPr>
           <a:xfrm>
             <a:off x="0" y="0"/>
-            <a:ext cx="12191695" cy="960120"/>
+            <a:ext cx="12191695" cy="1170432"/>
           </a:xfrm>
           <a:prstGeom prst="rect">
             <a:avLst/>
@@ -9561,7 +8268,7 @@
         </p:nvSpPr>
         <p:spPr>
           <a:xfrm>
-            <a:off x="0" y="960120"/>
+            <a:off x="0" y="1170432"/>
             <a:ext cx="12191695" cy="41148"/>
           </a:xfrm>
           <a:prstGeom prst="rect">
@@ -9605,7 +8312,7 @@
         <p:spPr>
           <a:xfrm>
             <a:off x="457200" y="164592"/>
-            <a:ext cx="11277295" cy="502920"/>
+            <a:ext cx="11277295" cy="384048"/>
           </a:xfrm>
           <a:prstGeom prst="rect">
             <a:avLst/>
@@ -9625,7 +8332,7 @@
                 </a:solidFill>
                 <a:latin typeface="Calibri"/>
               </a:rPr>
-              <a:t>Para la Clase 13</a:t>
+              <a:t>Taller de hoy: Ficha de avance y plan de ajustes</a:t>
             </a:r>
           </a:p>
         </p:txBody>
@@ -9638,8 +8345,8 @@
         </p:nvSpPr>
         <p:spPr>
           <a:xfrm>
-            <a:off x="457200" y="1170432"/>
-            <a:ext cx="11277295" cy="5230368"/>
+            <a:off x="457200" y="566928"/>
+            <a:ext cx="11277295" cy="411480"/>
           </a:xfrm>
           <a:prstGeom prst="rect">
             <a:avLst/>
@@ -9652,270 +8359,963 @@
           </a:bodyPr>
           <a:lstStyle/>
           <a:p>
-            <a:pPr>
-              <a:spcAft>
-                <a:spcPts val="800"/>
-              </a:spcAft>
-            </a:pPr>
-            <a:r>
-              <a:rPr sz="2000" b="0" i="0">
-                <a:solidFill>
-                  <a:srgbClr val="333333"/>
-                </a:solidFill>
-                <a:latin typeface="Calibri"/>
-              </a:rPr>
-              <a:t>–   </a:t>
-            </a:r>
-            <a:r>
-              <a:rPr sz="2000" b="1" i="0">
-                <a:solidFill>
-                  <a:srgbClr val="333333"/>
-                </a:solidFill>
-                <a:latin typeface="Calibri"/>
-              </a:rPr>
-              <a:t>Trabajo dirigido:</a:t>
-            </a:r>
-            <a:r>
-              <a:rPr sz="2000" b="0" i="0">
-                <a:solidFill>
-                  <a:srgbClr val="333333"/>
-                </a:solidFill>
-                <a:latin typeface="Calibri"/>
-              </a:rPr>
-              <a:t> Retroalimentación y ajustes — aplicar al prototipo los ajustes comprometidos en el muro, y dejar en el documento del equipo la ficha de avance completa con la lista de lo que no se arregla.</a:t>
-            </a:r>
-          </a:p>
-          <a:p>
-            <a:pPr>
-              <a:spcAft>
-                <a:spcPts val="800"/>
-              </a:spcAft>
-            </a:pPr>
-            <a:r>
-              <a:rPr sz="2000" b="0" i="0">
-                <a:solidFill>
-                  <a:srgbClr val="333333"/>
-                </a:solidFill>
-                <a:latin typeface="Calibri"/>
-              </a:rPr>
-              <a:t>–   </a:t>
-            </a:r>
-            <a:r>
-              <a:rPr sz="2000" b="1" i="0">
-                <a:solidFill>
-                  <a:srgbClr val="333333"/>
-                </a:solidFill>
-                <a:latin typeface="Calibri"/>
-              </a:rPr>
-              <a:t>Trabajo independiente:</a:t>
-            </a:r>
-            <a:r>
-              <a:rPr sz="2000" b="0" i="0">
-                <a:solidFill>
-                  <a:srgbClr val="333333"/>
-                </a:solidFill>
-                <a:latin typeface="Calibri"/>
-              </a:rPr>
-              <a:t> Revisión entre pares: leer el documento de </a:t>
-            </a:r>
-            <a:r>
-              <a:rPr sz="2000" b="1" i="0">
-                <a:solidFill>
-                  <a:srgbClr val="333333"/>
-                </a:solidFill>
-                <a:latin typeface="Calibri"/>
-              </a:rPr>
-              <a:t>otro equipo</a:t>
-            </a:r>
-            <a:r>
-              <a:rPr sz="2000" b="0" i="0">
-                <a:solidFill>
-                  <a:srgbClr val="333333"/>
-                </a:solidFill>
-                <a:latin typeface="Calibri"/>
-              </a:rPr>
-              <a:t> (el docente asigna la pareja) y dejarle </a:t>
-            </a:r>
-            <a:r>
-              <a:rPr sz="2000" b="1" i="0">
-                <a:solidFill>
-                  <a:srgbClr val="333333"/>
-                </a:solidFill>
-                <a:latin typeface="Calibri"/>
-              </a:rPr>
-              <a:t>dos observaciones escritas</a:t>
-            </a:r>
-            <a:r>
-              <a:rPr sz="2000" b="0" i="0">
-                <a:solidFill>
-                  <a:srgbClr val="333333"/>
-                </a:solidFill>
-                <a:latin typeface="Calibri"/>
-              </a:rPr>
-              <a:t> con el formato de hoy — observación y expectativa, una sola cosa importante cada una.</a:t>
-            </a:r>
-          </a:p>
-          <a:p>
-            <a:pPr>
-              <a:spcAft>
-                <a:spcPts val="800"/>
-              </a:spcAft>
-            </a:pPr>
-            <a:r>
-              <a:rPr sz="2000" b="0" i="0">
-                <a:solidFill>
-                  <a:srgbClr val="333333"/>
-                </a:solidFill>
-                <a:latin typeface="Calibri"/>
-              </a:rPr>
-              <a:t>–   </a:t>
-            </a:r>
-            <a:r>
-              <a:rPr sz="2000" b="1" i="0">
-                <a:solidFill>
-                  <a:srgbClr val="333333"/>
-                </a:solidFill>
-                <a:latin typeface="Calibri"/>
-              </a:rPr>
-              <a:t>Clase 13 · Evaluación de impacto social y ambiental</a:t>
-            </a:r>
-            <a:r>
-              <a:rPr sz="2000" b="0" i="0">
-                <a:solidFill>
-                  <a:srgbClr val="333333"/>
-                </a:solidFill>
-                <a:latin typeface="Calibri"/>
-              </a:rPr>
-              <a:t> — vemos el </a:t>
-            </a:r>
-            <a:r>
-              <a:rPr sz="2000" b="1" i="0">
-                <a:solidFill>
-                  <a:srgbClr val="333333"/>
-                </a:solidFill>
-                <a:latin typeface="Calibri"/>
-              </a:rPr>
-              <a:t>impacto social y ambiental</a:t>
-            </a:r>
-            <a:r>
-              <a:rPr sz="2000" b="0" i="0">
-                <a:solidFill>
-                  <a:srgbClr val="333333"/>
-                </a:solidFill>
-                <a:latin typeface="Calibri"/>
-              </a:rPr>
-              <a:t> del proyecto: a quién más afecta esto aunque no lo use, y cómo se mide.</a:t>
-            </a:r>
-          </a:p>
-          <a:p>
-            <a:pPr>
-              <a:spcAft>
-                <a:spcPts val="800"/>
-              </a:spcAft>
-            </a:pPr>
-            <a:r>
-              <a:rPr sz="2000" b="0" i="0">
-                <a:solidFill>
-                  <a:srgbClr val="333333"/>
-                </a:solidFill>
-                <a:latin typeface="Calibri"/>
-              </a:rPr>
-              <a:t>–   </a:t>
-            </a:r>
-            <a:r>
-              <a:rPr sz="2000" b="1" i="0">
-                <a:solidFill>
-                  <a:srgbClr val="333333"/>
-                </a:solidFill>
-                <a:latin typeface="Calibri"/>
-              </a:rPr>
-              <a:t>Aviso:</a:t>
-            </a:r>
-            <a:r>
-              <a:rPr sz="2000" b="0" i="0">
-                <a:solidFill>
-                  <a:srgbClr val="333333"/>
-                </a:solidFill>
-                <a:latin typeface="Calibri"/>
-              </a:rPr>
-              <a:t> Traigan a la Clase 13 el </a:t>
-            </a:r>
-            <a:r>
-              <a:rPr sz="2000" b="1" i="0">
-                <a:solidFill>
-                  <a:srgbClr val="333333"/>
-                </a:solidFill>
-                <a:latin typeface="Calibri"/>
-              </a:rPr>
-              <a:t>listado de actores no usuarios de la Clase 3</a:t>
-            </a:r>
-            <a:r>
-              <a:rPr sz="2000" b="0" i="0">
-                <a:solidFill>
-                  <a:srgbClr val="333333"/>
-                </a:solidFill>
-                <a:latin typeface="Calibri"/>
-              </a:rPr>
-              <a:t> y el </a:t>
-            </a:r>
-            <a:r>
-              <a:rPr sz="2000" b="1" i="0">
-                <a:solidFill>
-                  <a:srgbClr val="333333"/>
-                </a:solidFill>
-                <a:latin typeface="Calibri"/>
-              </a:rPr>
-              <a:t>indicador ambiental de la sesión 5</a:t>
-            </a:r>
-            <a:r>
-              <a:rPr sz="2000" b="0" i="0">
-                <a:solidFill>
-                  <a:srgbClr val="333333"/>
-                </a:solidFill>
-                <a:latin typeface="Calibri"/>
-              </a:rPr>
-              <a:t>: los dos se usan directamente en el taller. Si los perdieron, recupérenlos del documento del equipo antes de la sesión.</a:t>
-            </a:r>
-          </a:p>
-          <a:p>
-            <a:pPr>
-              <a:spcAft>
-                <a:spcPts val="800"/>
-              </a:spcAft>
-            </a:pPr>
-            <a:r>
-              <a:rPr sz="2000" b="0" i="0">
-                <a:solidFill>
-                  <a:srgbClr val="333333"/>
-                </a:solidFill>
-                <a:latin typeface="Calibri"/>
-              </a:rPr>
-              <a:t>–   </a:t>
-            </a:r>
-            <a:r>
-              <a:rPr sz="2000" b="1" i="0">
-                <a:solidFill>
-                  <a:srgbClr val="333333"/>
-                </a:solidFill>
-                <a:latin typeface="Calibri"/>
-              </a:rPr>
-              <a:t>Antes de salir:</a:t>
-            </a:r>
-            <a:r>
-              <a:rPr sz="2000" b="0" i="0">
-                <a:solidFill>
-                  <a:srgbClr val="333333"/>
-                </a:solidFill>
-                <a:latin typeface="Calibri"/>
-              </a:rPr>
-              <a:t> el enlace del documento del equipo en el chat, con permiso de lectura para el docente, y el nombre del vocero de hoy.</a:t>
-            </a:r>
-          </a:p>
-        </p:txBody>
-      </p:sp>
-      <p:sp>
-        <p:nvSpPr>
-          <p:cNvPr id="6" name="TextBox 5"/>
+            <a:r>
+              <a:rPr sz="1400" b="0" i="0">
+                <a:solidFill>
+                  <a:srgbClr val="B8D8EE"/>
+                </a:solidFill>
+                <a:latin typeface="Calibri"/>
+              </a:rPr>
+              <a:t>12 min en equipos · 12 min: hallazgos, clasificación, decisión y la pregunta al curso · ficha de avance de 5 bloques, con el plan de ajustes al cerrar</a:t>
+            </a:r>
+          </a:p>
+        </p:txBody>
+      </p:sp>
+      <p:sp>
+        <p:nvSpPr>
+          <p:cNvPr id="6" name="Rounded Rectangle 5"/>
+          <p:cNvSpPr/>
+          <p:nvPr/>
+        </p:nvSpPr>
+        <p:spPr>
+          <a:xfrm>
+            <a:off x="457200" y="1472184"/>
+            <a:ext cx="11277295" cy="566928"/>
+          </a:xfrm>
+          <a:prstGeom prst="roundRect">
+            <a:avLst>
+              <a:gd name="adj" fmla="val 12000"/>
+            </a:avLst>
+          </a:prstGeom>
+          <a:solidFill>
+            <a:srgbClr val="F2F2F2"/>
+          </a:solidFill>
+          <a:ln>
+            <a:noFill/>
+          </a:ln>
+        </p:spPr>
+        <p:style>
+          <a:lnRef idx="1">
+            <a:schemeClr val="accent1"/>
+          </a:lnRef>
+          <a:fillRef idx="3">
+            <a:schemeClr val="accent1"/>
+          </a:fillRef>
+          <a:effectRef idx="2">
+            <a:schemeClr val="accent1"/>
+          </a:effectRef>
+          <a:fontRef idx="minor">
+            <a:schemeClr val="lt1"/>
+          </a:fontRef>
+        </p:style>
+        <p:txBody>
+          <a:bodyPr rtlCol="0" anchor="ctr"/>
+          <a:lstStyle/>
+          <a:p>
+            <a:pPr algn="ctr"/>
+          </a:p>
+        </p:txBody>
+      </p:sp>
+      <p:sp>
+        <p:nvSpPr>
+          <p:cNvPr id="7" name="Rectangle 6"/>
+          <p:cNvSpPr/>
+          <p:nvPr/>
+        </p:nvSpPr>
+        <p:spPr>
+          <a:xfrm>
+            <a:off x="640080" y="1618487"/>
+            <a:ext cx="274320" cy="274320"/>
+          </a:xfrm>
+          <a:prstGeom prst="rect">
+            <a:avLst/>
+          </a:prstGeom>
+          <a:solidFill>
+            <a:srgbClr val="FFFFFF"/>
+          </a:solidFill>
+          <a:ln>
+            <a:solidFill>
+              <a:srgbClr val="333333"/>
+            </a:solidFill>
+          </a:ln>
+        </p:spPr>
+        <p:style>
+          <a:lnRef idx="1">
+            <a:schemeClr val="accent1"/>
+          </a:lnRef>
+          <a:fillRef idx="3">
+            <a:schemeClr val="accent1"/>
+          </a:fillRef>
+          <a:effectRef idx="2">
+            <a:schemeClr val="accent1"/>
+          </a:effectRef>
+          <a:fontRef idx="minor">
+            <a:schemeClr val="lt1"/>
+          </a:fontRef>
+        </p:style>
+        <p:txBody>
+          <a:bodyPr rtlCol="0" anchor="ctr"/>
+          <a:lstStyle/>
+          <a:p>
+            <a:pPr algn="ctr"/>
+          </a:p>
+        </p:txBody>
+      </p:sp>
+      <p:sp>
+        <p:nvSpPr>
+          <p:cNvPr id="8" name="Rectangle 7"/>
+          <p:cNvSpPr/>
+          <p:nvPr/>
+        </p:nvSpPr>
+        <p:spPr>
+          <a:xfrm>
+            <a:off x="640080" y="1618487"/>
+            <a:ext cx="73152" cy="274320"/>
+          </a:xfrm>
+          <a:prstGeom prst="rect">
+            <a:avLst/>
+          </a:prstGeom>
+          <a:solidFill>
+            <a:srgbClr val="269CCB"/>
+          </a:solidFill>
+          <a:ln>
+            <a:noFill/>
+          </a:ln>
+        </p:spPr>
+        <p:style>
+          <a:lnRef idx="1">
+            <a:schemeClr val="accent1"/>
+          </a:lnRef>
+          <a:fillRef idx="3">
+            <a:schemeClr val="accent1"/>
+          </a:fillRef>
+          <a:effectRef idx="2">
+            <a:schemeClr val="accent1"/>
+          </a:effectRef>
+          <a:fontRef idx="minor">
+            <a:schemeClr val="lt1"/>
+          </a:fontRef>
+        </p:style>
+        <p:txBody>
+          <a:bodyPr rtlCol="0" anchor="ctr"/>
+          <a:lstStyle/>
+          <a:p>
+            <a:pPr algn="ctr"/>
+          </a:p>
+        </p:txBody>
+      </p:sp>
+      <p:sp>
+        <p:nvSpPr>
+          <p:cNvPr id="9" name="TextBox 8"/>
+          <p:cNvSpPr txBox="1"/>
+          <p:nvPr/>
+        </p:nvSpPr>
+        <p:spPr>
+          <a:xfrm>
+            <a:off x="1097280" y="1563624"/>
+            <a:ext cx="10362895" cy="402336"/>
+          </a:xfrm>
+          <a:prstGeom prst="rect">
+            <a:avLst/>
+          </a:prstGeom>
+          <a:noFill/>
+        </p:spPr>
+        <p:txBody>
+          <a:bodyPr wrap="square" anchor="ctr"/>
+          <a:lstStyle/>
+          <a:p>
+            <a:r>
+              <a:rPr sz="1500" b="1" i="0">
+                <a:solidFill>
+                  <a:srgbClr val="333333"/>
+                </a:solidFill>
+                <a:latin typeface="Calibri"/>
+              </a:rPr>
+              <a:t>LOS TRES HALLAZGOS</a:t>
+            </a:r>
+            <a:r>
+              <a:rPr sz="1500" b="0" i="0">
+                <a:solidFill>
+                  <a:srgbClr val="333333"/>
+                </a:solidFill>
+                <a:latin typeface="Calibri"/>
+              </a:rPr>
+              <a:t> — Tres tropiezos de la prueba, escritos como </a:t>
+            </a:r>
+            <a:r>
+              <a:rPr sz="1500" b="1" i="0">
+                <a:solidFill>
+                  <a:srgbClr val="333333"/>
+                </a:solidFill>
+                <a:latin typeface="Calibri"/>
+              </a:rPr>
+              <a:t>lo que la persona hizo o preguntó</a:t>
+            </a:r>
+            <a:r>
+              <a:rPr sz="1500" b="0" i="0">
+                <a:solidFill>
+                  <a:srgbClr val="333333"/>
+                </a:solidFill>
+                <a:latin typeface="Calibri"/>
+              </a:rPr>
+              <a:t> — no como lo que dijo al final, y no como la solución.</a:t>
+            </a:r>
+          </a:p>
+        </p:txBody>
+      </p:sp>
+      <p:sp>
+        <p:nvSpPr>
+          <p:cNvPr id="10" name="Rounded Rectangle 9"/>
+          <p:cNvSpPr/>
+          <p:nvPr/>
+        </p:nvSpPr>
+        <p:spPr>
+          <a:xfrm>
+            <a:off x="457200" y="2148839"/>
+            <a:ext cx="11277295" cy="566928"/>
+          </a:xfrm>
+          <a:prstGeom prst="roundRect">
+            <a:avLst>
+              <a:gd name="adj" fmla="val 12000"/>
+            </a:avLst>
+          </a:prstGeom>
+          <a:solidFill>
+            <a:srgbClr val="F2F2F2"/>
+          </a:solidFill>
+          <a:ln>
+            <a:noFill/>
+          </a:ln>
+        </p:spPr>
+        <p:style>
+          <a:lnRef idx="1">
+            <a:schemeClr val="accent1"/>
+          </a:lnRef>
+          <a:fillRef idx="3">
+            <a:schemeClr val="accent1"/>
+          </a:fillRef>
+          <a:effectRef idx="2">
+            <a:schemeClr val="accent1"/>
+          </a:effectRef>
+          <a:fontRef idx="minor">
+            <a:schemeClr val="lt1"/>
+          </a:fontRef>
+        </p:style>
+        <p:txBody>
+          <a:bodyPr rtlCol="0" anchor="ctr"/>
+          <a:lstStyle/>
+          <a:p>
+            <a:pPr algn="ctr"/>
+          </a:p>
+        </p:txBody>
+      </p:sp>
+      <p:sp>
+        <p:nvSpPr>
+          <p:cNvPr id="11" name="Rectangle 10"/>
+          <p:cNvSpPr/>
+          <p:nvPr/>
+        </p:nvSpPr>
+        <p:spPr>
+          <a:xfrm>
+            <a:off x="640080" y="2295144"/>
+            <a:ext cx="274320" cy="274320"/>
+          </a:xfrm>
+          <a:prstGeom prst="rect">
+            <a:avLst/>
+          </a:prstGeom>
+          <a:solidFill>
+            <a:srgbClr val="FFFFFF"/>
+          </a:solidFill>
+          <a:ln>
+            <a:solidFill>
+              <a:srgbClr val="333333"/>
+            </a:solidFill>
+          </a:ln>
+        </p:spPr>
+        <p:style>
+          <a:lnRef idx="1">
+            <a:schemeClr val="accent1"/>
+          </a:lnRef>
+          <a:fillRef idx="3">
+            <a:schemeClr val="accent1"/>
+          </a:fillRef>
+          <a:effectRef idx="2">
+            <a:schemeClr val="accent1"/>
+          </a:effectRef>
+          <a:fontRef idx="minor">
+            <a:schemeClr val="lt1"/>
+          </a:fontRef>
+        </p:style>
+        <p:txBody>
+          <a:bodyPr rtlCol="0" anchor="ctr"/>
+          <a:lstStyle/>
+          <a:p>
+            <a:pPr algn="ctr"/>
+          </a:p>
+        </p:txBody>
+      </p:sp>
+      <p:sp>
+        <p:nvSpPr>
+          <p:cNvPr id="12" name="Rectangle 11"/>
+          <p:cNvSpPr/>
+          <p:nvPr/>
+        </p:nvSpPr>
+        <p:spPr>
+          <a:xfrm>
+            <a:off x="640080" y="2295144"/>
+            <a:ext cx="73152" cy="274320"/>
+          </a:xfrm>
+          <a:prstGeom prst="rect">
+            <a:avLst/>
+          </a:prstGeom>
+          <a:solidFill>
+            <a:srgbClr val="269CCB"/>
+          </a:solidFill>
+          <a:ln>
+            <a:noFill/>
+          </a:ln>
+        </p:spPr>
+        <p:style>
+          <a:lnRef idx="1">
+            <a:schemeClr val="accent1"/>
+          </a:lnRef>
+          <a:fillRef idx="3">
+            <a:schemeClr val="accent1"/>
+          </a:fillRef>
+          <a:effectRef idx="2">
+            <a:schemeClr val="accent1"/>
+          </a:effectRef>
+          <a:fontRef idx="minor">
+            <a:schemeClr val="lt1"/>
+          </a:fontRef>
+        </p:style>
+        <p:txBody>
+          <a:bodyPr rtlCol="0" anchor="ctr"/>
+          <a:lstStyle/>
+          <a:p>
+            <a:pPr algn="ctr"/>
+          </a:p>
+        </p:txBody>
+      </p:sp>
+      <p:sp>
+        <p:nvSpPr>
+          <p:cNvPr id="13" name="TextBox 12"/>
+          <p:cNvSpPr txBox="1"/>
+          <p:nvPr/>
+        </p:nvSpPr>
+        <p:spPr>
+          <a:xfrm>
+            <a:off x="1097280" y="2240279"/>
+            <a:ext cx="10362895" cy="402336"/>
+          </a:xfrm>
+          <a:prstGeom prst="rect">
+            <a:avLst/>
+          </a:prstGeom>
+          <a:noFill/>
+        </p:spPr>
+        <p:txBody>
+          <a:bodyPr wrap="square" anchor="ctr"/>
+          <a:lstStyle/>
+          <a:p>
+            <a:r>
+              <a:rPr sz="1500" b="1" i="0">
+                <a:solidFill>
+                  <a:srgbClr val="333333"/>
+                </a:solidFill>
+                <a:latin typeface="Calibri"/>
+              </a:rPr>
+              <a:t>LA CLASIFICACIÓN Y EL PATRÓN</a:t>
+            </a:r>
+            <a:r>
+              <a:rPr sz="1500" b="0" i="0">
+                <a:solidFill>
+                  <a:srgbClr val="333333"/>
+                </a:solidFill>
+                <a:latin typeface="Calibri"/>
+              </a:rPr>
+              <a:t> — El tipo de cada hallazgo —lenguaje, flujo, expectativa o suposición nuestra— y si se repitió en más de una persona.</a:t>
+            </a:r>
+          </a:p>
+        </p:txBody>
+      </p:sp>
+      <p:sp>
+        <p:nvSpPr>
+          <p:cNvPr id="14" name="Rounded Rectangle 13"/>
+          <p:cNvSpPr/>
+          <p:nvPr/>
+        </p:nvSpPr>
+        <p:spPr>
+          <a:xfrm>
+            <a:off x="457200" y="2825496"/>
+            <a:ext cx="11277295" cy="566928"/>
+          </a:xfrm>
+          <a:prstGeom prst="roundRect">
+            <a:avLst>
+              <a:gd name="adj" fmla="val 12000"/>
+            </a:avLst>
+          </a:prstGeom>
+          <a:solidFill>
+            <a:srgbClr val="F2F2F2"/>
+          </a:solidFill>
+          <a:ln>
+            <a:noFill/>
+          </a:ln>
+        </p:spPr>
+        <p:style>
+          <a:lnRef idx="1">
+            <a:schemeClr val="accent1"/>
+          </a:lnRef>
+          <a:fillRef idx="3">
+            <a:schemeClr val="accent1"/>
+          </a:fillRef>
+          <a:effectRef idx="2">
+            <a:schemeClr val="accent1"/>
+          </a:effectRef>
+          <a:fontRef idx="minor">
+            <a:schemeClr val="lt1"/>
+          </a:fontRef>
+        </p:style>
+        <p:txBody>
+          <a:bodyPr rtlCol="0" anchor="ctr"/>
+          <a:lstStyle/>
+          <a:p>
+            <a:pPr algn="ctr"/>
+          </a:p>
+        </p:txBody>
+      </p:sp>
+      <p:sp>
+        <p:nvSpPr>
+          <p:cNvPr id="15" name="Rectangle 14"/>
+          <p:cNvSpPr/>
+          <p:nvPr/>
+        </p:nvSpPr>
+        <p:spPr>
+          <a:xfrm>
+            <a:off x="640080" y="2971800"/>
+            <a:ext cx="274320" cy="274320"/>
+          </a:xfrm>
+          <a:prstGeom prst="rect">
+            <a:avLst/>
+          </a:prstGeom>
+          <a:solidFill>
+            <a:srgbClr val="FFFFFF"/>
+          </a:solidFill>
+          <a:ln>
+            <a:solidFill>
+              <a:srgbClr val="333333"/>
+            </a:solidFill>
+          </a:ln>
+        </p:spPr>
+        <p:style>
+          <a:lnRef idx="1">
+            <a:schemeClr val="accent1"/>
+          </a:lnRef>
+          <a:fillRef idx="3">
+            <a:schemeClr val="accent1"/>
+          </a:fillRef>
+          <a:effectRef idx="2">
+            <a:schemeClr val="accent1"/>
+          </a:effectRef>
+          <a:fontRef idx="minor">
+            <a:schemeClr val="lt1"/>
+          </a:fontRef>
+        </p:style>
+        <p:txBody>
+          <a:bodyPr rtlCol="0" anchor="ctr"/>
+          <a:lstStyle/>
+          <a:p>
+            <a:pPr algn="ctr"/>
+          </a:p>
+        </p:txBody>
+      </p:sp>
+      <p:sp>
+        <p:nvSpPr>
+          <p:cNvPr id="16" name="Rectangle 15"/>
+          <p:cNvSpPr/>
+          <p:nvPr/>
+        </p:nvSpPr>
+        <p:spPr>
+          <a:xfrm>
+            <a:off x="640080" y="2971800"/>
+            <a:ext cx="73152" cy="274320"/>
+          </a:xfrm>
+          <a:prstGeom prst="rect">
+            <a:avLst/>
+          </a:prstGeom>
+          <a:solidFill>
+            <a:srgbClr val="269CCB"/>
+          </a:solidFill>
+          <a:ln>
+            <a:noFill/>
+          </a:ln>
+        </p:spPr>
+        <p:style>
+          <a:lnRef idx="1">
+            <a:schemeClr val="accent1"/>
+          </a:lnRef>
+          <a:fillRef idx="3">
+            <a:schemeClr val="accent1"/>
+          </a:fillRef>
+          <a:effectRef idx="2">
+            <a:schemeClr val="accent1"/>
+          </a:effectRef>
+          <a:fontRef idx="minor">
+            <a:schemeClr val="lt1"/>
+          </a:fontRef>
+        </p:style>
+        <p:txBody>
+          <a:bodyPr rtlCol="0" anchor="ctr"/>
+          <a:lstStyle/>
+          <a:p>
+            <a:pPr algn="ctr"/>
+          </a:p>
+        </p:txBody>
+      </p:sp>
+      <p:sp>
+        <p:nvSpPr>
+          <p:cNvPr id="17" name="TextBox 16"/>
+          <p:cNvSpPr txBox="1"/>
+          <p:nvPr/>
+        </p:nvSpPr>
+        <p:spPr>
+          <a:xfrm>
+            <a:off x="1097280" y="2916936"/>
+            <a:ext cx="10362895" cy="402336"/>
+          </a:xfrm>
+          <a:prstGeom prst="rect">
+            <a:avLst/>
+          </a:prstGeom>
+          <a:noFill/>
+        </p:spPr>
+        <p:txBody>
+          <a:bodyPr wrap="square" anchor="ctr"/>
+          <a:lstStyle/>
+          <a:p>
+            <a:r>
+              <a:rPr sz="1500" b="1" i="0">
+                <a:solidFill>
+                  <a:srgbClr val="333333"/>
+                </a:solidFill>
+                <a:latin typeface="Calibri"/>
+              </a:rPr>
+              <a:t>QUÉ ARREGLAMOS Y QUÉ NO</a:t>
+            </a:r>
+            <a:r>
+              <a:rPr sz="1500" b="0" i="0">
+                <a:solidFill>
+                  <a:srgbClr val="333333"/>
+                </a:solidFill>
+                <a:latin typeface="Calibri"/>
+              </a:rPr>
+              <a:t> — Lo que se arregla antes de la Clase 14, y </a:t>
+            </a:r>
+            <a:r>
+              <a:rPr sz="1500" b="1" i="0">
+                <a:solidFill>
+                  <a:srgbClr val="333333"/>
+                </a:solidFill>
+                <a:latin typeface="Calibri"/>
+              </a:rPr>
+              <a:t>lo que no se arregla con su razón</a:t>
+            </a:r>
+            <a:r>
+              <a:rPr sz="1500" b="0" i="0">
+                <a:solidFill>
+                  <a:srgbClr val="333333"/>
+                </a:solidFill>
+                <a:latin typeface="Calibri"/>
+              </a:rPr>
+              <a:t>: fuera del alcance, no alcanza el tiempo, o cambia una restricción.</a:t>
+            </a:r>
+          </a:p>
+        </p:txBody>
+      </p:sp>
+      <p:sp>
+        <p:nvSpPr>
+          <p:cNvPr id="18" name="Rounded Rectangle 17"/>
+          <p:cNvSpPr/>
+          <p:nvPr/>
+        </p:nvSpPr>
+        <p:spPr>
+          <a:xfrm>
+            <a:off x="457200" y="3502152"/>
+            <a:ext cx="11277295" cy="566928"/>
+          </a:xfrm>
+          <a:prstGeom prst="roundRect">
+            <a:avLst>
+              <a:gd name="adj" fmla="val 12000"/>
+            </a:avLst>
+          </a:prstGeom>
+          <a:solidFill>
+            <a:srgbClr val="F2F2F2"/>
+          </a:solidFill>
+          <a:ln>
+            <a:noFill/>
+          </a:ln>
+        </p:spPr>
+        <p:style>
+          <a:lnRef idx="1">
+            <a:schemeClr val="accent1"/>
+          </a:lnRef>
+          <a:fillRef idx="3">
+            <a:schemeClr val="accent1"/>
+          </a:fillRef>
+          <a:effectRef idx="2">
+            <a:schemeClr val="accent1"/>
+          </a:effectRef>
+          <a:fontRef idx="minor">
+            <a:schemeClr val="lt1"/>
+          </a:fontRef>
+        </p:style>
+        <p:txBody>
+          <a:bodyPr rtlCol="0" anchor="ctr"/>
+          <a:lstStyle/>
+          <a:p>
+            <a:pPr algn="ctr"/>
+          </a:p>
+        </p:txBody>
+      </p:sp>
+      <p:sp>
+        <p:nvSpPr>
+          <p:cNvPr id="19" name="Rectangle 18"/>
+          <p:cNvSpPr/>
+          <p:nvPr/>
+        </p:nvSpPr>
+        <p:spPr>
+          <a:xfrm>
+            <a:off x="640080" y="3648456"/>
+            <a:ext cx="274320" cy="274320"/>
+          </a:xfrm>
+          <a:prstGeom prst="rect">
+            <a:avLst/>
+          </a:prstGeom>
+          <a:solidFill>
+            <a:srgbClr val="FFFFFF"/>
+          </a:solidFill>
+          <a:ln>
+            <a:solidFill>
+              <a:srgbClr val="333333"/>
+            </a:solidFill>
+          </a:ln>
+        </p:spPr>
+        <p:style>
+          <a:lnRef idx="1">
+            <a:schemeClr val="accent1"/>
+          </a:lnRef>
+          <a:fillRef idx="3">
+            <a:schemeClr val="accent1"/>
+          </a:fillRef>
+          <a:effectRef idx="2">
+            <a:schemeClr val="accent1"/>
+          </a:effectRef>
+          <a:fontRef idx="minor">
+            <a:schemeClr val="lt1"/>
+          </a:fontRef>
+        </p:style>
+        <p:txBody>
+          <a:bodyPr rtlCol="0" anchor="ctr"/>
+          <a:lstStyle/>
+          <a:p>
+            <a:pPr algn="ctr"/>
+          </a:p>
+        </p:txBody>
+      </p:sp>
+      <p:sp>
+        <p:nvSpPr>
+          <p:cNvPr id="20" name="Rectangle 19"/>
+          <p:cNvSpPr/>
+          <p:nvPr/>
+        </p:nvSpPr>
+        <p:spPr>
+          <a:xfrm>
+            <a:off x="640080" y="3648456"/>
+            <a:ext cx="73152" cy="274320"/>
+          </a:xfrm>
+          <a:prstGeom prst="rect">
+            <a:avLst/>
+          </a:prstGeom>
+          <a:solidFill>
+            <a:srgbClr val="269CCB"/>
+          </a:solidFill>
+          <a:ln>
+            <a:noFill/>
+          </a:ln>
+        </p:spPr>
+        <p:style>
+          <a:lnRef idx="1">
+            <a:schemeClr val="accent1"/>
+          </a:lnRef>
+          <a:fillRef idx="3">
+            <a:schemeClr val="accent1"/>
+          </a:fillRef>
+          <a:effectRef idx="2">
+            <a:schemeClr val="accent1"/>
+          </a:effectRef>
+          <a:fontRef idx="minor">
+            <a:schemeClr val="lt1"/>
+          </a:fontRef>
+        </p:style>
+        <p:txBody>
+          <a:bodyPr rtlCol="0" anchor="ctr"/>
+          <a:lstStyle/>
+          <a:p>
+            <a:pPr algn="ctr"/>
+          </a:p>
+        </p:txBody>
+      </p:sp>
+      <p:sp>
+        <p:nvSpPr>
+          <p:cNvPr id="21" name="TextBox 20"/>
+          <p:cNvSpPr txBox="1"/>
+          <p:nvPr/>
+        </p:nvSpPr>
+        <p:spPr>
+          <a:xfrm>
+            <a:off x="1097280" y="3593592"/>
+            <a:ext cx="10362895" cy="402336"/>
+          </a:xfrm>
+          <a:prstGeom prst="rect">
+            <a:avLst/>
+          </a:prstGeom>
+          <a:noFill/>
+        </p:spPr>
+        <p:txBody>
+          <a:bodyPr wrap="square" anchor="ctr"/>
+          <a:lstStyle/>
+          <a:p>
+            <a:r>
+              <a:rPr sz="1500" b="1" i="0">
+                <a:solidFill>
+                  <a:srgbClr val="333333"/>
+                </a:solidFill>
+                <a:latin typeface="Calibri"/>
+              </a:rPr>
+              <a:t>LA PREGUNTA PARA EL CURSO</a:t>
+            </a:r>
+            <a:r>
+              <a:rPr sz="1500" b="0" i="0">
+                <a:solidFill>
+                  <a:srgbClr val="333333"/>
+                </a:solidFill>
+                <a:latin typeface="Calibri"/>
+              </a:rPr>
+              <a:t> — Una pregunta abierta, concreta, sobre una decisión que el equipo no logra tomar. Es lo que hace útiles los tres minutos de retroalimentación.</a:t>
+            </a:r>
+          </a:p>
+        </p:txBody>
+      </p:sp>
+      <p:sp>
+        <p:nvSpPr>
+          <p:cNvPr id="22" name="Rounded Rectangle 21"/>
+          <p:cNvSpPr/>
+          <p:nvPr/>
+        </p:nvSpPr>
+        <p:spPr>
+          <a:xfrm>
+            <a:off x="457200" y="4178808"/>
+            <a:ext cx="11277295" cy="566928"/>
+          </a:xfrm>
+          <a:prstGeom prst="roundRect">
+            <a:avLst>
+              <a:gd name="adj" fmla="val 12000"/>
+            </a:avLst>
+          </a:prstGeom>
+          <a:solidFill>
+            <a:srgbClr val="F2F2F2"/>
+          </a:solidFill>
+          <a:ln>
+            <a:noFill/>
+          </a:ln>
+        </p:spPr>
+        <p:style>
+          <a:lnRef idx="1">
+            <a:schemeClr val="accent1"/>
+          </a:lnRef>
+          <a:fillRef idx="3">
+            <a:schemeClr val="accent1"/>
+          </a:fillRef>
+          <a:effectRef idx="2">
+            <a:schemeClr val="accent1"/>
+          </a:effectRef>
+          <a:fontRef idx="minor">
+            <a:schemeClr val="lt1"/>
+          </a:fontRef>
+        </p:style>
+        <p:txBody>
+          <a:bodyPr rtlCol="0" anchor="ctr"/>
+          <a:lstStyle/>
+          <a:p>
+            <a:pPr algn="ctr"/>
+          </a:p>
+        </p:txBody>
+      </p:sp>
+      <p:sp>
+        <p:nvSpPr>
+          <p:cNvPr id="23" name="Rectangle 22"/>
+          <p:cNvSpPr/>
+          <p:nvPr/>
+        </p:nvSpPr>
+        <p:spPr>
+          <a:xfrm>
+            <a:off x="640080" y="4325112"/>
+            <a:ext cx="274320" cy="274320"/>
+          </a:xfrm>
+          <a:prstGeom prst="rect">
+            <a:avLst/>
+          </a:prstGeom>
+          <a:solidFill>
+            <a:srgbClr val="FFFFFF"/>
+          </a:solidFill>
+          <a:ln>
+            <a:solidFill>
+              <a:srgbClr val="333333"/>
+            </a:solidFill>
+          </a:ln>
+        </p:spPr>
+        <p:style>
+          <a:lnRef idx="1">
+            <a:schemeClr val="accent1"/>
+          </a:lnRef>
+          <a:fillRef idx="3">
+            <a:schemeClr val="accent1"/>
+          </a:fillRef>
+          <a:effectRef idx="2">
+            <a:schemeClr val="accent1"/>
+          </a:effectRef>
+          <a:fontRef idx="minor">
+            <a:schemeClr val="lt1"/>
+          </a:fontRef>
+        </p:style>
+        <p:txBody>
+          <a:bodyPr rtlCol="0" anchor="ctr"/>
+          <a:lstStyle/>
+          <a:p>
+            <a:pPr algn="ctr"/>
+          </a:p>
+        </p:txBody>
+      </p:sp>
+      <p:sp>
+        <p:nvSpPr>
+          <p:cNvPr id="24" name="Rectangle 23"/>
+          <p:cNvSpPr/>
+          <p:nvPr/>
+        </p:nvSpPr>
+        <p:spPr>
+          <a:xfrm>
+            <a:off x="640080" y="4325112"/>
+            <a:ext cx="73152" cy="274320"/>
+          </a:xfrm>
+          <a:prstGeom prst="rect">
+            <a:avLst/>
+          </a:prstGeom>
+          <a:solidFill>
+            <a:srgbClr val="269CCB"/>
+          </a:solidFill>
+          <a:ln>
+            <a:noFill/>
+          </a:ln>
+        </p:spPr>
+        <p:style>
+          <a:lnRef idx="1">
+            <a:schemeClr val="accent1"/>
+          </a:lnRef>
+          <a:fillRef idx="3">
+            <a:schemeClr val="accent1"/>
+          </a:fillRef>
+          <a:effectRef idx="2">
+            <a:schemeClr val="accent1"/>
+          </a:effectRef>
+          <a:fontRef idx="minor">
+            <a:schemeClr val="lt1"/>
+          </a:fontRef>
+        </p:style>
+        <p:txBody>
+          <a:bodyPr rtlCol="0" anchor="ctr"/>
+          <a:lstStyle/>
+          <a:p>
+            <a:pPr algn="ctr"/>
+          </a:p>
+        </p:txBody>
+      </p:sp>
+      <p:sp>
+        <p:nvSpPr>
+          <p:cNvPr id="25" name="TextBox 24"/>
+          <p:cNvSpPr txBox="1"/>
+          <p:nvPr/>
+        </p:nvSpPr>
+        <p:spPr>
+          <a:xfrm>
+            <a:off x="1097280" y="4270248"/>
+            <a:ext cx="10362895" cy="402336"/>
+          </a:xfrm>
+          <a:prstGeom prst="rect">
+            <a:avLst/>
+          </a:prstGeom>
+          <a:noFill/>
+        </p:spPr>
+        <p:txBody>
+          <a:bodyPr wrap="square" anchor="ctr"/>
+          <a:lstStyle/>
+          <a:p>
+            <a:r>
+              <a:rPr sz="1500" b="1" i="0">
+                <a:solidFill>
+                  <a:srgbClr val="333333"/>
+                </a:solidFill>
+                <a:latin typeface="Calibri"/>
+              </a:rPr>
+              <a:t>EL PLAN DE AJUSTES</a:t>
+            </a:r>
+            <a:r>
+              <a:rPr sz="1500" b="0" i="0">
+                <a:solidFill>
+                  <a:srgbClr val="333333"/>
+                </a:solidFill>
+                <a:latin typeface="Calibri"/>
+              </a:rPr>
+              <a:t> — Las </a:t>
+            </a:r>
+            <a:r>
+              <a:rPr sz="1500" b="1" i="0">
+                <a:solidFill>
+                  <a:srgbClr val="333333"/>
+                </a:solidFill>
+                <a:latin typeface="Calibri"/>
+              </a:rPr>
+              <a:t>dos cosas</a:t>
+            </a:r>
+            <a:r>
+              <a:rPr sz="1500" b="0" i="0">
+                <a:solidFill>
+                  <a:srgbClr val="333333"/>
+                </a:solidFill>
+                <a:latin typeface="Calibri"/>
+              </a:rPr>
+              <a:t> que el equipo va a ajustar con lo que oyó en la retroalimentación, y </a:t>
+            </a:r>
+            <a:r>
+              <a:rPr sz="1500" b="1" i="0">
+                <a:solidFill>
+                  <a:srgbClr val="333333"/>
+                </a:solidFill>
+                <a:latin typeface="Calibri"/>
+              </a:rPr>
+              <a:t>qué lo motivó</a:t>
+            </a:r>
+            <a:r>
+              <a:rPr sz="1500" b="0" i="0">
+                <a:solidFill>
+                  <a:srgbClr val="333333"/>
+                </a:solidFill>
+                <a:latin typeface="Calibri"/>
+              </a:rPr>
+              <a:t>: quién lo dijo y qué dijo. Se llena en los últimos minutos de la sesión, no antes.</a:t>
+            </a:r>
+          </a:p>
+        </p:txBody>
+      </p:sp>
+      <p:sp>
+        <p:nvSpPr>
+          <p:cNvPr id="26" name="TextBox 25"/>
           <p:cNvSpPr txBox="1"/>
           <p:nvPr/>
         </p:nvSpPr>
@@ -9957,6 +9357,1576 @@
 </file>
 
 <file path=ppt/slides/slide22.xml><?xml version="1.0" encoding="utf-8"?>
+<p:sld xmlns:a="http://schemas.openxmlformats.org/drawingml/2006/main" xmlns:p="http://schemas.openxmlformats.org/presentationml/2006/main" xmlns:r="http://schemas.openxmlformats.org/officeDocument/2006/relationships">
+  <p:cSld>
+    <p:bg>
+      <p:bgPr>
+        <a:solidFill>
+          <a:srgbClr val="FFFFFF"/>
+        </a:solidFill>
+        <a:effectLst/>
+      </p:bgPr>
+    </p:bg>
+    <p:spTree>
+      <p:nvGrpSpPr>
+        <p:cNvPr id="1" name=""/>
+        <p:cNvGrpSpPr/>
+        <p:nvPr/>
+      </p:nvGrpSpPr>
+      <p:grpSpPr/>
+      <p:sp>
+        <p:nvSpPr>
+          <p:cNvPr id="2" name="Rectangle 1"/>
+          <p:cNvSpPr/>
+          <p:nvPr/>
+        </p:nvSpPr>
+        <p:spPr>
+          <a:xfrm>
+            <a:off x="0" y="0"/>
+            <a:ext cx="12191695" cy="1170432"/>
+          </a:xfrm>
+          <a:prstGeom prst="rect">
+            <a:avLst/>
+          </a:prstGeom>
+          <a:solidFill>
+            <a:srgbClr val="095292"/>
+          </a:solidFill>
+          <a:ln>
+            <a:noFill/>
+          </a:ln>
+        </p:spPr>
+        <p:style>
+          <a:lnRef idx="1">
+            <a:schemeClr val="accent1"/>
+          </a:lnRef>
+          <a:fillRef idx="3">
+            <a:schemeClr val="accent1"/>
+          </a:fillRef>
+          <a:effectRef idx="2">
+            <a:schemeClr val="accent1"/>
+          </a:effectRef>
+          <a:fontRef idx="minor">
+            <a:schemeClr val="lt1"/>
+          </a:fontRef>
+        </p:style>
+        <p:txBody>
+          <a:bodyPr rtlCol="0" anchor="ctr"/>
+          <a:lstStyle/>
+          <a:p>
+            <a:pPr algn="ctr"/>
+          </a:p>
+        </p:txBody>
+      </p:sp>
+      <p:sp>
+        <p:nvSpPr>
+          <p:cNvPr id="3" name="Rectangle 2"/>
+          <p:cNvSpPr/>
+          <p:nvPr/>
+        </p:nvSpPr>
+        <p:spPr>
+          <a:xfrm>
+            <a:off x="0" y="1170432"/>
+            <a:ext cx="12191695" cy="41148"/>
+          </a:xfrm>
+          <a:prstGeom prst="rect">
+            <a:avLst/>
+          </a:prstGeom>
+          <a:solidFill>
+            <a:srgbClr val="FFD000"/>
+          </a:solidFill>
+          <a:ln>
+            <a:noFill/>
+          </a:ln>
+        </p:spPr>
+        <p:style>
+          <a:lnRef idx="1">
+            <a:schemeClr val="accent1"/>
+          </a:lnRef>
+          <a:fillRef idx="3">
+            <a:schemeClr val="accent1"/>
+          </a:fillRef>
+          <a:effectRef idx="2">
+            <a:schemeClr val="accent1"/>
+          </a:effectRef>
+          <a:fontRef idx="minor">
+            <a:schemeClr val="lt1"/>
+          </a:fontRef>
+        </p:style>
+        <p:txBody>
+          <a:bodyPr rtlCol="0" anchor="ctr"/>
+          <a:lstStyle/>
+          <a:p>
+            <a:pPr algn="ctr"/>
+          </a:p>
+        </p:txBody>
+      </p:sp>
+      <p:sp>
+        <p:nvSpPr>
+          <p:cNvPr id="4" name="TextBox 3"/>
+          <p:cNvSpPr txBox="1"/>
+          <p:nvPr/>
+        </p:nvSpPr>
+        <p:spPr>
+          <a:xfrm>
+            <a:off x="457200" y="164592"/>
+            <a:ext cx="11277295" cy="384048"/>
+          </a:xfrm>
+          <a:prstGeom prst="rect">
+            <a:avLst/>
+          </a:prstGeom>
+          <a:noFill/>
+        </p:spPr>
+        <p:txBody>
+          <a:bodyPr wrap="square">
+            <a:spAutoFit/>
+          </a:bodyPr>
+          <a:lstStyle/>
+          <a:p>
+            <a:r>
+              <a:rPr sz="2600" b="1" i="0">
+                <a:solidFill>
+                  <a:srgbClr val="FFFFFF"/>
+                </a:solidFill>
+                <a:latin typeface="Calibri"/>
+              </a:rPr>
+              <a:t>Cómo se expone en 5 minutos</a:t>
+            </a:r>
+          </a:p>
+        </p:txBody>
+      </p:sp>
+      <p:sp>
+        <p:nvSpPr>
+          <p:cNvPr id="5" name="TextBox 4"/>
+          <p:cNvSpPr txBox="1"/>
+          <p:nvPr/>
+        </p:nvSpPr>
+        <p:spPr>
+          <a:xfrm>
+            <a:off x="457200" y="566928"/>
+            <a:ext cx="11277295" cy="411480"/>
+          </a:xfrm>
+          <a:prstGeom prst="rect">
+            <a:avLst/>
+          </a:prstGeom>
+          <a:noFill/>
+        </p:spPr>
+        <p:txBody>
+          <a:bodyPr wrap="square">
+            <a:spAutoFit/>
+          </a:bodyPr>
+          <a:lstStyle/>
+          <a:p>
+            <a:r>
+              <a:rPr sz="1400" b="0" i="0">
+                <a:solidFill>
+                  <a:srgbClr val="B8D8EE"/>
+                </a:solidFill>
+                <a:latin typeface="Calibri"/>
+              </a:rPr>
+              <a:t>Habla el vocero con la pantalla ya compartida · cronómetro en pantalla · se corta al llegar a cero</a:t>
+            </a:r>
+          </a:p>
+        </p:txBody>
+      </p:sp>
+      <p:sp>
+        <p:nvSpPr>
+          <p:cNvPr id="6" name="Rounded Rectangle 5"/>
+          <p:cNvSpPr/>
+          <p:nvPr/>
+        </p:nvSpPr>
+        <p:spPr>
+          <a:xfrm>
+            <a:off x="457200" y="1444752"/>
+            <a:ext cx="11277295" cy="908913"/>
+          </a:xfrm>
+          <a:prstGeom prst="roundRect">
+            <a:avLst>
+              <a:gd name="adj" fmla="val 12000"/>
+            </a:avLst>
+          </a:prstGeom>
+          <a:solidFill>
+            <a:srgbClr val="F2F2F2"/>
+          </a:solidFill>
+          <a:ln>
+            <a:noFill/>
+          </a:ln>
+        </p:spPr>
+        <p:style>
+          <a:lnRef idx="1">
+            <a:schemeClr val="accent1"/>
+          </a:lnRef>
+          <a:fillRef idx="3">
+            <a:schemeClr val="accent1"/>
+          </a:fillRef>
+          <a:effectRef idx="2">
+            <a:schemeClr val="accent1"/>
+          </a:effectRef>
+          <a:fontRef idx="minor">
+            <a:schemeClr val="lt1"/>
+          </a:fontRef>
+        </p:style>
+        <p:txBody>
+          <a:bodyPr rtlCol="0" anchor="ctr"/>
+          <a:lstStyle/>
+          <a:p>
+            <a:pPr algn="ctr"/>
+          </a:p>
+        </p:txBody>
+      </p:sp>
+      <p:sp>
+        <p:nvSpPr>
+          <p:cNvPr id="7" name="Rounded Rectangle 6"/>
+          <p:cNvSpPr/>
+          <p:nvPr/>
+        </p:nvSpPr>
+        <p:spPr>
+          <a:xfrm>
+            <a:off x="594360" y="1679752"/>
+            <a:ext cx="438912" cy="438912"/>
+          </a:xfrm>
+          <a:prstGeom prst="roundRect">
+            <a:avLst>
+              <a:gd name="adj" fmla="val 12000"/>
+            </a:avLst>
+          </a:prstGeom>
+          <a:solidFill>
+            <a:srgbClr val="095292"/>
+          </a:solidFill>
+          <a:ln>
+            <a:noFill/>
+          </a:ln>
+        </p:spPr>
+        <p:style>
+          <a:lnRef idx="1">
+            <a:schemeClr val="accent1"/>
+          </a:lnRef>
+          <a:fillRef idx="3">
+            <a:schemeClr val="accent1"/>
+          </a:fillRef>
+          <a:effectRef idx="2">
+            <a:schemeClr val="accent1"/>
+          </a:effectRef>
+          <a:fontRef idx="minor">
+            <a:schemeClr val="lt1"/>
+          </a:fontRef>
+        </p:style>
+        <p:txBody>
+          <a:bodyPr rtlCol="0" anchor="ctr"/>
+          <a:lstStyle/>
+          <a:p>
+            <a:pPr algn="ctr"/>
+          </a:p>
+        </p:txBody>
+      </p:sp>
+      <p:sp>
+        <p:nvSpPr>
+          <p:cNvPr id="8" name="TextBox 7"/>
+          <p:cNvSpPr txBox="1"/>
+          <p:nvPr/>
+        </p:nvSpPr>
+        <p:spPr>
+          <a:xfrm>
+            <a:off x="594360" y="1679752"/>
+            <a:ext cx="438912" cy="438912"/>
+          </a:xfrm>
+          <a:prstGeom prst="rect">
+            <a:avLst/>
+          </a:prstGeom>
+          <a:noFill/>
+        </p:spPr>
+        <p:txBody>
+          <a:bodyPr wrap="square" anchor="ctr"/>
+          <a:lstStyle/>
+          <a:p>
+            <a:pPr algn="ctr"/>
+            <a:r>
+              <a:rPr sz="1600" b="1" i="0">
+                <a:solidFill>
+                  <a:srgbClr val="FFFFFF"/>
+                </a:solidFill>
+                <a:latin typeface="Calibri"/>
+              </a:rPr>
+              <a:t>1</a:t>
+            </a:r>
+          </a:p>
+        </p:txBody>
+      </p:sp>
+      <p:sp>
+        <p:nvSpPr>
+          <p:cNvPr id="9" name="TextBox 8"/>
+          <p:cNvSpPr txBox="1"/>
+          <p:nvPr/>
+        </p:nvSpPr>
+        <p:spPr>
+          <a:xfrm>
+            <a:off x="1188720" y="1536192"/>
+            <a:ext cx="10271455" cy="744321"/>
+          </a:xfrm>
+          <a:prstGeom prst="rect">
+            <a:avLst/>
+          </a:prstGeom>
+          <a:noFill/>
+        </p:spPr>
+        <p:txBody>
+          <a:bodyPr wrap="square" anchor="ctr"/>
+          <a:lstStyle/>
+          <a:p>
+            <a:r>
+              <a:rPr sz="1500" b="1" i="0">
+                <a:solidFill>
+                  <a:srgbClr val="095292"/>
+                </a:solidFill>
+                <a:latin typeface="Calibri"/>
+              </a:rPr>
+              <a:t>30 s · Recordatorio mínimo</a:t>
+            </a:r>
+          </a:p>
+          <a:p>
+            <a:pPr>
+              <a:spcBef>
+                <a:spcPts val="200"/>
+              </a:spcBef>
+            </a:pPr>
+            <a:r>
+              <a:rPr sz="1300" b="0" i="0">
+                <a:solidFill>
+                  <a:srgbClr val="333333"/>
+                </a:solidFill>
+                <a:latin typeface="Calibri"/>
+              </a:rPr>
+              <a:t>El problema en </a:t>
+            </a:r>
+            <a:r>
+              <a:rPr sz="1300" b="1" i="0">
+                <a:solidFill>
+                  <a:srgbClr val="333333"/>
+                </a:solidFill>
+                <a:latin typeface="Calibri"/>
+              </a:rPr>
+              <a:t>una frase</a:t>
+            </a:r>
+            <a:r>
+              <a:rPr sz="1300" b="0" i="0">
+                <a:solidFill>
+                  <a:srgbClr val="333333"/>
+                </a:solidFill>
+                <a:latin typeface="Calibri"/>
+              </a:rPr>
+              <a:t>. Nada más: el curso ya conoce su proyecto.</a:t>
+            </a:r>
+          </a:p>
+        </p:txBody>
+      </p:sp>
+      <p:sp>
+        <p:nvSpPr>
+          <p:cNvPr id="10" name="Rounded Rectangle 9"/>
+          <p:cNvSpPr/>
+          <p:nvPr/>
+        </p:nvSpPr>
+        <p:spPr>
+          <a:xfrm>
+            <a:off x="457200" y="2445105"/>
+            <a:ext cx="11277295" cy="908913"/>
+          </a:xfrm>
+          <a:prstGeom prst="roundRect">
+            <a:avLst>
+              <a:gd name="adj" fmla="val 12000"/>
+            </a:avLst>
+          </a:prstGeom>
+          <a:solidFill>
+            <a:srgbClr val="E8F4FA"/>
+          </a:solidFill>
+          <a:ln>
+            <a:noFill/>
+          </a:ln>
+        </p:spPr>
+        <p:style>
+          <a:lnRef idx="1">
+            <a:schemeClr val="accent1"/>
+          </a:lnRef>
+          <a:fillRef idx="3">
+            <a:schemeClr val="accent1"/>
+          </a:fillRef>
+          <a:effectRef idx="2">
+            <a:schemeClr val="accent1"/>
+          </a:effectRef>
+          <a:fontRef idx="minor">
+            <a:schemeClr val="lt1"/>
+          </a:fontRef>
+        </p:style>
+        <p:txBody>
+          <a:bodyPr rtlCol="0" anchor="ctr"/>
+          <a:lstStyle/>
+          <a:p>
+            <a:pPr algn="ctr"/>
+          </a:p>
+        </p:txBody>
+      </p:sp>
+      <p:sp>
+        <p:nvSpPr>
+          <p:cNvPr id="11" name="Rounded Rectangle 10"/>
+          <p:cNvSpPr/>
+          <p:nvPr/>
+        </p:nvSpPr>
+        <p:spPr>
+          <a:xfrm>
+            <a:off x="594360" y="2680106"/>
+            <a:ext cx="438912" cy="438912"/>
+          </a:xfrm>
+          <a:prstGeom prst="roundRect">
+            <a:avLst>
+              <a:gd name="adj" fmla="val 12000"/>
+            </a:avLst>
+          </a:prstGeom>
+          <a:solidFill>
+            <a:srgbClr val="095292"/>
+          </a:solidFill>
+          <a:ln>
+            <a:noFill/>
+          </a:ln>
+        </p:spPr>
+        <p:style>
+          <a:lnRef idx="1">
+            <a:schemeClr val="accent1"/>
+          </a:lnRef>
+          <a:fillRef idx="3">
+            <a:schemeClr val="accent1"/>
+          </a:fillRef>
+          <a:effectRef idx="2">
+            <a:schemeClr val="accent1"/>
+          </a:effectRef>
+          <a:fontRef idx="minor">
+            <a:schemeClr val="lt1"/>
+          </a:fontRef>
+        </p:style>
+        <p:txBody>
+          <a:bodyPr rtlCol="0" anchor="ctr"/>
+          <a:lstStyle/>
+          <a:p>
+            <a:pPr algn="ctr"/>
+          </a:p>
+        </p:txBody>
+      </p:sp>
+      <p:sp>
+        <p:nvSpPr>
+          <p:cNvPr id="12" name="TextBox 11"/>
+          <p:cNvSpPr txBox="1"/>
+          <p:nvPr/>
+        </p:nvSpPr>
+        <p:spPr>
+          <a:xfrm>
+            <a:off x="594360" y="2680106"/>
+            <a:ext cx="438912" cy="438912"/>
+          </a:xfrm>
+          <a:prstGeom prst="rect">
+            <a:avLst/>
+          </a:prstGeom>
+          <a:noFill/>
+        </p:spPr>
+        <p:txBody>
+          <a:bodyPr wrap="square" anchor="ctr"/>
+          <a:lstStyle/>
+          <a:p>
+            <a:pPr algn="ctr"/>
+            <a:r>
+              <a:rPr sz="1600" b="1" i="0">
+                <a:solidFill>
+                  <a:srgbClr val="FFFFFF"/>
+                </a:solidFill>
+                <a:latin typeface="Calibri"/>
+              </a:rPr>
+              <a:t>2</a:t>
+            </a:r>
+          </a:p>
+        </p:txBody>
+      </p:sp>
+      <p:sp>
+        <p:nvSpPr>
+          <p:cNvPr id="13" name="TextBox 12"/>
+          <p:cNvSpPr txBox="1"/>
+          <p:nvPr/>
+        </p:nvSpPr>
+        <p:spPr>
+          <a:xfrm>
+            <a:off x="1188720" y="2536545"/>
+            <a:ext cx="10271455" cy="744321"/>
+          </a:xfrm>
+          <a:prstGeom prst="rect">
+            <a:avLst/>
+          </a:prstGeom>
+          <a:noFill/>
+        </p:spPr>
+        <p:txBody>
+          <a:bodyPr wrap="square" anchor="ctr"/>
+          <a:lstStyle/>
+          <a:p>
+            <a:r>
+              <a:rPr sz="1500" b="1" i="0">
+                <a:solidFill>
+                  <a:srgbClr val="095292"/>
+                </a:solidFill>
+                <a:latin typeface="Calibri"/>
+              </a:rPr>
+              <a:t>2 min · Los tres hallazgos</a:t>
+            </a:r>
+          </a:p>
+          <a:p>
+            <a:pPr>
+              <a:spcBef>
+                <a:spcPts val="200"/>
+              </a:spcBef>
+            </a:pPr>
+            <a:r>
+              <a:rPr sz="1300" b="0" i="0">
+                <a:solidFill>
+                  <a:srgbClr val="333333"/>
+                </a:solidFill>
+                <a:latin typeface="Calibri"/>
+              </a:rPr>
+              <a:t>Lo que la persona </a:t>
+            </a:r>
+            <a:r>
+              <a:rPr sz="1300" b="1" i="0">
+                <a:solidFill>
+                  <a:srgbClr val="333333"/>
+                </a:solidFill>
+                <a:latin typeface="Calibri"/>
+              </a:rPr>
+              <a:t>hizo</a:t>
+            </a:r>
+            <a:r>
+              <a:rPr sz="1300" b="0" i="0">
+                <a:solidFill>
+                  <a:srgbClr val="333333"/>
+                </a:solidFill>
+                <a:latin typeface="Calibri"/>
+              </a:rPr>
+              <a:t>. Es el corazón del avance.</a:t>
+            </a:r>
+          </a:p>
+        </p:txBody>
+      </p:sp>
+      <p:sp>
+        <p:nvSpPr>
+          <p:cNvPr id="14" name="Rounded Rectangle 13"/>
+          <p:cNvSpPr/>
+          <p:nvPr/>
+        </p:nvSpPr>
+        <p:spPr>
+          <a:xfrm>
+            <a:off x="457200" y="3445459"/>
+            <a:ext cx="11277295" cy="908913"/>
+          </a:xfrm>
+          <a:prstGeom prst="roundRect">
+            <a:avLst>
+              <a:gd name="adj" fmla="val 12000"/>
+            </a:avLst>
+          </a:prstGeom>
+          <a:solidFill>
+            <a:srgbClr val="F2F2F2"/>
+          </a:solidFill>
+          <a:ln>
+            <a:noFill/>
+          </a:ln>
+        </p:spPr>
+        <p:style>
+          <a:lnRef idx="1">
+            <a:schemeClr val="accent1"/>
+          </a:lnRef>
+          <a:fillRef idx="3">
+            <a:schemeClr val="accent1"/>
+          </a:fillRef>
+          <a:effectRef idx="2">
+            <a:schemeClr val="accent1"/>
+          </a:effectRef>
+          <a:fontRef idx="minor">
+            <a:schemeClr val="lt1"/>
+          </a:fontRef>
+        </p:style>
+        <p:txBody>
+          <a:bodyPr rtlCol="0" anchor="ctr"/>
+          <a:lstStyle/>
+          <a:p>
+            <a:pPr algn="ctr"/>
+          </a:p>
+        </p:txBody>
+      </p:sp>
+      <p:sp>
+        <p:nvSpPr>
+          <p:cNvPr id="15" name="Rounded Rectangle 14"/>
+          <p:cNvSpPr/>
+          <p:nvPr/>
+        </p:nvSpPr>
+        <p:spPr>
+          <a:xfrm>
+            <a:off x="594360" y="3680460"/>
+            <a:ext cx="438912" cy="438912"/>
+          </a:xfrm>
+          <a:prstGeom prst="roundRect">
+            <a:avLst>
+              <a:gd name="adj" fmla="val 12000"/>
+            </a:avLst>
+          </a:prstGeom>
+          <a:solidFill>
+            <a:srgbClr val="095292"/>
+          </a:solidFill>
+          <a:ln>
+            <a:noFill/>
+          </a:ln>
+        </p:spPr>
+        <p:style>
+          <a:lnRef idx="1">
+            <a:schemeClr val="accent1"/>
+          </a:lnRef>
+          <a:fillRef idx="3">
+            <a:schemeClr val="accent1"/>
+          </a:fillRef>
+          <a:effectRef idx="2">
+            <a:schemeClr val="accent1"/>
+          </a:effectRef>
+          <a:fontRef idx="minor">
+            <a:schemeClr val="lt1"/>
+          </a:fontRef>
+        </p:style>
+        <p:txBody>
+          <a:bodyPr rtlCol="0" anchor="ctr"/>
+          <a:lstStyle/>
+          <a:p>
+            <a:pPr algn="ctr"/>
+          </a:p>
+        </p:txBody>
+      </p:sp>
+      <p:sp>
+        <p:nvSpPr>
+          <p:cNvPr id="16" name="TextBox 15"/>
+          <p:cNvSpPr txBox="1"/>
+          <p:nvPr/>
+        </p:nvSpPr>
+        <p:spPr>
+          <a:xfrm>
+            <a:off x="594360" y="3680460"/>
+            <a:ext cx="438912" cy="438912"/>
+          </a:xfrm>
+          <a:prstGeom prst="rect">
+            <a:avLst/>
+          </a:prstGeom>
+          <a:noFill/>
+        </p:spPr>
+        <p:txBody>
+          <a:bodyPr wrap="square" anchor="ctr"/>
+          <a:lstStyle/>
+          <a:p>
+            <a:pPr algn="ctr"/>
+            <a:r>
+              <a:rPr sz="1600" b="1" i="0">
+                <a:solidFill>
+                  <a:srgbClr val="FFFFFF"/>
+                </a:solidFill>
+                <a:latin typeface="Calibri"/>
+              </a:rPr>
+              <a:t>3</a:t>
+            </a:r>
+          </a:p>
+        </p:txBody>
+      </p:sp>
+      <p:sp>
+        <p:nvSpPr>
+          <p:cNvPr id="17" name="TextBox 16"/>
+          <p:cNvSpPr txBox="1"/>
+          <p:nvPr/>
+        </p:nvSpPr>
+        <p:spPr>
+          <a:xfrm>
+            <a:off x="1188720" y="3536899"/>
+            <a:ext cx="10271455" cy="744321"/>
+          </a:xfrm>
+          <a:prstGeom prst="rect">
+            <a:avLst/>
+          </a:prstGeom>
+          <a:noFill/>
+        </p:spPr>
+        <p:txBody>
+          <a:bodyPr wrap="square" anchor="ctr"/>
+          <a:lstStyle/>
+          <a:p>
+            <a:r>
+              <a:rPr sz="1500" b="1" i="0">
+                <a:solidFill>
+                  <a:srgbClr val="095292"/>
+                </a:solidFill>
+                <a:latin typeface="Calibri"/>
+              </a:rPr>
+              <a:t>1 min · Qué arreglan y qué no</a:t>
+            </a:r>
+          </a:p>
+          <a:p>
+            <a:pPr>
+              <a:spcBef>
+                <a:spcPts val="200"/>
+              </a:spcBef>
+            </a:pPr>
+            <a:r>
+              <a:rPr sz="1300" b="0" i="0">
+                <a:solidFill>
+                  <a:srgbClr val="333333"/>
+                </a:solidFill>
+                <a:latin typeface="Calibri"/>
+              </a:rPr>
+              <a:t>Y por qué lo que queda fuera queda fuera.</a:t>
+            </a:r>
+          </a:p>
+        </p:txBody>
+      </p:sp>
+      <p:sp>
+        <p:nvSpPr>
+          <p:cNvPr id="18" name="Rounded Rectangle 17"/>
+          <p:cNvSpPr/>
+          <p:nvPr/>
+        </p:nvSpPr>
+        <p:spPr>
+          <a:xfrm>
+            <a:off x="457200" y="4445812"/>
+            <a:ext cx="11277295" cy="908913"/>
+          </a:xfrm>
+          <a:prstGeom prst="roundRect">
+            <a:avLst>
+              <a:gd name="adj" fmla="val 12000"/>
+            </a:avLst>
+          </a:prstGeom>
+          <a:solidFill>
+            <a:srgbClr val="E8F4FA"/>
+          </a:solidFill>
+          <a:ln>
+            <a:noFill/>
+          </a:ln>
+        </p:spPr>
+        <p:style>
+          <a:lnRef idx="1">
+            <a:schemeClr val="accent1"/>
+          </a:lnRef>
+          <a:fillRef idx="3">
+            <a:schemeClr val="accent1"/>
+          </a:fillRef>
+          <a:effectRef idx="2">
+            <a:schemeClr val="accent1"/>
+          </a:effectRef>
+          <a:fontRef idx="minor">
+            <a:schemeClr val="lt1"/>
+          </a:fontRef>
+        </p:style>
+        <p:txBody>
+          <a:bodyPr rtlCol="0" anchor="ctr"/>
+          <a:lstStyle/>
+          <a:p>
+            <a:pPr algn="ctr"/>
+          </a:p>
+        </p:txBody>
+      </p:sp>
+      <p:sp>
+        <p:nvSpPr>
+          <p:cNvPr id="19" name="Rounded Rectangle 18"/>
+          <p:cNvSpPr/>
+          <p:nvPr/>
+        </p:nvSpPr>
+        <p:spPr>
+          <a:xfrm>
+            <a:off x="594360" y="4680813"/>
+            <a:ext cx="438912" cy="438912"/>
+          </a:xfrm>
+          <a:prstGeom prst="roundRect">
+            <a:avLst>
+              <a:gd name="adj" fmla="val 12000"/>
+            </a:avLst>
+          </a:prstGeom>
+          <a:solidFill>
+            <a:srgbClr val="095292"/>
+          </a:solidFill>
+          <a:ln>
+            <a:noFill/>
+          </a:ln>
+        </p:spPr>
+        <p:style>
+          <a:lnRef idx="1">
+            <a:schemeClr val="accent1"/>
+          </a:lnRef>
+          <a:fillRef idx="3">
+            <a:schemeClr val="accent1"/>
+          </a:fillRef>
+          <a:effectRef idx="2">
+            <a:schemeClr val="accent1"/>
+          </a:effectRef>
+          <a:fontRef idx="minor">
+            <a:schemeClr val="lt1"/>
+          </a:fontRef>
+        </p:style>
+        <p:txBody>
+          <a:bodyPr rtlCol="0" anchor="ctr"/>
+          <a:lstStyle/>
+          <a:p>
+            <a:pPr algn="ctr"/>
+          </a:p>
+        </p:txBody>
+      </p:sp>
+      <p:sp>
+        <p:nvSpPr>
+          <p:cNvPr id="20" name="TextBox 19"/>
+          <p:cNvSpPr txBox="1"/>
+          <p:nvPr/>
+        </p:nvSpPr>
+        <p:spPr>
+          <a:xfrm>
+            <a:off x="594360" y="4680813"/>
+            <a:ext cx="438912" cy="438912"/>
+          </a:xfrm>
+          <a:prstGeom prst="rect">
+            <a:avLst/>
+          </a:prstGeom>
+          <a:noFill/>
+        </p:spPr>
+        <p:txBody>
+          <a:bodyPr wrap="square" anchor="ctr"/>
+          <a:lstStyle/>
+          <a:p>
+            <a:pPr algn="ctr"/>
+            <a:r>
+              <a:rPr sz="1600" b="1" i="0">
+                <a:solidFill>
+                  <a:srgbClr val="FFFFFF"/>
+                </a:solidFill>
+                <a:latin typeface="Calibri"/>
+              </a:rPr>
+              <a:t>4</a:t>
+            </a:r>
+          </a:p>
+        </p:txBody>
+      </p:sp>
+      <p:sp>
+        <p:nvSpPr>
+          <p:cNvPr id="21" name="TextBox 20"/>
+          <p:cNvSpPr txBox="1"/>
+          <p:nvPr/>
+        </p:nvSpPr>
+        <p:spPr>
+          <a:xfrm>
+            <a:off x="1188720" y="4537252"/>
+            <a:ext cx="10271455" cy="744321"/>
+          </a:xfrm>
+          <a:prstGeom prst="rect">
+            <a:avLst/>
+          </a:prstGeom>
+          <a:noFill/>
+        </p:spPr>
+        <p:txBody>
+          <a:bodyPr wrap="square" anchor="ctr"/>
+          <a:lstStyle/>
+          <a:p>
+            <a:r>
+              <a:rPr sz="1500" b="1" i="0">
+                <a:solidFill>
+                  <a:srgbClr val="095292"/>
+                </a:solidFill>
+                <a:latin typeface="Calibri"/>
+              </a:rPr>
+              <a:t>1 min · La pregunta para el curso</a:t>
+            </a:r>
+          </a:p>
+          <a:p>
+            <a:pPr>
+              <a:spcBef>
+                <a:spcPts val="200"/>
+              </a:spcBef>
+            </a:pPr>
+            <a:r>
+              <a:rPr sz="1300" b="0" i="0">
+                <a:solidFill>
+                  <a:srgbClr val="333333"/>
+                </a:solidFill>
+                <a:latin typeface="Calibri"/>
+              </a:rPr>
+              <a:t>Con las dos alternativas que están considerando.</a:t>
+            </a:r>
+          </a:p>
+        </p:txBody>
+      </p:sp>
+      <p:sp>
+        <p:nvSpPr>
+          <p:cNvPr id="22" name="Rounded Rectangle 21"/>
+          <p:cNvSpPr/>
+          <p:nvPr/>
+        </p:nvSpPr>
+        <p:spPr>
+          <a:xfrm>
+            <a:off x="457200" y="5446166"/>
+            <a:ext cx="11277295" cy="908913"/>
+          </a:xfrm>
+          <a:prstGeom prst="roundRect">
+            <a:avLst>
+              <a:gd name="adj" fmla="val 12000"/>
+            </a:avLst>
+          </a:prstGeom>
+          <a:solidFill>
+            <a:srgbClr val="F2F2F2"/>
+          </a:solidFill>
+          <a:ln>
+            <a:noFill/>
+          </a:ln>
+        </p:spPr>
+        <p:style>
+          <a:lnRef idx="1">
+            <a:schemeClr val="accent1"/>
+          </a:lnRef>
+          <a:fillRef idx="3">
+            <a:schemeClr val="accent1"/>
+          </a:fillRef>
+          <a:effectRef idx="2">
+            <a:schemeClr val="accent1"/>
+          </a:effectRef>
+          <a:fontRef idx="minor">
+            <a:schemeClr val="lt1"/>
+          </a:fontRef>
+        </p:style>
+        <p:txBody>
+          <a:bodyPr rtlCol="0" anchor="ctr"/>
+          <a:lstStyle/>
+          <a:p>
+            <a:pPr algn="ctr"/>
+          </a:p>
+        </p:txBody>
+      </p:sp>
+      <p:sp>
+        <p:nvSpPr>
+          <p:cNvPr id="23" name="Rounded Rectangle 22"/>
+          <p:cNvSpPr/>
+          <p:nvPr/>
+        </p:nvSpPr>
+        <p:spPr>
+          <a:xfrm>
+            <a:off x="594360" y="5681167"/>
+            <a:ext cx="438912" cy="438912"/>
+          </a:xfrm>
+          <a:prstGeom prst="roundRect">
+            <a:avLst>
+              <a:gd name="adj" fmla="val 12000"/>
+            </a:avLst>
+          </a:prstGeom>
+          <a:solidFill>
+            <a:srgbClr val="095292"/>
+          </a:solidFill>
+          <a:ln>
+            <a:noFill/>
+          </a:ln>
+        </p:spPr>
+        <p:style>
+          <a:lnRef idx="1">
+            <a:schemeClr val="accent1"/>
+          </a:lnRef>
+          <a:fillRef idx="3">
+            <a:schemeClr val="accent1"/>
+          </a:fillRef>
+          <a:effectRef idx="2">
+            <a:schemeClr val="accent1"/>
+          </a:effectRef>
+          <a:fontRef idx="minor">
+            <a:schemeClr val="lt1"/>
+          </a:fontRef>
+        </p:style>
+        <p:txBody>
+          <a:bodyPr rtlCol="0" anchor="ctr"/>
+          <a:lstStyle/>
+          <a:p>
+            <a:pPr algn="ctr"/>
+          </a:p>
+        </p:txBody>
+      </p:sp>
+      <p:sp>
+        <p:nvSpPr>
+          <p:cNvPr id="24" name="TextBox 23"/>
+          <p:cNvSpPr txBox="1"/>
+          <p:nvPr/>
+        </p:nvSpPr>
+        <p:spPr>
+          <a:xfrm>
+            <a:off x="594360" y="5681167"/>
+            <a:ext cx="438912" cy="438912"/>
+          </a:xfrm>
+          <a:prstGeom prst="rect">
+            <a:avLst/>
+          </a:prstGeom>
+          <a:noFill/>
+        </p:spPr>
+        <p:txBody>
+          <a:bodyPr wrap="square" anchor="ctr"/>
+          <a:lstStyle/>
+          <a:p>
+            <a:pPr algn="ctr"/>
+            <a:r>
+              <a:rPr sz="1600" b="1" i="0">
+                <a:solidFill>
+                  <a:srgbClr val="FFFFFF"/>
+                </a:solidFill>
+                <a:latin typeface="Calibri"/>
+              </a:rPr>
+              <a:t>5</a:t>
+            </a:r>
+          </a:p>
+        </p:txBody>
+      </p:sp>
+      <p:sp>
+        <p:nvSpPr>
+          <p:cNvPr id="25" name="TextBox 24"/>
+          <p:cNvSpPr txBox="1"/>
+          <p:nvPr/>
+        </p:nvSpPr>
+        <p:spPr>
+          <a:xfrm>
+            <a:off x="1188720" y="5537606"/>
+            <a:ext cx="10271455" cy="744321"/>
+          </a:xfrm>
+          <a:prstGeom prst="rect">
+            <a:avLst/>
+          </a:prstGeom>
+          <a:noFill/>
+        </p:spPr>
+        <p:txBody>
+          <a:bodyPr wrap="square" anchor="ctr"/>
+          <a:lstStyle/>
+          <a:p>
+            <a:r>
+              <a:rPr sz="1500" b="1" i="0">
+                <a:solidFill>
+                  <a:srgbClr val="095292"/>
+                </a:solidFill>
+                <a:latin typeface="Calibri"/>
+              </a:rPr>
+              <a:t>30 s · Cierre</a:t>
+            </a:r>
+          </a:p>
+          <a:p>
+            <a:pPr>
+              <a:spcBef>
+                <a:spcPts val="200"/>
+              </a:spcBef>
+            </a:pPr>
+            <a:r>
+              <a:rPr sz="1300" b="0" i="0">
+                <a:solidFill>
+                  <a:srgbClr val="333333"/>
+                </a:solidFill>
+                <a:latin typeface="Calibri"/>
+              </a:rPr>
+              <a:t>Qué van a tener listo para la Clase 14.</a:t>
+            </a:r>
+          </a:p>
+        </p:txBody>
+      </p:sp>
+      <p:sp>
+        <p:nvSpPr>
+          <p:cNvPr id="26" name="TextBox 25"/>
+          <p:cNvSpPr txBox="1"/>
+          <p:nvPr/>
+        </p:nvSpPr>
+        <p:spPr>
+          <a:xfrm>
+            <a:off x="11185855" y="6473952"/>
+            <a:ext cx="640080" cy="274320"/>
+          </a:xfrm>
+          <a:prstGeom prst="rect">
+            <a:avLst/>
+          </a:prstGeom>
+          <a:noFill/>
+        </p:spPr>
+        <p:txBody>
+          <a:bodyPr wrap="square">
+            <a:spAutoFit/>
+          </a:bodyPr>
+          <a:lstStyle/>
+          <a:p>
+            <a:pPr algn="r"/>
+            <a:r>
+              <a:rPr sz="1100" b="0" i="0">
+                <a:solidFill>
+                  <a:srgbClr val="666666"/>
+                </a:solidFill>
+                <a:latin typeface="Calibri"/>
+              </a:rPr>
+              <a:t>22</a:t>
+            </a:r>
+          </a:p>
+        </p:txBody>
+      </p:sp>
+    </p:spTree>
+  </p:cSld>
+  <p:clrMapOvr>
+    <a:masterClrMapping/>
+  </p:clrMapOvr>
+</p:sld>
+</file>
+
+<file path=ppt/slides/slide23.xml><?xml version="1.0" encoding="utf-8"?>
+<p:sld xmlns:a="http://schemas.openxmlformats.org/drawingml/2006/main" xmlns:p="http://schemas.openxmlformats.org/presentationml/2006/main" xmlns:r="http://schemas.openxmlformats.org/officeDocument/2006/relationships">
+  <p:cSld>
+    <p:bg>
+      <p:bgPr>
+        <a:solidFill>
+          <a:srgbClr val="FFFFFF"/>
+        </a:solidFill>
+        <a:effectLst/>
+      </p:bgPr>
+    </p:bg>
+    <p:spTree>
+      <p:nvGrpSpPr>
+        <p:cNvPr id="1" name=""/>
+        <p:cNvGrpSpPr/>
+        <p:nvPr/>
+      </p:nvGrpSpPr>
+      <p:grpSpPr/>
+      <p:sp>
+        <p:nvSpPr>
+          <p:cNvPr id="2" name="Rectangle 1"/>
+          <p:cNvSpPr/>
+          <p:nvPr/>
+        </p:nvSpPr>
+        <p:spPr>
+          <a:xfrm>
+            <a:off x="0" y="0"/>
+            <a:ext cx="12191695" cy="960120"/>
+          </a:xfrm>
+          <a:prstGeom prst="rect">
+            <a:avLst/>
+          </a:prstGeom>
+          <a:solidFill>
+            <a:srgbClr val="095292"/>
+          </a:solidFill>
+          <a:ln>
+            <a:noFill/>
+          </a:ln>
+        </p:spPr>
+        <p:style>
+          <a:lnRef idx="1">
+            <a:schemeClr val="accent1"/>
+          </a:lnRef>
+          <a:fillRef idx="3">
+            <a:schemeClr val="accent1"/>
+          </a:fillRef>
+          <a:effectRef idx="2">
+            <a:schemeClr val="accent1"/>
+          </a:effectRef>
+          <a:fontRef idx="minor">
+            <a:schemeClr val="lt1"/>
+          </a:fontRef>
+        </p:style>
+        <p:txBody>
+          <a:bodyPr rtlCol="0" anchor="ctr"/>
+          <a:lstStyle/>
+          <a:p>
+            <a:pPr algn="ctr"/>
+          </a:p>
+        </p:txBody>
+      </p:sp>
+      <p:sp>
+        <p:nvSpPr>
+          <p:cNvPr id="3" name="Rectangle 2"/>
+          <p:cNvSpPr/>
+          <p:nvPr/>
+        </p:nvSpPr>
+        <p:spPr>
+          <a:xfrm>
+            <a:off x="0" y="960120"/>
+            <a:ext cx="12191695" cy="41148"/>
+          </a:xfrm>
+          <a:prstGeom prst="rect">
+            <a:avLst/>
+          </a:prstGeom>
+          <a:solidFill>
+            <a:srgbClr val="FFD000"/>
+          </a:solidFill>
+          <a:ln>
+            <a:noFill/>
+          </a:ln>
+        </p:spPr>
+        <p:style>
+          <a:lnRef idx="1">
+            <a:schemeClr val="accent1"/>
+          </a:lnRef>
+          <a:fillRef idx="3">
+            <a:schemeClr val="accent1"/>
+          </a:fillRef>
+          <a:effectRef idx="2">
+            <a:schemeClr val="accent1"/>
+          </a:effectRef>
+          <a:fontRef idx="minor">
+            <a:schemeClr val="lt1"/>
+          </a:fontRef>
+        </p:style>
+        <p:txBody>
+          <a:bodyPr rtlCol="0" anchor="ctr"/>
+          <a:lstStyle/>
+          <a:p>
+            <a:pPr algn="ctr"/>
+          </a:p>
+        </p:txBody>
+      </p:sp>
+      <p:sp>
+        <p:nvSpPr>
+          <p:cNvPr id="4" name="TextBox 3"/>
+          <p:cNvSpPr txBox="1"/>
+          <p:nvPr/>
+        </p:nvSpPr>
+        <p:spPr>
+          <a:xfrm>
+            <a:off x="457200" y="164592"/>
+            <a:ext cx="11277295" cy="502920"/>
+          </a:xfrm>
+          <a:prstGeom prst="rect">
+            <a:avLst/>
+          </a:prstGeom>
+          <a:noFill/>
+        </p:spPr>
+        <p:txBody>
+          <a:bodyPr wrap="square">
+            <a:spAutoFit/>
+          </a:bodyPr>
+          <a:lstStyle/>
+          <a:p>
+            <a:r>
+              <a:rPr sz="2600" b="1" i="0">
+                <a:solidFill>
+                  <a:srgbClr val="FFFFFF"/>
+                </a:solidFill>
+                <a:latin typeface="Calibri"/>
+              </a:rPr>
+              <a:t>Para la Clase 13</a:t>
+            </a:r>
+          </a:p>
+        </p:txBody>
+      </p:sp>
+      <p:sp>
+        <p:nvSpPr>
+          <p:cNvPr id="5" name="TextBox 4"/>
+          <p:cNvSpPr txBox="1"/>
+          <p:nvPr/>
+        </p:nvSpPr>
+        <p:spPr>
+          <a:xfrm>
+            <a:off x="457200" y="1170432"/>
+            <a:ext cx="11277295" cy="5230368"/>
+          </a:xfrm>
+          <a:prstGeom prst="rect">
+            <a:avLst/>
+          </a:prstGeom>
+          <a:noFill/>
+        </p:spPr>
+        <p:txBody>
+          <a:bodyPr wrap="square">
+            <a:spAutoFit/>
+          </a:bodyPr>
+          <a:lstStyle/>
+          <a:p>
+            <a:pPr>
+              <a:spcAft>
+                <a:spcPts val="800"/>
+              </a:spcAft>
+            </a:pPr>
+            <a:r>
+              <a:rPr sz="2000" b="0" i="0">
+                <a:solidFill>
+                  <a:srgbClr val="333333"/>
+                </a:solidFill>
+                <a:latin typeface="Calibri"/>
+              </a:rPr>
+              <a:t>–   </a:t>
+            </a:r>
+            <a:r>
+              <a:rPr sz="2000" b="1" i="0">
+                <a:solidFill>
+                  <a:srgbClr val="333333"/>
+                </a:solidFill>
+                <a:latin typeface="Calibri"/>
+              </a:rPr>
+              <a:t>Trabajo dirigido:</a:t>
+            </a:r>
+            <a:r>
+              <a:rPr sz="2000" b="0" i="0">
+                <a:solidFill>
+                  <a:srgbClr val="333333"/>
+                </a:solidFill>
+                <a:latin typeface="Calibri"/>
+              </a:rPr>
+              <a:t> Retroalimentación y ajustes — aplicar al prototipo los ajustes comprometidos en el muro, y dejar en el documento del equipo la ficha de avance completa con la lista de lo que no se arregla.</a:t>
+            </a:r>
+          </a:p>
+          <a:p>
+            <a:pPr>
+              <a:spcAft>
+                <a:spcPts val="800"/>
+              </a:spcAft>
+            </a:pPr>
+            <a:r>
+              <a:rPr sz="2000" b="0" i="0">
+                <a:solidFill>
+                  <a:srgbClr val="333333"/>
+                </a:solidFill>
+                <a:latin typeface="Calibri"/>
+              </a:rPr>
+              <a:t>–   </a:t>
+            </a:r>
+            <a:r>
+              <a:rPr sz="2000" b="1" i="0">
+                <a:solidFill>
+                  <a:srgbClr val="333333"/>
+                </a:solidFill>
+                <a:latin typeface="Calibri"/>
+              </a:rPr>
+              <a:t>Trabajo independiente:</a:t>
+            </a:r>
+            <a:r>
+              <a:rPr sz="2000" b="0" i="0">
+                <a:solidFill>
+                  <a:srgbClr val="333333"/>
+                </a:solidFill>
+                <a:latin typeface="Calibri"/>
+              </a:rPr>
+              <a:t> Revisión entre pares: leer el documento de </a:t>
+            </a:r>
+            <a:r>
+              <a:rPr sz="2000" b="1" i="0">
+                <a:solidFill>
+                  <a:srgbClr val="333333"/>
+                </a:solidFill>
+                <a:latin typeface="Calibri"/>
+              </a:rPr>
+              <a:t>otro equipo</a:t>
+            </a:r>
+            <a:r>
+              <a:rPr sz="2000" b="0" i="0">
+                <a:solidFill>
+                  <a:srgbClr val="333333"/>
+                </a:solidFill>
+                <a:latin typeface="Calibri"/>
+              </a:rPr>
+              <a:t> (el docente asigna la pareja) y dejarle </a:t>
+            </a:r>
+            <a:r>
+              <a:rPr sz="2000" b="1" i="0">
+                <a:solidFill>
+                  <a:srgbClr val="333333"/>
+                </a:solidFill>
+                <a:latin typeface="Calibri"/>
+              </a:rPr>
+              <a:t>dos observaciones escritas</a:t>
+            </a:r>
+            <a:r>
+              <a:rPr sz="2000" b="0" i="0">
+                <a:solidFill>
+                  <a:srgbClr val="333333"/>
+                </a:solidFill>
+                <a:latin typeface="Calibri"/>
+              </a:rPr>
+              <a:t> con el formato de hoy — observación y expectativa, una sola cosa importante cada una.</a:t>
+            </a:r>
+          </a:p>
+          <a:p>
+            <a:pPr>
+              <a:spcAft>
+                <a:spcPts val="800"/>
+              </a:spcAft>
+            </a:pPr>
+            <a:r>
+              <a:rPr sz="2000" b="0" i="0">
+                <a:solidFill>
+                  <a:srgbClr val="333333"/>
+                </a:solidFill>
+                <a:latin typeface="Calibri"/>
+              </a:rPr>
+              <a:t>–   </a:t>
+            </a:r>
+            <a:r>
+              <a:rPr sz="2000" b="1" i="0">
+                <a:solidFill>
+                  <a:srgbClr val="333333"/>
+                </a:solidFill>
+                <a:latin typeface="Calibri"/>
+              </a:rPr>
+              <a:t>Clase 13 · Evaluación de impacto social y ambiental</a:t>
+            </a:r>
+            <a:r>
+              <a:rPr sz="2000" b="0" i="0">
+                <a:solidFill>
+                  <a:srgbClr val="333333"/>
+                </a:solidFill>
+                <a:latin typeface="Calibri"/>
+              </a:rPr>
+              <a:t> — vemos el </a:t>
+            </a:r>
+            <a:r>
+              <a:rPr sz="2000" b="1" i="0">
+                <a:solidFill>
+                  <a:srgbClr val="333333"/>
+                </a:solidFill>
+                <a:latin typeface="Calibri"/>
+              </a:rPr>
+              <a:t>impacto social y ambiental</a:t>
+            </a:r>
+            <a:r>
+              <a:rPr sz="2000" b="0" i="0">
+                <a:solidFill>
+                  <a:srgbClr val="333333"/>
+                </a:solidFill>
+                <a:latin typeface="Calibri"/>
+              </a:rPr>
+              <a:t> del proyecto: a quién más afecta esto aunque no lo use, y cómo se mide.</a:t>
+            </a:r>
+          </a:p>
+          <a:p>
+            <a:pPr>
+              <a:spcAft>
+                <a:spcPts val="800"/>
+              </a:spcAft>
+            </a:pPr>
+            <a:r>
+              <a:rPr sz="2000" b="0" i="0">
+                <a:solidFill>
+                  <a:srgbClr val="333333"/>
+                </a:solidFill>
+                <a:latin typeface="Calibri"/>
+              </a:rPr>
+              <a:t>–   </a:t>
+            </a:r>
+            <a:r>
+              <a:rPr sz="2000" b="1" i="0">
+                <a:solidFill>
+                  <a:srgbClr val="333333"/>
+                </a:solidFill>
+                <a:latin typeface="Calibri"/>
+              </a:rPr>
+              <a:t>Aviso:</a:t>
+            </a:r>
+            <a:r>
+              <a:rPr sz="2000" b="0" i="0">
+                <a:solidFill>
+                  <a:srgbClr val="333333"/>
+                </a:solidFill>
+                <a:latin typeface="Calibri"/>
+              </a:rPr>
+              <a:t> Traigan a la Clase 13 el </a:t>
+            </a:r>
+            <a:r>
+              <a:rPr sz="2000" b="1" i="0">
+                <a:solidFill>
+                  <a:srgbClr val="333333"/>
+                </a:solidFill>
+                <a:latin typeface="Calibri"/>
+              </a:rPr>
+              <a:t>listado de actores no usuarios de la Clase 3</a:t>
+            </a:r>
+            <a:r>
+              <a:rPr sz="2000" b="0" i="0">
+                <a:solidFill>
+                  <a:srgbClr val="333333"/>
+                </a:solidFill>
+                <a:latin typeface="Calibri"/>
+              </a:rPr>
+              <a:t> y el </a:t>
+            </a:r>
+            <a:r>
+              <a:rPr sz="2000" b="1" i="0">
+                <a:solidFill>
+                  <a:srgbClr val="333333"/>
+                </a:solidFill>
+                <a:latin typeface="Calibri"/>
+              </a:rPr>
+              <a:t>indicador ambiental de la sesión 5</a:t>
+            </a:r>
+            <a:r>
+              <a:rPr sz="2000" b="0" i="0">
+                <a:solidFill>
+                  <a:srgbClr val="333333"/>
+                </a:solidFill>
+                <a:latin typeface="Calibri"/>
+              </a:rPr>
+              <a:t>: los dos se usan directamente en el taller. Si los perdieron, recupérenlos del documento del equipo antes de la sesión.</a:t>
+            </a:r>
+          </a:p>
+          <a:p>
+            <a:pPr>
+              <a:spcAft>
+                <a:spcPts val="800"/>
+              </a:spcAft>
+            </a:pPr>
+            <a:r>
+              <a:rPr sz="2000" b="0" i="0">
+                <a:solidFill>
+                  <a:srgbClr val="333333"/>
+                </a:solidFill>
+                <a:latin typeface="Calibri"/>
+              </a:rPr>
+              <a:t>–   </a:t>
+            </a:r>
+            <a:r>
+              <a:rPr sz="2000" b="1" i="0">
+                <a:solidFill>
+                  <a:srgbClr val="333333"/>
+                </a:solidFill>
+                <a:latin typeface="Calibri"/>
+              </a:rPr>
+              <a:t>Antes de salir:</a:t>
+            </a:r>
+            <a:r>
+              <a:rPr sz="2000" b="0" i="0">
+                <a:solidFill>
+                  <a:srgbClr val="333333"/>
+                </a:solidFill>
+                <a:latin typeface="Calibri"/>
+              </a:rPr>
+              <a:t> el enlace del documento del equipo en el chat, con permiso de lectura para el docente, y el nombre del vocero de hoy.</a:t>
+            </a:r>
+          </a:p>
+        </p:txBody>
+      </p:sp>
+      <p:sp>
+        <p:nvSpPr>
+          <p:cNvPr id="6" name="TextBox 5"/>
+          <p:cNvSpPr txBox="1"/>
+          <p:nvPr/>
+        </p:nvSpPr>
+        <p:spPr>
+          <a:xfrm>
+            <a:off x="11185855" y="6473952"/>
+            <a:ext cx="640080" cy="274320"/>
+          </a:xfrm>
+          <a:prstGeom prst="rect">
+            <a:avLst/>
+          </a:prstGeom>
+          <a:noFill/>
+        </p:spPr>
+        <p:txBody>
+          <a:bodyPr wrap="square">
+            <a:spAutoFit/>
+          </a:bodyPr>
+          <a:lstStyle/>
+          <a:p>
+            <a:pPr algn="r"/>
+            <a:r>
+              <a:rPr sz="1100" b="0" i="0">
+                <a:solidFill>
+                  <a:srgbClr val="666666"/>
+                </a:solidFill>
+                <a:latin typeface="Calibri"/>
+              </a:rPr>
+              <a:t>23</a:t>
+            </a:r>
+          </a:p>
+        </p:txBody>
+      </p:sp>
+    </p:spTree>
+  </p:cSld>
+  <p:clrMapOvr>
+    <a:masterClrMapping/>
+  </p:clrMapOvr>
+</p:sld>
+</file>
+
+<file path=ppt/slides/slide24.xml><?xml version="1.0" encoding="utf-8"?>
 <p:sld xmlns:a="http://schemas.openxmlformats.org/drawingml/2006/main" xmlns:p="http://schemas.openxmlformats.org/presentationml/2006/main" xmlns:r="http://schemas.openxmlformats.org/officeDocument/2006/relationships">
   <p:cSld>
     <p:bg>

--- a/Introduccion a la Ingenieria/Clases/Clase 12 - Presentacion de avances de proyectos/Presentacion.pptx
+++ b/Introduccion a la Ingenieria/Clases/Clase 12 - Presentacion de avances de proyectos/Presentacion.pptx
@@ -17,9 +17,6 @@
     <p:sldId id="265" r:id="rId17"/>
     <p:sldId id="266" r:id="rId18"/>
     <p:sldId id="267" r:id="rId19"/>
-    <p:sldId id="268" r:id="rId20"/>
-    <p:sldId id="269" r:id="rId21"/>
-    <p:sldId id="270" r:id="rId22"/>
   </p:sldIdLst>
   <p:sldSz cx="12191695" cy="6858000" type="screen4x3"/>
   <p:notesSz cx="6858000" cy="9144000"/>
@@ -5813,2733 +5810,6 @@
 </file>
 
 <file path=ppt/slides/slide12.xml><?xml version="1.0" encoding="utf-8"?>
-<p:sld xmlns:a="http://schemas.openxmlformats.org/drawingml/2006/main" xmlns:p="http://schemas.openxmlformats.org/presentationml/2006/main" xmlns:r="http://schemas.openxmlformats.org/officeDocument/2006/relationships">
-  <p:cSld>
-    <p:bg>
-      <p:bgPr>
-        <a:solidFill>
-          <a:srgbClr val="FFFFFF"/>
-        </a:solidFill>
-        <a:effectLst/>
-      </p:bgPr>
-    </p:bg>
-    <p:spTree>
-      <p:nvGrpSpPr>
-        <p:cNvPr id="1" name=""/>
-        <p:cNvGrpSpPr/>
-        <p:nvPr/>
-      </p:nvGrpSpPr>
-      <p:grpSpPr/>
-      <p:sp>
-        <p:nvSpPr>
-          <p:cNvPr id="2" name="Rectangle 1"/>
-          <p:cNvSpPr/>
-          <p:nvPr/>
-        </p:nvSpPr>
-        <p:spPr>
-          <a:xfrm>
-            <a:off x="0" y="0"/>
-            <a:ext cx="12191695" cy="1170432"/>
-          </a:xfrm>
-          <a:prstGeom prst="rect">
-            <a:avLst/>
-          </a:prstGeom>
-          <a:solidFill>
-            <a:srgbClr val="095292"/>
-          </a:solidFill>
-          <a:ln>
-            <a:noFill/>
-          </a:ln>
-        </p:spPr>
-        <p:style>
-          <a:lnRef idx="1">
-            <a:schemeClr val="accent1"/>
-          </a:lnRef>
-          <a:fillRef idx="3">
-            <a:schemeClr val="accent1"/>
-          </a:fillRef>
-          <a:effectRef idx="2">
-            <a:schemeClr val="accent1"/>
-          </a:effectRef>
-          <a:fontRef idx="minor">
-            <a:schemeClr val="lt1"/>
-          </a:fontRef>
-        </p:style>
-        <p:txBody>
-          <a:bodyPr rtlCol="0" anchor="ctr"/>
-          <a:lstStyle/>
-          <a:p>
-            <a:pPr algn="ctr"/>
-          </a:p>
-        </p:txBody>
-      </p:sp>
-      <p:sp>
-        <p:nvSpPr>
-          <p:cNvPr id="3" name="Rectangle 2"/>
-          <p:cNvSpPr/>
-          <p:nvPr/>
-        </p:nvSpPr>
-        <p:spPr>
-          <a:xfrm>
-            <a:off x="0" y="1170432"/>
-            <a:ext cx="12191695" cy="41148"/>
-          </a:xfrm>
-          <a:prstGeom prst="rect">
-            <a:avLst/>
-          </a:prstGeom>
-          <a:solidFill>
-            <a:srgbClr val="FFD000"/>
-          </a:solidFill>
-          <a:ln>
-            <a:noFill/>
-          </a:ln>
-        </p:spPr>
-        <p:style>
-          <a:lnRef idx="1">
-            <a:schemeClr val="accent1"/>
-          </a:lnRef>
-          <a:fillRef idx="3">
-            <a:schemeClr val="accent1"/>
-          </a:fillRef>
-          <a:effectRef idx="2">
-            <a:schemeClr val="accent1"/>
-          </a:effectRef>
-          <a:fontRef idx="minor">
-            <a:schemeClr val="lt1"/>
-          </a:fontRef>
-        </p:style>
-        <p:txBody>
-          <a:bodyPr rtlCol="0" anchor="ctr"/>
-          <a:lstStyle/>
-          <a:p>
-            <a:pPr algn="ctr"/>
-          </a:p>
-        </p:txBody>
-      </p:sp>
-      <p:sp>
-        <p:nvSpPr>
-          <p:cNvPr id="4" name="TextBox 3"/>
-          <p:cNvSpPr txBox="1"/>
-          <p:nvPr/>
-        </p:nvSpPr>
-        <p:spPr>
-          <a:xfrm>
-            <a:off x="457200" y="164592"/>
-            <a:ext cx="11277295" cy="384048"/>
-          </a:xfrm>
-          <a:prstGeom prst="rect">
-            <a:avLst/>
-          </a:prstGeom>
-          <a:noFill/>
-        </p:spPr>
-        <p:txBody>
-          <a:bodyPr wrap="square">
-            <a:spAutoFit/>
-          </a:bodyPr>
-          <a:lstStyle/>
-          <a:p>
-            <a:r>
-              <a:rPr sz="2600" b="1" i="0">
-                <a:solidFill>
-                  <a:srgbClr val="FFFFFF"/>
-                </a:solidFill>
-                <a:latin typeface="Calibri"/>
-              </a:rPr>
-              <a:t>Taller de hoy: Ficha de avance y plan de ajustes</a:t>
-            </a:r>
-          </a:p>
-        </p:txBody>
-      </p:sp>
-      <p:sp>
-        <p:nvSpPr>
-          <p:cNvPr id="5" name="TextBox 4"/>
-          <p:cNvSpPr txBox="1"/>
-          <p:nvPr/>
-        </p:nvSpPr>
-        <p:spPr>
-          <a:xfrm>
-            <a:off x="457200" y="566928"/>
-            <a:ext cx="11277295" cy="411480"/>
-          </a:xfrm>
-          <a:prstGeom prst="rect">
-            <a:avLst/>
-          </a:prstGeom>
-          <a:noFill/>
-        </p:spPr>
-        <p:txBody>
-          <a:bodyPr wrap="square">
-            <a:spAutoFit/>
-          </a:bodyPr>
-          <a:lstStyle/>
-          <a:p>
-            <a:r>
-              <a:rPr sz="1400" b="0" i="0">
-                <a:solidFill>
-                  <a:srgbClr val="B8D8EE"/>
-                </a:solidFill>
-                <a:latin typeface="Calibri"/>
-              </a:rPr>
-              <a:t>12 min en equipos · 12 min: hallazgos, clasificación, decisión y la pregunta al curso · ficha de avance de 5 bloques, con el plan de ajustes al cerrar</a:t>
-            </a:r>
-          </a:p>
-        </p:txBody>
-      </p:sp>
-      <p:sp>
-        <p:nvSpPr>
-          <p:cNvPr id="6" name="Rounded Rectangle 5"/>
-          <p:cNvSpPr/>
-          <p:nvPr/>
-        </p:nvSpPr>
-        <p:spPr>
-          <a:xfrm>
-            <a:off x="457200" y="1472184"/>
-            <a:ext cx="11277295" cy="566928"/>
-          </a:xfrm>
-          <a:prstGeom prst="roundRect">
-            <a:avLst>
-              <a:gd name="adj" fmla="val 12000"/>
-            </a:avLst>
-          </a:prstGeom>
-          <a:solidFill>
-            <a:srgbClr val="F2F2F2"/>
-          </a:solidFill>
-          <a:ln>
-            <a:noFill/>
-          </a:ln>
-        </p:spPr>
-        <p:style>
-          <a:lnRef idx="1">
-            <a:schemeClr val="accent1"/>
-          </a:lnRef>
-          <a:fillRef idx="3">
-            <a:schemeClr val="accent1"/>
-          </a:fillRef>
-          <a:effectRef idx="2">
-            <a:schemeClr val="accent1"/>
-          </a:effectRef>
-          <a:fontRef idx="minor">
-            <a:schemeClr val="lt1"/>
-          </a:fontRef>
-        </p:style>
-        <p:txBody>
-          <a:bodyPr rtlCol="0" anchor="ctr"/>
-          <a:lstStyle/>
-          <a:p>
-            <a:pPr algn="ctr"/>
-          </a:p>
-        </p:txBody>
-      </p:sp>
-      <p:sp>
-        <p:nvSpPr>
-          <p:cNvPr id="7" name="Rectangle 6"/>
-          <p:cNvSpPr/>
-          <p:nvPr/>
-        </p:nvSpPr>
-        <p:spPr>
-          <a:xfrm>
-            <a:off x="640080" y="1618487"/>
-            <a:ext cx="274320" cy="274320"/>
-          </a:xfrm>
-          <a:prstGeom prst="rect">
-            <a:avLst/>
-          </a:prstGeom>
-          <a:solidFill>
-            <a:srgbClr val="FFFFFF"/>
-          </a:solidFill>
-          <a:ln>
-            <a:solidFill>
-              <a:srgbClr val="333333"/>
-            </a:solidFill>
-          </a:ln>
-        </p:spPr>
-        <p:style>
-          <a:lnRef idx="1">
-            <a:schemeClr val="accent1"/>
-          </a:lnRef>
-          <a:fillRef idx="3">
-            <a:schemeClr val="accent1"/>
-          </a:fillRef>
-          <a:effectRef idx="2">
-            <a:schemeClr val="accent1"/>
-          </a:effectRef>
-          <a:fontRef idx="minor">
-            <a:schemeClr val="lt1"/>
-          </a:fontRef>
-        </p:style>
-        <p:txBody>
-          <a:bodyPr rtlCol="0" anchor="ctr"/>
-          <a:lstStyle/>
-          <a:p>
-            <a:pPr algn="ctr"/>
-          </a:p>
-        </p:txBody>
-      </p:sp>
-      <p:sp>
-        <p:nvSpPr>
-          <p:cNvPr id="8" name="Rectangle 7"/>
-          <p:cNvSpPr/>
-          <p:nvPr/>
-        </p:nvSpPr>
-        <p:spPr>
-          <a:xfrm>
-            <a:off x="640080" y="1618487"/>
-            <a:ext cx="73152" cy="274320"/>
-          </a:xfrm>
-          <a:prstGeom prst="rect">
-            <a:avLst/>
-          </a:prstGeom>
-          <a:solidFill>
-            <a:srgbClr val="269CCB"/>
-          </a:solidFill>
-          <a:ln>
-            <a:noFill/>
-          </a:ln>
-        </p:spPr>
-        <p:style>
-          <a:lnRef idx="1">
-            <a:schemeClr val="accent1"/>
-          </a:lnRef>
-          <a:fillRef idx="3">
-            <a:schemeClr val="accent1"/>
-          </a:fillRef>
-          <a:effectRef idx="2">
-            <a:schemeClr val="accent1"/>
-          </a:effectRef>
-          <a:fontRef idx="minor">
-            <a:schemeClr val="lt1"/>
-          </a:fontRef>
-        </p:style>
-        <p:txBody>
-          <a:bodyPr rtlCol="0" anchor="ctr"/>
-          <a:lstStyle/>
-          <a:p>
-            <a:pPr algn="ctr"/>
-          </a:p>
-        </p:txBody>
-      </p:sp>
-      <p:sp>
-        <p:nvSpPr>
-          <p:cNvPr id="9" name="TextBox 8"/>
-          <p:cNvSpPr txBox="1"/>
-          <p:nvPr/>
-        </p:nvSpPr>
-        <p:spPr>
-          <a:xfrm>
-            <a:off x="1097280" y="1563624"/>
-            <a:ext cx="10362895" cy="402336"/>
-          </a:xfrm>
-          <a:prstGeom prst="rect">
-            <a:avLst/>
-          </a:prstGeom>
-          <a:noFill/>
-        </p:spPr>
-        <p:txBody>
-          <a:bodyPr wrap="square" anchor="ctr"/>
-          <a:lstStyle/>
-          <a:p>
-            <a:r>
-              <a:rPr sz="1500" b="1" i="0">
-                <a:solidFill>
-                  <a:srgbClr val="333333"/>
-                </a:solidFill>
-                <a:latin typeface="Calibri"/>
-              </a:rPr>
-              <a:t>LOS TRES HALLAZGOS</a:t>
-            </a:r>
-            <a:r>
-              <a:rPr sz="1500" b="0" i="0">
-                <a:solidFill>
-                  <a:srgbClr val="333333"/>
-                </a:solidFill>
-                <a:latin typeface="Calibri"/>
-              </a:rPr>
-              <a:t> — Tres tropiezos de la prueba, escritos como </a:t>
-            </a:r>
-            <a:r>
-              <a:rPr sz="1500" b="1" i="0">
-                <a:solidFill>
-                  <a:srgbClr val="333333"/>
-                </a:solidFill>
-                <a:latin typeface="Calibri"/>
-              </a:rPr>
-              <a:t>lo que la persona hizo o preguntó</a:t>
-            </a:r>
-            <a:r>
-              <a:rPr sz="1500" b="0" i="0">
-                <a:solidFill>
-                  <a:srgbClr val="333333"/>
-                </a:solidFill>
-                <a:latin typeface="Calibri"/>
-              </a:rPr>
-              <a:t> — no como lo que dijo al final, y no como la solución.</a:t>
-            </a:r>
-          </a:p>
-        </p:txBody>
-      </p:sp>
-      <p:sp>
-        <p:nvSpPr>
-          <p:cNvPr id="10" name="Rounded Rectangle 9"/>
-          <p:cNvSpPr/>
-          <p:nvPr/>
-        </p:nvSpPr>
-        <p:spPr>
-          <a:xfrm>
-            <a:off x="457200" y="2148839"/>
-            <a:ext cx="11277295" cy="566928"/>
-          </a:xfrm>
-          <a:prstGeom prst="roundRect">
-            <a:avLst>
-              <a:gd name="adj" fmla="val 12000"/>
-            </a:avLst>
-          </a:prstGeom>
-          <a:solidFill>
-            <a:srgbClr val="F2F2F2"/>
-          </a:solidFill>
-          <a:ln>
-            <a:noFill/>
-          </a:ln>
-        </p:spPr>
-        <p:style>
-          <a:lnRef idx="1">
-            <a:schemeClr val="accent1"/>
-          </a:lnRef>
-          <a:fillRef idx="3">
-            <a:schemeClr val="accent1"/>
-          </a:fillRef>
-          <a:effectRef idx="2">
-            <a:schemeClr val="accent1"/>
-          </a:effectRef>
-          <a:fontRef idx="minor">
-            <a:schemeClr val="lt1"/>
-          </a:fontRef>
-        </p:style>
-        <p:txBody>
-          <a:bodyPr rtlCol="0" anchor="ctr"/>
-          <a:lstStyle/>
-          <a:p>
-            <a:pPr algn="ctr"/>
-          </a:p>
-        </p:txBody>
-      </p:sp>
-      <p:sp>
-        <p:nvSpPr>
-          <p:cNvPr id="11" name="Rectangle 10"/>
-          <p:cNvSpPr/>
-          <p:nvPr/>
-        </p:nvSpPr>
-        <p:spPr>
-          <a:xfrm>
-            <a:off x="640080" y="2295144"/>
-            <a:ext cx="274320" cy="274320"/>
-          </a:xfrm>
-          <a:prstGeom prst="rect">
-            <a:avLst/>
-          </a:prstGeom>
-          <a:solidFill>
-            <a:srgbClr val="FFFFFF"/>
-          </a:solidFill>
-          <a:ln>
-            <a:solidFill>
-              <a:srgbClr val="333333"/>
-            </a:solidFill>
-          </a:ln>
-        </p:spPr>
-        <p:style>
-          <a:lnRef idx="1">
-            <a:schemeClr val="accent1"/>
-          </a:lnRef>
-          <a:fillRef idx="3">
-            <a:schemeClr val="accent1"/>
-          </a:fillRef>
-          <a:effectRef idx="2">
-            <a:schemeClr val="accent1"/>
-          </a:effectRef>
-          <a:fontRef idx="minor">
-            <a:schemeClr val="lt1"/>
-          </a:fontRef>
-        </p:style>
-        <p:txBody>
-          <a:bodyPr rtlCol="0" anchor="ctr"/>
-          <a:lstStyle/>
-          <a:p>
-            <a:pPr algn="ctr"/>
-          </a:p>
-        </p:txBody>
-      </p:sp>
-      <p:sp>
-        <p:nvSpPr>
-          <p:cNvPr id="12" name="Rectangle 11"/>
-          <p:cNvSpPr/>
-          <p:nvPr/>
-        </p:nvSpPr>
-        <p:spPr>
-          <a:xfrm>
-            <a:off x="640080" y="2295144"/>
-            <a:ext cx="73152" cy="274320"/>
-          </a:xfrm>
-          <a:prstGeom prst="rect">
-            <a:avLst/>
-          </a:prstGeom>
-          <a:solidFill>
-            <a:srgbClr val="269CCB"/>
-          </a:solidFill>
-          <a:ln>
-            <a:noFill/>
-          </a:ln>
-        </p:spPr>
-        <p:style>
-          <a:lnRef idx="1">
-            <a:schemeClr val="accent1"/>
-          </a:lnRef>
-          <a:fillRef idx="3">
-            <a:schemeClr val="accent1"/>
-          </a:fillRef>
-          <a:effectRef idx="2">
-            <a:schemeClr val="accent1"/>
-          </a:effectRef>
-          <a:fontRef idx="minor">
-            <a:schemeClr val="lt1"/>
-          </a:fontRef>
-        </p:style>
-        <p:txBody>
-          <a:bodyPr rtlCol="0" anchor="ctr"/>
-          <a:lstStyle/>
-          <a:p>
-            <a:pPr algn="ctr"/>
-          </a:p>
-        </p:txBody>
-      </p:sp>
-      <p:sp>
-        <p:nvSpPr>
-          <p:cNvPr id="13" name="TextBox 12"/>
-          <p:cNvSpPr txBox="1"/>
-          <p:nvPr/>
-        </p:nvSpPr>
-        <p:spPr>
-          <a:xfrm>
-            <a:off x="1097280" y="2240279"/>
-            <a:ext cx="10362895" cy="402336"/>
-          </a:xfrm>
-          <a:prstGeom prst="rect">
-            <a:avLst/>
-          </a:prstGeom>
-          <a:noFill/>
-        </p:spPr>
-        <p:txBody>
-          <a:bodyPr wrap="square" anchor="ctr"/>
-          <a:lstStyle/>
-          <a:p>
-            <a:r>
-              <a:rPr sz="1500" b="1" i="0">
-                <a:solidFill>
-                  <a:srgbClr val="333333"/>
-                </a:solidFill>
-                <a:latin typeface="Calibri"/>
-              </a:rPr>
-              <a:t>LA CLASIFICACIÓN Y EL PATRÓN</a:t>
-            </a:r>
-            <a:r>
-              <a:rPr sz="1500" b="0" i="0">
-                <a:solidFill>
-                  <a:srgbClr val="333333"/>
-                </a:solidFill>
-                <a:latin typeface="Calibri"/>
-              </a:rPr>
-              <a:t> — El tipo de cada hallazgo —lenguaje, flujo, expectativa o suposición nuestra— y si se repitió en más de una persona.</a:t>
-            </a:r>
-          </a:p>
-        </p:txBody>
-      </p:sp>
-      <p:sp>
-        <p:nvSpPr>
-          <p:cNvPr id="14" name="Rounded Rectangle 13"/>
-          <p:cNvSpPr/>
-          <p:nvPr/>
-        </p:nvSpPr>
-        <p:spPr>
-          <a:xfrm>
-            <a:off x="457200" y="2825496"/>
-            <a:ext cx="11277295" cy="566928"/>
-          </a:xfrm>
-          <a:prstGeom prst="roundRect">
-            <a:avLst>
-              <a:gd name="adj" fmla="val 12000"/>
-            </a:avLst>
-          </a:prstGeom>
-          <a:solidFill>
-            <a:srgbClr val="F2F2F2"/>
-          </a:solidFill>
-          <a:ln>
-            <a:noFill/>
-          </a:ln>
-        </p:spPr>
-        <p:style>
-          <a:lnRef idx="1">
-            <a:schemeClr val="accent1"/>
-          </a:lnRef>
-          <a:fillRef idx="3">
-            <a:schemeClr val="accent1"/>
-          </a:fillRef>
-          <a:effectRef idx="2">
-            <a:schemeClr val="accent1"/>
-          </a:effectRef>
-          <a:fontRef idx="minor">
-            <a:schemeClr val="lt1"/>
-          </a:fontRef>
-        </p:style>
-        <p:txBody>
-          <a:bodyPr rtlCol="0" anchor="ctr"/>
-          <a:lstStyle/>
-          <a:p>
-            <a:pPr algn="ctr"/>
-          </a:p>
-        </p:txBody>
-      </p:sp>
-      <p:sp>
-        <p:nvSpPr>
-          <p:cNvPr id="15" name="Rectangle 14"/>
-          <p:cNvSpPr/>
-          <p:nvPr/>
-        </p:nvSpPr>
-        <p:spPr>
-          <a:xfrm>
-            <a:off x="640080" y="2971800"/>
-            <a:ext cx="274320" cy="274320"/>
-          </a:xfrm>
-          <a:prstGeom prst="rect">
-            <a:avLst/>
-          </a:prstGeom>
-          <a:solidFill>
-            <a:srgbClr val="FFFFFF"/>
-          </a:solidFill>
-          <a:ln>
-            <a:solidFill>
-              <a:srgbClr val="333333"/>
-            </a:solidFill>
-          </a:ln>
-        </p:spPr>
-        <p:style>
-          <a:lnRef idx="1">
-            <a:schemeClr val="accent1"/>
-          </a:lnRef>
-          <a:fillRef idx="3">
-            <a:schemeClr val="accent1"/>
-          </a:fillRef>
-          <a:effectRef idx="2">
-            <a:schemeClr val="accent1"/>
-          </a:effectRef>
-          <a:fontRef idx="minor">
-            <a:schemeClr val="lt1"/>
-          </a:fontRef>
-        </p:style>
-        <p:txBody>
-          <a:bodyPr rtlCol="0" anchor="ctr"/>
-          <a:lstStyle/>
-          <a:p>
-            <a:pPr algn="ctr"/>
-          </a:p>
-        </p:txBody>
-      </p:sp>
-      <p:sp>
-        <p:nvSpPr>
-          <p:cNvPr id="16" name="Rectangle 15"/>
-          <p:cNvSpPr/>
-          <p:nvPr/>
-        </p:nvSpPr>
-        <p:spPr>
-          <a:xfrm>
-            <a:off x="640080" y="2971800"/>
-            <a:ext cx="73152" cy="274320"/>
-          </a:xfrm>
-          <a:prstGeom prst="rect">
-            <a:avLst/>
-          </a:prstGeom>
-          <a:solidFill>
-            <a:srgbClr val="269CCB"/>
-          </a:solidFill>
-          <a:ln>
-            <a:noFill/>
-          </a:ln>
-        </p:spPr>
-        <p:style>
-          <a:lnRef idx="1">
-            <a:schemeClr val="accent1"/>
-          </a:lnRef>
-          <a:fillRef idx="3">
-            <a:schemeClr val="accent1"/>
-          </a:fillRef>
-          <a:effectRef idx="2">
-            <a:schemeClr val="accent1"/>
-          </a:effectRef>
-          <a:fontRef idx="minor">
-            <a:schemeClr val="lt1"/>
-          </a:fontRef>
-        </p:style>
-        <p:txBody>
-          <a:bodyPr rtlCol="0" anchor="ctr"/>
-          <a:lstStyle/>
-          <a:p>
-            <a:pPr algn="ctr"/>
-          </a:p>
-        </p:txBody>
-      </p:sp>
-      <p:sp>
-        <p:nvSpPr>
-          <p:cNvPr id="17" name="TextBox 16"/>
-          <p:cNvSpPr txBox="1"/>
-          <p:nvPr/>
-        </p:nvSpPr>
-        <p:spPr>
-          <a:xfrm>
-            <a:off x="1097280" y="2916936"/>
-            <a:ext cx="10362895" cy="402336"/>
-          </a:xfrm>
-          <a:prstGeom prst="rect">
-            <a:avLst/>
-          </a:prstGeom>
-          <a:noFill/>
-        </p:spPr>
-        <p:txBody>
-          <a:bodyPr wrap="square" anchor="ctr"/>
-          <a:lstStyle/>
-          <a:p>
-            <a:r>
-              <a:rPr sz="1500" b="1" i="0">
-                <a:solidFill>
-                  <a:srgbClr val="333333"/>
-                </a:solidFill>
-                <a:latin typeface="Calibri"/>
-              </a:rPr>
-              <a:t>QUÉ ARREGLAMOS Y QUÉ NO</a:t>
-            </a:r>
-            <a:r>
-              <a:rPr sz="1500" b="0" i="0">
-                <a:solidFill>
-                  <a:srgbClr val="333333"/>
-                </a:solidFill>
-                <a:latin typeface="Calibri"/>
-              </a:rPr>
-              <a:t> — Lo que se arregla antes de la Clase 14, y </a:t>
-            </a:r>
-            <a:r>
-              <a:rPr sz="1500" b="1" i="0">
-                <a:solidFill>
-                  <a:srgbClr val="333333"/>
-                </a:solidFill>
-                <a:latin typeface="Calibri"/>
-              </a:rPr>
-              <a:t>lo que no se arregla con su razón</a:t>
-            </a:r>
-            <a:r>
-              <a:rPr sz="1500" b="0" i="0">
-                <a:solidFill>
-                  <a:srgbClr val="333333"/>
-                </a:solidFill>
-                <a:latin typeface="Calibri"/>
-              </a:rPr>
-              <a:t>: fuera del alcance, no alcanza el tiempo, o cambia una restricción.</a:t>
-            </a:r>
-          </a:p>
-        </p:txBody>
-      </p:sp>
-      <p:sp>
-        <p:nvSpPr>
-          <p:cNvPr id="18" name="Rounded Rectangle 17"/>
-          <p:cNvSpPr/>
-          <p:nvPr/>
-        </p:nvSpPr>
-        <p:spPr>
-          <a:xfrm>
-            <a:off x="457200" y="3502152"/>
-            <a:ext cx="11277295" cy="566928"/>
-          </a:xfrm>
-          <a:prstGeom prst="roundRect">
-            <a:avLst>
-              <a:gd name="adj" fmla="val 12000"/>
-            </a:avLst>
-          </a:prstGeom>
-          <a:solidFill>
-            <a:srgbClr val="F2F2F2"/>
-          </a:solidFill>
-          <a:ln>
-            <a:noFill/>
-          </a:ln>
-        </p:spPr>
-        <p:style>
-          <a:lnRef idx="1">
-            <a:schemeClr val="accent1"/>
-          </a:lnRef>
-          <a:fillRef idx="3">
-            <a:schemeClr val="accent1"/>
-          </a:fillRef>
-          <a:effectRef idx="2">
-            <a:schemeClr val="accent1"/>
-          </a:effectRef>
-          <a:fontRef idx="minor">
-            <a:schemeClr val="lt1"/>
-          </a:fontRef>
-        </p:style>
-        <p:txBody>
-          <a:bodyPr rtlCol="0" anchor="ctr"/>
-          <a:lstStyle/>
-          <a:p>
-            <a:pPr algn="ctr"/>
-          </a:p>
-        </p:txBody>
-      </p:sp>
-      <p:sp>
-        <p:nvSpPr>
-          <p:cNvPr id="19" name="Rectangle 18"/>
-          <p:cNvSpPr/>
-          <p:nvPr/>
-        </p:nvSpPr>
-        <p:spPr>
-          <a:xfrm>
-            <a:off x="640080" y="3648456"/>
-            <a:ext cx="274320" cy="274320"/>
-          </a:xfrm>
-          <a:prstGeom prst="rect">
-            <a:avLst/>
-          </a:prstGeom>
-          <a:solidFill>
-            <a:srgbClr val="FFFFFF"/>
-          </a:solidFill>
-          <a:ln>
-            <a:solidFill>
-              <a:srgbClr val="333333"/>
-            </a:solidFill>
-          </a:ln>
-        </p:spPr>
-        <p:style>
-          <a:lnRef idx="1">
-            <a:schemeClr val="accent1"/>
-          </a:lnRef>
-          <a:fillRef idx="3">
-            <a:schemeClr val="accent1"/>
-          </a:fillRef>
-          <a:effectRef idx="2">
-            <a:schemeClr val="accent1"/>
-          </a:effectRef>
-          <a:fontRef idx="minor">
-            <a:schemeClr val="lt1"/>
-          </a:fontRef>
-        </p:style>
-        <p:txBody>
-          <a:bodyPr rtlCol="0" anchor="ctr"/>
-          <a:lstStyle/>
-          <a:p>
-            <a:pPr algn="ctr"/>
-          </a:p>
-        </p:txBody>
-      </p:sp>
-      <p:sp>
-        <p:nvSpPr>
-          <p:cNvPr id="20" name="Rectangle 19"/>
-          <p:cNvSpPr/>
-          <p:nvPr/>
-        </p:nvSpPr>
-        <p:spPr>
-          <a:xfrm>
-            <a:off x="640080" y="3648456"/>
-            <a:ext cx="73152" cy="274320"/>
-          </a:xfrm>
-          <a:prstGeom prst="rect">
-            <a:avLst/>
-          </a:prstGeom>
-          <a:solidFill>
-            <a:srgbClr val="269CCB"/>
-          </a:solidFill>
-          <a:ln>
-            <a:noFill/>
-          </a:ln>
-        </p:spPr>
-        <p:style>
-          <a:lnRef idx="1">
-            <a:schemeClr val="accent1"/>
-          </a:lnRef>
-          <a:fillRef idx="3">
-            <a:schemeClr val="accent1"/>
-          </a:fillRef>
-          <a:effectRef idx="2">
-            <a:schemeClr val="accent1"/>
-          </a:effectRef>
-          <a:fontRef idx="minor">
-            <a:schemeClr val="lt1"/>
-          </a:fontRef>
-        </p:style>
-        <p:txBody>
-          <a:bodyPr rtlCol="0" anchor="ctr"/>
-          <a:lstStyle/>
-          <a:p>
-            <a:pPr algn="ctr"/>
-          </a:p>
-        </p:txBody>
-      </p:sp>
-      <p:sp>
-        <p:nvSpPr>
-          <p:cNvPr id="21" name="TextBox 20"/>
-          <p:cNvSpPr txBox="1"/>
-          <p:nvPr/>
-        </p:nvSpPr>
-        <p:spPr>
-          <a:xfrm>
-            <a:off x="1097280" y="3593592"/>
-            <a:ext cx="10362895" cy="402336"/>
-          </a:xfrm>
-          <a:prstGeom prst="rect">
-            <a:avLst/>
-          </a:prstGeom>
-          <a:noFill/>
-        </p:spPr>
-        <p:txBody>
-          <a:bodyPr wrap="square" anchor="ctr"/>
-          <a:lstStyle/>
-          <a:p>
-            <a:r>
-              <a:rPr sz="1500" b="1" i="0">
-                <a:solidFill>
-                  <a:srgbClr val="333333"/>
-                </a:solidFill>
-                <a:latin typeface="Calibri"/>
-              </a:rPr>
-              <a:t>LA PREGUNTA PARA EL CURSO</a:t>
-            </a:r>
-            <a:r>
-              <a:rPr sz="1500" b="0" i="0">
-                <a:solidFill>
-                  <a:srgbClr val="333333"/>
-                </a:solidFill>
-                <a:latin typeface="Calibri"/>
-              </a:rPr>
-              <a:t> — Una pregunta abierta, concreta, sobre una decisión que el equipo no logra tomar. Es lo que hace útiles los tres minutos de retroalimentación.</a:t>
-            </a:r>
-          </a:p>
-        </p:txBody>
-      </p:sp>
-      <p:sp>
-        <p:nvSpPr>
-          <p:cNvPr id="22" name="Rounded Rectangle 21"/>
-          <p:cNvSpPr/>
-          <p:nvPr/>
-        </p:nvSpPr>
-        <p:spPr>
-          <a:xfrm>
-            <a:off x="457200" y="4178808"/>
-            <a:ext cx="11277295" cy="566928"/>
-          </a:xfrm>
-          <a:prstGeom prst="roundRect">
-            <a:avLst>
-              <a:gd name="adj" fmla="val 12000"/>
-            </a:avLst>
-          </a:prstGeom>
-          <a:solidFill>
-            <a:srgbClr val="F2F2F2"/>
-          </a:solidFill>
-          <a:ln>
-            <a:noFill/>
-          </a:ln>
-        </p:spPr>
-        <p:style>
-          <a:lnRef idx="1">
-            <a:schemeClr val="accent1"/>
-          </a:lnRef>
-          <a:fillRef idx="3">
-            <a:schemeClr val="accent1"/>
-          </a:fillRef>
-          <a:effectRef idx="2">
-            <a:schemeClr val="accent1"/>
-          </a:effectRef>
-          <a:fontRef idx="minor">
-            <a:schemeClr val="lt1"/>
-          </a:fontRef>
-        </p:style>
-        <p:txBody>
-          <a:bodyPr rtlCol="0" anchor="ctr"/>
-          <a:lstStyle/>
-          <a:p>
-            <a:pPr algn="ctr"/>
-          </a:p>
-        </p:txBody>
-      </p:sp>
-      <p:sp>
-        <p:nvSpPr>
-          <p:cNvPr id="23" name="Rectangle 22"/>
-          <p:cNvSpPr/>
-          <p:nvPr/>
-        </p:nvSpPr>
-        <p:spPr>
-          <a:xfrm>
-            <a:off x="640080" y="4325112"/>
-            <a:ext cx="274320" cy="274320"/>
-          </a:xfrm>
-          <a:prstGeom prst="rect">
-            <a:avLst/>
-          </a:prstGeom>
-          <a:solidFill>
-            <a:srgbClr val="FFFFFF"/>
-          </a:solidFill>
-          <a:ln>
-            <a:solidFill>
-              <a:srgbClr val="333333"/>
-            </a:solidFill>
-          </a:ln>
-        </p:spPr>
-        <p:style>
-          <a:lnRef idx="1">
-            <a:schemeClr val="accent1"/>
-          </a:lnRef>
-          <a:fillRef idx="3">
-            <a:schemeClr val="accent1"/>
-          </a:fillRef>
-          <a:effectRef idx="2">
-            <a:schemeClr val="accent1"/>
-          </a:effectRef>
-          <a:fontRef idx="minor">
-            <a:schemeClr val="lt1"/>
-          </a:fontRef>
-        </p:style>
-        <p:txBody>
-          <a:bodyPr rtlCol="0" anchor="ctr"/>
-          <a:lstStyle/>
-          <a:p>
-            <a:pPr algn="ctr"/>
-          </a:p>
-        </p:txBody>
-      </p:sp>
-      <p:sp>
-        <p:nvSpPr>
-          <p:cNvPr id="24" name="Rectangle 23"/>
-          <p:cNvSpPr/>
-          <p:nvPr/>
-        </p:nvSpPr>
-        <p:spPr>
-          <a:xfrm>
-            <a:off x="640080" y="4325112"/>
-            <a:ext cx="73152" cy="274320"/>
-          </a:xfrm>
-          <a:prstGeom prst="rect">
-            <a:avLst/>
-          </a:prstGeom>
-          <a:solidFill>
-            <a:srgbClr val="269CCB"/>
-          </a:solidFill>
-          <a:ln>
-            <a:noFill/>
-          </a:ln>
-        </p:spPr>
-        <p:style>
-          <a:lnRef idx="1">
-            <a:schemeClr val="accent1"/>
-          </a:lnRef>
-          <a:fillRef idx="3">
-            <a:schemeClr val="accent1"/>
-          </a:fillRef>
-          <a:effectRef idx="2">
-            <a:schemeClr val="accent1"/>
-          </a:effectRef>
-          <a:fontRef idx="minor">
-            <a:schemeClr val="lt1"/>
-          </a:fontRef>
-        </p:style>
-        <p:txBody>
-          <a:bodyPr rtlCol="0" anchor="ctr"/>
-          <a:lstStyle/>
-          <a:p>
-            <a:pPr algn="ctr"/>
-          </a:p>
-        </p:txBody>
-      </p:sp>
-      <p:sp>
-        <p:nvSpPr>
-          <p:cNvPr id="25" name="TextBox 24"/>
-          <p:cNvSpPr txBox="1"/>
-          <p:nvPr/>
-        </p:nvSpPr>
-        <p:spPr>
-          <a:xfrm>
-            <a:off x="1097280" y="4270248"/>
-            <a:ext cx="10362895" cy="402336"/>
-          </a:xfrm>
-          <a:prstGeom prst="rect">
-            <a:avLst/>
-          </a:prstGeom>
-          <a:noFill/>
-        </p:spPr>
-        <p:txBody>
-          <a:bodyPr wrap="square" anchor="ctr"/>
-          <a:lstStyle/>
-          <a:p>
-            <a:r>
-              <a:rPr sz="1500" b="1" i="0">
-                <a:solidFill>
-                  <a:srgbClr val="333333"/>
-                </a:solidFill>
-                <a:latin typeface="Calibri"/>
-              </a:rPr>
-              <a:t>EL PLAN DE AJUSTES</a:t>
-            </a:r>
-            <a:r>
-              <a:rPr sz="1500" b="0" i="0">
-                <a:solidFill>
-                  <a:srgbClr val="333333"/>
-                </a:solidFill>
-                <a:latin typeface="Calibri"/>
-              </a:rPr>
-              <a:t> — Las </a:t>
-            </a:r>
-            <a:r>
-              <a:rPr sz="1500" b="1" i="0">
-                <a:solidFill>
-                  <a:srgbClr val="333333"/>
-                </a:solidFill>
-                <a:latin typeface="Calibri"/>
-              </a:rPr>
-              <a:t>dos cosas</a:t>
-            </a:r>
-            <a:r>
-              <a:rPr sz="1500" b="0" i="0">
-                <a:solidFill>
-                  <a:srgbClr val="333333"/>
-                </a:solidFill>
-                <a:latin typeface="Calibri"/>
-              </a:rPr>
-              <a:t> que el equipo va a ajustar con lo que oyó en la retroalimentación, y </a:t>
-            </a:r>
-            <a:r>
-              <a:rPr sz="1500" b="1" i="0">
-                <a:solidFill>
-                  <a:srgbClr val="333333"/>
-                </a:solidFill>
-                <a:latin typeface="Calibri"/>
-              </a:rPr>
-              <a:t>qué lo motivó</a:t>
-            </a:r>
-            <a:r>
-              <a:rPr sz="1500" b="0" i="0">
-                <a:solidFill>
-                  <a:srgbClr val="333333"/>
-                </a:solidFill>
-                <a:latin typeface="Calibri"/>
-              </a:rPr>
-              <a:t>: quién lo dijo y qué dijo. Se llena en los últimos minutos de la sesión, no antes.</a:t>
-            </a:r>
-          </a:p>
-        </p:txBody>
-      </p:sp>
-      <p:sp>
-        <p:nvSpPr>
-          <p:cNvPr id="26" name="TextBox 25"/>
-          <p:cNvSpPr txBox="1"/>
-          <p:nvPr/>
-        </p:nvSpPr>
-        <p:spPr>
-          <a:xfrm>
-            <a:off x="11185855" y="6473952"/>
-            <a:ext cx="640080" cy="274320"/>
-          </a:xfrm>
-          <a:prstGeom prst="rect">
-            <a:avLst/>
-          </a:prstGeom>
-          <a:noFill/>
-        </p:spPr>
-        <p:txBody>
-          <a:bodyPr wrap="square">
-            <a:spAutoFit/>
-          </a:bodyPr>
-          <a:lstStyle/>
-          <a:p>
-            <a:pPr algn="r"/>
-            <a:r>
-              <a:rPr sz="1100" b="0" i="0">
-                <a:solidFill>
-                  <a:srgbClr val="666666"/>
-                </a:solidFill>
-                <a:latin typeface="Calibri"/>
-              </a:rPr>
-              <a:t>12</a:t>
-            </a:r>
-          </a:p>
-        </p:txBody>
-      </p:sp>
-    </p:spTree>
-  </p:cSld>
-  <p:clrMapOvr>
-    <a:masterClrMapping/>
-  </p:clrMapOvr>
-</p:sld>
-</file>
-
-<file path=ppt/slides/slide13.xml><?xml version="1.0" encoding="utf-8"?>
-<p:sld xmlns:a="http://schemas.openxmlformats.org/drawingml/2006/main" xmlns:p="http://schemas.openxmlformats.org/presentationml/2006/main" xmlns:r="http://schemas.openxmlformats.org/officeDocument/2006/relationships">
-  <p:cSld>
-    <p:bg>
-      <p:bgPr>
-        <a:solidFill>
-          <a:srgbClr val="FFFFFF"/>
-        </a:solidFill>
-        <a:effectLst/>
-      </p:bgPr>
-    </p:bg>
-    <p:spTree>
-      <p:nvGrpSpPr>
-        <p:cNvPr id="1" name=""/>
-        <p:cNvGrpSpPr/>
-        <p:nvPr/>
-      </p:nvGrpSpPr>
-      <p:grpSpPr/>
-      <p:sp>
-        <p:nvSpPr>
-          <p:cNvPr id="2" name="Rectangle 1"/>
-          <p:cNvSpPr/>
-          <p:nvPr/>
-        </p:nvSpPr>
-        <p:spPr>
-          <a:xfrm>
-            <a:off x="0" y="0"/>
-            <a:ext cx="12191695" cy="1170432"/>
-          </a:xfrm>
-          <a:prstGeom prst="rect">
-            <a:avLst/>
-          </a:prstGeom>
-          <a:solidFill>
-            <a:srgbClr val="095292"/>
-          </a:solidFill>
-          <a:ln>
-            <a:noFill/>
-          </a:ln>
-        </p:spPr>
-        <p:style>
-          <a:lnRef idx="1">
-            <a:schemeClr val="accent1"/>
-          </a:lnRef>
-          <a:fillRef idx="3">
-            <a:schemeClr val="accent1"/>
-          </a:fillRef>
-          <a:effectRef idx="2">
-            <a:schemeClr val="accent1"/>
-          </a:effectRef>
-          <a:fontRef idx="minor">
-            <a:schemeClr val="lt1"/>
-          </a:fontRef>
-        </p:style>
-        <p:txBody>
-          <a:bodyPr rtlCol="0" anchor="ctr"/>
-          <a:lstStyle/>
-          <a:p>
-            <a:pPr algn="ctr"/>
-          </a:p>
-        </p:txBody>
-      </p:sp>
-      <p:sp>
-        <p:nvSpPr>
-          <p:cNvPr id="3" name="Rectangle 2"/>
-          <p:cNvSpPr/>
-          <p:nvPr/>
-        </p:nvSpPr>
-        <p:spPr>
-          <a:xfrm>
-            <a:off x="0" y="1170432"/>
-            <a:ext cx="12191695" cy="41148"/>
-          </a:xfrm>
-          <a:prstGeom prst="rect">
-            <a:avLst/>
-          </a:prstGeom>
-          <a:solidFill>
-            <a:srgbClr val="FFD000"/>
-          </a:solidFill>
-          <a:ln>
-            <a:noFill/>
-          </a:ln>
-        </p:spPr>
-        <p:style>
-          <a:lnRef idx="1">
-            <a:schemeClr val="accent1"/>
-          </a:lnRef>
-          <a:fillRef idx="3">
-            <a:schemeClr val="accent1"/>
-          </a:fillRef>
-          <a:effectRef idx="2">
-            <a:schemeClr val="accent1"/>
-          </a:effectRef>
-          <a:fontRef idx="minor">
-            <a:schemeClr val="lt1"/>
-          </a:fontRef>
-        </p:style>
-        <p:txBody>
-          <a:bodyPr rtlCol="0" anchor="ctr"/>
-          <a:lstStyle/>
-          <a:p>
-            <a:pPr algn="ctr"/>
-          </a:p>
-        </p:txBody>
-      </p:sp>
-      <p:sp>
-        <p:nvSpPr>
-          <p:cNvPr id="4" name="TextBox 3"/>
-          <p:cNvSpPr txBox="1"/>
-          <p:nvPr/>
-        </p:nvSpPr>
-        <p:spPr>
-          <a:xfrm>
-            <a:off x="457200" y="164592"/>
-            <a:ext cx="11277295" cy="384048"/>
-          </a:xfrm>
-          <a:prstGeom prst="rect">
-            <a:avLst/>
-          </a:prstGeom>
-          <a:noFill/>
-        </p:spPr>
-        <p:txBody>
-          <a:bodyPr wrap="square">
-            <a:spAutoFit/>
-          </a:bodyPr>
-          <a:lstStyle/>
-          <a:p>
-            <a:r>
-              <a:rPr sz="2600" b="1" i="0">
-                <a:solidFill>
-                  <a:srgbClr val="FFFFFF"/>
-                </a:solidFill>
-                <a:latin typeface="Calibri"/>
-              </a:rPr>
-              <a:t>Cómo se expone en 5 minutos</a:t>
-            </a:r>
-          </a:p>
-        </p:txBody>
-      </p:sp>
-      <p:sp>
-        <p:nvSpPr>
-          <p:cNvPr id="5" name="TextBox 4"/>
-          <p:cNvSpPr txBox="1"/>
-          <p:nvPr/>
-        </p:nvSpPr>
-        <p:spPr>
-          <a:xfrm>
-            <a:off x="457200" y="566928"/>
-            <a:ext cx="11277295" cy="411480"/>
-          </a:xfrm>
-          <a:prstGeom prst="rect">
-            <a:avLst/>
-          </a:prstGeom>
-          <a:noFill/>
-        </p:spPr>
-        <p:txBody>
-          <a:bodyPr wrap="square">
-            <a:spAutoFit/>
-          </a:bodyPr>
-          <a:lstStyle/>
-          <a:p>
-            <a:r>
-              <a:rPr sz="1400" b="0" i="0">
-                <a:solidFill>
-                  <a:srgbClr val="B8D8EE"/>
-                </a:solidFill>
-                <a:latin typeface="Calibri"/>
-              </a:rPr>
-              <a:t>Habla el vocero con la pantalla ya compartida · cronómetro en pantalla · se corta al llegar a cero</a:t>
-            </a:r>
-          </a:p>
-        </p:txBody>
-      </p:sp>
-      <p:sp>
-        <p:nvSpPr>
-          <p:cNvPr id="6" name="Rounded Rectangle 5"/>
-          <p:cNvSpPr/>
-          <p:nvPr/>
-        </p:nvSpPr>
-        <p:spPr>
-          <a:xfrm>
-            <a:off x="457200" y="1444752"/>
-            <a:ext cx="11277295" cy="908913"/>
-          </a:xfrm>
-          <a:prstGeom prst="roundRect">
-            <a:avLst>
-              <a:gd name="adj" fmla="val 12000"/>
-            </a:avLst>
-          </a:prstGeom>
-          <a:solidFill>
-            <a:srgbClr val="F2F2F2"/>
-          </a:solidFill>
-          <a:ln>
-            <a:noFill/>
-          </a:ln>
-        </p:spPr>
-        <p:style>
-          <a:lnRef idx="1">
-            <a:schemeClr val="accent1"/>
-          </a:lnRef>
-          <a:fillRef idx="3">
-            <a:schemeClr val="accent1"/>
-          </a:fillRef>
-          <a:effectRef idx="2">
-            <a:schemeClr val="accent1"/>
-          </a:effectRef>
-          <a:fontRef idx="minor">
-            <a:schemeClr val="lt1"/>
-          </a:fontRef>
-        </p:style>
-        <p:txBody>
-          <a:bodyPr rtlCol="0" anchor="ctr"/>
-          <a:lstStyle/>
-          <a:p>
-            <a:pPr algn="ctr"/>
-          </a:p>
-        </p:txBody>
-      </p:sp>
-      <p:sp>
-        <p:nvSpPr>
-          <p:cNvPr id="7" name="Rounded Rectangle 6"/>
-          <p:cNvSpPr/>
-          <p:nvPr/>
-        </p:nvSpPr>
-        <p:spPr>
-          <a:xfrm>
-            <a:off x="594360" y="1679752"/>
-            <a:ext cx="438912" cy="438912"/>
-          </a:xfrm>
-          <a:prstGeom prst="roundRect">
-            <a:avLst>
-              <a:gd name="adj" fmla="val 12000"/>
-            </a:avLst>
-          </a:prstGeom>
-          <a:solidFill>
-            <a:srgbClr val="095292"/>
-          </a:solidFill>
-          <a:ln>
-            <a:noFill/>
-          </a:ln>
-        </p:spPr>
-        <p:style>
-          <a:lnRef idx="1">
-            <a:schemeClr val="accent1"/>
-          </a:lnRef>
-          <a:fillRef idx="3">
-            <a:schemeClr val="accent1"/>
-          </a:fillRef>
-          <a:effectRef idx="2">
-            <a:schemeClr val="accent1"/>
-          </a:effectRef>
-          <a:fontRef idx="minor">
-            <a:schemeClr val="lt1"/>
-          </a:fontRef>
-        </p:style>
-        <p:txBody>
-          <a:bodyPr rtlCol="0" anchor="ctr"/>
-          <a:lstStyle/>
-          <a:p>
-            <a:pPr algn="ctr"/>
-          </a:p>
-        </p:txBody>
-      </p:sp>
-      <p:sp>
-        <p:nvSpPr>
-          <p:cNvPr id="8" name="TextBox 7"/>
-          <p:cNvSpPr txBox="1"/>
-          <p:nvPr/>
-        </p:nvSpPr>
-        <p:spPr>
-          <a:xfrm>
-            <a:off x="594360" y="1679752"/>
-            <a:ext cx="438912" cy="438912"/>
-          </a:xfrm>
-          <a:prstGeom prst="rect">
-            <a:avLst/>
-          </a:prstGeom>
-          <a:noFill/>
-        </p:spPr>
-        <p:txBody>
-          <a:bodyPr wrap="square" anchor="ctr"/>
-          <a:lstStyle/>
-          <a:p>
-            <a:pPr algn="ctr"/>
-            <a:r>
-              <a:rPr sz="1600" b="1" i="0">
-                <a:solidFill>
-                  <a:srgbClr val="FFFFFF"/>
-                </a:solidFill>
-                <a:latin typeface="Calibri"/>
-              </a:rPr>
-              <a:t>1</a:t>
-            </a:r>
-          </a:p>
-        </p:txBody>
-      </p:sp>
-      <p:sp>
-        <p:nvSpPr>
-          <p:cNvPr id="9" name="TextBox 8"/>
-          <p:cNvSpPr txBox="1"/>
-          <p:nvPr/>
-        </p:nvSpPr>
-        <p:spPr>
-          <a:xfrm>
-            <a:off x="1188720" y="1536192"/>
-            <a:ext cx="10271455" cy="744321"/>
-          </a:xfrm>
-          <a:prstGeom prst="rect">
-            <a:avLst/>
-          </a:prstGeom>
-          <a:noFill/>
-        </p:spPr>
-        <p:txBody>
-          <a:bodyPr wrap="square" anchor="ctr"/>
-          <a:lstStyle/>
-          <a:p>
-            <a:r>
-              <a:rPr sz="1500" b="1" i="0">
-                <a:solidFill>
-                  <a:srgbClr val="095292"/>
-                </a:solidFill>
-                <a:latin typeface="Calibri"/>
-              </a:rPr>
-              <a:t>30 s · Recordatorio mínimo</a:t>
-            </a:r>
-          </a:p>
-          <a:p>
-            <a:pPr>
-              <a:spcBef>
-                <a:spcPts val="200"/>
-              </a:spcBef>
-            </a:pPr>
-            <a:r>
-              <a:rPr sz="1300" b="0" i="0">
-                <a:solidFill>
-                  <a:srgbClr val="333333"/>
-                </a:solidFill>
-                <a:latin typeface="Calibri"/>
-              </a:rPr>
-              <a:t>El problema en </a:t>
-            </a:r>
-            <a:r>
-              <a:rPr sz="1300" b="1" i="0">
-                <a:solidFill>
-                  <a:srgbClr val="333333"/>
-                </a:solidFill>
-                <a:latin typeface="Calibri"/>
-              </a:rPr>
-              <a:t>una frase</a:t>
-            </a:r>
-            <a:r>
-              <a:rPr sz="1300" b="0" i="0">
-                <a:solidFill>
-                  <a:srgbClr val="333333"/>
-                </a:solidFill>
-                <a:latin typeface="Calibri"/>
-              </a:rPr>
-              <a:t>. Nada más: el curso ya conoce su proyecto.</a:t>
-            </a:r>
-          </a:p>
-        </p:txBody>
-      </p:sp>
-      <p:sp>
-        <p:nvSpPr>
-          <p:cNvPr id="10" name="Rounded Rectangle 9"/>
-          <p:cNvSpPr/>
-          <p:nvPr/>
-        </p:nvSpPr>
-        <p:spPr>
-          <a:xfrm>
-            <a:off x="457200" y="2445105"/>
-            <a:ext cx="11277295" cy="908913"/>
-          </a:xfrm>
-          <a:prstGeom prst="roundRect">
-            <a:avLst>
-              <a:gd name="adj" fmla="val 12000"/>
-            </a:avLst>
-          </a:prstGeom>
-          <a:solidFill>
-            <a:srgbClr val="E8F4FA"/>
-          </a:solidFill>
-          <a:ln>
-            <a:noFill/>
-          </a:ln>
-        </p:spPr>
-        <p:style>
-          <a:lnRef idx="1">
-            <a:schemeClr val="accent1"/>
-          </a:lnRef>
-          <a:fillRef idx="3">
-            <a:schemeClr val="accent1"/>
-          </a:fillRef>
-          <a:effectRef idx="2">
-            <a:schemeClr val="accent1"/>
-          </a:effectRef>
-          <a:fontRef idx="minor">
-            <a:schemeClr val="lt1"/>
-          </a:fontRef>
-        </p:style>
-        <p:txBody>
-          <a:bodyPr rtlCol="0" anchor="ctr"/>
-          <a:lstStyle/>
-          <a:p>
-            <a:pPr algn="ctr"/>
-          </a:p>
-        </p:txBody>
-      </p:sp>
-      <p:sp>
-        <p:nvSpPr>
-          <p:cNvPr id="11" name="Rounded Rectangle 10"/>
-          <p:cNvSpPr/>
-          <p:nvPr/>
-        </p:nvSpPr>
-        <p:spPr>
-          <a:xfrm>
-            <a:off x="594360" y="2680106"/>
-            <a:ext cx="438912" cy="438912"/>
-          </a:xfrm>
-          <a:prstGeom prst="roundRect">
-            <a:avLst>
-              <a:gd name="adj" fmla="val 12000"/>
-            </a:avLst>
-          </a:prstGeom>
-          <a:solidFill>
-            <a:srgbClr val="095292"/>
-          </a:solidFill>
-          <a:ln>
-            <a:noFill/>
-          </a:ln>
-        </p:spPr>
-        <p:style>
-          <a:lnRef idx="1">
-            <a:schemeClr val="accent1"/>
-          </a:lnRef>
-          <a:fillRef idx="3">
-            <a:schemeClr val="accent1"/>
-          </a:fillRef>
-          <a:effectRef idx="2">
-            <a:schemeClr val="accent1"/>
-          </a:effectRef>
-          <a:fontRef idx="minor">
-            <a:schemeClr val="lt1"/>
-          </a:fontRef>
-        </p:style>
-        <p:txBody>
-          <a:bodyPr rtlCol="0" anchor="ctr"/>
-          <a:lstStyle/>
-          <a:p>
-            <a:pPr algn="ctr"/>
-          </a:p>
-        </p:txBody>
-      </p:sp>
-      <p:sp>
-        <p:nvSpPr>
-          <p:cNvPr id="12" name="TextBox 11"/>
-          <p:cNvSpPr txBox="1"/>
-          <p:nvPr/>
-        </p:nvSpPr>
-        <p:spPr>
-          <a:xfrm>
-            <a:off x="594360" y="2680106"/>
-            <a:ext cx="438912" cy="438912"/>
-          </a:xfrm>
-          <a:prstGeom prst="rect">
-            <a:avLst/>
-          </a:prstGeom>
-          <a:noFill/>
-        </p:spPr>
-        <p:txBody>
-          <a:bodyPr wrap="square" anchor="ctr"/>
-          <a:lstStyle/>
-          <a:p>
-            <a:pPr algn="ctr"/>
-            <a:r>
-              <a:rPr sz="1600" b="1" i="0">
-                <a:solidFill>
-                  <a:srgbClr val="FFFFFF"/>
-                </a:solidFill>
-                <a:latin typeface="Calibri"/>
-              </a:rPr>
-              <a:t>2</a:t>
-            </a:r>
-          </a:p>
-        </p:txBody>
-      </p:sp>
-      <p:sp>
-        <p:nvSpPr>
-          <p:cNvPr id="13" name="TextBox 12"/>
-          <p:cNvSpPr txBox="1"/>
-          <p:nvPr/>
-        </p:nvSpPr>
-        <p:spPr>
-          <a:xfrm>
-            <a:off x="1188720" y="2536545"/>
-            <a:ext cx="10271455" cy="744321"/>
-          </a:xfrm>
-          <a:prstGeom prst="rect">
-            <a:avLst/>
-          </a:prstGeom>
-          <a:noFill/>
-        </p:spPr>
-        <p:txBody>
-          <a:bodyPr wrap="square" anchor="ctr"/>
-          <a:lstStyle/>
-          <a:p>
-            <a:r>
-              <a:rPr sz="1500" b="1" i="0">
-                <a:solidFill>
-                  <a:srgbClr val="095292"/>
-                </a:solidFill>
-                <a:latin typeface="Calibri"/>
-              </a:rPr>
-              <a:t>2 min · Los tres hallazgos</a:t>
-            </a:r>
-          </a:p>
-          <a:p>
-            <a:pPr>
-              <a:spcBef>
-                <a:spcPts val="200"/>
-              </a:spcBef>
-            </a:pPr>
-            <a:r>
-              <a:rPr sz="1300" b="0" i="0">
-                <a:solidFill>
-                  <a:srgbClr val="333333"/>
-                </a:solidFill>
-                <a:latin typeface="Calibri"/>
-              </a:rPr>
-              <a:t>Lo que la persona </a:t>
-            </a:r>
-            <a:r>
-              <a:rPr sz="1300" b="1" i="0">
-                <a:solidFill>
-                  <a:srgbClr val="333333"/>
-                </a:solidFill>
-                <a:latin typeface="Calibri"/>
-              </a:rPr>
-              <a:t>hizo</a:t>
-            </a:r>
-            <a:r>
-              <a:rPr sz="1300" b="0" i="0">
-                <a:solidFill>
-                  <a:srgbClr val="333333"/>
-                </a:solidFill>
-                <a:latin typeface="Calibri"/>
-              </a:rPr>
-              <a:t>. Es el corazón del avance.</a:t>
-            </a:r>
-          </a:p>
-        </p:txBody>
-      </p:sp>
-      <p:sp>
-        <p:nvSpPr>
-          <p:cNvPr id="14" name="Rounded Rectangle 13"/>
-          <p:cNvSpPr/>
-          <p:nvPr/>
-        </p:nvSpPr>
-        <p:spPr>
-          <a:xfrm>
-            <a:off x="457200" y="3445459"/>
-            <a:ext cx="11277295" cy="908913"/>
-          </a:xfrm>
-          <a:prstGeom prst="roundRect">
-            <a:avLst>
-              <a:gd name="adj" fmla="val 12000"/>
-            </a:avLst>
-          </a:prstGeom>
-          <a:solidFill>
-            <a:srgbClr val="F2F2F2"/>
-          </a:solidFill>
-          <a:ln>
-            <a:noFill/>
-          </a:ln>
-        </p:spPr>
-        <p:style>
-          <a:lnRef idx="1">
-            <a:schemeClr val="accent1"/>
-          </a:lnRef>
-          <a:fillRef idx="3">
-            <a:schemeClr val="accent1"/>
-          </a:fillRef>
-          <a:effectRef idx="2">
-            <a:schemeClr val="accent1"/>
-          </a:effectRef>
-          <a:fontRef idx="minor">
-            <a:schemeClr val="lt1"/>
-          </a:fontRef>
-        </p:style>
-        <p:txBody>
-          <a:bodyPr rtlCol="0" anchor="ctr"/>
-          <a:lstStyle/>
-          <a:p>
-            <a:pPr algn="ctr"/>
-          </a:p>
-        </p:txBody>
-      </p:sp>
-      <p:sp>
-        <p:nvSpPr>
-          <p:cNvPr id="15" name="Rounded Rectangle 14"/>
-          <p:cNvSpPr/>
-          <p:nvPr/>
-        </p:nvSpPr>
-        <p:spPr>
-          <a:xfrm>
-            <a:off x="594360" y="3680460"/>
-            <a:ext cx="438912" cy="438912"/>
-          </a:xfrm>
-          <a:prstGeom prst="roundRect">
-            <a:avLst>
-              <a:gd name="adj" fmla="val 12000"/>
-            </a:avLst>
-          </a:prstGeom>
-          <a:solidFill>
-            <a:srgbClr val="095292"/>
-          </a:solidFill>
-          <a:ln>
-            <a:noFill/>
-          </a:ln>
-        </p:spPr>
-        <p:style>
-          <a:lnRef idx="1">
-            <a:schemeClr val="accent1"/>
-          </a:lnRef>
-          <a:fillRef idx="3">
-            <a:schemeClr val="accent1"/>
-          </a:fillRef>
-          <a:effectRef idx="2">
-            <a:schemeClr val="accent1"/>
-          </a:effectRef>
-          <a:fontRef idx="minor">
-            <a:schemeClr val="lt1"/>
-          </a:fontRef>
-        </p:style>
-        <p:txBody>
-          <a:bodyPr rtlCol="0" anchor="ctr"/>
-          <a:lstStyle/>
-          <a:p>
-            <a:pPr algn="ctr"/>
-          </a:p>
-        </p:txBody>
-      </p:sp>
-      <p:sp>
-        <p:nvSpPr>
-          <p:cNvPr id="16" name="TextBox 15"/>
-          <p:cNvSpPr txBox="1"/>
-          <p:nvPr/>
-        </p:nvSpPr>
-        <p:spPr>
-          <a:xfrm>
-            <a:off x="594360" y="3680460"/>
-            <a:ext cx="438912" cy="438912"/>
-          </a:xfrm>
-          <a:prstGeom prst="rect">
-            <a:avLst/>
-          </a:prstGeom>
-          <a:noFill/>
-        </p:spPr>
-        <p:txBody>
-          <a:bodyPr wrap="square" anchor="ctr"/>
-          <a:lstStyle/>
-          <a:p>
-            <a:pPr algn="ctr"/>
-            <a:r>
-              <a:rPr sz="1600" b="1" i="0">
-                <a:solidFill>
-                  <a:srgbClr val="FFFFFF"/>
-                </a:solidFill>
-                <a:latin typeface="Calibri"/>
-              </a:rPr>
-              <a:t>3</a:t>
-            </a:r>
-          </a:p>
-        </p:txBody>
-      </p:sp>
-      <p:sp>
-        <p:nvSpPr>
-          <p:cNvPr id="17" name="TextBox 16"/>
-          <p:cNvSpPr txBox="1"/>
-          <p:nvPr/>
-        </p:nvSpPr>
-        <p:spPr>
-          <a:xfrm>
-            <a:off x="1188720" y="3536899"/>
-            <a:ext cx="10271455" cy="744321"/>
-          </a:xfrm>
-          <a:prstGeom prst="rect">
-            <a:avLst/>
-          </a:prstGeom>
-          <a:noFill/>
-        </p:spPr>
-        <p:txBody>
-          <a:bodyPr wrap="square" anchor="ctr"/>
-          <a:lstStyle/>
-          <a:p>
-            <a:r>
-              <a:rPr sz="1500" b="1" i="0">
-                <a:solidFill>
-                  <a:srgbClr val="095292"/>
-                </a:solidFill>
-                <a:latin typeface="Calibri"/>
-              </a:rPr>
-              <a:t>1 min · Qué arreglan y qué no</a:t>
-            </a:r>
-          </a:p>
-          <a:p>
-            <a:pPr>
-              <a:spcBef>
-                <a:spcPts val="200"/>
-              </a:spcBef>
-            </a:pPr>
-            <a:r>
-              <a:rPr sz="1300" b="0" i="0">
-                <a:solidFill>
-                  <a:srgbClr val="333333"/>
-                </a:solidFill>
-                <a:latin typeface="Calibri"/>
-              </a:rPr>
-              <a:t>Y por qué lo que queda fuera queda fuera.</a:t>
-            </a:r>
-          </a:p>
-        </p:txBody>
-      </p:sp>
-      <p:sp>
-        <p:nvSpPr>
-          <p:cNvPr id="18" name="Rounded Rectangle 17"/>
-          <p:cNvSpPr/>
-          <p:nvPr/>
-        </p:nvSpPr>
-        <p:spPr>
-          <a:xfrm>
-            <a:off x="457200" y="4445812"/>
-            <a:ext cx="11277295" cy="908913"/>
-          </a:xfrm>
-          <a:prstGeom prst="roundRect">
-            <a:avLst>
-              <a:gd name="adj" fmla="val 12000"/>
-            </a:avLst>
-          </a:prstGeom>
-          <a:solidFill>
-            <a:srgbClr val="E8F4FA"/>
-          </a:solidFill>
-          <a:ln>
-            <a:noFill/>
-          </a:ln>
-        </p:spPr>
-        <p:style>
-          <a:lnRef idx="1">
-            <a:schemeClr val="accent1"/>
-          </a:lnRef>
-          <a:fillRef idx="3">
-            <a:schemeClr val="accent1"/>
-          </a:fillRef>
-          <a:effectRef idx="2">
-            <a:schemeClr val="accent1"/>
-          </a:effectRef>
-          <a:fontRef idx="minor">
-            <a:schemeClr val="lt1"/>
-          </a:fontRef>
-        </p:style>
-        <p:txBody>
-          <a:bodyPr rtlCol="0" anchor="ctr"/>
-          <a:lstStyle/>
-          <a:p>
-            <a:pPr algn="ctr"/>
-          </a:p>
-        </p:txBody>
-      </p:sp>
-      <p:sp>
-        <p:nvSpPr>
-          <p:cNvPr id="19" name="Rounded Rectangle 18"/>
-          <p:cNvSpPr/>
-          <p:nvPr/>
-        </p:nvSpPr>
-        <p:spPr>
-          <a:xfrm>
-            <a:off x="594360" y="4680813"/>
-            <a:ext cx="438912" cy="438912"/>
-          </a:xfrm>
-          <a:prstGeom prst="roundRect">
-            <a:avLst>
-              <a:gd name="adj" fmla="val 12000"/>
-            </a:avLst>
-          </a:prstGeom>
-          <a:solidFill>
-            <a:srgbClr val="095292"/>
-          </a:solidFill>
-          <a:ln>
-            <a:noFill/>
-          </a:ln>
-        </p:spPr>
-        <p:style>
-          <a:lnRef idx="1">
-            <a:schemeClr val="accent1"/>
-          </a:lnRef>
-          <a:fillRef idx="3">
-            <a:schemeClr val="accent1"/>
-          </a:fillRef>
-          <a:effectRef idx="2">
-            <a:schemeClr val="accent1"/>
-          </a:effectRef>
-          <a:fontRef idx="minor">
-            <a:schemeClr val="lt1"/>
-          </a:fontRef>
-        </p:style>
-        <p:txBody>
-          <a:bodyPr rtlCol="0" anchor="ctr"/>
-          <a:lstStyle/>
-          <a:p>
-            <a:pPr algn="ctr"/>
-          </a:p>
-        </p:txBody>
-      </p:sp>
-      <p:sp>
-        <p:nvSpPr>
-          <p:cNvPr id="20" name="TextBox 19"/>
-          <p:cNvSpPr txBox="1"/>
-          <p:nvPr/>
-        </p:nvSpPr>
-        <p:spPr>
-          <a:xfrm>
-            <a:off x="594360" y="4680813"/>
-            <a:ext cx="438912" cy="438912"/>
-          </a:xfrm>
-          <a:prstGeom prst="rect">
-            <a:avLst/>
-          </a:prstGeom>
-          <a:noFill/>
-        </p:spPr>
-        <p:txBody>
-          <a:bodyPr wrap="square" anchor="ctr"/>
-          <a:lstStyle/>
-          <a:p>
-            <a:pPr algn="ctr"/>
-            <a:r>
-              <a:rPr sz="1600" b="1" i="0">
-                <a:solidFill>
-                  <a:srgbClr val="FFFFFF"/>
-                </a:solidFill>
-                <a:latin typeface="Calibri"/>
-              </a:rPr>
-              <a:t>4</a:t>
-            </a:r>
-          </a:p>
-        </p:txBody>
-      </p:sp>
-      <p:sp>
-        <p:nvSpPr>
-          <p:cNvPr id="21" name="TextBox 20"/>
-          <p:cNvSpPr txBox="1"/>
-          <p:nvPr/>
-        </p:nvSpPr>
-        <p:spPr>
-          <a:xfrm>
-            <a:off x="1188720" y="4537252"/>
-            <a:ext cx="10271455" cy="744321"/>
-          </a:xfrm>
-          <a:prstGeom prst="rect">
-            <a:avLst/>
-          </a:prstGeom>
-          <a:noFill/>
-        </p:spPr>
-        <p:txBody>
-          <a:bodyPr wrap="square" anchor="ctr"/>
-          <a:lstStyle/>
-          <a:p>
-            <a:r>
-              <a:rPr sz="1500" b="1" i="0">
-                <a:solidFill>
-                  <a:srgbClr val="095292"/>
-                </a:solidFill>
-                <a:latin typeface="Calibri"/>
-              </a:rPr>
-              <a:t>1 min · La pregunta para el curso</a:t>
-            </a:r>
-          </a:p>
-          <a:p>
-            <a:pPr>
-              <a:spcBef>
-                <a:spcPts val="200"/>
-              </a:spcBef>
-            </a:pPr>
-            <a:r>
-              <a:rPr sz="1300" b="0" i="0">
-                <a:solidFill>
-                  <a:srgbClr val="333333"/>
-                </a:solidFill>
-                <a:latin typeface="Calibri"/>
-              </a:rPr>
-              <a:t>Con las dos alternativas que están considerando.</a:t>
-            </a:r>
-          </a:p>
-        </p:txBody>
-      </p:sp>
-      <p:sp>
-        <p:nvSpPr>
-          <p:cNvPr id="22" name="Rounded Rectangle 21"/>
-          <p:cNvSpPr/>
-          <p:nvPr/>
-        </p:nvSpPr>
-        <p:spPr>
-          <a:xfrm>
-            <a:off x="457200" y="5446166"/>
-            <a:ext cx="11277295" cy="908913"/>
-          </a:xfrm>
-          <a:prstGeom prst="roundRect">
-            <a:avLst>
-              <a:gd name="adj" fmla="val 12000"/>
-            </a:avLst>
-          </a:prstGeom>
-          <a:solidFill>
-            <a:srgbClr val="F2F2F2"/>
-          </a:solidFill>
-          <a:ln>
-            <a:noFill/>
-          </a:ln>
-        </p:spPr>
-        <p:style>
-          <a:lnRef idx="1">
-            <a:schemeClr val="accent1"/>
-          </a:lnRef>
-          <a:fillRef idx="3">
-            <a:schemeClr val="accent1"/>
-          </a:fillRef>
-          <a:effectRef idx="2">
-            <a:schemeClr val="accent1"/>
-          </a:effectRef>
-          <a:fontRef idx="minor">
-            <a:schemeClr val="lt1"/>
-          </a:fontRef>
-        </p:style>
-        <p:txBody>
-          <a:bodyPr rtlCol="0" anchor="ctr"/>
-          <a:lstStyle/>
-          <a:p>
-            <a:pPr algn="ctr"/>
-          </a:p>
-        </p:txBody>
-      </p:sp>
-      <p:sp>
-        <p:nvSpPr>
-          <p:cNvPr id="23" name="Rounded Rectangle 22"/>
-          <p:cNvSpPr/>
-          <p:nvPr/>
-        </p:nvSpPr>
-        <p:spPr>
-          <a:xfrm>
-            <a:off x="594360" y="5681167"/>
-            <a:ext cx="438912" cy="438912"/>
-          </a:xfrm>
-          <a:prstGeom prst="roundRect">
-            <a:avLst>
-              <a:gd name="adj" fmla="val 12000"/>
-            </a:avLst>
-          </a:prstGeom>
-          <a:solidFill>
-            <a:srgbClr val="095292"/>
-          </a:solidFill>
-          <a:ln>
-            <a:noFill/>
-          </a:ln>
-        </p:spPr>
-        <p:style>
-          <a:lnRef idx="1">
-            <a:schemeClr val="accent1"/>
-          </a:lnRef>
-          <a:fillRef idx="3">
-            <a:schemeClr val="accent1"/>
-          </a:fillRef>
-          <a:effectRef idx="2">
-            <a:schemeClr val="accent1"/>
-          </a:effectRef>
-          <a:fontRef idx="minor">
-            <a:schemeClr val="lt1"/>
-          </a:fontRef>
-        </p:style>
-        <p:txBody>
-          <a:bodyPr rtlCol="0" anchor="ctr"/>
-          <a:lstStyle/>
-          <a:p>
-            <a:pPr algn="ctr"/>
-          </a:p>
-        </p:txBody>
-      </p:sp>
-      <p:sp>
-        <p:nvSpPr>
-          <p:cNvPr id="24" name="TextBox 23"/>
-          <p:cNvSpPr txBox="1"/>
-          <p:nvPr/>
-        </p:nvSpPr>
-        <p:spPr>
-          <a:xfrm>
-            <a:off x="594360" y="5681167"/>
-            <a:ext cx="438912" cy="438912"/>
-          </a:xfrm>
-          <a:prstGeom prst="rect">
-            <a:avLst/>
-          </a:prstGeom>
-          <a:noFill/>
-        </p:spPr>
-        <p:txBody>
-          <a:bodyPr wrap="square" anchor="ctr"/>
-          <a:lstStyle/>
-          <a:p>
-            <a:pPr algn="ctr"/>
-            <a:r>
-              <a:rPr sz="1600" b="1" i="0">
-                <a:solidFill>
-                  <a:srgbClr val="FFFFFF"/>
-                </a:solidFill>
-                <a:latin typeface="Calibri"/>
-              </a:rPr>
-              <a:t>5</a:t>
-            </a:r>
-          </a:p>
-        </p:txBody>
-      </p:sp>
-      <p:sp>
-        <p:nvSpPr>
-          <p:cNvPr id="25" name="TextBox 24"/>
-          <p:cNvSpPr txBox="1"/>
-          <p:nvPr/>
-        </p:nvSpPr>
-        <p:spPr>
-          <a:xfrm>
-            <a:off x="1188720" y="5537606"/>
-            <a:ext cx="10271455" cy="744321"/>
-          </a:xfrm>
-          <a:prstGeom prst="rect">
-            <a:avLst/>
-          </a:prstGeom>
-          <a:noFill/>
-        </p:spPr>
-        <p:txBody>
-          <a:bodyPr wrap="square" anchor="ctr"/>
-          <a:lstStyle/>
-          <a:p>
-            <a:r>
-              <a:rPr sz="1500" b="1" i="0">
-                <a:solidFill>
-                  <a:srgbClr val="095292"/>
-                </a:solidFill>
-                <a:latin typeface="Calibri"/>
-              </a:rPr>
-              <a:t>30 s · Cierre</a:t>
-            </a:r>
-          </a:p>
-          <a:p>
-            <a:pPr>
-              <a:spcBef>
-                <a:spcPts val="200"/>
-              </a:spcBef>
-            </a:pPr>
-            <a:r>
-              <a:rPr sz="1300" b="0" i="0">
-                <a:solidFill>
-                  <a:srgbClr val="333333"/>
-                </a:solidFill>
-                <a:latin typeface="Calibri"/>
-              </a:rPr>
-              <a:t>Qué van a tener listo para la Clase 14.</a:t>
-            </a:r>
-          </a:p>
-        </p:txBody>
-      </p:sp>
-      <p:sp>
-        <p:nvSpPr>
-          <p:cNvPr id="26" name="TextBox 25"/>
-          <p:cNvSpPr txBox="1"/>
-          <p:nvPr/>
-        </p:nvSpPr>
-        <p:spPr>
-          <a:xfrm>
-            <a:off x="11185855" y="6473952"/>
-            <a:ext cx="640080" cy="274320"/>
-          </a:xfrm>
-          <a:prstGeom prst="rect">
-            <a:avLst/>
-          </a:prstGeom>
-          <a:noFill/>
-        </p:spPr>
-        <p:txBody>
-          <a:bodyPr wrap="square">
-            <a:spAutoFit/>
-          </a:bodyPr>
-          <a:lstStyle/>
-          <a:p>
-            <a:pPr algn="r"/>
-            <a:r>
-              <a:rPr sz="1100" b="0" i="0">
-                <a:solidFill>
-                  <a:srgbClr val="666666"/>
-                </a:solidFill>
-                <a:latin typeface="Calibri"/>
-              </a:rPr>
-              <a:t>13</a:t>
-            </a:r>
-          </a:p>
-        </p:txBody>
-      </p:sp>
-    </p:spTree>
-  </p:cSld>
-  <p:clrMapOvr>
-    <a:masterClrMapping/>
-  </p:clrMapOvr>
-</p:sld>
-</file>
-
-<file path=ppt/slides/slide14.xml><?xml version="1.0" encoding="utf-8"?>
-<p:sld xmlns:a="http://schemas.openxmlformats.org/drawingml/2006/main" xmlns:p="http://schemas.openxmlformats.org/presentationml/2006/main" xmlns:r="http://schemas.openxmlformats.org/officeDocument/2006/relationships">
-  <p:cSld>
-    <p:bg>
-      <p:bgPr>
-        <a:solidFill>
-          <a:srgbClr val="FFFFFF"/>
-        </a:solidFill>
-        <a:effectLst/>
-      </p:bgPr>
-    </p:bg>
-    <p:spTree>
-      <p:nvGrpSpPr>
-        <p:cNvPr id="1" name=""/>
-        <p:cNvGrpSpPr/>
-        <p:nvPr/>
-      </p:nvGrpSpPr>
-      <p:grpSpPr/>
-      <p:sp>
-        <p:nvSpPr>
-          <p:cNvPr id="2" name="Rectangle 1"/>
-          <p:cNvSpPr/>
-          <p:nvPr/>
-        </p:nvSpPr>
-        <p:spPr>
-          <a:xfrm>
-            <a:off x="0" y="0"/>
-            <a:ext cx="12191695" cy="960120"/>
-          </a:xfrm>
-          <a:prstGeom prst="rect">
-            <a:avLst/>
-          </a:prstGeom>
-          <a:solidFill>
-            <a:srgbClr val="095292"/>
-          </a:solidFill>
-          <a:ln>
-            <a:noFill/>
-          </a:ln>
-        </p:spPr>
-        <p:style>
-          <a:lnRef idx="1">
-            <a:schemeClr val="accent1"/>
-          </a:lnRef>
-          <a:fillRef idx="3">
-            <a:schemeClr val="accent1"/>
-          </a:fillRef>
-          <a:effectRef idx="2">
-            <a:schemeClr val="accent1"/>
-          </a:effectRef>
-          <a:fontRef idx="minor">
-            <a:schemeClr val="lt1"/>
-          </a:fontRef>
-        </p:style>
-        <p:txBody>
-          <a:bodyPr rtlCol="0" anchor="ctr"/>
-          <a:lstStyle/>
-          <a:p>
-            <a:pPr algn="ctr"/>
-          </a:p>
-        </p:txBody>
-      </p:sp>
-      <p:sp>
-        <p:nvSpPr>
-          <p:cNvPr id="3" name="Rectangle 2"/>
-          <p:cNvSpPr/>
-          <p:nvPr/>
-        </p:nvSpPr>
-        <p:spPr>
-          <a:xfrm>
-            <a:off x="0" y="960120"/>
-            <a:ext cx="12191695" cy="41148"/>
-          </a:xfrm>
-          <a:prstGeom prst="rect">
-            <a:avLst/>
-          </a:prstGeom>
-          <a:solidFill>
-            <a:srgbClr val="FFD000"/>
-          </a:solidFill>
-          <a:ln>
-            <a:noFill/>
-          </a:ln>
-        </p:spPr>
-        <p:style>
-          <a:lnRef idx="1">
-            <a:schemeClr val="accent1"/>
-          </a:lnRef>
-          <a:fillRef idx="3">
-            <a:schemeClr val="accent1"/>
-          </a:fillRef>
-          <a:effectRef idx="2">
-            <a:schemeClr val="accent1"/>
-          </a:effectRef>
-          <a:fontRef idx="minor">
-            <a:schemeClr val="lt1"/>
-          </a:fontRef>
-        </p:style>
-        <p:txBody>
-          <a:bodyPr rtlCol="0" anchor="ctr"/>
-          <a:lstStyle/>
-          <a:p>
-            <a:pPr algn="ctr"/>
-          </a:p>
-        </p:txBody>
-      </p:sp>
-      <p:sp>
-        <p:nvSpPr>
-          <p:cNvPr id="4" name="TextBox 3"/>
-          <p:cNvSpPr txBox="1"/>
-          <p:nvPr/>
-        </p:nvSpPr>
-        <p:spPr>
-          <a:xfrm>
-            <a:off x="457200" y="164592"/>
-            <a:ext cx="11277295" cy="502920"/>
-          </a:xfrm>
-          <a:prstGeom prst="rect">
-            <a:avLst/>
-          </a:prstGeom>
-          <a:noFill/>
-        </p:spPr>
-        <p:txBody>
-          <a:bodyPr wrap="square">
-            <a:spAutoFit/>
-          </a:bodyPr>
-          <a:lstStyle/>
-          <a:p>
-            <a:r>
-              <a:rPr sz="2600" b="1" i="0">
-                <a:solidFill>
-                  <a:srgbClr val="FFFFFF"/>
-                </a:solidFill>
-                <a:latin typeface="Calibri"/>
-              </a:rPr>
-              <a:t>Para la Clase 13</a:t>
-            </a:r>
-          </a:p>
-        </p:txBody>
-      </p:sp>
-      <p:sp>
-        <p:nvSpPr>
-          <p:cNvPr id="5" name="TextBox 4"/>
-          <p:cNvSpPr txBox="1"/>
-          <p:nvPr/>
-        </p:nvSpPr>
-        <p:spPr>
-          <a:xfrm>
-            <a:off x="457200" y="1170432"/>
-            <a:ext cx="11277295" cy="5230368"/>
-          </a:xfrm>
-          <a:prstGeom prst="rect">
-            <a:avLst/>
-          </a:prstGeom>
-          <a:noFill/>
-        </p:spPr>
-        <p:txBody>
-          <a:bodyPr wrap="square">
-            <a:spAutoFit/>
-          </a:bodyPr>
-          <a:lstStyle/>
-          <a:p>
-            <a:pPr>
-              <a:spcAft>
-                <a:spcPts val="800"/>
-              </a:spcAft>
-            </a:pPr>
-            <a:r>
-              <a:rPr sz="2000" b="0" i="0">
-                <a:solidFill>
-                  <a:srgbClr val="333333"/>
-                </a:solidFill>
-                <a:latin typeface="Calibri"/>
-              </a:rPr>
-              <a:t>–   </a:t>
-            </a:r>
-            <a:r>
-              <a:rPr sz="2000" b="1" i="0">
-                <a:solidFill>
-                  <a:srgbClr val="333333"/>
-                </a:solidFill>
-                <a:latin typeface="Calibri"/>
-              </a:rPr>
-              <a:t>Trabajo dirigido:</a:t>
-            </a:r>
-            <a:r>
-              <a:rPr sz="2000" b="0" i="0">
-                <a:solidFill>
-                  <a:srgbClr val="333333"/>
-                </a:solidFill>
-                <a:latin typeface="Calibri"/>
-              </a:rPr>
-              <a:t> Retroalimentación y ajustes — aplicar al prototipo los ajustes comprometidos en el muro, y dejar en el documento del equipo la ficha de avance completa con la lista de lo que no se arregla.</a:t>
-            </a:r>
-          </a:p>
-          <a:p>
-            <a:pPr>
-              <a:spcAft>
-                <a:spcPts val="800"/>
-              </a:spcAft>
-            </a:pPr>
-            <a:r>
-              <a:rPr sz="2000" b="0" i="0">
-                <a:solidFill>
-                  <a:srgbClr val="333333"/>
-                </a:solidFill>
-                <a:latin typeface="Calibri"/>
-              </a:rPr>
-              <a:t>–   </a:t>
-            </a:r>
-            <a:r>
-              <a:rPr sz="2000" b="1" i="0">
-                <a:solidFill>
-                  <a:srgbClr val="333333"/>
-                </a:solidFill>
-                <a:latin typeface="Calibri"/>
-              </a:rPr>
-              <a:t>Trabajo independiente:</a:t>
-            </a:r>
-            <a:r>
-              <a:rPr sz="2000" b="0" i="0">
-                <a:solidFill>
-                  <a:srgbClr val="333333"/>
-                </a:solidFill>
-                <a:latin typeface="Calibri"/>
-              </a:rPr>
-              <a:t> Revisión entre pares: leer el documento de </a:t>
-            </a:r>
-            <a:r>
-              <a:rPr sz="2000" b="1" i="0">
-                <a:solidFill>
-                  <a:srgbClr val="333333"/>
-                </a:solidFill>
-                <a:latin typeface="Calibri"/>
-              </a:rPr>
-              <a:t>otro equipo</a:t>
-            </a:r>
-            <a:r>
-              <a:rPr sz="2000" b="0" i="0">
-                <a:solidFill>
-                  <a:srgbClr val="333333"/>
-                </a:solidFill>
-                <a:latin typeface="Calibri"/>
-              </a:rPr>
-              <a:t> (el docente asigna la pareja) y dejarle </a:t>
-            </a:r>
-            <a:r>
-              <a:rPr sz="2000" b="1" i="0">
-                <a:solidFill>
-                  <a:srgbClr val="333333"/>
-                </a:solidFill>
-                <a:latin typeface="Calibri"/>
-              </a:rPr>
-              <a:t>dos observaciones escritas</a:t>
-            </a:r>
-            <a:r>
-              <a:rPr sz="2000" b="0" i="0">
-                <a:solidFill>
-                  <a:srgbClr val="333333"/>
-                </a:solidFill>
-                <a:latin typeface="Calibri"/>
-              </a:rPr>
-              <a:t> con el formato de hoy — observación y expectativa, una sola cosa importante cada una.</a:t>
-            </a:r>
-          </a:p>
-          <a:p>
-            <a:pPr>
-              <a:spcAft>
-                <a:spcPts val="800"/>
-              </a:spcAft>
-            </a:pPr>
-            <a:r>
-              <a:rPr sz="2000" b="0" i="0">
-                <a:solidFill>
-                  <a:srgbClr val="333333"/>
-                </a:solidFill>
-                <a:latin typeface="Calibri"/>
-              </a:rPr>
-              <a:t>–   </a:t>
-            </a:r>
-            <a:r>
-              <a:rPr sz="2000" b="1" i="0">
-                <a:solidFill>
-                  <a:srgbClr val="333333"/>
-                </a:solidFill>
-                <a:latin typeface="Calibri"/>
-              </a:rPr>
-              <a:t>Clase 13 · Evaluación de impacto social y ambiental</a:t>
-            </a:r>
-            <a:r>
-              <a:rPr sz="2000" b="0" i="0">
-                <a:solidFill>
-                  <a:srgbClr val="333333"/>
-                </a:solidFill>
-                <a:latin typeface="Calibri"/>
-              </a:rPr>
-              <a:t> — vemos el </a:t>
-            </a:r>
-            <a:r>
-              <a:rPr sz="2000" b="1" i="0">
-                <a:solidFill>
-                  <a:srgbClr val="333333"/>
-                </a:solidFill>
-                <a:latin typeface="Calibri"/>
-              </a:rPr>
-              <a:t>impacto social y ambiental</a:t>
-            </a:r>
-            <a:r>
-              <a:rPr sz="2000" b="0" i="0">
-                <a:solidFill>
-                  <a:srgbClr val="333333"/>
-                </a:solidFill>
-                <a:latin typeface="Calibri"/>
-              </a:rPr>
-              <a:t> del proyecto: a quién más afecta esto aunque no lo use, y cómo se mide.</a:t>
-            </a:r>
-          </a:p>
-          <a:p>
-            <a:pPr>
-              <a:spcAft>
-                <a:spcPts val="800"/>
-              </a:spcAft>
-            </a:pPr>
-            <a:r>
-              <a:rPr sz="2000" b="0" i="0">
-                <a:solidFill>
-                  <a:srgbClr val="333333"/>
-                </a:solidFill>
-                <a:latin typeface="Calibri"/>
-              </a:rPr>
-              <a:t>–   </a:t>
-            </a:r>
-            <a:r>
-              <a:rPr sz="2000" b="1" i="0">
-                <a:solidFill>
-                  <a:srgbClr val="333333"/>
-                </a:solidFill>
-                <a:latin typeface="Calibri"/>
-              </a:rPr>
-              <a:t>Aviso:</a:t>
-            </a:r>
-            <a:r>
-              <a:rPr sz="2000" b="0" i="0">
-                <a:solidFill>
-                  <a:srgbClr val="333333"/>
-                </a:solidFill>
-                <a:latin typeface="Calibri"/>
-              </a:rPr>
-              <a:t> Traigan a la Clase 13 el </a:t>
-            </a:r>
-            <a:r>
-              <a:rPr sz="2000" b="1" i="0">
-                <a:solidFill>
-                  <a:srgbClr val="333333"/>
-                </a:solidFill>
-                <a:latin typeface="Calibri"/>
-              </a:rPr>
-              <a:t>listado de actores no usuarios de la Clase 3</a:t>
-            </a:r>
-            <a:r>
-              <a:rPr sz="2000" b="0" i="0">
-                <a:solidFill>
-                  <a:srgbClr val="333333"/>
-                </a:solidFill>
-                <a:latin typeface="Calibri"/>
-              </a:rPr>
-              <a:t> y el </a:t>
-            </a:r>
-            <a:r>
-              <a:rPr sz="2000" b="1" i="0">
-                <a:solidFill>
-                  <a:srgbClr val="333333"/>
-                </a:solidFill>
-                <a:latin typeface="Calibri"/>
-              </a:rPr>
-              <a:t>indicador ambiental de la sesión 5</a:t>
-            </a:r>
-            <a:r>
-              <a:rPr sz="2000" b="0" i="0">
-                <a:solidFill>
-                  <a:srgbClr val="333333"/>
-                </a:solidFill>
-                <a:latin typeface="Calibri"/>
-              </a:rPr>
-              <a:t>: los dos se usan directamente en el taller. Si los perdieron, recupérenlos del documento del equipo antes de la sesión.</a:t>
-            </a:r>
-          </a:p>
-          <a:p>
-            <a:pPr>
-              <a:spcAft>
-                <a:spcPts val="800"/>
-              </a:spcAft>
-            </a:pPr>
-            <a:r>
-              <a:rPr sz="2000" b="0" i="0">
-                <a:solidFill>
-                  <a:srgbClr val="333333"/>
-                </a:solidFill>
-                <a:latin typeface="Calibri"/>
-              </a:rPr>
-              <a:t>–   </a:t>
-            </a:r>
-            <a:r>
-              <a:rPr sz="2000" b="1" i="0">
-                <a:solidFill>
-                  <a:srgbClr val="333333"/>
-                </a:solidFill>
-                <a:latin typeface="Calibri"/>
-              </a:rPr>
-              <a:t>Antes de salir:</a:t>
-            </a:r>
-            <a:r>
-              <a:rPr sz="2000" b="0" i="0">
-                <a:solidFill>
-                  <a:srgbClr val="333333"/>
-                </a:solidFill>
-                <a:latin typeface="Calibri"/>
-              </a:rPr>
-              <a:t> el enlace del documento del equipo en el chat, con permiso de lectura para el docente, y el nombre del vocero de hoy.</a:t>
-            </a:r>
-          </a:p>
-        </p:txBody>
-      </p:sp>
-      <p:sp>
-        <p:nvSpPr>
-          <p:cNvPr id="6" name="TextBox 5"/>
-          <p:cNvSpPr txBox="1"/>
-          <p:nvPr/>
-        </p:nvSpPr>
-        <p:spPr>
-          <a:xfrm>
-            <a:off x="11185855" y="6473952"/>
-            <a:ext cx="640080" cy="274320"/>
-          </a:xfrm>
-          <a:prstGeom prst="rect">
-            <a:avLst/>
-          </a:prstGeom>
-          <a:noFill/>
-        </p:spPr>
-        <p:txBody>
-          <a:bodyPr wrap="square">
-            <a:spAutoFit/>
-          </a:bodyPr>
-          <a:lstStyle/>
-          <a:p>
-            <a:pPr algn="r"/>
-            <a:r>
-              <a:rPr sz="1100" b="0" i="0">
-                <a:solidFill>
-                  <a:srgbClr val="666666"/>
-                </a:solidFill>
-                <a:latin typeface="Calibri"/>
-              </a:rPr>
-              <a:t>14</a:t>
-            </a:r>
-          </a:p>
-        </p:txBody>
-      </p:sp>
-    </p:spTree>
-  </p:cSld>
-  <p:clrMapOvr>
-    <a:masterClrMapping/>
-  </p:clrMapOvr>
-</p:sld>
-</file>
-
-<file path=ppt/slides/slide15.xml><?xml version="1.0" encoding="utf-8"?>
 <p:sld xmlns:a="http://schemas.openxmlformats.org/drawingml/2006/main" xmlns:p="http://schemas.openxmlformats.org/presentationml/2006/main" xmlns:r="http://schemas.openxmlformats.org/officeDocument/2006/relationships">
   <p:cSld>
     <p:bg>

--- a/Introduccion a la Ingenieria/Clases/Clase 12 - Presentacion de avances de proyectos/Presentacion.pptx
+++ b/Introduccion a la Ingenieria/Clases/Clase 12 - Presentacion de avances de proyectos/Presentacion.pptx
@@ -5761,7 +5761,7 @@
                 </a:solidFill>
                 <a:latin typeface="Calibri"/>
               </a:rPr>
-              <a:t> Solo se pregunta para entender —«¿en qué momento se perdió?»—. Defenderse en vivo desperdicia los únicos tres minutos gratis de revisión externa que van a tener antes de la nota.</a:t>
+              <a:t> Solo se pregunta para entender —«¿en qué momento se perdió?»—. Defenderse en vivo desperdicia los únicos tres minutos gratis de revisión externa que van a tener antes de la exposición final.</a:t>
             </a:r>
           </a:p>
         </p:txBody>
@@ -6580,7 +6580,7 @@
                 </a:solidFill>
                 <a:latin typeface="Calibri"/>
               </a:rPr>
-              <a:t>Actividad en equipos — Armar la ficha de avance con los hallazgos de la prueba</a:t>
+              <a:t>Actividad en equipos — opcional · la guía está en la carpeta de la clase</a:t>
             </a:r>
           </a:p>
         </p:txBody>
@@ -10668,7 +10668,7 @@
                 </a:solidFill>
                 <a:latin typeface="Calibri"/>
               </a:rPr>
-              <a:t>, delante de todo el mundo y con nota.</a:t>
+              <a:t>, delante de todo el mundo.</a:t>
             </a:r>
           </a:p>
         </p:txBody>

--- a/Introduccion a la Ingenieria/Clases/Clase 12 - Presentacion de avances de proyectos/Presentacion.pptx
+++ b/Introduccion a la Ingenieria/Clases/Clase 12 - Presentacion de avances de proyectos/Presentacion.pptx
@@ -5072,9 +5072,57 @@
           </a:p>
         </p:txBody>
       </p:sp>
-      <p:sp>
-        <p:nvSpPr>
-          <p:cNvPr id="13" name="TextBox 12"/>
+      <p:pic>
+        <p:nvPicPr>
+          <p:cNvPr id="13" name="Picture 12" descr="sello_mal.png"/>
+          <p:cNvPicPr>
+            <a:picLocks noChangeAspect="1"/>
+          </p:cNvPicPr>
+          <p:nvPr/>
+        </p:nvPicPr>
+        <p:blipFill>
+          <a:blip r:embed="rId2"/>
+          <a:stretch>
+            <a:fillRect/>
+          </a:stretch>
+        </p:blipFill>
+        <p:spPr>
+          <a:xfrm>
+            <a:off x="566928" y="1316736"/>
+            <a:ext cx="393192" cy="393192"/>
+          </a:xfrm>
+          <a:prstGeom prst="rect">
+            <a:avLst/>
+          </a:prstGeom>
+        </p:spPr>
+      </p:pic>
+      <p:pic>
+        <p:nvPicPr>
+          <p:cNvPr id="14" name="Picture 13" descr="sello_bien.png"/>
+          <p:cNvPicPr>
+            <a:picLocks noChangeAspect="1"/>
+          </p:cNvPicPr>
+          <p:nvPr/>
+        </p:nvPicPr>
+        <p:blipFill>
+          <a:blip r:embed="rId3"/>
+          <a:stretch>
+            <a:fillRect/>
+          </a:stretch>
+        </p:blipFill>
+        <p:spPr>
+          <a:xfrm>
+            <a:off x="6365595" y="1316736"/>
+            <a:ext cx="393192" cy="393192"/>
+          </a:xfrm>
+          <a:prstGeom prst="rect">
+            <a:avLst/>
+          </a:prstGeom>
+        </p:spPr>
+      </p:pic>
+      <p:sp>
+        <p:nvSpPr>
+          <p:cNvPr id="15" name="TextBox 14"/>
           <p:cNvSpPr txBox="1"/>
           <p:nvPr/>
         </p:nvSpPr>
@@ -7078,14 +7126,118 @@
       </p:sp>
       <p:sp>
         <p:nvSpPr>
-          <p:cNvPr id="5" name="TextBox 4"/>
+          <p:cNvPr id="5" name="Rounded Rectangle 4"/>
+          <p:cNvSpPr/>
+          <p:nvPr/>
+        </p:nvSpPr>
+        <p:spPr>
+          <a:xfrm>
+            <a:off x="5797149" y="1573813"/>
+            <a:ext cx="6010497" cy="4057845"/>
+          </a:xfrm>
+          <a:prstGeom prst="roundRect">
+            <a:avLst>
+              <a:gd name="adj" fmla="val 4000"/>
+            </a:avLst>
+          </a:prstGeom>
+          <a:solidFill>
+            <a:srgbClr val="E8EEF4"/>
+          </a:solidFill>
+          <a:ln>
+            <a:noFill/>
+          </a:ln>
+        </p:spPr>
+        <p:style>
+          <a:lnRef idx="1">
+            <a:schemeClr val="accent1"/>
+          </a:lnRef>
+          <a:fillRef idx="3">
+            <a:schemeClr val="accent1"/>
+          </a:fillRef>
+          <a:effectRef idx="2">
+            <a:schemeClr val="accent1"/>
+          </a:effectRef>
+          <a:fontRef idx="minor">
+            <a:schemeClr val="lt1"/>
+          </a:fontRef>
+        </p:style>
+        <p:txBody>
+          <a:bodyPr rtlCol="0" anchor="ctr"/>
+          <a:lstStyle/>
+          <a:p>
+            <a:pPr algn="ctr"/>
+          </a:p>
+        </p:txBody>
+      </p:sp>
+      <p:pic>
+        <p:nvPicPr>
+          <p:cNvPr id="6" name="Picture 5" descr="students-learning-laptops-classroom.jpg"/>
+          <p:cNvPicPr>
+            <a:picLocks noChangeAspect="1"/>
+          </p:cNvPicPr>
+          <p:nvPr/>
+        </p:nvPicPr>
+        <p:blipFill>
+          <a:blip r:embed="rId2"/>
+          <a:stretch>
+            <a:fillRect/>
+          </a:stretch>
+        </p:blipFill>
+        <p:spPr>
+          <a:xfrm>
+            <a:off x="5870301" y="1646965"/>
+            <a:ext cx="5864193" cy="3911541"/>
+          </a:xfrm>
+          <a:prstGeom prst="rect">
+            <a:avLst/>
+          </a:prstGeom>
+        </p:spPr>
+      </p:pic>
+      <p:sp>
+        <p:nvSpPr>
+          <p:cNvPr id="7" name="TextBox 6"/>
           <p:cNvSpPr txBox="1"/>
           <p:nvPr/>
         </p:nvSpPr>
         <p:spPr>
           <a:xfrm>
-            <a:off x="457200" y="1170432"/>
-            <a:ext cx="11277295" cy="5230368"/>
+            <a:off x="5870301" y="5961888"/>
+            <a:ext cx="5864193" cy="320040"/>
+          </a:xfrm>
+          <a:prstGeom prst="rect">
+            <a:avLst/>
+          </a:prstGeom>
+          <a:noFill/>
+        </p:spPr>
+        <p:txBody>
+          <a:bodyPr wrap="square">
+            <a:spAutoFit/>
+          </a:bodyPr>
+          <a:lstStyle/>
+          <a:p>
+            <a:pPr algn="ctr"/>
+            <a:r>
+              <a:rPr sz="1100" b="0" i="1">
+                <a:solidFill>
+                  <a:srgbClr val="666666"/>
+                </a:solidFill>
+                <a:latin typeface="Calibri"/>
+              </a:rPr>
+              <a:t>Foto: Mikhail Nilov · Pexels</a:t>
+            </a:r>
+          </a:p>
+        </p:txBody>
+      </p:sp>
+      <p:sp>
+        <p:nvSpPr>
+          <p:cNvPr id="8" name="TextBox 7"/>
+          <p:cNvSpPr txBox="1"/>
+          <p:nvPr/>
+        </p:nvSpPr>
+        <p:spPr>
+          <a:xfrm>
+            <a:off x="457200" y="1353312"/>
+            <a:ext cx="5093061" cy="5047488"/>
           </a:xfrm>
           <a:prstGeom prst="rect">
             <a:avLst/>
@@ -7273,7 +7425,7 @@
       </p:sp>
       <p:sp>
         <p:nvSpPr>
-          <p:cNvPr id="6" name="TextBox 5"/>
+          <p:cNvPr id="9" name="TextBox 8"/>
           <p:cNvSpPr txBox="1"/>
           <p:nvPr/>
         </p:nvSpPr>

--- a/Introduccion a la Ingenieria/Clases/Clase 12 - Presentacion de avances de proyectos/Presentacion.pptx
+++ b/Introduccion a la Ingenieria/Clases/Clase 12 - Presentacion de avances de proyectos/Presentacion.pptx
@@ -7126,118 +7126,14 @@
       </p:sp>
       <p:sp>
         <p:nvSpPr>
-          <p:cNvPr id="5" name="Rounded Rectangle 4"/>
-          <p:cNvSpPr/>
-          <p:nvPr/>
-        </p:nvSpPr>
-        <p:spPr>
-          <a:xfrm>
-            <a:off x="5797149" y="1573813"/>
-            <a:ext cx="6010497" cy="4057845"/>
-          </a:xfrm>
-          <a:prstGeom prst="roundRect">
-            <a:avLst>
-              <a:gd name="adj" fmla="val 4000"/>
-            </a:avLst>
-          </a:prstGeom>
-          <a:solidFill>
-            <a:srgbClr val="E8EEF4"/>
-          </a:solidFill>
-          <a:ln>
-            <a:noFill/>
-          </a:ln>
-        </p:spPr>
-        <p:style>
-          <a:lnRef idx="1">
-            <a:schemeClr val="accent1"/>
-          </a:lnRef>
-          <a:fillRef idx="3">
-            <a:schemeClr val="accent1"/>
-          </a:fillRef>
-          <a:effectRef idx="2">
-            <a:schemeClr val="accent1"/>
-          </a:effectRef>
-          <a:fontRef idx="minor">
-            <a:schemeClr val="lt1"/>
-          </a:fontRef>
-        </p:style>
-        <p:txBody>
-          <a:bodyPr rtlCol="0" anchor="ctr"/>
-          <a:lstStyle/>
-          <a:p>
-            <a:pPr algn="ctr"/>
-          </a:p>
-        </p:txBody>
-      </p:sp>
-      <p:pic>
-        <p:nvPicPr>
-          <p:cNvPr id="6" name="Picture 5" descr="students-learning-laptops-classroom.jpg"/>
-          <p:cNvPicPr>
-            <a:picLocks noChangeAspect="1"/>
-          </p:cNvPicPr>
-          <p:nvPr/>
-        </p:nvPicPr>
-        <p:blipFill>
-          <a:blip r:embed="rId2"/>
-          <a:stretch>
-            <a:fillRect/>
-          </a:stretch>
-        </p:blipFill>
-        <p:spPr>
-          <a:xfrm>
-            <a:off x="5870301" y="1646965"/>
-            <a:ext cx="5864193" cy="3911541"/>
-          </a:xfrm>
-          <a:prstGeom prst="rect">
-            <a:avLst/>
-          </a:prstGeom>
-        </p:spPr>
-      </p:pic>
-      <p:sp>
-        <p:nvSpPr>
-          <p:cNvPr id="7" name="TextBox 6"/>
+          <p:cNvPr id="5" name="TextBox 4"/>
           <p:cNvSpPr txBox="1"/>
           <p:nvPr/>
         </p:nvSpPr>
         <p:spPr>
           <a:xfrm>
-            <a:off x="5870301" y="5961888"/>
-            <a:ext cx="5864193" cy="320040"/>
-          </a:xfrm>
-          <a:prstGeom prst="rect">
-            <a:avLst/>
-          </a:prstGeom>
-          <a:noFill/>
-        </p:spPr>
-        <p:txBody>
-          <a:bodyPr wrap="square">
-            <a:spAutoFit/>
-          </a:bodyPr>
-          <a:lstStyle/>
-          <a:p>
-            <a:pPr algn="ctr"/>
-            <a:r>
-              <a:rPr sz="1100" b="0" i="1">
-                <a:solidFill>
-                  <a:srgbClr val="666666"/>
-                </a:solidFill>
-                <a:latin typeface="Calibri"/>
-              </a:rPr>
-              <a:t>Foto: Mikhail Nilov · Pexels</a:t>
-            </a:r>
-          </a:p>
-        </p:txBody>
-      </p:sp>
-      <p:sp>
-        <p:nvSpPr>
-          <p:cNvPr id="8" name="TextBox 7"/>
-          <p:cNvSpPr txBox="1"/>
-          <p:nvPr/>
-        </p:nvSpPr>
-        <p:spPr>
-          <a:xfrm>
-            <a:off x="457200" y="1353312"/>
-            <a:ext cx="5093061" cy="5047488"/>
+            <a:off x="457200" y="1170432"/>
+            <a:ext cx="11277295" cy="5230368"/>
           </a:xfrm>
           <a:prstGeom prst="rect">
             <a:avLst/>
@@ -7425,7 +7321,7 @@
       </p:sp>
       <p:sp>
         <p:nvSpPr>
-          <p:cNvPr id="9" name="TextBox 8"/>
+          <p:cNvPr id="6" name="TextBox 5"/>
           <p:cNvSpPr txBox="1"/>
           <p:nvPr/>
         </p:nvSpPr>
